--- a/output/wordlabs-merge-3day.pptx
+++ b/output/wordlabs-merge-3day.pptx
@@ -4240,7 +4240,7 @@
                 <a:ea typeface="Calibri" pitchFamily="34" charset="-122"/>
                 <a:cs typeface="Calibri" pitchFamily="34" charset="-120"/>
               </a:rPr>
-              <a:t>"to combine, sink into"</a:t>
+              <a:t>"join, combine, sink into"</a:t>
             </a:r>
             <a:endParaRPr lang="en-US" sz="2200" dirty="0"/>
           </a:p>
@@ -5288,7 +5288,7 @@
                 <a:ea typeface="Calibri" pitchFamily="34" charset="-122"/>
                 <a:cs typeface="Calibri" pitchFamily="34" charset="-120"/>
               </a:rPr>
-              <a:t>Word Labs  •  wordlabs.app  •  Root: 'merge' = to combine, sink into</a:t>
+              <a:t>Word Labs  •  wordlabs.app  •  Root: 'merge' = join, combine, sink into</a:t>
             </a:r>
             <a:endParaRPr lang="en-US" sz="800" dirty="0"/>
           </a:p>
@@ -5928,7 +5928,7 @@
                 <a:ea typeface="Calibri" pitchFamily="34" charset="-122"/>
                 <a:cs typeface="Calibri" pitchFamily="34" charset="-120"/>
               </a:rPr>
-              <a:t>Word Labs  •  wordlabs.app  •  Root: 'merge' = to combine, sink into</a:t>
+              <a:t>Word Labs  •  wordlabs.app  •  Root: 'merge' = join, combine, sink into</a:t>
             </a:r>
             <a:endParaRPr lang="en-US" sz="800" dirty="0"/>
           </a:p>
@@ -6040,7 +6040,7 @@
                 <a:ea typeface="Calibri" pitchFamily="34" charset="-122"/>
                 <a:cs typeface="Calibri" pitchFamily="34" charset="-120"/>
               </a:rPr>
-              <a:t>When the two small creeks </a:t>
+              <a:t>When the two streams </a:t>
             </a:r>
             <a:pPr algn="l" indent="0" marL="0">
               <a:buNone/>
@@ -6071,7 +6071,7 @@
                 <a:ea typeface="Calibri" pitchFamily="34" charset="-122"/>
                 <a:cs typeface="Calibri" pitchFamily="34" charset="-120"/>
               </a:rPr>
-              <a:t>, a larger river will </a:t>
+              <a:t>, a beautiful </a:t>
             </a:r>
             <a:pPr algn="l" indent="0" marL="0">
               <a:buNone/>
@@ -6088,7 +6088,7 @@
                 <a:ea typeface="Calibri" pitchFamily="34" charset="-122"/>
                 <a:cs typeface="Calibri" pitchFamily="34" charset="-120"/>
               </a:rPr>
-              <a:t>emerge</a:t>
+              <a:t>emergence</a:t>
             </a:r>
             <a:pPr algn="l" indent="0" marL="0">
               <a:buNone/>
@@ -6102,7 +6102,7 @@
                 <a:ea typeface="Calibri" pitchFamily="34" charset="-122"/>
                 <a:cs typeface="Calibri" pitchFamily="34" charset="-120"/>
               </a:rPr>
-              <a:t> from the valley.</a:t>
+              <a:t> of wildlife can be seen along the bank.</a:t>
             </a:r>
             <a:endParaRPr lang="en-US" sz="1800" dirty="0"/>
           </a:p>
@@ -6385,7 +6385,7 @@
                 <a:ea typeface="Trebuchet MS" pitchFamily="34" charset="-122"/>
                 <a:cs typeface="Trebuchet MS" pitchFamily="34" charset="-120"/>
               </a:rPr>
-              <a:t>emerge</a:t>
+              <a:t>emergence</a:t>
             </a:r>
             <a:endParaRPr lang="en-US" sz="1400" dirty="0"/>
           </a:p>
@@ -6716,7 +6716,7 @@
                 <a:ea typeface="Calibri" pitchFamily="34" charset="-122"/>
                 <a:cs typeface="Calibri" pitchFamily="34" charset="-120"/>
               </a:rPr>
-              <a:t>Word Labs  •  wordlabs.app  •  Root: 'merge' = to combine, sink into</a:t>
+              <a:t>Word Labs  •  wordlabs.app  •  Root: 'merge' = join, combine, sink into</a:t>
             </a:r>
             <a:endParaRPr lang="en-US" sz="800" dirty="0"/>
           </a:p>
@@ -7543,7 +7543,7 @@
                 <a:ea typeface="Calibri" pitchFamily="34" charset="-122"/>
                 <a:cs typeface="Calibri" pitchFamily="34" charset="-120"/>
               </a:rPr>
-              <a:t>Word Labs  •  wordlabs.app  •  Root: 'merge' = to combine, sink into</a:t>
+              <a:t>Word Labs  •  wordlabs.app  •  Root: 'merge' = join, combine, sink into</a:t>
             </a:r>
             <a:endParaRPr lang="en-US" sz="800" dirty="0"/>
           </a:p>
@@ -7860,7 +7860,7 @@
                 <a:ea typeface="Calibri" pitchFamily="34" charset="-122"/>
                 <a:cs typeface="Calibri" pitchFamily="34" charset="-120"/>
               </a:rPr>
-              <a:t>to combine, sink into</a:t>
+              <a:t>join, combine, sink into</a:t>
             </a:r>
             <a:endParaRPr lang="en-US" sz="850" dirty="0"/>
           </a:p>
@@ -8416,7 +8416,7 @@
                 <a:ea typeface="Calibri" pitchFamily="34" charset="-122"/>
                 <a:cs typeface="Calibri" pitchFamily="34" charset="-120"/>
               </a:rPr>
-              <a:t>Word Labs  •  wordlabs.app  •  Root: 'merge' = to combine, sink into</a:t>
+              <a:t>Word Labs  •  wordlabs.app  •  Root: 'merge' = join, combine, sink into</a:t>
             </a:r>
             <a:endParaRPr lang="en-US" sz="800" dirty="0"/>
           </a:p>
@@ -8733,7 +8733,7 @@
                 <a:ea typeface="Calibri" pitchFamily="34" charset="-122"/>
                 <a:cs typeface="Calibri" pitchFamily="34" charset="-120"/>
               </a:rPr>
-              <a:t>to combine, sink into</a:t>
+              <a:t>join, combine, sink into</a:t>
             </a:r>
             <a:endParaRPr lang="en-US" sz="850" dirty="0"/>
           </a:p>
@@ -9316,7 +9316,7 @@
                 <a:ea typeface="Calibri" pitchFamily="34" charset="-122"/>
                 <a:cs typeface="Calibri" pitchFamily="34" charset="-120"/>
               </a:rPr>
-              <a:t>Word Labs  •  wordlabs.app  •  Root: 'merge' = to combine, sink into</a:t>
+              <a:t>Word Labs  •  wordlabs.app  •  Root: 'merge' = join, combine, sink into</a:t>
             </a:r>
             <a:endParaRPr lang="en-US" sz="800" dirty="0"/>
           </a:p>
@@ -9633,7 +9633,7 @@
                 <a:ea typeface="Calibri" pitchFamily="34" charset="-122"/>
                 <a:cs typeface="Calibri" pitchFamily="34" charset="-120"/>
               </a:rPr>
-              <a:t>to combine, sink into</a:t>
+              <a:t>join, combine, sink into</a:t>
             </a:r>
             <a:endParaRPr lang="en-US" sz="850" dirty="0"/>
           </a:p>
@@ -10414,7 +10414,7 @@
                 <a:ea typeface="Calibri" pitchFamily="34" charset="-122"/>
                 <a:cs typeface="Calibri" pitchFamily="34" charset="-120"/>
               </a:rPr>
-              <a:t>Word Labs  •  wordlabs.app  •  Root: 'merge' = to combine, sink into</a:t>
+              <a:t>Word Labs  •  wordlabs.app  •  Root: 'merge' = join, combine, sink into</a:t>
             </a:r>
             <a:endParaRPr lang="en-US" sz="800" dirty="0"/>
           </a:p>
@@ -10553,7 +10553,7 @@
                 <a:ea typeface="Trebuchet MS" pitchFamily="34" charset="-122"/>
                 <a:cs typeface="Trebuchet MS" pitchFamily="34" charset="-120"/>
               </a:rPr>
-              <a:t>emerge</a:t>
+              <a:t>emergence</a:t>
             </a:r>
             <a:endParaRPr lang="en-US" sz="2800" dirty="0"/>
           </a:p>
@@ -11241,7 +11241,7 @@
                 <a:ea typeface="Calibri" pitchFamily="34" charset="-122"/>
                 <a:cs typeface="Calibri" pitchFamily="34" charset="-120"/>
               </a:rPr>
-              <a:t>Word Labs  •  wordlabs.app  •  Root: 'merge' = to combine, sink into</a:t>
+              <a:t>Word Labs  •  wordlabs.app  •  Root: 'merge' = join, combine, sink into</a:t>
             </a:r>
             <a:endParaRPr lang="en-US" sz="800" dirty="0"/>
           </a:p>
@@ -11380,7 +11380,7 @@
                 <a:ea typeface="Trebuchet MS" pitchFamily="34" charset="-122"/>
                 <a:cs typeface="Trebuchet MS" pitchFamily="34" charset="-120"/>
               </a:rPr>
-              <a:t>emerge</a:t>
+              <a:t>emergence</a:t>
             </a:r>
             <a:endParaRPr lang="en-US" sz="2800" dirty="0"/>
           </a:p>
@@ -11460,7 +11460,7 @@
         </p:nvSpPr>
         <p:spPr>
           <a:xfrm>
-            <a:off x="2938272" y="2258568"/>
+            <a:off x="2221992" y="2258568"/>
             <a:ext cx="1828800" cy="292608"/>
           </a:xfrm>
           <a:prstGeom prst="rect">
@@ -11494,7 +11494,7 @@
         </p:nvSpPr>
         <p:spPr>
           <a:xfrm>
-            <a:off x="2938272" y="2258568"/>
+            <a:off x="2221992" y="2258568"/>
             <a:ext cx="1828800" cy="292608"/>
           </a:xfrm>
           <a:prstGeom prst="rect">
@@ -11533,7 +11533,7 @@
         </p:nvSpPr>
         <p:spPr>
           <a:xfrm>
-            <a:off x="2938272" y="2569464"/>
+            <a:off x="2221992" y="2569464"/>
             <a:ext cx="1828800" cy="201168"/>
           </a:xfrm>
           <a:prstGeom prst="rect">
@@ -11558,7 +11558,7 @@
                 <a:ea typeface="Calibri" pitchFamily="34" charset="-122"/>
                 <a:cs typeface="Calibri" pitchFamily="34" charset="-120"/>
               </a:rPr>
-              <a:t>out of, from</a:t>
+              <a:t>out, from</a:t>
             </a:r>
             <a:endParaRPr lang="en-US" sz="850" dirty="0"/>
           </a:p>
@@ -11572,7 +11572,7 @@
         </p:nvSpPr>
         <p:spPr>
           <a:xfrm>
-            <a:off x="5803392" y="2258568"/>
+            <a:off x="4370832" y="2258568"/>
             <a:ext cx="1828800" cy="292608"/>
           </a:xfrm>
           <a:prstGeom prst="rect">
@@ -11606,7 +11606,7 @@
         </p:nvSpPr>
         <p:spPr>
           <a:xfrm>
-            <a:off x="5803392" y="2258568"/>
+            <a:off x="4370832" y="2258568"/>
             <a:ext cx="1828800" cy="292608"/>
           </a:xfrm>
           <a:prstGeom prst="rect">
@@ -11645,7 +11645,7 @@
         </p:nvSpPr>
         <p:spPr>
           <a:xfrm>
-            <a:off x="5803392" y="2569464"/>
+            <a:off x="4370832" y="2569464"/>
             <a:ext cx="1828800" cy="201168"/>
           </a:xfrm>
           <a:prstGeom prst="rect">
@@ -11670,7 +11670,7 @@
                 <a:ea typeface="Calibri" pitchFamily="34" charset="-122"/>
                 <a:cs typeface="Calibri" pitchFamily="34" charset="-120"/>
               </a:rPr>
-              <a:t>to combine, sink into</a:t>
+              <a:t>join, combine, sink into</a:t>
             </a:r>
             <a:endParaRPr lang="en-US" sz="850" dirty="0"/>
           </a:p>
@@ -11679,6 +11679,118 @@
       <p:sp>
         <p:nvSpPr>
           <p:cNvPr id="22" name="Shape 20"/>
+          <p:cNvSpPr/>
+          <p:nvPr/>
+        </p:nvSpPr>
+        <p:spPr>
+          <a:xfrm>
+            <a:off x="6519672" y="2258568"/>
+            <a:ext cx="1828800" cy="292608"/>
+          </a:xfrm>
+          <a:prstGeom prst="rect">
+            <a:avLst>
+              <a:gd name="adj" fmla="val 25000"/>
+            </a:avLst>
+          </a:prstGeom>
+          <a:solidFill>
+            <a:srgbClr val="FCE7F3"/>
+          </a:solidFill>
+          <a:ln w="19050">
+            <a:solidFill>
+              <a:srgbClr val="DB2777"/>
+            </a:solidFill>
+            <a:prstDash val="solid"/>
+          </a:ln>
+          <a:effectLst>
+            <a:outerShdw sx="100000" sy="100000" kx="0" ky="0" algn="bl" rotWithShape="0" blurRad="101600" dist="38100" dir="8100000">
+              <a:srgbClr val="000000">
+                <a:alpha val="12000"/>
+              </a:srgbClr>
+            </a:outerShdw>
+          </a:effectLst>
+        </p:spPr>
+      </p:sp>
+      <p:sp>
+        <p:nvSpPr>
+          <p:cNvPr id="23" name="Text 21"/>
+          <p:cNvSpPr/>
+          <p:nvPr/>
+        </p:nvSpPr>
+        <p:spPr>
+          <a:xfrm>
+            <a:off x="6519672" y="2258568"/>
+            <a:ext cx="1828800" cy="292608"/>
+          </a:xfrm>
+          <a:prstGeom prst="rect">
+            <a:avLst/>
+          </a:prstGeom>
+          <a:noFill/>
+          <a:ln/>
+        </p:spPr>
+        <p:txBody>
+          <a:bodyPr wrap="square" lIns="0" tIns="0" rIns="0" bIns="0" rtlCol="0" anchor="ctr"/>
+          <a:lstStyle/>
+          <a:p>
+            <a:pPr algn="ctr" indent="0" marL="0">
+              <a:buNone/>
+            </a:pPr>
+            <a:r>
+              <a:rPr lang="en-US" sz="1300" b="1" dirty="0">
+                <a:solidFill>
+                  <a:srgbClr val="9D174D"/>
+                </a:solidFill>
+                <a:latin typeface="Trebuchet MS" pitchFamily="34" charset="0"/>
+                <a:ea typeface="Trebuchet MS" pitchFamily="34" charset="-122"/>
+                <a:cs typeface="Trebuchet MS" pitchFamily="34" charset="-120"/>
+              </a:rPr>
+              <a:t>nce</a:t>
+            </a:r>
+            <a:endParaRPr lang="en-US" sz="1300" dirty="0"/>
+          </a:p>
+        </p:txBody>
+      </p:sp>
+      <p:sp>
+        <p:nvSpPr>
+          <p:cNvPr id="24" name="Text 22"/>
+          <p:cNvSpPr/>
+          <p:nvPr/>
+        </p:nvSpPr>
+        <p:spPr>
+          <a:xfrm>
+            <a:off x="6519672" y="2569464"/>
+            <a:ext cx="1828800" cy="201168"/>
+          </a:xfrm>
+          <a:prstGeom prst="rect">
+            <a:avLst/>
+          </a:prstGeom>
+          <a:noFill/>
+          <a:ln/>
+        </p:spPr>
+        <p:txBody>
+          <a:bodyPr wrap="square" lIns="0" tIns="0" rIns="0" bIns="0" rtlCol="0" anchor="t"/>
+          <a:lstStyle/>
+          <a:p>
+            <a:pPr algn="ctr" indent="0" marL="0">
+              <a:buNone/>
+            </a:pPr>
+            <a:r>
+              <a:rPr lang="en-US" sz="850" dirty="0">
+                <a:solidFill>
+                  <a:srgbClr val="475569"/>
+                </a:solidFill>
+                <a:latin typeface="Calibri" pitchFamily="34" charset="0"/>
+                <a:ea typeface="Calibri" pitchFamily="34" charset="-122"/>
+                <a:cs typeface="Calibri" pitchFamily="34" charset="-120"/>
+              </a:rPr>
+              <a:t>state or quality of</a:t>
+            </a:r>
+            <a:endParaRPr lang="en-US" sz="850" dirty="0"/>
+          </a:p>
+        </p:txBody>
+      </p:sp>
+      <p:sp>
+        <p:nvSpPr>
+          <p:cNvPr id="25" name="Shape 23"/>
           <p:cNvSpPr/>
           <p:nvPr/>
         </p:nvSpPr>
@@ -11705,7 +11817,7 @@
       </p:sp>
       <p:sp>
         <p:nvSpPr>
-          <p:cNvPr id="23" name="Text 21"/>
+          <p:cNvPr id="26" name="Text 24"/>
           <p:cNvSpPr/>
           <p:nvPr/>
         </p:nvSpPr>
@@ -11744,7 +11856,7 @@
       </p:sp>
       <p:sp>
         <p:nvSpPr>
-          <p:cNvPr id="24" name="Shape 22"/>
+          <p:cNvPr id="27" name="Shape 25"/>
           <p:cNvSpPr/>
           <p:nvPr/>
         </p:nvSpPr>
@@ -11771,7 +11883,7 @@
       </p:sp>
       <p:sp>
         <p:nvSpPr>
-          <p:cNvPr id="25" name="Text 23"/>
+          <p:cNvPr id="28" name="Text 26"/>
           <p:cNvSpPr/>
           <p:nvPr/>
         </p:nvSpPr>
@@ -11810,7 +11922,7 @@
       </p:sp>
       <p:sp>
         <p:nvSpPr>
-          <p:cNvPr id="26" name="Shape 24"/>
+          <p:cNvPr id="29" name="Shape 27"/>
           <p:cNvSpPr/>
           <p:nvPr/>
         </p:nvSpPr>
@@ -11837,7 +11949,7 @@
       </p:sp>
       <p:sp>
         <p:nvSpPr>
-          <p:cNvPr id="27" name="Text 25"/>
+          <p:cNvPr id="30" name="Text 28"/>
           <p:cNvSpPr/>
           <p:nvPr/>
         </p:nvSpPr>
@@ -11876,7 +11988,7 @@
       </p:sp>
       <p:sp>
         <p:nvSpPr>
-          <p:cNvPr id="28" name="Shape 26"/>
+          <p:cNvPr id="31" name="Shape 29"/>
           <p:cNvSpPr/>
           <p:nvPr/>
         </p:nvSpPr>
@@ -11903,7 +12015,7 @@
       </p:sp>
       <p:sp>
         <p:nvSpPr>
-          <p:cNvPr id="29" name="Text 27"/>
+          <p:cNvPr id="32" name="Text 30"/>
           <p:cNvSpPr/>
           <p:nvPr/>
         </p:nvSpPr>
@@ -12226,7 +12338,7 @@
                 <a:ea typeface="Calibri" pitchFamily="34" charset="-122"/>
                 <a:cs typeface="Calibri" pitchFamily="34" charset="-120"/>
               </a:rPr>
-              <a:t>Word Labs  •  wordlabs.app  •  Root: 'merge' = to combine, sink into</a:t>
+              <a:t>Word Labs  •  wordlabs.app  •  Root: 'merge' = join, combine, sink into</a:t>
             </a:r>
             <a:endParaRPr lang="en-US" sz="800" dirty="0"/>
           </a:p>
@@ -12365,7 +12477,7 @@
                 <a:ea typeface="Trebuchet MS" pitchFamily="34" charset="-122"/>
                 <a:cs typeface="Trebuchet MS" pitchFamily="34" charset="-120"/>
               </a:rPr>
-              <a:t>emerge</a:t>
+              <a:t>emergence</a:t>
             </a:r>
             <a:endParaRPr lang="en-US" sz="2800" dirty="0"/>
           </a:p>
@@ -12445,7 +12557,7 @@
         </p:nvSpPr>
         <p:spPr>
           <a:xfrm>
-            <a:off x="2938272" y="2258568"/>
+            <a:off x="2221992" y="2258568"/>
             <a:ext cx="1828800" cy="292608"/>
           </a:xfrm>
           <a:prstGeom prst="rect">
@@ -12479,7 +12591,7 @@
         </p:nvSpPr>
         <p:spPr>
           <a:xfrm>
-            <a:off x="2938272" y="2258568"/>
+            <a:off x="2221992" y="2258568"/>
             <a:ext cx="1828800" cy="292608"/>
           </a:xfrm>
           <a:prstGeom prst="rect">
@@ -12518,7 +12630,7 @@
         </p:nvSpPr>
         <p:spPr>
           <a:xfrm>
-            <a:off x="2938272" y="2569464"/>
+            <a:off x="2221992" y="2569464"/>
             <a:ext cx="1828800" cy="201168"/>
           </a:xfrm>
           <a:prstGeom prst="rect">
@@ -12543,7 +12655,7 @@
                 <a:ea typeface="Calibri" pitchFamily="34" charset="-122"/>
                 <a:cs typeface="Calibri" pitchFamily="34" charset="-120"/>
               </a:rPr>
-              <a:t>out of, from</a:t>
+              <a:t>out, from</a:t>
             </a:r>
             <a:endParaRPr lang="en-US" sz="850" dirty="0"/>
           </a:p>
@@ -12557,7 +12669,7 @@
         </p:nvSpPr>
         <p:spPr>
           <a:xfrm>
-            <a:off x="5803392" y="2258568"/>
+            <a:off x="4370832" y="2258568"/>
             <a:ext cx="1828800" cy="292608"/>
           </a:xfrm>
           <a:prstGeom prst="rect">
@@ -12591,7 +12703,7 @@
         </p:nvSpPr>
         <p:spPr>
           <a:xfrm>
-            <a:off x="5803392" y="2258568"/>
+            <a:off x="4370832" y="2258568"/>
             <a:ext cx="1828800" cy="292608"/>
           </a:xfrm>
           <a:prstGeom prst="rect">
@@ -12630,7 +12742,7 @@
         </p:nvSpPr>
         <p:spPr>
           <a:xfrm>
-            <a:off x="5803392" y="2569464"/>
+            <a:off x="4370832" y="2569464"/>
             <a:ext cx="1828800" cy="201168"/>
           </a:xfrm>
           <a:prstGeom prst="rect">
@@ -12655,7 +12767,7 @@
                 <a:ea typeface="Calibri" pitchFamily="34" charset="-122"/>
                 <a:cs typeface="Calibri" pitchFamily="34" charset="-120"/>
               </a:rPr>
-              <a:t>to combine, sink into</a:t>
+              <a:t>join, combine, sink into</a:t>
             </a:r>
             <a:endParaRPr lang="en-US" sz="850" dirty="0"/>
           </a:p>
@@ -12664,6 +12776,118 @@
       <p:sp>
         <p:nvSpPr>
           <p:cNvPr id="22" name="Shape 20"/>
+          <p:cNvSpPr/>
+          <p:nvPr/>
+        </p:nvSpPr>
+        <p:spPr>
+          <a:xfrm>
+            <a:off x="6519672" y="2258568"/>
+            <a:ext cx="1828800" cy="292608"/>
+          </a:xfrm>
+          <a:prstGeom prst="rect">
+            <a:avLst>
+              <a:gd name="adj" fmla="val 25000"/>
+            </a:avLst>
+          </a:prstGeom>
+          <a:solidFill>
+            <a:srgbClr val="FCE7F3"/>
+          </a:solidFill>
+          <a:ln w="19050">
+            <a:solidFill>
+              <a:srgbClr val="DB2777"/>
+            </a:solidFill>
+            <a:prstDash val="solid"/>
+          </a:ln>
+          <a:effectLst>
+            <a:outerShdw sx="100000" sy="100000" kx="0" ky="0" algn="bl" rotWithShape="0" blurRad="101600" dist="38100" dir="8100000">
+              <a:srgbClr val="000000">
+                <a:alpha val="12000"/>
+              </a:srgbClr>
+            </a:outerShdw>
+          </a:effectLst>
+        </p:spPr>
+      </p:sp>
+      <p:sp>
+        <p:nvSpPr>
+          <p:cNvPr id="23" name="Text 21"/>
+          <p:cNvSpPr/>
+          <p:nvPr/>
+        </p:nvSpPr>
+        <p:spPr>
+          <a:xfrm>
+            <a:off x="6519672" y="2258568"/>
+            <a:ext cx="1828800" cy="292608"/>
+          </a:xfrm>
+          <a:prstGeom prst="rect">
+            <a:avLst/>
+          </a:prstGeom>
+          <a:noFill/>
+          <a:ln/>
+        </p:spPr>
+        <p:txBody>
+          <a:bodyPr wrap="square" lIns="0" tIns="0" rIns="0" bIns="0" rtlCol="0" anchor="ctr"/>
+          <a:lstStyle/>
+          <a:p>
+            <a:pPr algn="ctr" indent="0" marL="0">
+              <a:buNone/>
+            </a:pPr>
+            <a:r>
+              <a:rPr lang="en-US" sz="1300" b="1" dirty="0">
+                <a:solidFill>
+                  <a:srgbClr val="9D174D"/>
+                </a:solidFill>
+                <a:latin typeface="Trebuchet MS" pitchFamily="34" charset="0"/>
+                <a:ea typeface="Trebuchet MS" pitchFamily="34" charset="-122"/>
+                <a:cs typeface="Trebuchet MS" pitchFamily="34" charset="-120"/>
+              </a:rPr>
+              <a:t>nce</a:t>
+            </a:r>
+            <a:endParaRPr lang="en-US" sz="1300" dirty="0"/>
+          </a:p>
+        </p:txBody>
+      </p:sp>
+      <p:sp>
+        <p:nvSpPr>
+          <p:cNvPr id="24" name="Text 22"/>
+          <p:cNvSpPr/>
+          <p:nvPr/>
+        </p:nvSpPr>
+        <p:spPr>
+          <a:xfrm>
+            <a:off x="6519672" y="2569464"/>
+            <a:ext cx="1828800" cy="201168"/>
+          </a:xfrm>
+          <a:prstGeom prst="rect">
+            <a:avLst/>
+          </a:prstGeom>
+          <a:noFill/>
+          <a:ln/>
+        </p:spPr>
+        <p:txBody>
+          <a:bodyPr wrap="square" lIns="0" tIns="0" rIns="0" bIns="0" rtlCol="0" anchor="t"/>
+          <a:lstStyle/>
+          <a:p>
+            <a:pPr algn="ctr" indent="0" marL="0">
+              <a:buNone/>
+            </a:pPr>
+            <a:r>
+              <a:rPr lang="en-US" sz="850" dirty="0">
+                <a:solidFill>
+                  <a:srgbClr val="475569"/>
+                </a:solidFill>
+                <a:latin typeface="Calibri" pitchFamily="34" charset="0"/>
+                <a:ea typeface="Calibri" pitchFamily="34" charset="-122"/>
+                <a:cs typeface="Calibri" pitchFamily="34" charset="-120"/>
+              </a:rPr>
+              <a:t>state or quality of</a:t>
+            </a:r>
+            <a:endParaRPr lang="en-US" sz="850" dirty="0"/>
+          </a:p>
+        </p:txBody>
+      </p:sp>
+      <p:sp>
+        <p:nvSpPr>
+          <p:cNvPr id="25" name="Shape 23"/>
           <p:cNvSpPr/>
           <p:nvPr/>
         </p:nvSpPr>
@@ -12690,7 +12914,7 @@
       </p:sp>
       <p:sp>
         <p:nvSpPr>
-          <p:cNvPr id="23" name="Text 21"/>
+          <p:cNvPr id="26" name="Text 24"/>
           <p:cNvSpPr/>
           <p:nvPr/>
         </p:nvSpPr>
@@ -12729,7 +12953,7 @@
       </p:sp>
       <p:sp>
         <p:nvSpPr>
-          <p:cNvPr id="24" name="Shape 22"/>
+          <p:cNvPr id="27" name="Shape 25"/>
           <p:cNvSpPr/>
           <p:nvPr/>
         </p:nvSpPr>
@@ -12756,13 +12980,13 @@
       </p:sp>
       <p:sp>
         <p:nvSpPr>
-          <p:cNvPr id="25" name="Shape 23"/>
-          <p:cNvSpPr/>
-          <p:nvPr/>
-        </p:nvSpPr>
-        <p:spPr>
-          <a:xfrm>
-            <a:off x="2999232" y="3364992"/>
+          <p:cNvPr id="28" name="Shape 26"/>
+          <p:cNvSpPr/>
+          <p:nvPr/>
+        </p:nvSpPr>
+        <p:spPr>
+          <a:xfrm>
+            <a:off x="2313432" y="3364992"/>
             <a:ext cx="1645920" cy="475488"/>
           </a:xfrm>
           <a:prstGeom prst="rect">
@@ -12783,13 +13007,13 @@
       </p:sp>
       <p:sp>
         <p:nvSpPr>
-          <p:cNvPr id="26" name="Text 24"/>
-          <p:cNvSpPr/>
-          <p:nvPr/>
-        </p:nvSpPr>
-        <p:spPr>
-          <a:xfrm>
-            <a:off x="2999232" y="3364992"/>
+          <p:cNvPr id="29" name="Text 27"/>
+          <p:cNvSpPr/>
+          <p:nvPr/>
+        </p:nvSpPr>
+        <p:spPr>
+          <a:xfrm>
+            <a:off x="2313432" y="3364992"/>
             <a:ext cx="1645920" cy="475488"/>
           </a:xfrm>
           <a:prstGeom prst="rect">
@@ -12822,14 +13046,14 @@
       </p:sp>
       <p:sp>
         <p:nvSpPr>
-          <p:cNvPr id="27" name="Text 25"/>
-          <p:cNvSpPr/>
-          <p:nvPr/>
-        </p:nvSpPr>
-        <p:spPr>
-          <a:xfrm>
-            <a:off x="4645152" y="3364992"/>
-            <a:ext cx="1097280" cy="475488"/>
+          <p:cNvPr id="30" name="Text 28"/>
+          <p:cNvSpPr/>
+          <p:nvPr/>
+        </p:nvSpPr>
+        <p:spPr>
+          <a:xfrm>
+            <a:off x="3959352" y="3364992"/>
+            <a:ext cx="411480" cy="475488"/>
           </a:xfrm>
           <a:prstGeom prst="rect">
             <a:avLst/>
@@ -12861,13 +13085,13 @@
       </p:sp>
       <p:sp>
         <p:nvSpPr>
-          <p:cNvPr id="28" name="Shape 26"/>
-          <p:cNvSpPr/>
-          <p:nvPr/>
-        </p:nvSpPr>
-        <p:spPr>
-          <a:xfrm>
-            <a:off x="5742432" y="3364992"/>
+          <p:cNvPr id="31" name="Shape 29"/>
+          <p:cNvSpPr/>
+          <p:nvPr/>
+        </p:nvSpPr>
+        <p:spPr>
+          <a:xfrm>
+            <a:off x="4370832" y="3364992"/>
             <a:ext cx="1645920" cy="475488"/>
           </a:xfrm>
           <a:prstGeom prst="rect">
@@ -12888,13 +13112,13 @@
       </p:sp>
       <p:sp>
         <p:nvSpPr>
-          <p:cNvPr id="29" name="Text 27"/>
-          <p:cNvSpPr/>
-          <p:nvPr/>
-        </p:nvSpPr>
-        <p:spPr>
-          <a:xfrm>
-            <a:off x="5742432" y="3364992"/>
+          <p:cNvPr id="32" name="Text 30"/>
+          <p:cNvSpPr/>
+          <p:nvPr/>
+        </p:nvSpPr>
+        <p:spPr>
+          <a:xfrm>
+            <a:off x="4370832" y="3364992"/>
             <a:ext cx="1645920" cy="475488"/>
           </a:xfrm>
           <a:prstGeom prst="rect">
@@ -12919,7 +13143,7 @@
                 <a:ea typeface="Trebuchet MS" pitchFamily="34" charset="-122"/>
                 <a:cs typeface="Trebuchet MS" pitchFamily="34" charset="-120"/>
               </a:rPr>
-              <a:t>merge</a:t>
+              <a:t>mer</a:t>
             </a:r>
             <a:endParaRPr lang="en-US" sz="1400" dirty="0"/>
           </a:p>
@@ -12927,7 +13151,112 @@
       </p:sp>
       <p:sp>
         <p:nvSpPr>
-          <p:cNvPr id="30" name="Shape 28"/>
+          <p:cNvPr id="33" name="Text 31"/>
+          <p:cNvSpPr/>
+          <p:nvPr/>
+        </p:nvSpPr>
+        <p:spPr>
+          <a:xfrm>
+            <a:off x="6016752" y="3364992"/>
+            <a:ext cx="411480" cy="475488"/>
+          </a:xfrm>
+          <a:prstGeom prst="rect">
+            <a:avLst/>
+          </a:prstGeom>
+          <a:noFill/>
+          <a:ln/>
+        </p:spPr>
+        <p:txBody>
+          <a:bodyPr wrap="square" lIns="0" tIns="0" rIns="0" bIns="0" rtlCol="0" anchor="ctr"/>
+          <a:lstStyle/>
+          <a:p>
+            <a:pPr algn="ctr" indent="0" marL="0">
+              <a:buNone/>
+            </a:pPr>
+            <a:r>
+              <a:rPr lang="en-US" sz="1600" b="1" dirty="0">
+                <a:solidFill>
+                  <a:srgbClr val="0D9488"/>
+                </a:solidFill>
+                <a:latin typeface="Trebuchet MS" pitchFamily="34" charset="0"/>
+                <a:ea typeface="Trebuchet MS" pitchFamily="34" charset="-122"/>
+                <a:cs typeface="Trebuchet MS" pitchFamily="34" charset="-120"/>
+              </a:rPr>
+              <a:t>·</a:t>
+            </a:r>
+            <a:endParaRPr lang="en-US" sz="1600" dirty="0"/>
+          </a:p>
+        </p:txBody>
+      </p:sp>
+      <p:sp>
+        <p:nvSpPr>
+          <p:cNvPr id="34" name="Shape 32"/>
+          <p:cNvSpPr/>
+          <p:nvPr/>
+        </p:nvSpPr>
+        <p:spPr>
+          <a:xfrm>
+            <a:off x="6428232" y="3364992"/>
+            <a:ext cx="1645920" cy="475488"/>
+          </a:xfrm>
+          <a:prstGeom prst="rect">
+            <a:avLst>
+              <a:gd name="adj" fmla="val 9615"/>
+            </a:avLst>
+          </a:prstGeom>
+          <a:solidFill>
+            <a:srgbClr val="FFFFFF"/>
+          </a:solidFill>
+          <a:ln w="12700">
+            <a:solidFill>
+              <a:srgbClr val="0D9488"/>
+            </a:solidFill>
+            <a:prstDash val="solid"/>
+          </a:ln>
+        </p:spPr>
+      </p:sp>
+      <p:sp>
+        <p:nvSpPr>
+          <p:cNvPr id="35" name="Text 33"/>
+          <p:cNvSpPr/>
+          <p:nvPr/>
+        </p:nvSpPr>
+        <p:spPr>
+          <a:xfrm>
+            <a:off x="6428232" y="3364992"/>
+            <a:ext cx="1645920" cy="475488"/>
+          </a:xfrm>
+          <a:prstGeom prst="rect">
+            <a:avLst/>
+          </a:prstGeom>
+          <a:noFill/>
+          <a:ln/>
+        </p:spPr>
+        <p:txBody>
+          <a:bodyPr wrap="square" lIns="0" tIns="0" rIns="0" bIns="0" rtlCol="0" anchor="ctr"/>
+          <a:lstStyle/>
+          <a:p>
+            <a:pPr algn="ctr" indent="0" marL="0">
+              <a:buNone/>
+            </a:pPr>
+            <a:r>
+              <a:rPr lang="en-US" sz="1400" b="1" dirty="0">
+                <a:solidFill>
+                  <a:srgbClr val="0D9488"/>
+                </a:solidFill>
+                <a:latin typeface="Trebuchet MS" pitchFamily="34" charset="0"/>
+                <a:ea typeface="Trebuchet MS" pitchFamily="34" charset="-122"/>
+                <a:cs typeface="Trebuchet MS" pitchFamily="34" charset="-120"/>
+              </a:rPr>
+              <a:t>gence</a:t>
+            </a:r>
+            <a:endParaRPr lang="en-US" sz="1400" dirty="0"/>
+          </a:p>
+        </p:txBody>
+      </p:sp>
+      <p:sp>
+        <p:nvSpPr>
+          <p:cNvPr id="36" name="Shape 34"/>
           <p:cNvSpPr/>
           <p:nvPr/>
         </p:nvSpPr>
@@ -12954,7 +13283,7 @@
       </p:sp>
       <p:sp>
         <p:nvSpPr>
-          <p:cNvPr id="31" name="Text 29"/>
+          <p:cNvPr id="37" name="Text 35"/>
           <p:cNvSpPr/>
           <p:nvPr/>
         </p:nvSpPr>
@@ -12993,7 +13322,7 @@
       </p:sp>
       <p:sp>
         <p:nvSpPr>
-          <p:cNvPr id="32" name="Shape 30"/>
+          <p:cNvPr id="38" name="Shape 36"/>
           <p:cNvSpPr/>
           <p:nvPr/>
         </p:nvSpPr>
@@ -13020,7 +13349,7 @@
       </p:sp>
       <p:sp>
         <p:nvSpPr>
-          <p:cNvPr id="33" name="Text 31"/>
+          <p:cNvPr id="39" name="Text 37"/>
           <p:cNvSpPr/>
           <p:nvPr/>
         </p:nvSpPr>
@@ -13252,7 +13581,7 @@
                 <a:ea typeface="Calibri" pitchFamily="34" charset="-122"/>
                 <a:cs typeface="Calibri" pitchFamily="34" charset="-120"/>
               </a:rPr>
-              <a:t>Root 'merge' — to combine, sink into</a:t>
+              <a:t>Root 'merge' — join, combine, sink into</a:t>
             </a:r>
             <a:endParaRPr lang="en-US" sz="1600" dirty="0"/>
           </a:p>
@@ -13608,7 +13937,7 @@
                 <a:ea typeface="Calibri" pitchFamily="34" charset="-122"/>
                 <a:cs typeface="Calibri" pitchFamily="34" charset="-120"/>
               </a:rPr>
-              <a:t>Word Labs  •  wordlabs.app  •  Root: 'merge' = to combine, sink into</a:t>
+              <a:t>Word Labs  •  wordlabs.app  •  Root: 'merge' = join, combine, sink into</a:t>
             </a:r>
             <a:endParaRPr lang="en-US" sz="800" dirty="0"/>
           </a:p>
@@ -13747,7 +14076,7 @@
                 <a:ea typeface="Trebuchet MS" pitchFamily="34" charset="-122"/>
                 <a:cs typeface="Trebuchet MS" pitchFamily="34" charset="-120"/>
               </a:rPr>
-              <a:t>emerge</a:t>
+              <a:t>emergence</a:t>
             </a:r>
             <a:endParaRPr lang="en-US" sz="2800" dirty="0"/>
           </a:p>
@@ -13827,7 +14156,7 @@
         </p:nvSpPr>
         <p:spPr>
           <a:xfrm>
-            <a:off x="2938272" y="2258568"/>
+            <a:off x="2221992" y="2258568"/>
             <a:ext cx="1828800" cy="292608"/>
           </a:xfrm>
           <a:prstGeom prst="rect">
@@ -13861,7 +14190,7 @@
         </p:nvSpPr>
         <p:spPr>
           <a:xfrm>
-            <a:off x="2938272" y="2258568"/>
+            <a:off x="2221992" y="2258568"/>
             <a:ext cx="1828800" cy="292608"/>
           </a:xfrm>
           <a:prstGeom prst="rect">
@@ -13900,7 +14229,7 @@
         </p:nvSpPr>
         <p:spPr>
           <a:xfrm>
-            <a:off x="2938272" y="2569464"/>
+            <a:off x="2221992" y="2569464"/>
             <a:ext cx="1828800" cy="201168"/>
           </a:xfrm>
           <a:prstGeom prst="rect">
@@ -13925,7 +14254,7 @@
                 <a:ea typeface="Calibri" pitchFamily="34" charset="-122"/>
                 <a:cs typeface="Calibri" pitchFamily="34" charset="-120"/>
               </a:rPr>
-              <a:t>out of, from</a:t>
+              <a:t>out, from</a:t>
             </a:r>
             <a:endParaRPr lang="en-US" sz="850" dirty="0"/>
           </a:p>
@@ -13939,7 +14268,7 @@
         </p:nvSpPr>
         <p:spPr>
           <a:xfrm>
-            <a:off x="5803392" y="2258568"/>
+            <a:off x="4370832" y="2258568"/>
             <a:ext cx="1828800" cy="292608"/>
           </a:xfrm>
           <a:prstGeom prst="rect">
@@ -13973,7 +14302,7 @@
         </p:nvSpPr>
         <p:spPr>
           <a:xfrm>
-            <a:off x="5803392" y="2258568"/>
+            <a:off x="4370832" y="2258568"/>
             <a:ext cx="1828800" cy="292608"/>
           </a:xfrm>
           <a:prstGeom prst="rect">
@@ -14012,7 +14341,7 @@
         </p:nvSpPr>
         <p:spPr>
           <a:xfrm>
-            <a:off x="5803392" y="2569464"/>
+            <a:off x="4370832" y="2569464"/>
             <a:ext cx="1828800" cy="201168"/>
           </a:xfrm>
           <a:prstGeom prst="rect">
@@ -14037,7 +14366,7 @@
                 <a:ea typeface="Calibri" pitchFamily="34" charset="-122"/>
                 <a:cs typeface="Calibri" pitchFamily="34" charset="-120"/>
               </a:rPr>
-              <a:t>to combine, sink into</a:t>
+              <a:t>join, combine, sink into</a:t>
             </a:r>
             <a:endParaRPr lang="en-US" sz="850" dirty="0"/>
           </a:p>
@@ -14046,6 +14375,118 @@
       <p:sp>
         <p:nvSpPr>
           <p:cNvPr id="22" name="Shape 20"/>
+          <p:cNvSpPr/>
+          <p:nvPr/>
+        </p:nvSpPr>
+        <p:spPr>
+          <a:xfrm>
+            <a:off x="6519672" y="2258568"/>
+            <a:ext cx="1828800" cy="292608"/>
+          </a:xfrm>
+          <a:prstGeom prst="rect">
+            <a:avLst>
+              <a:gd name="adj" fmla="val 25000"/>
+            </a:avLst>
+          </a:prstGeom>
+          <a:solidFill>
+            <a:srgbClr val="FCE7F3"/>
+          </a:solidFill>
+          <a:ln w="19050">
+            <a:solidFill>
+              <a:srgbClr val="DB2777"/>
+            </a:solidFill>
+            <a:prstDash val="solid"/>
+          </a:ln>
+          <a:effectLst>
+            <a:outerShdw sx="100000" sy="100000" kx="0" ky="0" algn="bl" rotWithShape="0" blurRad="101600" dist="38100" dir="8100000">
+              <a:srgbClr val="000000">
+                <a:alpha val="12000"/>
+              </a:srgbClr>
+            </a:outerShdw>
+          </a:effectLst>
+        </p:spPr>
+      </p:sp>
+      <p:sp>
+        <p:nvSpPr>
+          <p:cNvPr id="23" name="Text 21"/>
+          <p:cNvSpPr/>
+          <p:nvPr/>
+        </p:nvSpPr>
+        <p:spPr>
+          <a:xfrm>
+            <a:off x="6519672" y="2258568"/>
+            <a:ext cx="1828800" cy="292608"/>
+          </a:xfrm>
+          <a:prstGeom prst="rect">
+            <a:avLst/>
+          </a:prstGeom>
+          <a:noFill/>
+          <a:ln/>
+        </p:spPr>
+        <p:txBody>
+          <a:bodyPr wrap="square" lIns="0" tIns="0" rIns="0" bIns="0" rtlCol="0" anchor="ctr"/>
+          <a:lstStyle/>
+          <a:p>
+            <a:pPr algn="ctr" indent="0" marL="0">
+              <a:buNone/>
+            </a:pPr>
+            <a:r>
+              <a:rPr lang="en-US" sz="1300" b="1" dirty="0">
+                <a:solidFill>
+                  <a:srgbClr val="9D174D"/>
+                </a:solidFill>
+                <a:latin typeface="Trebuchet MS" pitchFamily="34" charset="0"/>
+                <a:ea typeface="Trebuchet MS" pitchFamily="34" charset="-122"/>
+                <a:cs typeface="Trebuchet MS" pitchFamily="34" charset="-120"/>
+              </a:rPr>
+              <a:t>nce</a:t>
+            </a:r>
+            <a:endParaRPr lang="en-US" sz="1300" dirty="0"/>
+          </a:p>
+        </p:txBody>
+      </p:sp>
+      <p:sp>
+        <p:nvSpPr>
+          <p:cNvPr id="24" name="Text 22"/>
+          <p:cNvSpPr/>
+          <p:nvPr/>
+        </p:nvSpPr>
+        <p:spPr>
+          <a:xfrm>
+            <a:off x="6519672" y="2569464"/>
+            <a:ext cx="1828800" cy="201168"/>
+          </a:xfrm>
+          <a:prstGeom prst="rect">
+            <a:avLst/>
+          </a:prstGeom>
+          <a:noFill/>
+          <a:ln/>
+        </p:spPr>
+        <p:txBody>
+          <a:bodyPr wrap="square" lIns="0" tIns="0" rIns="0" bIns="0" rtlCol="0" anchor="t"/>
+          <a:lstStyle/>
+          <a:p>
+            <a:pPr algn="ctr" indent="0" marL="0">
+              <a:buNone/>
+            </a:pPr>
+            <a:r>
+              <a:rPr lang="en-US" sz="850" dirty="0">
+                <a:solidFill>
+                  <a:srgbClr val="475569"/>
+                </a:solidFill>
+                <a:latin typeface="Calibri" pitchFamily="34" charset="0"/>
+                <a:ea typeface="Calibri" pitchFamily="34" charset="-122"/>
+                <a:cs typeface="Calibri" pitchFamily="34" charset="-120"/>
+              </a:rPr>
+              <a:t>state or quality of</a:t>
+            </a:r>
+            <a:endParaRPr lang="en-US" sz="850" dirty="0"/>
+          </a:p>
+        </p:txBody>
+      </p:sp>
+      <p:sp>
+        <p:nvSpPr>
+          <p:cNvPr id="25" name="Shape 23"/>
           <p:cNvSpPr/>
           <p:nvPr/>
         </p:nvSpPr>
@@ -14072,7 +14513,7 @@
       </p:sp>
       <p:sp>
         <p:nvSpPr>
-          <p:cNvPr id="23" name="Text 21"/>
+          <p:cNvPr id="26" name="Text 24"/>
           <p:cNvSpPr/>
           <p:nvPr/>
         </p:nvSpPr>
@@ -14111,7 +14552,7 @@
       </p:sp>
       <p:sp>
         <p:nvSpPr>
-          <p:cNvPr id="24" name="Shape 22"/>
+          <p:cNvPr id="27" name="Shape 25"/>
           <p:cNvSpPr/>
           <p:nvPr/>
         </p:nvSpPr>
@@ -14138,13 +14579,13 @@
       </p:sp>
       <p:sp>
         <p:nvSpPr>
-          <p:cNvPr id="25" name="Shape 23"/>
-          <p:cNvSpPr/>
-          <p:nvPr/>
-        </p:nvSpPr>
-        <p:spPr>
-          <a:xfrm>
-            <a:off x="2999232" y="3364992"/>
+          <p:cNvPr id="28" name="Shape 26"/>
+          <p:cNvSpPr/>
+          <p:nvPr/>
+        </p:nvSpPr>
+        <p:spPr>
+          <a:xfrm>
+            <a:off x="2313432" y="3364992"/>
             <a:ext cx="1645920" cy="475488"/>
           </a:xfrm>
           <a:prstGeom prst="rect">
@@ -14165,13 +14606,13 @@
       </p:sp>
       <p:sp>
         <p:nvSpPr>
-          <p:cNvPr id="26" name="Text 24"/>
-          <p:cNvSpPr/>
-          <p:nvPr/>
-        </p:nvSpPr>
-        <p:spPr>
-          <a:xfrm>
-            <a:off x="2999232" y="3364992"/>
+          <p:cNvPr id="29" name="Text 27"/>
+          <p:cNvSpPr/>
+          <p:nvPr/>
+        </p:nvSpPr>
+        <p:spPr>
+          <a:xfrm>
+            <a:off x="2313432" y="3364992"/>
             <a:ext cx="1645920" cy="475488"/>
           </a:xfrm>
           <a:prstGeom prst="rect">
@@ -14204,14 +14645,14 @@
       </p:sp>
       <p:sp>
         <p:nvSpPr>
-          <p:cNvPr id="27" name="Text 25"/>
-          <p:cNvSpPr/>
-          <p:nvPr/>
-        </p:nvSpPr>
-        <p:spPr>
-          <a:xfrm>
-            <a:off x="4645152" y="3364992"/>
-            <a:ext cx="1097280" cy="475488"/>
+          <p:cNvPr id="30" name="Text 28"/>
+          <p:cNvSpPr/>
+          <p:nvPr/>
+        </p:nvSpPr>
+        <p:spPr>
+          <a:xfrm>
+            <a:off x="3959352" y="3364992"/>
+            <a:ext cx="411480" cy="475488"/>
           </a:xfrm>
           <a:prstGeom prst="rect">
             <a:avLst/>
@@ -14243,13 +14684,13 @@
       </p:sp>
       <p:sp>
         <p:nvSpPr>
-          <p:cNvPr id="28" name="Shape 26"/>
-          <p:cNvSpPr/>
-          <p:nvPr/>
-        </p:nvSpPr>
-        <p:spPr>
-          <a:xfrm>
-            <a:off x="5742432" y="3364992"/>
+          <p:cNvPr id="31" name="Shape 29"/>
+          <p:cNvSpPr/>
+          <p:nvPr/>
+        </p:nvSpPr>
+        <p:spPr>
+          <a:xfrm>
+            <a:off x="4370832" y="3364992"/>
             <a:ext cx="1645920" cy="475488"/>
           </a:xfrm>
           <a:prstGeom prst="rect">
@@ -14270,13 +14711,13 @@
       </p:sp>
       <p:sp>
         <p:nvSpPr>
-          <p:cNvPr id="29" name="Text 27"/>
-          <p:cNvSpPr/>
-          <p:nvPr/>
-        </p:nvSpPr>
-        <p:spPr>
-          <a:xfrm>
-            <a:off x="5742432" y="3364992"/>
+          <p:cNvPr id="32" name="Text 30"/>
+          <p:cNvSpPr/>
+          <p:nvPr/>
+        </p:nvSpPr>
+        <p:spPr>
+          <a:xfrm>
+            <a:off x="4370832" y="3364992"/>
             <a:ext cx="1645920" cy="475488"/>
           </a:xfrm>
           <a:prstGeom prst="rect">
@@ -14301,7 +14742,7 @@
                 <a:ea typeface="Trebuchet MS" pitchFamily="34" charset="-122"/>
                 <a:cs typeface="Trebuchet MS" pitchFamily="34" charset="-120"/>
               </a:rPr>
-              <a:t>merge</a:t>
+              <a:t>mer</a:t>
             </a:r>
             <a:endParaRPr lang="en-US" sz="1400" dirty="0"/>
           </a:p>
@@ -14309,7 +14750,112 @@
       </p:sp>
       <p:sp>
         <p:nvSpPr>
-          <p:cNvPr id="30" name="Shape 28"/>
+          <p:cNvPr id="33" name="Text 31"/>
+          <p:cNvSpPr/>
+          <p:nvPr/>
+        </p:nvSpPr>
+        <p:spPr>
+          <a:xfrm>
+            <a:off x="6016752" y="3364992"/>
+            <a:ext cx="411480" cy="475488"/>
+          </a:xfrm>
+          <a:prstGeom prst="rect">
+            <a:avLst/>
+          </a:prstGeom>
+          <a:noFill/>
+          <a:ln/>
+        </p:spPr>
+        <p:txBody>
+          <a:bodyPr wrap="square" lIns="0" tIns="0" rIns="0" bIns="0" rtlCol="0" anchor="ctr"/>
+          <a:lstStyle/>
+          <a:p>
+            <a:pPr algn="ctr" indent="0" marL="0">
+              <a:buNone/>
+            </a:pPr>
+            <a:r>
+              <a:rPr lang="en-US" sz="1600" b="1" dirty="0">
+                <a:solidFill>
+                  <a:srgbClr val="0D9488"/>
+                </a:solidFill>
+                <a:latin typeface="Trebuchet MS" pitchFamily="34" charset="0"/>
+                <a:ea typeface="Trebuchet MS" pitchFamily="34" charset="-122"/>
+                <a:cs typeface="Trebuchet MS" pitchFamily="34" charset="-120"/>
+              </a:rPr>
+              <a:t>·</a:t>
+            </a:r>
+            <a:endParaRPr lang="en-US" sz="1600" dirty="0"/>
+          </a:p>
+        </p:txBody>
+      </p:sp>
+      <p:sp>
+        <p:nvSpPr>
+          <p:cNvPr id="34" name="Shape 32"/>
+          <p:cNvSpPr/>
+          <p:nvPr/>
+        </p:nvSpPr>
+        <p:spPr>
+          <a:xfrm>
+            <a:off x="6428232" y="3364992"/>
+            <a:ext cx="1645920" cy="475488"/>
+          </a:xfrm>
+          <a:prstGeom prst="rect">
+            <a:avLst>
+              <a:gd name="adj" fmla="val 9615"/>
+            </a:avLst>
+          </a:prstGeom>
+          <a:solidFill>
+            <a:srgbClr val="FFFFFF"/>
+          </a:solidFill>
+          <a:ln w="12700">
+            <a:solidFill>
+              <a:srgbClr val="0D9488"/>
+            </a:solidFill>
+            <a:prstDash val="solid"/>
+          </a:ln>
+        </p:spPr>
+      </p:sp>
+      <p:sp>
+        <p:nvSpPr>
+          <p:cNvPr id="35" name="Text 33"/>
+          <p:cNvSpPr/>
+          <p:nvPr/>
+        </p:nvSpPr>
+        <p:spPr>
+          <a:xfrm>
+            <a:off x="6428232" y="3364992"/>
+            <a:ext cx="1645920" cy="475488"/>
+          </a:xfrm>
+          <a:prstGeom prst="rect">
+            <a:avLst/>
+          </a:prstGeom>
+          <a:noFill/>
+          <a:ln/>
+        </p:spPr>
+        <p:txBody>
+          <a:bodyPr wrap="square" lIns="0" tIns="0" rIns="0" bIns="0" rtlCol="0" anchor="ctr"/>
+          <a:lstStyle/>
+          <a:p>
+            <a:pPr algn="ctr" indent="0" marL="0">
+              <a:buNone/>
+            </a:pPr>
+            <a:r>
+              <a:rPr lang="en-US" sz="1400" b="1" dirty="0">
+                <a:solidFill>
+                  <a:srgbClr val="0D9488"/>
+                </a:solidFill>
+                <a:latin typeface="Trebuchet MS" pitchFamily="34" charset="0"/>
+                <a:ea typeface="Trebuchet MS" pitchFamily="34" charset="-122"/>
+                <a:cs typeface="Trebuchet MS" pitchFamily="34" charset="-120"/>
+              </a:rPr>
+              <a:t>gence</a:t>
+            </a:r>
+            <a:endParaRPr lang="en-US" sz="1400" dirty="0"/>
+          </a:p>
+        </p:txBody>
+      </p:sp>
+      <p:sp>
+        <p:nvSpPr>
+          <p:cNvPr id="36" name="Shape 34"/>
           <p:cNvSpPr/>
           <p:nvPr/>
         </p:nvSpPr>
@@ -14336,7 +14882,7 @@
       </p:sp>
       <p:sp>
         <p:nvSpPr>
-          <p:cNvPr id="31" name="Text 29"/>
+          <p:cNvPr id="37" name="Text 35"/>
           <p:cNvSpPr/>
           <p:nvPr/>
         </p:nvSpPr>
@@ -14375,7 +14921,7 @@
       </p:sp>
       <p:sp>
         <p:nvSpPr>
-          <p:cNvPr id="32" name="Shape 30"/>
+          <p:cNvPr id="38" name="Shape 36"/>
           <p:cNvSpPr/>
           <p:nvPr/>
         </p:nvSpPr>
@@ -14402,13 +14948,13 @@
       </p:sp>
       <p:sp>
         <p:nvSpPr>
-          <p:cNvPr id="33" name="Shape 31"/>
-          <p:cNvSpPr/>
-          <p:nvPr/>
-        </p:nvSpPr>
-        <p:spPr>
-          <a:xfrm>
-            <a:off x="2670048" y="4169664"/>
+          <p:cNvPr id="39" name="Shape 37"/>
+          <p:cNvSpPr/>
+          <p:nvPr/>
+        </p:nvSpPr>
+        <p:spPr>
+          <a:xfrm>
+            <a:off x="2254649" y="4169664"/>
             <a:ext cx="685800" cy="384048"/>
           </a:xfrm>
           <a:prstGeom prst="rect">
@@ -14429,13 +14975,13 @@
       </p:sp>
       <p:sp>
         <p:nvSpPr>
-          <p:cNvPr id="34" name="Text 32"/>
-          <p:cNvSpPr/>
-          <p:nvPr/>
-        </p:nvSpPr>
-        <p:spPr>
-          <a:xfrm>
-            <a:off x="2670048" y="4169664"/>
+          <p:cNvPr id="40" name="Text 38"/>
+          <p:cNvSpPr/>
+          <p:nvPr/>
+        </p:nvSpPr>
+        <p:spPr>
+          <a:xfrm>
+            <a:off x="2254649" y="4169664"/>
             <a:ext cx="685800" cy="384048"/>
           </a:xfrm>
           <a:prstGeom prst="rect">
@@ -14468,13 +15014,13 @@
       </p:sp>
       <p:sp>
         <p:nvSpPr>
-          <p:cNvPr id="35" name="Shape 33"/>
-          <p:cNvSpPr/>
-          <p:nvPr/>
-        </p:nvSpPr>
-        <p:spPr>
-          <a:xfrm>
-            <a:off x="4123944" y="4169664"/>
+          <p:cNvPr id="41" name="Shape 39"/>
+          <p:cNvSpPr/>
+          <p:nvPr/>
+        </p:nvSpPr>
+        <p:spPr>
+          <a:xfrm>
+            <a:off x="3293146" y="4169664"/>
             <a:ext cx="685800" cy="384048"/>
           </a:xfrm>
           <a:prstGeom prst="rect">
@@ -14495,13 +15041,13 @@
       </p:sp>
       <p:sp>
         <p:nvSpPr>
-          <p:cNvPr id="36" name="Text 34"/>
-          <p:cNvSpPr/>
-          <p:nvPr/>
-        </p:nvSpPr>
-        <p:spPr>
-          <a:xfrm>
-            <a:off x="4123944" y="4169664"/>
+          <p:cNvPr id="42" name="Text 40"/>
+          <p:cNvSpPr/>
+          <p:nvPr/>
+        </p:nvSpPr>
+        <p:spPr>
+          <a:xfrm>
+            <a:off x="3293146" y="4169664"/>
             <a:ext cx="685800" cy="384048"/>
           </a:xfrm>
           <a:prstGeom prst="rect">
@@ -14534,13 +15080,13 @@
       </p:sp>
       <p:sp>
         <p:nvSpPr>
-          <p:cNvPr id="37" name="Shape 35"/>
-          <p:cNvSpPr/>
-          <p:nvPr/>
-        </p:nvSpPr>
-        <p:spPr>
-          <a:xfrm>
-            <a:off x="5577840" y="4169664"/>
+          <p:cNvPr id="43" name="Shape 41"/>
+          <p:cNvSpPr/>
+          <p:nvPr/>
+        </p:nvSpPr>
+        <p:spPr>
+          <a:xfrm>
+            <a:off x="4331643" y="4169664"/>
             <a:ext cx="685800" cy="384048"/>
           </a:xfrm>
           <a:prstGeom prst="rect">
@@ -14561,13 +15107,13 @@
       </p:sp>
       <p:sp>
         <p:nvSpPr>
-          <p:cNvPr id="38" name="Text 36"/>
-          <p:cNvSpPr/>
-          <p:nvPr/>
-        </p:nvSpPr>
-        <p:spPr>
-          <a:xfrm>
-            <a:off x="5577840" y="4169664"/>
+          <p:cNvPr id="44" name="Text 42"/>
+          <p:cNvSpPr/>
+          <p:nvPr/>
+        </p:nvSpPr>
+        <p:spPr>
+          <a:xfrm>
+            <a:off x="4331643" y="4169664"/>
             <a:ext cx="685800" cy="384048"/>
           </a:xfrm>
           <a:prstGeom prst="rect">
@@ -14600,13 +15146,13 @@
       </p:sp>
       <p:sp>
         <p:nvSpPr>
-          <p:cNvPr id="39" name="Shape 37"/>
-          <p:cNvSpPr/>
-          <p:nvPr/>
-        </p:nvSpPr>
-        <p:spPr>
-          <a:xfrm>
-            <a:off x="7031736" y="4169664"/>
+          <p:cNvPr id="45" name="Shape 43"/>
+          <p:cNvSpPr/>
+          <p:nvPr/>
+        </p:nvSpPr>
+        <p:spPr>
+          <a:xfrm>
+            <a:off x="5370141" y="4169664"/>
             <a:ext cx="685800" cy="384048"/>
           </a:xfrm>
           <a:prstGeom prst="rect">
@@ -14627,13 +15173,13 @@
       </p:sp>
       <p:sp>
         <p:nvSpPr>
-          <p:cNvPr id="40" name="Text 38"/>
-          <p:cNvSpPr/>
-          <p:nvPr/>
-        </p:nvSpPr>
-        <p:spPr>
-          <a:xfrm>
-            <a:off x="7031736" y="4169664"/>
+          <p:cNvPr id="46" name="Text 44"/>
+          <p:cNvSpPr/>
+          <p:nvPr/>
+        </p:nvSpPr>
+        <p:spPr>
+          <a:xfrm>
+            <a:off x="5370141" y="4169664"/>
             <a:ext cx="685800" cy="384048"/>
           </a:xfrm>
           <a:prstGeom prst="rect">
@@ -14666,13 +15212,13 @@
       </p:sp>
       <p:sp>
         <p:nvSpPr>
-          <p:cNvPr id="41" name="Text 39"/>
-          <p:cNvSpPr/>
-          <p:nvPr/>
-        </p:nvSpPr>
-        <p:spPr>
-          <a:xfrm>
-            <a:off x="7031736" y="4572000"/>
+          <p:cNvPr id="47" name="Text 45"/>
+          <p:cNvSpPr/>
+          <p:nvPr/>
+        </p:nvSpPr>
+        <p:spPr>
+          <a:xfrm>
+            <a:off x="5370141" y="4572000"/>
             <a:ext cx="685800" cy="219456"/>
           </a:xfrm>
           <a:prstGeom prst="rect">
@@ -14698,6 +15244,177 @@
                 <a:cs typeface="Calibri" pitchFamily="34" charset="-120"/>
               </a:rPr>
               <a:t>/j/</a:t>
+            </a:r>
+            <a:endParaRPr lang="en-US" sz="750" dirty="0"/>
+          </a:p>
+        </p:txBody>
+      </p:sp>
+      <p:sp>
+        <p:nvSpPr>
+          <p:cNvPr id="48" name="Shape 46"/>
+          <p:cNvSpPr/>
+          <p:nvPr/>
+        </p:nvSpPr>
+        <p:spPr>
+          <a:xfrm>
+            <a:off x="6408638" y="4169664"/>
+            <a:ext cx="685800" cy="384048"/>
+          </a:xfrm>
+          <a:prstGeom prst="rect">
+            <a:avLst>
+              <a:gd name="adj" fmla="val 9524"/>
+            </a:avLst>
+          </a:prstGeom>
+          <a:solidFill>
+            <a:srgbClr val="FFFFFF"/>
+          </a:solidFill>
+          <a:ln w="12700">
+            <a:solidFill>
+              <a:srgbClr val="DB2777"/>
+            </a:solidFill>
+            <a:prstDash val="solid"/>
+          </a:ln>
+        </p:spPr>
+      </p:sp>
+      <p:sp>
+        <p:nvSpPr>
+          <p:cNvPr id="49" name="Text 47"/>
+          <p:cNvSpPr/>
+          <p:nvPr/>
+        </p:nvSpPr>
+        <p:spPr>
+          <a:xfrm>
+            <a:off x="6408638" y="4169664"/>
+            <a:ext cx="685800" cy="384048"/>
+          </a:xfrm>
+          <a:prstGeom prst="rect">
+            <a:avLst/>
+          </a:prstGeom>
+          <a:noFill/>
+          <a:ln/>
+        </p:spPr>
+        <p:txBody>
+          <a:bodyPr wrap="square" lIns="0" tIns="0" rIns="0" bIns="0" rtlCol="0" anchor="ctr"/>
+          <a:lstStyle/>
+          <a:p>
+            <a:pPr algn="ctr" indent="0" marL="0">
+              <a:buNone/>
+            </a:pPr>
+            <a:r>
+              <a:rPr lang="en-US" sz="900" b="1" dirty="0">
+                <a:solidFill>
+                  <a:srgbClr val="9D174D"/>
+                </a:solidFill>
+                <a:latin typeface="Trebuchet MS" pitchFamily="34" charset="0"/>
+                <a:ea typeface="Trebuchet MS" pitchFamily="34" charset="-122"/>
+                <a:cs typeface="Trebuchet MS" pitchFamily="34" charset="-120"/>
+              </a:rPr>
+              <a:t>n</a:t>
+            </a:r>
+            <a:endParaRPr lang="en-US" sz="900" dirty="0"/>
+          </a:p>
+        </p:txBody>
+      </p:sp>
+      <p:sp>
+        <p:nvSpPr>
+          <p:cNvPr id="50" name="Shape 48"/>
+          <p:cNvSpPr/>
+          <p:nvPr/>
+        </p:nvSpPr>
+        <p:spPr>
+          <a:xfrm>
+            <a:off x="7447135" y="4169664"/>
+            <a:ext cx="685800" cy="384048"/>
+          </a:xfrm>
+          <a:prstGeom prst="rect">
+            <a:avLst>
+              <a:gd name="adj" fmla="val 9524"/>
+            </a:avLst>
+          </a:prstGeom>
+          <a:solidFill>
+            <a:srgbClr val="FFFFFF"/>
+          </a:solidFill>
+          <a:ln w="12700">
+            <a:solidFill>
+              <a:srgbClr val="DB2777"/>
+            </a:solidFill>
+            <a:prstDash val="solid"/>
+          </a:ln>
+        </p:spPr>
+      </p:sp>
+      <p:sp>
+        <p:nvSpPr>
+          <p:cNvPr id="51" name="Text 49"/>
+          <p:cNvSpPr/>
+          <p:nvPr/>
+        </p:nvSpPr>
+        <p:spPr>
+          <a:xfrm>
+            <a:off x="7447135" y="4169664"/>
+            <a:ext cx="685800" cy="384048"/>
+          </a:xfrm>
+          <a:prstGeom prst="rect">
+            <a:avLst/>
+          </a:prstGeom>
+          <a:noFill/>
+          <a:ln/>
+        </p:spPr>
+        <p:txBody>
+          <a:bodyPr wrap="square" lIns="0" tIns="0" rIns="0" bIns="0" rtlCol="0" anchor="ctr"/>
+          <a:lstStyle/>
+          <a:p>
+            <a:pPr algn="ctr" indent="0" marL="0">
+              <a:buNone/>
+            </a:pPr>
+            <a:r>
+              <a:rPr lang="en-US" sz="900" b="1" dirty="0">
+                <a:solidFill>
+                  <a:srgbClr val="9D174D"/>
+                </a:solidFill>
+                <a:latin typeface="Trebuchet MS" pitchFamily="34" charset="0"/>
+                <a:ea typeface="Trebuchet MS" pitchFamily="34" charset="-122"/>
+                <a:cs typeface="Trebuchet MS" pitchFamily="34" charset="-120"/>
+              </a:rPr>
+              <a:t>ce</a:t>
+            </a:r>
+            <a:endParaRPr lang="en-US" sz="900" dirty="0"/>
+          </a:p>
+        </p:txBody>
+      </p:sp>
+      <p:sp>
+        <p:nvSpPr>
+          <p:cNvPr id="52" name="Text 50"/>
+          <p:cNvSpPr/>
+          <p:nvPr/>
+        </p:nvSpPr>
+        <p:spPr>
+          <a:xfrm>
+            <a:off x="7447135" y="4572000"/>
+            <a:ext cx="685800" cy="219456"/>
+          </a:xfrm>
+          <a:prstGeom prst="rect">
+            <a:avLst/>
+          </a:prstGeom>
+          <a:noFill/>
+          <a:ln/>
+        </p:spPr>
+        <p:txBody>
+          <a:bodyPr wrap="square" lIns="0" tIns="0" rIns="0" bIns="0" rtlCol="0" anchor="t"/>
+          <a:lstStyle/>
+          <a:p>
+            <a:pPr algn="ctr" indent="0" marL="0">
+              <a:buNone/>
+            </a:pPr>
+            <a:r>
+              <a:rPr lang="en-US" sz="750" i="1" dirty="0">
+                <a:solidFill>
+                  <a:srgbClr val="94A3B8"/>
+                </a:solidFill>
+                <a:latin typeface="Calibri" pitchFamily="34" charset="0"/>
+                <a:ea typeface="Calibri" pitchFamily="34" charset="-122"/>
+                <a:cs typeface="Calibri" pitchFamily="34" charset="-120"/>
+              </a:rPr>
+              <a:t>/s/</a:t>
             </a:r>
             <a:endParaRPr lang="en-US" sz="750" dirty="0"/>
           </a:p>
@@ -15271,7 +15988,7 @@
                 <a:ea typeface="Calibri" pitchFamily="34" charset="-122"/>
                 <a:cs typeface="Calibri" pitchFamily="34" charset="-120"/>
               </a:rPr>
-              <a:t>Word Labs  •  wordlabs.app  •  Root: 'merge' = to combine, sink into</a:t>
+              <a:t>Word Labs  •  wordlabs.app  •  Root: 'merge' = join, combine, sink into</a:t>
             </a:r>
             <a:endParaRPr lang="en-US" sz="800" dirty="0"/>
           </a:p>
@@ -15911,7 +16628,7 @@
                 <a:ea typeface="Calibri" pitchFamily="34" charset="-122"/>
                 <a:cs typeface="Calibri" pitchFamily="34" charset="-120"/>
               </a:rPr>
-              <a:t>Word Labs  •  wordlabs.app  •  Root: 'merge' = to combine, sink into</a:t>
+              <a:t>Word Labs  •  wordlabs.app  •  Root: 'merge' = join, combine, sink into</a:t>
             </a:r>
             <a:endParaRPr lang="en-US" sz="800" dirty="0"/>
           </a:p>
@@ -16023,7 +16740,7 @@
                 <a:ea typeface="Calibri" pitchFamily="34" charset="-122"/>
                 <a:cs typeface="Calibri" pitchFamily="34" charset="-120"/>
               </a:rPr>
-              <a:t>As the rivers </a:t>
+              <a:t>The submarine had to </a:t>
             </a:r>
             <a:pPr algn="l" indent="0" marL="0">
               <a:buNone/>
@@ -16040,7 +16757,7 @@
                 <a:ea typeface="Calibri" pitchFamily="34" charset="-122"/>
                 <a:cs typeface="Calibri" pitchFamily="34" charset="-120"/>
               </a:rPr>
-              <a:t>merge</a:t>
+              <a:t>submerge</a:t>
             </a:r>
             <a:pPr algn="l" indent="0" marL="0">
               <a:buNone/>
@@ -16054,7 +16771,7 @@
                 <a:ea typeface="Calibri" pitchFamily="34" charset="-122"/>
                 <a:cs typeface="Calibri" pitchFamily="34" charset="-120"/>
               </a:rPr>
-              <a:t> near the town, fish </a:t>
+              <a:t> quickly, but the </a:t>
             </a:r>
             <a:pPr algn="l" indent="0" marL="0">
               <a:buNone/>
@@ -16071,7 +16788,7 @@
                 <a:ea typeface="Calibri" pitchFamily="34" charset="-122"/>
                 <a:cs typeface="Calibri" pitchFamily="34" charset="-120"/>
               </a:rPr>
-              <a:t>emerge</a:t>
+              <a:t>emerging</a:t>
             </a:r>
             <a:pPr algn="l" indent="0" marL="0">
               <a:buNone/>
@@ -16085,7 +16802,7 @@
                 <a:ea typeface="Calibri" pitchFamily="34" charset="-122"/>
                 <a:cs typeface="Calibri" pitchFamily="34" charset="-120"/>
               </a:rPr>
-              <a:t> from the reeds, and we watched one </a:t>
+              <a:t> danger meant the crew had to stay </a:t>
             </a:r>
             <a:pPr algn="l" indent="0" marL="0">
               <a:buNone/>
@@ -16102,7 +16819,7 @@
                 <a:ea typeface="Calibri" pitchFamily="34" charset="-122"/>
                 <a:cs typeface="Calibri" pitchFamily="34" charset="-120"/>
               </a:rPr>
-              <a:t>submerge</a:t>
+              <a:t>submerged</a:t>
             </a:r>
             <a:pPr algn="l" indent="0" marL="0">
               <a:buNone/>
@@ -16116,7 +16833,7 @@
                 <a:ea typeface="Calibri" pitchFamily="34" charset="-122"/>
                 <a:cs typeface="Calibri" pitchFamily="34" charset="-120"/>
               </a:rPr>
-              <a:t> again beneath the surface.</a:t>
+              <a:t> for hours.</a:t>
             </a:r>
             <a:endParaRPr lang="en-US" sz="1800" dirty="0"/>
           </a:p>
@@ -16271,7 +16988,7 @@
                 <a:ea typeface="Trebuchet MS" pitchFamily="34" charset="-122"/>
                 <a:cs typeface="Trebuchet MS" pitchFamily="34" charset="-120"/>
               </a:rPr>
-              <a:t>merge</a:t>
+              <a:t>submerge</a:t>
             </a:r>
             <a:endParaRPr lang="en-US" sz="1400" dirty="0"/>
           </a:p>
@@ -16399,7 +17116,7 @@
                 <a:ea typeface="Trebuchet MS" pitchFamily="34" charset="-122"/>
                 <a:cs typeface="Trebuchet MS" pitchFamily="34" charset="-120"/>
               </a:rPr>
-              <a:t>emerge</a:t>
+              <a:t>emerging</a:t>
             </a:r>
             <a:endParaRPr lang="en-US" sz="1400" dirty="0"/>
           </a:p>
@@ -16527,7 +17244,7 @@
                 <a:ea typeface="Trebuchet MS" pitchFamily="34" charset="-122"/>
                 <a:cs typeface="Trebuchet MS" pitchFamily="34" charset="-120"/>
               </a:rPr>
-              <a:t>submerge</a:t>
+              <a:t>submerged</a:t>
             </a:r>
             <a:endParaRPr lang="en-US" sz="1400" dirty="0"/>
           </a:p>
@@ -16858,7 +17575,7 @@
                 <a:ea typeface="Calibri" pitchFamily="34" charset="-122"/>
                 <a:cs typeface="Calibri" pitchFamily="34" charset="-120"/>
               </a:rPr>
-              <a:t>Word Labs  •  wordlabs.app  •  Root: 'merge' = to combine, sink into</a:t>
+              <a:t>Word Labs  •  wordlabs.app  •  Root: 'merge' = join, combine, sink into</a:t>
             </a:r>
             <a:endParaRPr lang="en-US" sz="800" dirty="0"/>
           </a:p>
@@ -16997,7 +17714,7 @@
                 <a:ea typeface="Trebuchet MS" pitchFamily="34" charset="-122"/>
                 <a:cs typeface="Trebuchet MS" pitchFamily="34" charset="-120"/>
               </a:rPr>
-              <a:t>merge</a:t>
+              <a:t>submerge</a:t>
             </a:r>
             <a:endParaRPr lang="en-US" sz="2800" dirty="0"/>
           </a:p>
@@ -17685,7 +18402,7 @@
                 <a:ea typeface="Calibri" pitchFamily="34" charset="-122"/>
                 <a:cs typeface="Calibri" pitchFamily="34" charset="-120"/>
               </a:rPr>
-              <a:t>Word Labs  •  wordlabs.app  •  Root: 'merge' = to combine, sink into</a:t>
+              <a:t>Word Labs  •  wordlabs.app  •  Root: 'merge' = join, combine, sink into</a:t>
             </a:r>
             <a:endParaRPr lang="en-US" sz="800" dirty="0"/>
           </a:p>
@@ -17824,7 +18541,7 @@
                 <a:ea typeface="Trebuchet MS" pitchFamily="34" charset="-122"/>
                 <a:cs typeface="Trebuchet MS" pitchFamily="34" charset="-120"/>
               </a:rPr>
-              <a:t>merge</a:t>
+              <a:t>submerge</a:t>
             </a:r>
             <a:endParaRPr lang="en-US" sz="2800" dirty="0"/>
           </a:p>
@@ -17904,7 +18621,7 @@
         </p:nvSpPr>
         <p:spPr>
           <a:xfrm>
-            <a:off x="4370832" y="2258568"/>
+            <a:off x="2938272" y="2258568"/>
             <a:ext cx="1828800" cy="292608"/>
           </a:xfrm>
           <a:prstGeom prst="rect">
@@ -17913,11 +18630,11 @@
             </a:avLst>
           </a:prstGeom>
           <a:solidFill>
-            <a:srgbClr val="CCFBF1"/>
+            <a:srgbClr val="DDD6FE"/>
           </a:solidFill>
           <a:ln w="19050">
             <a:solidFill>
-              <a:srgbClr val="0D9488"/>
+              <a:srgbClr val="7C3AED"/>
             </a:solidFill>
             <a:prstDash val="solid"/>
           </a:ln>
@@ -17938,7 +18655,7 @@
         </p:nvSpPr>
         <p:spPr>
           <a:xfrm>
-            <a:off x="4370832" y="2258568"/>
+            <a:off x="2938272" y="2258568"/>
             <a:ext cx="1828800" cy="292608"/>
           </a:xfrm>
           <a:prstGeom prst="rect">
@@ -17957,13 +18674,13 @@
             <a:r>
               <a:rPr lang="en-US" sz="1300" b="1" dirty="0">
                 <a:solidFill>
-                  <a:srgbClr val="0F766E"/>
+                  <a:srgbClr val="4C1D95"/>
                 </a:solidFill>
                 <a:latin typeface="Trebuchet MS" pitchFamily="34" charset="0"/>
                 <a:ea typeface="Trebuchet MS" pitchFamily="34" charset="-122"/>
                 <a:cs typeface="Trebuchet MS" pitchFamily="34" charset="-120"/>
               </a:rPr>
-              <a:t>merge</a:t>
+              <a:t>sub</a:t>
             </a:r>
             <a:endParaRPr lang="en-US" sz="1300" dirty="0"/>
           </a:p>
@@ -17977,7 +18694,7 @@
         </p:nvSpPr>
         <p:spPr>
           <a:xfrm>
-            <a:off x="4370832" y="2569464"/>
+            <a:off x="2938272" y="2569464"/>
             <a:ext cx="1828800" cy="201168"/>
           </a:xfrm>
           <a:prstGeom prst="rect">
@@ -18002,7 +18719,7 @@
                 <a:ea typeface="Calibri" pitchFamily="34" charset="-122"/>
                 <a:cs typeface="Calibri" pitchFamily="34" charset="-120"/>
               </a:rPr>
-              <a:t>to combine, sink into</a:t>
+              <a:t>under, below</a:t>
             </a:r>
             <a:endParaRPr lang="en-US" sz="850" dirty="0"/>
           </a:p>
@@ -18011,6 +18728,118 @@
       <p:sp>
         <p:nvSpPr>
           <p:cNvPr id="19" name="Shape 17"/>
+          <p:cNvSpPr/>
+          <p:nvPr/>
+        </p:nvSpPr>
+        <p:spPr>
+          <a:xfrm>
+            <a:off x="5803392" y="2258568"/>
+            <a:ext cx="1828800" cy="292608"/>
+          </a:xfrm>
+          <a:prstGeom prst="rect">
+            <a:avLst>
+              <a:gd name="adj" fmla="val 25000"/>
+            </a:avLst>
+          </a:prstGeom>
+          <a:solidFill>
+            <a:srgbClr val="CCFBF1"/>
+          </a:solidFill>
+          <a:ln w="19050">
+            <a:solidFill>
+              <a:srgbClr val="0D9488"/>
+            </a:solidFill>
+            <a:prstDash val="solid"/>
+          </a:ln>
+          <a:effectLst>
+            <a:outerShdw sx="100000" sy="100000" kx="0" ky="0" algn="bl" rotWithShape="0" blurRad="101600" dist="38100" dir="8100000">
+              <a:srgbClr val="000000">
+                <a:alpha val="12000"/>
+              </a:srgbClr>
+            </a:outerShdw>
+          </a:effectLst>
+        </p:spPr>
+      </p:sp>
+      <p:sp>
+        <p:nvSpPr>
+          <p:cNvPr id="20" name="Text 18"/>
+          <p:cNvSpPr/>
+          <p:nvPr/>
+        </p:nvSpPr>
+        <p:spPr>
+          <a:xfrm>
+            <a:off x="5803392" y="2258568"/>
+            <a:ext cx="1828800" cy="292608"/>
+          </a:xfrm>
+          <a:prstGeom prst="rect">
+            <a:avLst/>
+          </a:prstGeom>
+          <a:noFill/>
+          <a:ln/>
+        </p:spPr>
+        <p:txBody>
+          <a:bodyPr wrap="square" lIns="0" tIns="0" rIns="0" bIns="0" rtlCol="0" anchor="ctr"/>
+          <a:lstStyle/>
+          <a:p>
+            <a:pPr algn="ctr" indent="0" marL="0">
+              <a:buNone/>
+            </a:pPr>
+            <a:r>
+              <a:rPr lang="en-US" sz="1300" b="1" dirty="0">
+                <a:solidFill>
+                  <a:srgbClr val="0F766E"/>
+                </a:solidFill>
+                <a:latin typeface="Trebuchet MS" pitchFamily="34" charset="0"/>
+                <a:ea typeface="Trebuchet MS" pitchFamily="34" charset="-122"/>
+                <a:cs typeface="Trebuchet MS" pitchFamily="34" charset="-120"/>
+              </a:rPr>
+              <a:t>merge</a:t>
+            </a:r>
+            <a:endParaRPr lang="en-US" sz="1300" dirty="0"/>
+          </a:p>
+        </p:txBody>
+      </p:sp>
+      <p:sp>
+        <p:nvSpPr>
+          <p:cNvPr id="21" name="Text 19"/>
+          <p:cNvSpPr/>
+          <p:nvPr/>
+        </p:nvSpPr>
+        <p:spPr>
+          <a:xfrm>
+            <a:off x="5803392" y="2569464"/>
+            <a:ext cx="1828800" cy="201168"/>
+          </a:xfrm>
+          <a:prstGeom prst="rect">
+            <a:avLst/>
+          </a:prstGeom>
+          <a:noFill/>
+          <a:ln/>
+        </p:spPr>
+        <p:txBody>
+          <a:bodyPr wrap="square" lIns="0" tIns="0" rIns="0" bIns="0" rtlCol="0" anchor="t"/>
+          <a:lstStyle/>
+          <a:p>
+            <a:pPr algn="ctr" indent="0" marL="0">
+              <a:buNone/>
+            </a:pPr>
+            <a:r>
+              <a:rPr lang="en-US" sz="850" dirty="0">
+                <a:solidFill>
+                  <a:srgbClr val="475569"/>
+                </a:solidFill>
+                <a:latin typeface="Calibri" pitchFamily="34" charset="0"/>
+                <a:ea typeface="Calibri" pitchFamily="34" charset="-122"/>
+                <a:cs typeface="Calibri" pitchFamily="34" charset="-120"/>
+              </a:rPr>
+              <a:t>join, combine, sink into</a:t>
+            </a:r>
+            <a:endParaRPr lang="en-US" sz="850" dirty="0"/>
+          </a:p>
+        </p:txBody>
+      </p:sp>
+      <p:sp>
+        <p:nvSpPr>
+          <p:cNvPr id="22" name="Shape 20"/>
           <p:cNvSpPr/>
           <p:nvPr/>
         </p:nvSpPr>
@@ -18037,7 +18866,7 @@
       </p:sp>
       <p:sp>
         <p:nvSpPr>
-          <p:cNvPr id="20" name="Text 18"/>
+          <p:cNvPr id="23" name="Text 21"/>
           <p:cNvSpPr/>
           <p:nvPr/>
         </p:nvSpPr>
@@ -18076,7 +18905,7 @@
       </p:sp>
       <p:sp>
         <p:nvSpPr>
-          <p:cNvPr id="21" name="Shape 19"/>
+          <p:cNvPr id="24" name="Shape 22"/>
           <p:cNvSpPr/>
           <p:nvPr/>
         </p:nvSpPr>
@@ -18103,7 +18932,7 @@
       </p:sp>
       <p:sp>
         <p:nvSpPr>
-          <p:cNvPr id="22" name="Text 20"/>
+          <p:cNvPr id="25" name="Text 23"/>
           <p:cNvSpPr/>
           <p:nvPr/>
         </p:nvSpPr>
@@ -18142,7 +18971,7 @@
       </p:sp>
       <p:sp>
         <p:nvSpPr>
-          <p:cNvPr id="23" name="Shape 21"/>
+          <p:cNvPr id="26" name="Shape 24"/>
           <p:cNvSpPr/>
           <p:nvPr/>
         </p:nvSpPr>
@@ -18169,7 +18998,7 @@
       </p:sp>
       <p:sp>
         <p:nvSpPr>
-          <p:cNvPr id="24" name="Text 22"/>
+          <p:cNvPr id="27" name="Text 25"/>
           <p:cNvSpPr/>
           <p:nvPr/>
         </p:nvSpPr>
@@ -18208,7 +19037,7 @@
       </p:sp>
       <p:sp>
         <p:nvSpPr>
-          <p:cNvPr id="25" name="Shape 23"/>
+          <p:cNvPr id="28" name="Shape 26"/>
           <p:cNvSpPr/>
           <p:nvPr/>
         </p:nvSpPr>
@@ -18235,7 +19064,7 @@
       </p:sp>
       <p:sp>
         <p:nvSpPr>
-          <p:cNvPr id="26" name="Text 24"/>
+          <p:cNvPr id="29" name="Text 27"/>
           <p:cNvSpPr/>
           <p:nvPr/>
         </p:nvSpPr>
@@ -18558,7 +19387,7 @@
                 <a:ea typeface="Calibri" pitchFamily="34" charset="-122"/>
                 <a:cs typeface="Calibri" pitchFamily="34" charset="-120"/>
               </a:rPr>
-              <a:t>Word Labs  •  wordlabs.app  •  Root: 'merge' = to combine, sink into</a:t>
+              <a:t>Word Labs  •  wordlabs.app  •  Root: 'merge' = join, combine, sink into</a:t>
             </a:r>
             <a:endParaRPr lang="en-US" sz="800" dirty="0"/>
           </a:p>
@@ -18697,7 +19526,7 @@
                 <a:ea typeface="Trebuchet MS" pitchFamily="34" charset="-122"/>
                 <a:cs typeface="Trebuchet MS" pitchFamily="34" charset="-120"/>
               </a:rPr>
-              <a:t>merge</a:t>
+              <a:t>submerge</a:t>
             </a:r>
             <a:endParaRPr lang="en-US" sz="2800" dirty="0"/>
           </a:p>
@@ -18777,7 +19606,7 @@
         </p:nvSpPr>
         <p:spPr>
           <a:xfrm>
-            <a:off x="4370832" y="2258568"/>
+            <a:off x="2938272" y="2258568"/>
             <a:ext cx="1828800" cy="292608"/>
           </a:xfrm>
           <a:prstGeom prst="rect">
@@ -18786,11 +19615,11 @@
             </a:avLst>
           </a:prstGeom>
           <a:solidFill>
-            <a:srgbClr val="CCFBF1"/>
+            <a:srgbClr val="DDD6FE"/>
           </a:solidFill>
           <a:ln w="19050">
             <a:solidFill>
-              <a:srgbClr val="0D9488"/>
+              <a:srgbClr val="7C3AED"/>
             </a:solidFill>
             <a:prstDash val="solid"/>
           </a:ln>
@@ -18811,7 +19640,7 @@
         </p:nvSpPr>
         <p:spPr>
           <a:xfrm>
-            <a:off x="4370832" y="2258568"/>
+            <a:off x="2938272" y="2258568"/>
             <a:ext cx="1828800" cy="292608"/>
           </a:xfrm>
           <a:prstGeom prst="rect">
@@ -18830,13 +19659,13 @@
             <a:r>
               <a:rPr lang="en-US" sz="1300" b="1" dirty="0">
                 <a:solidFill>
-                  <a:srgbClr val="0F766E"/>
+                  <a:srgbClr val="4C1D95"/>
                 </a:solidFill>
                 <a:latin typeface="Trebuchet MS" pitchFamily="34" charset="0"/>
                 <a:ea typeface="Trebuchet MS" pitchFamily="34" charset="-122"/>
                 <a:cs typeface="Trebuchet MS" pitchFamily="34" charset="-120"/>
               </a:rPr>
-              <a:t>merge</a:t>
+              <a:t>sub</a:t>
             </a:r>
             <a:endParaRPr lang="en-US" sz="1300" dirty="0"/>
           </a:p>
@@ -18850,7 +19679,7 @@
         </p:nvSpPr>
         <p:spPr>
           <a:xfrm>
-            <a:off x="4370832" y="2569464"/>
+            <a:off x="2938272" y="2569464"/>
             <a:ext cx="1828800" cy="201168"/>
           </a:xfrm>
           <a:prstGeom prst="rect">
@@ -18875,7 +19704,7 @@
                 <a:ea typeface="Calibri" pitchFamily="34" charset="-122"/>
                 <a:cs typeface="Calibri" pitchFamily="34" charset="-120"/>
               </a:rPr>
-              <a:t>to combine, sink into</a:t>
+              <a:t>under, below</a:t>
             </a:r>
             <a:endParaRPr lang="en-US" sz="850" dirty="0"/>
           </a:p>
@@ -18884,6 +19713,118 @@
       <p:sp>
         <p:nvSpPr>
           <p:cNvPr id="19" name="Shape 17"/>
+          <p:cNvSpPr/>
+          <p:nvPr/>
+        </p:nvSpPr>
+        <p:spPr>
+          <a:xfrm>
+            <a:off x="5803392" y="2258568"/>
+            <a:ext cx="1828800" cy="292608"/>
+          </a:xfrm>
+          <a:prstGeom prst="rect">
+            <a:avLst>
+              <a:gd name="adj" fmla="val 25000"/>
+            </a:avLst>
+          </a:prstGeom>
+          <a:solidFill>
+            <a:srgbClr val="CCFBF1"/>
+          </a:solidFill>
+          <a:ln w="19050">
+            <a:solidFill>
+              <a:srgbClr val="0D9488"/>
+            </a:solidFill>
+            <a:prstDash val="solid"/>
+          </a:ln>
+          <a:effectLst>
+            <a:outerShdw sx="100000" sy="100000" kx="0" ky="0" algn="bl" rotWithShape="0" blurRad="101600" dist="38100" dir="8100000">
+              <a:srgbClr val="000000">
+                <a:alpha val="12000"/>
+              </a:srgbClr>
+            </a:outerShdw>
+          </a:effectLst>
+        </p:spPr>
+      </p:sp>
+      <p:sp>
+        <p:nvSpPr>
+          <p:cNvPr id="20" name="Text 18"/>
+          <p:cNvSpPr/>
+          <p:nvPr/>
+        </p:nvSpPr>
+        <p:spPr>
+          <a:xfrm>
+            <a:off x="5803392" y="2258568"/>
+            <a:ext cx="1828800" cy="292608"/>
+          </a:xfrm>
+          <a:prstGeom prst="rect">
+            <a:avLst/>
+          </a:prstGeom>
+          <a:noFill/>
+          <a:ln/>
+        </p:spPr>
+        <p:txBody>
+          <a:bodyPr wrap="square" lIns="0" tIns="0" rIns="0" bIns="0" rtlCol="0" anchor="ctr"/>
+          <a:lstStyle/>
+          <a:p>
+            <a:pPr algn="ctr" indent="0" marL="0">
+              <a:buNone/>
+            </a:pPr>
+            <a:r>
+              <a:rPr lang="en-US" sz="1300" b="1" dirty="0">
+                <a:solidFill>
+                  <a:srgbClr val="0F766E"/>
+                </a:solidFill>
+                <a:latin typeface="Trebuchet MS" pitchFamily="34" charset="0"/>
+                <a:ea typeface="Trebuchet MS" pitchFamily="34" charset="-122"/>
+                <a:cs typeface="Trebuchet MS" pitchFamily="34" charset="-120"/>
+              </a:rPr>
+              <a:t>merge</a:t>
+            </a:r>
+            <a:endParaRPr lang="en-US" sz="1300" dirty="0"/>
+          </a:p>
+        </p:txBody>
+      </p:sp>
+      <p:sp>
+        <p:nvSpPr>
+          <p:cNvPr id="21" name="Text 19"/>
+          <p:cNvSpPr/>
+          <p:nvPr/>
+        </p:nvSpPr>
+        <p:spPr>
+          <a:xfrm>
+            <a:off x="5803392" y="2569464"/>
+            <a:ext cx="1828800" cy="201168"/>
+          </a:xfrm>
+          <a:prstGeom prst="rect">
+            <a:avLst/>
+          </a:prstGeom>
+          <a:noFill/>
+          <a:ln/>
+        </p:spPr>
+        <p:txBody>
+          <a:bodyPr wrap="square" lIns="0" tIns="0" rIns="0" bIns="0" rtlCol="0" anchor="t"/>
+          <a:lstStyle/>
+          <a:p>
+            <a:pPr algn="ctr" indent="0" marL="0">
+              <a:buNone/>
+            </a:pPr>
+            <a:r>
+              <a:rPr lang="en-US" sz="850" dirty="0">
+                <a:solidFill>
+                  <a:srgbClr val="475569"/>
+                </a:solidFill>
+                <a:latin typeface="Calibri" pitchFamily="34" charset="0"/>
+                <a:ea typeface="Calibri" pitchFamily="34" charset="-122"/>
+                <a:cs typeface="Calibri" pitchFamily="34" charset="-120"/>
+              </a:rPr>
+              <a:t>join, combine, sink into</a:t>
+            </a:r>
+            <a:endParaRPr lang="en-US" sz="850" dirty="0"/>
+          </a:p>
+        </p:txBody>
+      </p:sp>
+      <p:sp>
+        <p:nvSpPr>
+          <p:cNvPr id="22" name="Shape 20"/>
           <p:cNvSpPr/>
           <p:nvPr/>
         </p:nvSpPr>
@@ -18910,7 +19851,7 @@
       </p:sp>
       <p:sp>
         <p:nvSpPr>
-          <p:cNvPr id="20" name="Text 18"/>
+          <p:cNvPr id="23" name="Text 21"/>
           <p:cNvSpPr/>
           <p:nvPr/>
         </p:nvSpPr>
@@ -18949,7 +19890,7 @@
       </p:sp>
       <p:sp>
         <p:nvSpPr>
-          <p:cNvPr id="21" name="Shape 19"/>
+          <p:cNvPr id="24" name="Shape 22"/>
           <p:cNvSpPr/>
           <p:nvPr/>
         </p:nvSpPr>
@@ -18976,13 +19917,13 @@
       </p:sp>
       <p:sp>
         <p:nvSpPr>
-          <p:cNvPr id="22" name="Shape 20"/>
-          <p:cNvSpPr/>
-          <p:nvPr/>
-        </p:nvSpPr>
-        <p:spPr>
-          <a:xfrm>
-            <a:off x="4370832" y="3364992"/>
+          <p:cNvPr id="25" name="Shape 23"/>
+          <p:cNvSpPr/>
+          <p:nvPr/>
+        </p:nvSpPr>
+        <p:spPr>
+          <a:xfrm>
+            <a:off x="2999232" y="3364992"/>
             <a:ext cx="1645920" cy="475488"/>
           </a:xfrm>
           <a:prstGeom prst="rect">
@@ -19003,13 +19944,13 @@
       </p:sp>
       <p:sp>
         <p:nvSpPr>
-          <p:cNvPr id="23" name="Text 21"/>
-          <p:cNvSpPr/>
-          <p:nvPr/>
-        </p:nvSpPr>
-        <p:spPr>
-          <a:xfrm>
-            <a:off x="4370832" y="3364992"/>
+          <p:cNvPr id="26" name="Text 24"/>
+          <p:cNvSpPr/>
+          <p:nvPr/>
+        </p:nvSpPr>
+        <p:spPr>
+          <a:xfrm>
+            <a:off x="2999232" y="3364992"/>
             <a:ext cx="1645920" cy="475488"/>
           </a:xfrm>
           <a:prstGeom prst="rect">
@@ -19034,6 +19975,111 @@
                 <a:ea typeface="Trebuchet MS" pitchFamily="34" charset="-122"/>
                 <a:cs typeface="Trebuchet MS" pitchFamily="34" charset="-120"/>
               </a:rPr>
+              <a:t>sub</a:t>
+            </a:r>
+            <a:endParaRPr lang="en-US" sz="1400" dirty="0"/>
+          </a:p>
+        </p:txBody>
+      </p:sp>
+      <p:sp>
+        <p:nvSpPr>
+          <p:cNvPr id="27" name="Text 25"/>
+          <p:cNvSpPr/>
+          <p:nvPr/>
+        </p:nvSpPr>
+        <p:spPr>
+          <a:xfrm>
+            <a:off x="4645152" y="3364992"/>
+            <a:ext cx="1097280" cy="475488"/>
+          </a:xfrm>
+          <a:prstGeom prst="rect">
+            <a:avLst/>
+          </a:prstGeom>
+          <a:noFill/>
+          <a:ln/>
+        </p:spPr>
+        <p:txBody>
+          <a:bodyPr wrap="square" lIns="0" tIns="0" rIns="0" bIns="0" rtlCol="0" anchor="ctr"/>
+          <a:lstStyle/>
+          <a:p>
+            <a:pPr algn="ctr" indent="0" marL="0">
+              <a:buNone/>
+            </a:pPr>
+            <a:r>
+              <a:rPr lang="en-US" sz="1600" b="1" dirty="0">
+                <a:solidFill>
+                  <a:srgbClr val="0D9488"/>
+                </a:solidFill>
+                <a:latin typeface="Trebuchet MS" pitchFamily="34" charset="0"/>
+                <a:ea typeface="Trebuchet MS" pitchFamily="34" charset="-122"/>
+                <a:cs typeface="Trebuchet MS" pitchFamily="34" charset="-120"/>
+              </a:rPr>
+              <a:t>·</a:t>
+            </a:r>
+            <a:endParaRPr lang="en-US" sz="1600" dirty="0"/>
+          </a:p>
+        </p:txBody>
+      </p:sp>
+      <p:sp>
+        <p:nvSpPr>
+          <p:cNvPr id="28" name="Shape 26"/>
+          <p:cNvSpPr/>
+          <p:nvPr/>
+        </p:nvSpPr>
+        <p:spPr>
+          <a:xfrm>
+            <a:off x="5742432" y="3364992"/>
+            <a:ext cx="1645920" cy="475488"/>
+          </a:xfrm>
+          <a:prstGeom prst="rect">
+            <a:avLst>
+              <a:gd name="adj" fmla="val 9615"/>
+            </a:avLst>
+          </a:prstGeom>
+          <a:solidFill>
+            <a:srgbClr val="FFFFFF"/>
+          </a:solidFill>
+          <a:ln w="12700">
+            <a:solidFill>
+              <a:srgbClr val="0D9488"/>
+            </a:solidFill>
+            <a:prstDash val="solid"/>
+          </a:ln>
+        </p:spPr>
+      </p:sp>
+      <p:sp>
+        <p:nvSpPr>
+          <p:cNvPr id="29" name="Text 27"/>
+          <p:cNvSpPr/>
+          <p:nvPr/>
+        </p:nvSpPr>
+        <p:spPr>
+          <a:xfrm>
+            <a:off x="5742432" y="3364992"/>
+            <a:ext cx="1645920" cy="475488"/>
+          </a:xfrm>
+          <a:prstGeom prst="rect">
+            <a:avLst/>
+          </a:prstGeom>
+          <a:noFill/>
+          <a:ln/>
+        </p:spPr>
+        <p:txBody>
+          <a:bodyPr wrap="square" lIns="0" tIns="0" rIns="0" bIns="0" rtlCol="0" anchor="ctr"/>
+          <a:lstStyle/>
+          <a:p>
+            <a:pPr algn="ctr" indent="0" marL="0">
+              <a:buNone/>
+            </a:pPr>
+            <a:r>
+              <a:rPr lang="en-US" sz="1400" b="1" dirty="0">
+                <a:solidFill>
+                  <a:srgbClr val="0D9488"/>
+                </a:solidFill>
+                <a:latin typeface="Trebuchet MS" pitchFamily="34" charset="0"/>
+                <a:ea typeface="Trebuchet MS" pitchFamily="34" charset="-122"/>
+                <a:cs typeface="Trebuchet MS" pitchFamily="34" charset="-120"/>
+              </a:rPr>
               <a:t>merge</a:t>
             </a:r>
             <a:endParaRPr lang="en-US" sz="1400" dirty="0"/>
@@ -19042,7 +20088,7 @@
       </p:sp>
       <p:sp>
         <p:nvSpPr>
-          <p:cNvPr id="24" name="Shape 22"/>
+          <p:cNvPr id="30" name="Shape 28"/>
           <p:cNvSpPr/>
           <p:nvPr/>
         </p:nvSpPr>
@@ -19069,7 +20115,7 @@
       </p:sp>
       <p:sp>
         <p:nvSpPr>
-          <p:cNvPr id="25" name="Text 23"/>
+          <p:cNvPr id="31" name="Text 29"/>
           <p:cNvSpPr/>
           <p:nvPr/>
         </p:nvSpPr>
@@ -19108,7 +20154,7 @@
       </p:sp>
       <p:sp>
         <p:nvSpPr>
-          <p:cNvPr id="26" name="Shape 24"/>
+          <p:cNvPr id="32" name="Shape 30"/>
           <p:cNvSpPr/>
           <p:nvPr/>
         </p:nvSpPr>
@@ -19135,7 +20181,7 @@
       </p:sp>
       <p:sp>
         <p:nvSpPr>
-          <p:cNvPr id="27" name="Text 25"/>
+          <p:cNvPr id="33" name="Text 31"/>
           <p:cNvSpPr/>
           <p:nvPr/>
         </p:nvSpPr>
@@ -19458,7 +20504,7 @@
                 <a:ea typeface="Calibri" pitchFamily="34" charset="-122"/>
                 <a:cs typeface="Calibri" pitchFamily="34" charset="-120"/>
               </a:rPr>
-              <a:t>Word Labs  •  wordlabs.app  •  Root: 'merge' = to combine, sink into</a:t>
+              <a:t>Word Labs  •  wordlabs.app  •  Root: 'merge' = join, combine, sink into</a:t>
             </a:r>
             <a:endParaRPr lang="en-US" sz="800" dirty="0"/>
           </a:p>
@@ -19597,7 +20643,7 @@
                 <a:ea typeface="Trebuchet MS" pitchFamily="34" charset="-122"/>
                 <a:cs typeface="Trebuchet MS" pitchFamily="34" charset="-120"/>
               </a:rPr>
-              <a:t>merge</a:t>
+              <a:t>submerge</a:t>
             </a:r>
             <a:endParaRPr lang="en-US" sz="2800" dirty="0"/>
           </a:p>
@@ -19677,7 +20723,7 @@
         </p:nvSpPr>
         <p:spPr>
           <a:xfrm>
-            <a:off x="4370832" y="2258568"/>
+            <a:off x="2938272" y="2258568"/>
             <a:ext cx="1828800" cy="292608"/>
           </a:xfrm>
           <a:prstGeom prst="rect">
@@ -19686,11 +20732,11 @@
             </a:avLst>
           </a:prstGeom>
           <a:solidFill>
-            <a:srgbClr val="CCFBF1"/>
+            <a:srgbClr val="DDD6FE"/>
           </a:solidFill>
           <a:ln w="19050">
             <a:solidFill>
-              <a:srgbClr val="0D9488"/>
+              <a:srgbClr val="7C3AED"/>
             </a:solidFill>
             <a:prstDash val="solid"/>
           </a:ln>
@@ -19711,7 +20757,7 @@
         </p:nvSpPr>
         <p:spPr>
           <a:xfrm>
-            <a:off x="4370832" y="2258568"/>
+            <a:off x="2938272" y="2258568"/>
             <a:ext cx="1828800" cy="292608"/>
           </a:xfrm>
           <a:prstGeom prst="rect">
@@ -19730,13 +20776,13 @@
             <a:r>
               <a:rPr lang="en-US" sz="1300" b="1" dirty="0">
                 <a:solidFill>
-                  <a:srgbClr val="0F766E"/>
+                  <a:srgbClr val="4C1D95"/>
                 </a:solidFill>
                 <a:latin typeface="Trebuchet MS" pitchFamily="34" charset="0"/>
                 <a:ea typeface="Trebuchet MS" pitchFamily="34" charset="-122"/>
                 <a:cs typeface="Trebuchet MS" pitchFamily="34" charset="-120"/>
               </a:rPr>
-              <a:t>merge</a:t>
+              <a:t>sub</a:t>
             </a:r>
             <a:endParaRPr lang="en-US" sz="1300" dirty="0"/>
           </a:p>
@@ -19750,7 +20796,7 @@
         </p:nvSpPr>
         <p:spPr>
           <a:xfrm>
-            <a:off x="4370832" y="2569464"/>
+            <a:off x="2938272" y="2569464"/>
             <a:ext cx="1828800" cy="201168"/>
           </a:xfrm>
           <a:prstGeom prst="rect">
@@ -19775,7 +20821,7 @@
                 <a:ea typeface="Calibri" pitchFamily="34" charset="-122"/>
                 <a:cs typeface="Calibri" pitchFamily="34" charset="-120"/>
               </a:rPr>
-              <a:t>to combine, sink into</a:t>
+              <a:t>under, below</a:t>
             </a:r>
             <a:endParaRPr lang="en-US" sz="850" dirty="0"/>
           </a:p>
@@ -19784,6 +20830,118 @@
       <p:sp>
         <p:nvSpPr>
           <p:cNvPr id="19" name="Shape 17"/>
+          <p:cNvSpPr/>
+          <p:nvPr/>
+        </p:nvSpPr>
+        <p:spPr>
+          <a:xfrm>
+            <a:off x="5803392" y="2258568"/>
+            <a:ext cx="1828800" cy="292608"/>
+          </a:xfrm>
+          <a:prstGeom prst="rect">
+            <a:avLst>
+              <a:gd name="adj" fmla="val 25000"/>
+            </a:avLst>
+          </a:prstGeom>
+          <a:solidFill>
+            <a:srgbClr val="CCFBF1"/>
+          </a:solidFill>
+          <a:ln w="19050">
+            <a:solidFill>
+              <a:srgbClr val="0D9488"/>
+            </a:solidFill>
+            <a:prstDash val="solid"/>
+          </a:ln>
+          <a:effectLst>
+            <a:outerShdw sx="100000" sy="100000" kx="0" ky="0" algn="bl" rotWithShape="0" blurRad="101600" dist="38100" dir="8100000">
+              <a:srgbClr val="000000">
+                <a:alpha val="12000"/>
+              </a:srgbClr>
+            </a:outerShdw>
+          </a:effectLst>
+        </p:spPr>
+      </p:sp>
+      <p:sp>
+        <p:nvSpPr>
+          <p:cNvPr id="20" name="Text 18"/>
+          <p:cNvSpPr/>
+          <p:nvPr/>
+        </p:nvSpPr>
+        <p:spPr>
+          <a:xfrm>
+            <a:off x="5803392" y="2258568"/>
+            <a:ext cx="1828800" cy="292608"/>
+          </a:xfrm>
+          <a:prstGeom prst="rect">
+            <a:avLst/>
+          </a:prstGeom>
+          <a:noFill/>
+          <a:ln/>
+        </p:spPr>
+        <p:txBody>
+          <a:bodyPr wrap="square" lIns="0" tIns="0" rIns="0" bIns="0" rtlCol="0" anchor="ctr"/>
+          <a:lstStyle/>
+          <a:p>
+            <a:pPr algn="ctr" indent="0" marL="0">
+              <a:buNone/>
+            </a:pPr>
+            <a:r>
+              <a:rPr lang="en-US" sz="1300" b="1" dirty="0">
+                <a:solidFill>
+                  <a:srgbClr val="0F766E"/>
+                </a:solidFill>
+                <a:latin typeface="Trebuchet MS" pitchFamily="34" charset="0"/>
+                <a:ea typeface="Trebuchet MS" pitchFamily="34" charset="-122"/>
+                <a:cs typeface="Trebuchet MS" pitchFamily="34" charset="-120"/>
+              </a:rPr>
+              <a:t>merge</a:t>
+            </a:r>
+            <a:endParaRPr lang="en-US" sz="1300" dirty="0"/>
+          </a:p>
+        </p:txBody>
+      </p:sp>
+      <p:sp>
+        <p:nvSpPr>
+          <p:cNvPr id="21" name="Text 19"/>
+          <p:cNvSpPr/>
+          <p:nvPr/>
+        </p:nvSpPr>
+        <p:spPr>
+          <a:xfrm>
+            <a:off x="5803392" y="2569464"/>
+            <a:ext cx="1828800" cy="201168"/>
+          </a:xfrm>
+          <a:prstGeom prst="rect">
+            <a:avLst/>
+          </a:prstGeom>
+          <a:noFill/>
+          <a:ln/>
+        </p:spPr>
+        <p:txBody>
+          <a:bodyPr wrap="square" lIns="0" tIns="0" rIns="0" bIns="0" rtlCol="0" anchor="t"/>
+          <a:lstStyle/>
+          <a:p>
+            <a:pPr algn="ctr" indent="0" marL="0">
+              <a:buNone/>
+            </a:pPr>
+            <a:r>
+              <a:rPr lang="en-US" sz="850" dirty="0">
+                <a:solidFill>
+                  <a:srgbClr val="475569"/>
+                </a:solidFill>
+                <a:latin typeface="Calibri" pitchFamily="34" charset="0"/>
+                <a:ea typeface="Calibri" pitchFamily="34" charset="-122"/>
+                <a:cs typeface="Calibri" pitchFamily="34" charset="-120"/>
+              </a:rPr>
+              <a:t>join, combine, sink into</a:t>
+            </a:r>
+            <a:endParaRPr lang="en-US" sz="850" dirty="0"/>
+          </a:p>
+        </p:txBody>
+      </p:sp>
+      <p:sp>
+        <p:nvSpPr>
+          <p:cNvPr id="22" name="Shape 20"/>
           <p:cNvSpPr/>
           <p:nvPr/>
         </p:nvSpPr>
@@ -19810,7 +20968,7 @@
       </p:sp>
       <p:sp>
         <p:nvSpPr>
-          <p:cNvPr id="20" name="Text 18"/>
+          <p:cNvPr id="23" name="Text 21"/>
           <p:cNvSpPr/>
           <p:nvPr/>
         </p:nvSpPr>
@@ -19849,7 +21007,7 @@
       </p:sp>
       <p:sp>
         <p:nvSpPr>
-          <p:cNvPr id="21" name="Shape 19"/>
+          <p:cNvPr id="24" name="Shape 22"/>
           <p:cNvSpPr/>
           <p:nvPr/>
         </p:nvSpPr>
@@ -19876,13 +21034,13 @@
       </p:sp>
       <p:sp>
         <p:nvSpPr>
-          <p:cNvPr id="22" name="Shape 20"/>
-          <p:cNvSpPr/>
-          <p:nvPr/>
-        </p:nvSpPr>
-        <p:spPr>
-          <a:xfrm>
-            <a:off x="4370832" y="3364992"/>
+          <p:cNvPr id="25" name="Shape 23"/>
+          <p:cNvSpPr/>
+          <p:nvPr/>
+        </p:nvSpPr>
+        <p:spPr>
+          <a:xfrm>
+            <a:off x="2999232" y="3364992"/>
             <a:ext cx="1645920" cy="475488"/>
           </a:xfrm>
           <a:prstGeom prst="rect">
@@ -19903,13 +21061,13 @@
       </p:sp>
       <p:sp>
         <p:nvSpPr>
-          <p:cNvPr id="23" name="Text 21"/>
-          <p:cNvSpPr/>
-          <p:nvPr/>
-        </p:nvSpPr>
-        <p:spPr>
-          <a:xfrm>
-            <a:off x="4370832" y="3364992"/>
+          <p:cNvPr id="26" name="Text 24"/>
+          <p:cNvSpPr/>
+          <p:nvPr/>
+        </p:nvSpPr>
+        <p:spPr>
+          <a:xfrm>
+            <a:off x="2999232" y="3364992"/>
             <a:ext cx="1645920" cy="475488"/>
           </a:xfrm>
           <a:prstGeom prst="rect">
@@ -19934,6 +21092,111 @@
                 <a:ea typeface="Trebuchet MS" pitchFamily="34" charset="-122"/>
                 <a:cs typeface="Trebuchet MS" pitchFamily="34" charset="-120"/>
               </a:rPr>
+              <a:t>sub</a:t>
+            </a:r>
+            <a:endParaRPr lang="en-US" sz="1400" dirty="0"/>
+          </a:p>
+        </p:txBody>
+      </p:sp>
+      <p:sp>
+        <p:nvSpPr>
+          <p:cNvPr id="27" name="Text 25"/>
+          <p:cNvSpPr/>
+          <p:nvPr/>
+        </p:nvSpPr>
+        <p:spPr>
+          <a:xfrm>
+            <a:off x="4645152" y="3364992"/>
+            <a:ext cx="1097280" cy="475488"/>
+          </a:xfrm>
+          <a:prstGeom prst="rect">
+            <a:avLst/>
+          </a:prstGeom>
+          <a:noFill/>
+          <a:ln/>
+        </p:spPr>
+        <p:txBody>
+          <a:bodyPr wrap="square" lIns="0" tIns="0" rIns="0" bIns="0" rtlCol="0" anchor="ctr"/>
+          <a:lstStyle/>
+          <a:p>
+            <a:pPr algn="ctr" indent="0" marL="0">
+              <a:buNone/>
+            </a:pPr>
+            <a:r>
+              <a:rPr lang="en-US" sz="1600" b="1" dirty="0">
+                <a:solidFill>
+                  <a:srgbClr val="0D9488"/>
+                </a:solidFill>
+                <a:latin typeface="Trebuchet MS" pitchFamily="34" charset="0"/>
+                <a:ea typeface="Trebuchet MS" pitchFamily="34" charset="-122"/>
+                <a:cs typeface="Trebuchet MS" pitchFamily="34" charset="-120"/>
+              </a:rPr>
+              <a:t>·</a:t>
+            </a:r>
+            <a:endParaRPr lang="en-US" sz="1600" dirty="0"/>
+          </a:p>
+        </p:txBody>
+      </p:sp>
+      <p:sp>
+        <p:nvSpPr>
+          <p:cNvPr id="28" name="Shape 26"/>
+          <p:cNvSpPr/>
+          <p:nvPr/>
+        </p:nvSpPr>
+        <p:spPr>
+          <a:xfrm>
+            <a:off x="5742432" y="3364992"/>
+            <a:ext cx="1645920" cy="475488"/>
+          </a:xfrm>
+          <a:prstGeom prst="rect">
+            <a:avLst>
+              <a:gd name="adj" fmla="val 9615"/>
+            </a:avLst>
+          </a:prstGeom>
+          <a:solidFill>
+            <a:srgbClr val="FFFFFF"/>
+          </a:solidFill>
+          <a:ln w="12700">
+            <a:solidFill>
+              <a:srgbClr val="0D9488"/>
+            </a:solidFill>
+            <a:prstDash val="solid"/>
+          </a:ln>
+        </p:spPr>
+      </p:sp>
+      <p:sp>
+        <p:nvSpPr>
+          <p:cNvPr id="29" name="Text 27"/>
+          <p:cNvSpPr/>
+          <p:nvPr/>
+        </p:nvSpPr>
+        <p:spPr>
+          <a:xfrm>
+            <a:off x="5742432" y="3364992"/>
+            <a:ext cx="1645920" cy="475488"/>
+          </a:xfrm>
+          <a:prstGeom prst="rect">
+            <a:avLst/>
+          </a:prstGeom>
+          <a:noFill/>
+          <a:ln/>
+        </p:spPr>
+        <p:txBody>
+          <a:bodyPr wrap="square" lIns="0" tIns="0" rIns="0" bIns="0" rtlCol="0" anchor="ctr"/>
+          <a:lstStyle/>
+          <a:p>
+            <a:pPr algn="ctr" indent="0" marL="0">
+              <a:buNone/>
+            </a:pPr>
+            <a:r>
+              <a:rPr lang="en-US" sz="1400" b="1" dirty="0">
+                <a:solidFill>
+                  <a:srgbClr val="0D9488"/>
+                </a:solidFill>
+                <a:latin typeface="Trebuchet MS" pitchFamily="34" charset="0"/>
+                <a:ea typeface="Trebuchet MS" pitchFamily="34" charset="-122"/>
+                <a:cs typeface="Trebuchet MS" pitchFamily="34" charset="-120"/>
+              </a:rPr>
               <a:t>merge</a:t>
             </a:r>
             <a:endParaRPr lang="en-US" sz="1400" dirty="0"/>
@@ -19942,7 +21205,7 @@
       </p:sp>
       <p:sp>
         <p:nvSpPr>
-          <p:cNvPr id="24" name="Shape 22"/>
+          <p:cNvPr id="30" name="Shape 28"/>
           <p:cNvSpPr/>
           <p:nvPr/>
         </p:nvSpPr>
@@ -19969,7 +21232,7 @@
       </p:sp>
       <p:sp>
         <p:nvSpPr>
-          <p:cNvPr id="25" name="Text 23"/>
+          <p:cNvPr id="31" name="Text 29"/>
           <p:cNvSpPr/>
           <p:nvPr/>
         </p:nvSpPr>
@@ -20008,7 +21271,7 @@
       </p:sp>
       <p:sp>
         <p:nvSpPr>
-          <p:cNvPr id="26" name="Shape 24"/>
+          <p:cNvPr id="32" name="Shape 30"/>
           <p:cNvSpPr/>
           <p:nvPr/>
         </p:nvSpPr>
@@ -20035,13 +21298,13 @@
       </p:sp>
       <p:sp>
         <p:nvSpPr>
-          <p:cNvPr id="27" name="Shape 25"/>
-          <p:cNvSpPr/>
-          <p:nvPr/>
-        </p:nvSpPr>
-        <p:spPr>
-          <a:xfrm>
-            <a:off x="3033522" y="4169664"/>
+          <p:cNvPr id="33" name="Shape 31"/>
+          <p:cNvSpPr/>
+          <p:nvPr/>
+        </p:nvSpPr>
+        <p:spPr>
+          <a:xfrm>
+            <a:off x="2254649" y="4169664"/>
             <a:ext cx="685800" cy="384048"/>
           </a:xfrm>
           <a:prstGeom prst="rect">
@@ -20062,13 +21325,13 @@
       </p:sp>
       <p:sp>
         <p:nvSpPr>
-          <p:cNvPr id="28" name="Text 26"/>
-          <p:cNvSpPr/>
-          <p:nvPr/>
-        </p:nvSpPr>
-        <p:spPr>
-          <a:xfrm>
-            <a:off x="3033522" y="4169664"/>
+          <p:cNvPr id="34" name="Text 32"/>
+          <p:cNvSpPr/>
+          <p:nvPr/>
+        </p:nvSpPr>
+        <p:spPr>
+          <a:xfrm>
+            <a:off x="2254649" y="4169664"/>
             <a:ext cx="685800" cy="384048"/>
           </a:xfrm>
           <a:prstGeom prst="rect">
@@ -20085,7 +21348,7 @@
               <a:buNone/>
             </a:pPr>
             <a:r>
-              <a:rPr lang="en-US" sz="1000" b="1" dirty="0">
+              <a:rPr lang="en-US" sz="900" b="1" dirty="0">
                 <a:solidFill>
                   <a:srgbClr val="9D174D"/>
                 </a:solidFill>
@@ -20093,21 +21356,21 @@
                 <a:ea typeface="Trebuchet MS" pitchFamily="34" charset="-122"/>
                 <a:cs typeface="Trebuchet MS" pitchFamily="34" charset="-120"/>
               </a:rPr>
-              <a:t>m</a:t>
-            </a:r>
-            <a:endParaRPr lang="en-US" sz="1000" dirty="0"/>
-          </a:p>
-        </p:txBody>
-      </p:sp>
-      <p:sp>
-        <p:nvSpPr>
-          <p:cNvPr id="29" name="Shape 27"/>
-          <p:cNvSpPr/>
-          <p:nvPr/>
-        </p:nvSpPr>
-        <p:spPr>
-          <a:xfrm>
-            <a:off x="4850892" y="4169664"/>
+              <a:t>s</a:t>
+            </a:r>
+            <a:endParaRPr lang="en-US" sz="900" dirty="0"/>
+          </a:p>
+        </p:txBody>
+      </p:sp>
+      <p:sp>
+        <p:nvSpPr>
+          <p:cNvPr id="35" name="Shape 33"/>
+          <p:cNvSpPr/>
+          <p:nvPr/>
+        </p:nvSpPr>
+        <p:spPr>
+          <a:xfrm>
+            <a:off x="3293146" y="4169664"/>
             <a:ext cx="685800" cy="384048"/>
           </a:xfrm>
           <a:prstGeom prst="rect">
@@ -20128,13 +21391,13 @@
       </p:sp>
       <p:sp>
         <p:nvSpPr>
-          <p:cNvPr id="30" name="Text 28"/>
-          <p:cNvSpPr/>
-          <p:nvPr/>
-        </p:nvSpPr>
-        <p:spPr>
-          <a:xfrm>
-            <a:off x="4850892" y="4169664"/>
+          <p:cNvPr id="36" name="Text 34"/>
+          <p:cNvSpPr/>
+          <p:nvPr/>
+        </p:nvSpPr>
+        <p:spPr>
+          <a:xfrm>
+            <a:off x="3293146" y="4169664"/>
             <a:ext cx="685800" cy="384048"/>
           </a:xfrm>
           <a:prstGeom prst="rect">
@@ -20151,7 +21414,7 @@
               <a:buNone/>
             </a:pPr>
             <a:r>
-              <a:rPr lang="en-US" sz="1000" b="1" dirty="0">
+              <a:rPr lang="en-US" sz="900" b="1" dirty="0">
                 <a:solidFill>
                   <a:srgbClr val="9D174D"/>
                 </a:solidFill>
@@ -20159,21 +21422,21 @@
                 <a:ea typeface="Trebuchet MS" pitchFamily="34" charset="-122"/>
                 <a:cs typeface="Trebuchet MS" pitchFamily="34" charset="-120"/>
               </a:rPr>
-              <a:t>er</a:t>
-            </a:r>
-            <a:endParaRPr lang="en-US" sz="1000" dirty="0"/>
-          </a:p>
-        </p:txBody>
-      </p:sp>
-      <p:sp>
-        <p:nvSpPr>
-          <p:cNvPr id="31" name="Shape 29"/>
-          <p:cNvSpPr/>
-          <p:nvPr/>
-        </p:nvSpPr>
-        <p:spPr>
-          <a:xfrm>
-            <a:off x="6668262" y="4169664"/>
+              <a:t>u</a:t>
+            </a:r>
+            <a:endParaRPr lang="en-US" sz="900" dirty="0"/>
+          </a:p>
+        </p:txBody>
+      </p:sp>
+      <p:sp>
+        <p:nvSpPr>
+          <p:cNvPr id="37" name="Shape 35"/>
+          <p:cNvSpPr/>
+          <p:nvPr/>
+        </p:nvSpPr>
+        <p:spPr>
+          <a:xfrm>
+            <a:off x="4331643" y="4169664"/>
             <a:ext cx="685800" cy="384048"/>
           </a:xfrm>
           <a:prstGeom prst="rect">
@@ -20194,13 +21457,13 @@
       </p:sp>
       <p:sp>
         <p:nvSpPr>
-          <p:cNvPr id="32" name="Text 30"/>
-          <p:cNvSpPr/>
-          <p:nvPr/>
-        </p:nvSpPr>
-        <p:spPr>
-          <a:xfrm>
-            <a:off x="6668262" y="4169664"/>
+          <p:cNvPr id="38" name="Text 36"/>
+          <p:cNvSpPr/>
+          <p:nvPr/>
+        </p:nvSpPr>
+        <p:spPr>
+          <a:xfrm>
+            <a:off x="4331643" y="4169664"/>
             <a:ext cx="685800" cy="384048"/>
           </a:xfrm>
           <a:prstGeom prst="rect">
@@ -20217,7 +21480,7 @@
               <a:buNone/>
             </a:pPr>
             <a:r>
-              <a:rPr lang="en-US" sz="1000" b="1" dirty="0">
+              <a:rPr lang="en-US" sz="900" b="1" dirty="0">
                 <a:solidFill>
                   <a:srgbClr val="9D174D"/>
                 </a:solidFill>
@@ -20225,21 +21488,219 @@
                 <a:ea typeface="Trebuchet MS" pitchFamily="34" charset="-122"/>
                 <a:cs typeface="Trebuchet MS" pitchFamily="34" charset="-120"/>
               </a:rPr>
+              <a:t>b</a:t>
+            </a:r>
+            <a:endParaRPr lang="en-US" sz="900" dirty="0"/>
+          </a:p>
+        </p:txBody>
+      </p:sp>
+      <p:sp>
+        <p:nvSpPr>
+          <p:cNvPr id="39" name="Shape 37"/>
+          <p:cNvSpPr/>
+          <p:nvPr/>
+        </p:nvSpPr>
+        <p:spPr>
+          <a:xfrm>
+            <a:off x="5370141" y="4169664"/>
+            <a:ext cx="685800" cy="384048"/>
+          </a:xfrm>
+          <a:prstGeom prst="rect">
+            <a:avLst>
+              <a:gd name="adj" fmla="val 9524"/>
+            </a:avLst>
+          </a:prstGeom>
+          <a:solidFill>
+            <a:srgbClr val="FFFFFF"/>
+          </a:solidFill>
+          <a:ln w="12700">
+            <a:solidFill>
+              <a:srgbClr val="DB2777"/>
+            </a:solidFill>
+            <a:prstDash val="solid"/>
+          </a:ln>
+        </p:spPr>
+      </p:sp>
+      <p:sp>
+        <p:nvSpPr>
+          <p:cNvPr id="40" name="Text 38"/>
+          <p:cNvSpPr/>
+          <p:nvPr/>
+        </p:nvSpPr>
+        <p:spPr>
+          <a:xfrm>
+            <a:off x="5370141" y="4169664"/>
+            <a:ext cx="685800" cy="384048"/>
+          </a:xfrm>
+          <a:prstGeom prst="rect">
+            <a:avLst/>
+          </a:prstGeom>
+          <a:noFill/>
+          <a:ln/>
+        </p:spPr>
+        <p:txBody>
+          <a:bodyPr wrap="square" lIns="0" tIns="0" rIns="0" bIns="0" rtlCol="0" anchor="ctr"/>
+          <a:lstStyle/>
+          <a:p>
+            <a:pPr algn="ctr" indent="0" marL="0">
+              <a:buNone/>
+            </a:pPr>
+            <a:r>
+              <a:rPr lang="en-US" sz="900" b="1" dirty="0">
+                <a:solidFill>
+                  <a:srgbClr val="9D174D"/>
+                </a:solidFill>
+                <a:latin typeface="Trebuchet MS" pitchFamily="34" charset="0"/>
+                <a:ea typeface="Trebuchet MS" pitchFamily="34" charset="-122"/>
+                <a:cs typeface="Trebuchet MS" pitchFamily="34" charset="-120"/>
+              </a:rPr>
+              <a:t>m</a:t>
+            </a:r>
+            <a:endParaRPr lang="en-US" sz="900" dirty="0"/>
+          </a:p>
+        </p:txBody>
+      </p:sp>
+      <p:sp>
+        <p:nvSpPr>
+          <p:cNvPr id="41" name="Shape 39"/>
+          <p:cNvSpPr/>
+          <p:nvPr/>
+        </p:nvSpPr>
+        <p:spPr>
+          <a:xfrm>
+            <a:off x="6408638" y="4169664"/>
+            <a:ext cx="685800" cy="384048"/>
+          </a:xfrm>
+          <a:prstGeom prst="rect">
+            <a:avLst>
+              <a:gd name="adj" fmla="val 9524"/>
+            </a:avLst>
+          </a:prstGeom>
+          <a:solidFill>
+            <a:srgbClr val="FFFFFF"/>
+          </a:solidFill>
+          <a:ln w="12700">
+            <a:solidFill>
+              <a:srgbClr val="DB2777"/>
+            </a:solidFill>
+            <a:prstDash val="solid"/>
+          </a:ln>
+        </p:spPr>
+      </p:sp>
+      <p:sp>
+        <p:nvSpPr>
+          <p:cNvPr id="42" name="Text 40"/>
+          <p:cNvSpPr/>
+          <p:nvPr/>
+        </p:nvSpPr>
+        <p:spPr>
+          <a:xfrm>
+            <a:off x="6408638" y="4169664"/>
+            <a:ext cx="685800" cy="384048"/>
+          </a:xfrm>
+          <a:prstGeom prst="rect">
+            <a:avLst/>
+          </a:prstGeom>
+          <a:noFill/>
+          <a:ln/>
+        </p:spPr>
+        <p:txBody>
+          <a:bodyPr wrap="square" lIns="0" tIns="0" rIns="0" bIns="0" rtlCol="0" anchor="ctr"/>
+          <a:lstStyle/>
+          <a:p>
+            <a:pPr algn="ctr" indent="0" marL="0">
+              <a:buNone/>
+            </a:pPr>
+            <a:r>
+              <a:rPr lang="en-US" sz="900" b="1" dirty="0">
+                <a:solidFill>
+                  <a:srgbClr val="9D174D"/>
+                </a:solidFill>
+                <a:latin typeface="Trebuchet MS" pitchFamily="34" charset="0"/>
+                <a:ea typeface="Trebuchet MS" pitchFamily="34" charset="-122"/>
+                <a:cs typeface="Trebuchet MS" pitchFamily="34" charset="-120"/>
+              </a:rPr>
+              <a:t>er</a:t>
+            </a:r>
+            <a:endParaRPr lang="en-US" sz="900" dirty="0"/>
+          </a:p>
+        </p:txBody>
+      </p:sp>
+      <p:sp>
+        <p:nvSpPr>
+          <p:cNvPr id="43" name="Shape 41"/>
+          <p:cNvSpPr/>
+          <p:nvPr/>
+        </p:nvSpPr>
+        <p:spPr>
+          <a:xfrm>
+            <a:off x="7447135" y="4169664"/>
+            <a:ext cx="685800" cy="384048"/>
+          </a:xfrm>
+          <a:prstGeom prst="rect">
+            <a:avLst>
+              <a:gd name="adj" fmla="val 9524"/>
+            </a:avLst>
+          </a:prstGeom>
+          <a:solidFill>
+            <a:srgbClr val="FFFFFF"/>
+          </a:solidFill>
+          <a:ln w="12700">
+            <a:solidFill>
+              <a:srgbClr val="DB2777"/>
+            </a:solidFill>
+            <a:prstDash val="solid"/>
+          </a:ln>
+        </p:spPr>
+      </p:sp>
+      <p:sp>
+        <p:nvSpPr>
+          <p:cNvPr id="44" name="Text 42"/>
+          <p:cNvSpPr/>
+          <p:nvPr/>
+        </p:nvSpPr>
+        <p:spPr>
+          <a:xfrm>
+            <a:off x="7447135" y="4169664"/>
+            <a:ext cx="685800" cy="384048"/>
+          </a:xfrm>
+          <a:prstGeom prst="rect">
+            <a:avLst/>
+          </a:prstGeom>
+          <a:noFill/>
+          <a:ln/>
+        </p:spPr>
+        <p:txBody>
+          <a:bodyPr wrap="square" lIns="0" tIns="0" rIns="0" bIns="0" rtlCol="0" anchor="ctr"/>
+          <a:lstStyle/>
+          <a:p>
+            <a:pPr algn="ctr" indent="0" marL="0">
+              <a:buNone/>
+            </a:pPr>
+            <a:r>
+              <a:rPr lang="en-US" sz="900" b="1" dirty="0">
+                <a:solidFill>
+                  <a:srgbClr val="9D174D"/>
+                </a:solidFill>
+                <a:latin typeface="Trebuchet MS" pitchFamily="34" charset="0"/>
+                <a:ea typeface="Trebuchet MS" pitchFamily="34" charset="-122"/>
+                <a:cs typeface="Trebuchet MS" pitchFamily="34" charset="-120"/>
+              </a:rPr>
               <a:t>ge</a:t>
             </a:r>
-            <a:endParaRPr lang="en-US" sz="1000" dirty="0"/>
-          </a:p>
-        </p:txBody>
-      </p:sp>
-      <p:sp>
-        <p:nvSpPr>
-          <p:cNvPr id="33" name="Text 31"/>
-          <p:cNvSpPr/>
-          <p:nvPr/>
-        </p:nvSpPr>
-        <p:spPr>
-          <a:xfrm>
-            <a:off x="6668262" y="4572000"/>
+            <a:endParaRPr lang="en-US" sz="900" dirty="0"/>
+          </a:p>
+        </p:txBody>
+      </p:sp>
+      <p:sp>
+        <p:nvSpPr>
+          <p:cNvPr id="45" name="Text 43"/>
+          <p:cNvSpPr/>
+          <p:nvPr/>
+        </p:nvSpPr>
+        <p:spPr>
+          <a:xfrm>
+            <a:off x="7447135" y="4572000"/>
             <a:ext cx="685800" cy="219456"/>
           </a:xfrm>
           <a:prstGeom prst="rect">
@@ -20556,7 +22017,7 @@
                 <a:ea typeface="Calibri" pitchFamily="34" charset="-122"/>
                 <a:cs typeface="Calibri" pitchFamily="34" charset="-120"/>
               </a:rPr>
-              <a:t>Word Labs  •  wordlabs.app  •  Root: 'merge' = to combine, sink into</a:t>
+              <a:t>Word Labs  •  wordlabs.app  •  Root: 'merge' = join, combine, sink into</a:t>
             </a:r>
             <a:endParaRPr lang="en-US" sz="800" dirty="0"/>
           </a:p>
@@ -20695,7 +22156,7 @@
                 <a:ea typeface="Trebuchet MS" pitchFamily="34" charset="-122"/>
                 <a:cs typeface="Trebuchet MS" pitchFamily="34" charset="-120"/>
               </a:rPr>
-              <a:t>emerge</a:t>
+              <a:t>emerging</a:t>
             </a:r>
             <a:endParaRPr lang="en-US" sz="2800" dirty="0"/>
           </a:p>
@@ -21383,7 +22844,7 @@
                 <a:ea typeface="Calibri" pitchFamily="34" charset="-122"/>
                 <a:cs typeface="Calibri" pitchFamily="34" charset="-120"/>
               </a:rPr>
-              <a:t>Word Labs  •  wordlabs.app  •  Root: 'merge' = to combine, sink into</a:t>
+              <a:t>Word Labs  •  wordlabs.app  •  Root: 'merge' = join, combine, sink into</a:t>
             </a:r>
             <a:endParaRPr lang="en-US" sz="800" dirty="0"/>
           </a:p>
@@ -21522,7 +22983,7 @@
                 <a:ea typeface="Trebuchet MS" pitchFamily="34" charset="-122"/>
                 <a:cs typeface="Trebuchet MS" pitchFamily="34" charset="-120"/>
               </a:rPr>
-              <a:t>emerge</a:t>
+              <a:t>emerging</a:t>
             </a:r>
             <a:endParaRPr lang="en-US" sz="2800" dirty="0"/>
           </a:p>
@@ -21602,7 +23063,7 @@
         </p:nvSpPr>
         <p:spPr>
           <a:xfrm>
-            <a:off x="2938272" y="2258568"/>
+            <a:off x="2221992" y="2258568"/>
             <a:ext cx="1828800" cy="292608"/>
           </a:xfrm>
           <a:prstGeom prst="rect">
@@ -21636,7 +23097,7 @@
         </p:nvSpPr>
         <p:spPr>
           <a:xfrm>
-            <a:off x="2938272" y="2258568"/>
+            <a:off x="2221992" y="2258568"/>
             <a:ext cx="1828800" cy="292608"/>
           </a:xfrm>
           <a:prstGeom prst="rect">
@@ -21675,7 +23136,7 @@
         </p:nvSpPr>
         <p:spPr>
           <a:xfrm>
-            <a:off x="2938272" y="2569464"/>
+            <a:off x="2221992" y="2569464"/>
             <a:ext cx="1828800" cy="201168"/>
           </a:xfrm>
           <a:prstGeom prst="rect">
@@ -21700,7 +23161,7 @@
                 <a:ea typeface="Calibri" pitchFamily="34" charset="-122"/>
                 <a:cs typeface="Calibri" pitchFamily="34" charset="-120"/>
               </a:rPr>
-              <a:t>out of, from</a:t>
+              <a:t>out, from</a:t>
             </a:r>
             <a:endParaRPr lang="en-US" sz="850" dirty="0"/>
           </a:p>
@@ -21714,7 +23175,7 @@
         </p:nvSpPr>
         <p:spPr>
           <a:xfrm>
-            <a:off x="5803392" y="2258568"/>
+            <a:off x="4370832" y="2258568"/>
             <a:ext cx="1828800" cy="292608"/>
           </a:xfrm>
           <a:prstGeom prst="rect">
@@ -21748,7 +23209,7 @@
         </p:nvSpPr>
         <p:spPr>
           <a:xfrm>
-            <a:off x="5803392" y="2258568"/>
+            <a:off x="4370832" y="2258568"/>
             <a:ext cx="1828800" cy="292608"/>
           </a:xfrm>
           <a:prstGeom prst="rect">
@@ -21787,7 +23248,7 @@
         </p:nvSpPr>
         <p:spPr>
           <a:xfrm>
-            <a:off x="5803392" y="2569464"/>
+            <a:off x="4370832" y="2569464"/>
             <a:ext cx="1828800" cy="201168"/>
           </a:xfrm>
           <a:prstGeom prst="rect">
@@ -21812,7 +23273,7 @@
                 <a:ea typeface="Calibri" pitchFamily="34" charset="-122"/>
                 <a:cs typeface="Calibri" pitchFamily="34" charset="-120"/>
               </a:rPr>
-              <a:t>to combine, sink into</a:t>
+              <a:t>join, combine, sink into</a:t>
             </a:r>
             <a:endParaRPr lang="en-US" sz="850" dirty="0"/>
           </a:p>
@@ -21820,7 +23281,158 @@
       </p:sp>
       <p:sp>
         <p:nvSpPr>
-          <p:cNvPr id="22" name="Shape 20"/>
+          <p:cNvPr id="22" name="Text 20"/>
+          <p:cNvSpPr/>
+          <p:nvPr/>
+        </p:nvSpPr>
+        <p:spPr>
+          <a:xfrm>
+            <a:off x="4370832" y="2752344"/>
+            <a:ext cx="1828800" cy="182880"/>
+          </a:xfrm>
+          <a:prstGeom prst="rect">
+            <a:avLst/>
+          </a:prstGeom>
+          <a:noFill/>
+          <a:ln/>
+        </p:spPr>
+        <p:txBody>
+          <a:bodyPr wrap="square" lIns="0" tIns="0" rIns="0" bIns="0" rtlCol="0" anchor="t"/>
+          <a:lstStyle/>
+          <a:p>
+            <a:pPr algn="ctr" indent="0" marL="0">
+              <a:buNone/>
+            </a:pPr>
+            <a:r>
+              <a:rPr lang="en-US" sz="700" i="1" dirty="0">
+                <a:solidFill>
+                  <a:srgbClr val="94A3B8"/>
+                </a:solidFill>
+                <a:latin typeface="Calibri" pitchFamily="34" charset="0"/>
+                <a:ea typeface="Calibri" pitchFamily="34" charset="-122"/>
+                <a:cs typeface="Calibri" pitchFamily="34" charset="-120"/>
+              </a:rPr>
+              <a:t>'e' dropped before vowel suffix</a:t>
+            </a:r>
+            <a:endParaRPr lang="en-US" sz="700" dirty="0"/>
+          </a:p>
+        </p:txBody>
+      </p:sp>
+      <p:sp>
+        <p:nvSpPr>
+          <p:cNvPr id="23" name="Shape 21"/>
+          <p:cNvSpPr/>
+          <p:nvPr/>
+        </p:nvSpPr>
+        <p:spPr>
+          <a:xfrm>
+            <a:off x="6519672" y="2258568"/>
+            <a:ext cx="1828800" cy="292608"/>
+          </a:xfrm>
+          <a:prstGeom prst="rect">
+            <a:avLst>
+              <a:gd name="adj" fmla="val 25000"/>
+            </a:avLst>
+          </a:prstGeom>
+          <a:solidFill>
+            <a:srgbClr val="FCE7F3"/>
+          </a:solidFill>
+          <a:ln w="19050">
+            <a:solidFill>
+              <a:srgbClr val="DB2777"/>
+            </a:solidFill>
+            <a:prstDash val="solid"/>
+          </a:ln>
+          <a:effectLst>
+            <a:outerShdw sx="100000" sy="100000" kx="0" ky="0" algn="bl" rotWithShape="0" blurRad="101600" dist="38100" dir="8100000">
+              <a:srgbClr val="000000">
+                <a:alpha val="12000"/>
+              </a:srgbClr>
+            </a:outerShdw>
+          </a:effectLst>
+        </p:spPr>
+      </p:sp>
+      <p:sp>
+        <p:nvSpPr>
+          <p:cNvPr id="24" name="Text 22"/>
+          <p:cNvSpPr/>
+          <p:nvPr/>
+        </p:nvSpPr>
+        <p:spPr>
+          <a:xfrm>
+            <a:off x="6519672" y="2258568"/>
+            <a:ext cx="1828800" cy="292608"/>
+          </a:xfrm>
+          <a:prstGeom prst="rect">
+            <a:avLst/>
+          </a:prstGeom>
+          <a:noFill/>
+          <a:ln/>
+        </p:spPr>
+        <p:txBody>
+          <a:bodyPr wrap="square" lIns="0" tIns="0" rIns="0" bIns="0" rtlCol="0" anchor="ctr"/>
+          <a:lstStyle/>
+          <a:p>
+            <a:pPr algn="ctr" indent="0" marL="0">
+              <a:buNone/>
+            </a:pPr>
+            <a:r>
+              <a:rPr lang="en-US" sz="1300" b="1" dirty="0">
+                <a:solidFill>
+                  <a:srgbClr val="9D174D"/>
+                </a:solidFill>
+                <a:latin typeface="Trebuchet MS" pitchFamily="34" charset="0"/>
+                <a:ea typeface="Trebuchet MS" pitchFamily="34" charset="-122"/>
+                <a:cs typeface="Trebuchet MS" pitchFamily="34" charset="-120"/>
+              </a:rPr>
+              <a:t>ing</a:t>
+            </a:r>
+            <a:endParaRPr lang="en-US" sz="1300" dirty="0"/>
+          </a:p>
+        </p:txBody>
+      </p:sp>
+      <p:sp>
+        <p:nvSpPr>
+          <p:cNvPr id="25" name="Text 23"/>
+          <p:cNvSpPr/>
+          <p:nvPr/>
+        </p:nvSpPr>
+        <p:spPr>
+          <a:xfrm>
+            <a:off x="6519672" y="2569464"/>
+            <a:ext cx="1828800" cy="201168"/>
+          </a:xfrm>
+          <a:prstGeom prst="rect">
+            <a:avLst/>
+          </a:prstGeom>
+          <a:noFill/>
+          <a:ln/>
+        </p:spPr>
+        <p:txBody>
+          <a:bodyPr wrap="square" lIns="0" tIns="0" rIns="0" bIns="0" rtlCol="0" anchor="t"/>
+          <a:lstStyle/>
+          <a:p>
+            <a:pPr algn="ctr" indent="0" marL="0">
+              <a:buNone/>
+            </a:pPr>
+            <a:r>
+              <a:rPr lang="en-US" sz="850" dirty="0">
+                <a:solidFill>
+                  <a:srgbClr val="475569"/>
+                </a:solidFill>
+                <a:latin typeface="Calibri" pitchFamily="34" charset="0"/>
+                <a:ea typeface="Calibri" pitchFamily="34" charset="-122"/>
+                <a:cs typeface="Calibri" pitchFamily="34" charset="-120"/>
+              </a:rPr>
+              <a:t>happening now, action in progress</a:t>
+            </a:r>
+            <a:endParaRPr lang="en-US" sz="850" dirty="0"/>
+          </a:p>
+        </p:txBody>
+      </p:sp>
+      <p:sp>
+        <p:nvSpPr>
+          <p:cNvPr id="26" name="Shape 24"/>
           <p:cNvSpPr/>
           <p:nvPr/>
         </p:nvSpPr>
@@ -21847,7 +23459,7 @@
       </p:sp>
       <p:sp>
         <p:nvSpPr>
-          <p:cNvPr id="23" name="Text 21"/>
+          <p:cNvPr id="27" name="Text 25"/>
           <p:cNvSpPr/>
           <p:nvPr/>
         </p:nvSpPr>
@@ -21886,7 +23498,7 @@
       </p:sp>
       <p:sp>
         <p:nvSpPr>
-          <p:cNvPr id="24" name="Shape 22"/>
+          <p:cNvPr id="28" name="Shape 26"/>
           <p:cNvSpPr/>
           <p:nvPr/>
         </p:nvSpPr>
@@ -21913,7 +23525,7 @@
       </p:sp>
       <p:sp>
         <p:nvSpPr>
-          <p:cNvPr id="25" name="Text 23"/>
+          <p:cNvPr id="29" name="Text 27"/>
           <p:cNvSpPr/>
           <p:nvPr/>
         </p:nvSpPr>
@@ -21952,7 +23564,7 @@
       </p:sp>
       <p:sp>
         <p:nvSpPr>
-          <p:cNvPr id="26" name="Shape 24"/>
+          <p:cNvPr id="30" name="Shape 28"/>
           <p:cNvSpPr/>
           <p:nvPr/>
         </p:nvSpPr>
@@ -21979,7 +23591,7 @@
       </p:sp>
       <p:sp>
         <p:nvSpPr>
-          <p:cNvPr id="27" name="Text 25"/>
+          <p:cNvPr id="31" name="Text 29"/>
           <p:cNvSpPr/>
           <p:nvPr/>
         </p:nvSpPr>
@@ -22018,7 +23630,7 @@
       </p:sp>
       <p:sp>
         <p:nvSpPr>
-          <p:cNvPr id="28" name="Shape 26"/>
+          <p:cNvPr id="32" name="Shape 30"/>
           <p:cNvSpPr/>
           <p:nvPr/>
         </p:nvSpPr>
@@ -22045,7 +23657,7 @@
       </p:sp>
       <p:sp>
         <p:nvSpPr>
-          <p:cNvPr id="29" name="Text 27"/>
+          <p:cNvPr id="33" name="Text 31"/>
           <p:cNvSpPr/>
           <p:nvPr/>
         </p:nvSpPr>
@@ -22368,7 +23980,7 @@
                 <a:ea typeface="Calibri" pitchFamily="34" charset="-122"/>
                 <a:cs typeface="Calibri" pitchFamily="34" charset="-120"/>
               </a:rPr>
-              <a:t>Word Labs  •  wordlabs.app  •  Root: 'merge' = to combine, sink into</a:t>
+              <a:t>Word Labs  •  wordlabs.app  •  Root: 'merge' = join, combine, sink into</a:t>
             </a:r>
             <a:endParaRPr lang="en-US" sz="800" dirty="0"/>
           </a:p>
@@ -22441,7 +24053,7 @@
                 <a:ea typeface="Trebuchet MS" pitchFamily="34" charset="-122"/>
                 <a:cs typeface="Trebuchet MS" pitchFamily="34" charset="-120"/>
               </a:rPr>
-              <a:t>We are learning that the root 'merge' means 'to combine, sink into'.</a:t>
+              <a:t>We are learning that the root 'merge' means 'join, combine, sink into'.</a:t>
             </a:r>
             <a:endParaRPr lang="en-US" sz="2000" dirty="0"/>
           </a:p>
@@ -23087,7 +24699,7 @@
                 <a:ea typeface="Calibri" pitchFamily="34" charset="-122"/>
                 <a:cs typeface="Calibri" pitchFamily="34" charset="-120"/>
               </a:rPr>
-              <a:t>Word Labs  •  wordlabs.app  •  Root: 'merge' = to combine, sink into</a:t>
+              <a:t>Word Labs  •  wordlabs.app  •  Root: 'merge' = join, combine, sink into</a:t>
             </a:r>
             <a:endParaRPr lang="en-US" sz="800" dirty="0"/>
           </a:p>
@@ -23226,7 +24838,7 @@
                 <a:ea typeface="Trebuchet MS" pitchFamily="34" charset="-122"/>
                 <a:cs typeface="Trebuchet MS" pitchFamily="34" charset="-120"/>
               </a:rPr>
-              <a:t>emerge</a:t>
+              <a:t>emerging</a:t>
             </a:r>
             <a:endParaRPr lang="en-US" sz="2800" dirty="0"/>
           </a:p>
@@ -23306,7 +24918,7 @@
         </p:nvSpPr>
         <p:spPr>
           <a:xfrm>
-            <a:off x="2938272" y="2258568"/>
+            <a:off x="2221992" y="2258568"/>
             <a:ext cx="1828800" cy="292608"/>
           </a:xfrm>
           <a:prstGeom prst="rect">
@@ -23340,7 +24952,7 @@
         </p:nvSpPr>
         <p:spPr>
           <a:xfrm>
-            <a:off x="2938272" y="2258568"/>
+            <a:off x="2221992" y="2258568"/>
             <a:ext cx="1828800" cy="292608"/>
           </a:xfrm>
           <a:prstGeom prst="rect">
@@ -23379,7 +24991,7 @@
         </p:nvSpPr>
         <p:spPr>
           <a:xfrm>
-            <a:off x="2938272" y="2569464"/>
+            <a:off x="2221992" y="2569464"/>
             <a:ext cx="1828800" cy="201168"/>
           </a:xfrm>
           <a:prstGeom prst="rect">
@@ -23404,7 +25016,7 @@
                 <a:ea typeface="Calibri" pitchFamily="34" charset="-122"/>
                 <a:cs typeface="Calibri" pitchFamily="34" charset="-120"/>
               </a:rPr>
-              <a:t>out of, from</a:t>
+              <a:t>out, from</a:t>
             </a:r>
             <a:endParaRPr lang="en-US" sz="850" dirty="0"/>
           </a:p>
@@ -23418,7 +25030,7 @@
         </p:nvSpPr>
         <p:spPr>
           <a:xfrm>
-            <a:off x="5803392" y="2258568"/>
+            <a:off x="4370832" y="2258568"/>
             <a:ext cx="1828800" cy="292608"/>
           </a:xfrm>
           <a:prstGeom prst="rect">
@@ -23452,7 +25064,7 @@
         </p:nvSpPr>
         <p:spPr>
           <a:xfrm>
-            <a:off x="5803392" y="2258568"/>
+            <a:off x="4370832" y="2258568"/>
             <a:ext cx="1828800" cy="292608"/>
           </a:xfrm>
           <a:prstGeom prst="rect">
@@ -23491,7 +25103,7 @@
         </p:nvSpPr>
         <p:spPr>
           <a:xfrm>
-            <a:off x="5803392" y="2569464"/>
+            <a:off x="4370832" y="2569464"/>
             <a:ext cx="1828800" cy="201168"/>
           </a:xfrm>
           <a:prstGeom prst="rect">
@@ -23516,7 +25128,7 @@
                 <a:ea typeface="Calibri" pitchFamily="34" charset="-122"/>
                 <a:cs typeface="Calibri" pitchFamily="34" charset="-120"/>
               </a:rPr>
-              <a:t>to combine, sink into</a:t>
+              <a:t>join, combine, sink into</a:t>
             </a:r>
             <a:endParaRPr lang="en-US" sz="850" dirty="0"/>
           </a:p>
@@ -23524,7 +25136,158 @@
       </p:sp>
       <p:sp>
         <p:nvSpPr>
-          <p:cNvPr id="22" name="Shape 20"/>
+          <p:cNvPr id="22" name="Text 20"/>
+          <p:cNvSpPr/>
+          <p:nvPr/>
+        </p:nvSpPr>
+        <p:spPr>
+          <a:xfrm>
+            <a:off x="4370832" y="2752344"/>
+            <a:ext cx="1828800" cy="182880"/>
+          </a:xfrm>
+          <a:prstGeom prst="rect">
+            <a:avLst/>
+          </a:prstGeom>
+          <a:noFill/>
+          <a:ln/>
+        </p:spPr>
+        <p:txBody>
+          <a:bodyPr wrap="square" lIns="0" tIns="0" rIns="0" bIns="0" rtlCol="0" anchor="t"/>
+          <a:lstStyle/>
+          <a:p>
+            <a:pPr algn="ctr" indent="0" marL="0">
+              <a:buNone/>
+            </a:pPr>
+            <a:r>
+              <a:rPr lang="en-US" sz="700" i="1" dirty="0">
+                <a:solidFill>
+                  <a:srgbClr val="94A3B8"/>
+                </a:solidFill>
+                <a:latin typeface="Calibri" pitchFamily="34" charset="0"/>
+                <a:ea typeface="Calibri" pitchFamily="34" charset="-122"/>
+                <a:cs typeface="Calibri" pitchFamily="34" charset="-120"/>
+              </a:rPr>
+              <a:t>'e' dropped before vowel suffix</a:t>
+            </a:r>
+            <a:endParaRPr lang="en-US" sz="700" dirty="0"/>
+          </a:p>
+        </p:txBody>
+      </p:sp>
+      <p:sp>
+        <p:nvSpPr>
+          <p:cNvPr id="23" name="Shape 21"/>
+          <p:cNvSpPr/>
+          <p:nvPr/>
+        </p:nvSpPr>
+        <p:spPr>
+          <a:xfrm>
+            <a:off x="6519672" y="2258568"/>
+            <a:ext cx="1828800" cy="292608"/>
+          </a:xfrm>
+          <a:prstGeom prst="rect">
+            <a:avLst>
+              <a:gd name="adj" fmla="val 25000"/>
+            </a:avLst>
+          </a:prstGeom>
+          <a:solidFill>
+            <a:srgbClr val="FCE7F3"/>
+          </a:solidFill>
+          <a:ln w="19050">
+            <a:solidFill>
+              <a:srgbClr val="DB2777"/>
+            </a:solidFill>
+            <a:prstDash val="solid"/>
+          </a:ln>
+          <a:effectLst>
+            <a:outerShdw sx="100000" sy="100000" kx="0" ky="0" algn="bl" rotWithShape="0" blurRad="101600" dist="38100" dir="8100000">
+              <a:srgbClr val="000000">
+                <a:alpha val="12000"/>
+              </a:srgbClr>
+            </a:outerShdw>
+          </a:effectLst>
+        </p:spPr>
+      </p:sp>
+      <p:sp>
+        <p:nvSpPr>
+          <p:cNvPr id="24" name="Text 22"/>
+          <p:cNvSpPr/>
+          <p:nvPr/>
+        </p:nvSpPr>
+        <p:spPr>
+          <a:xfrm>
+            <a:off x="6519672" y="2258568"/>
+            <a:ext cx="1828800" cy="292608"/>
+          </a:xfrm>
+          <a:prstGeom prst="rect">
+            <a:avLst/>
+          </a:prstGeom>
+          <a:noFill/>
+          <a:ln/>
+        </p:spPr>
+        <p:txBody>
+          <a:bodyPr wrap="square" lIns="0" tIns="0" rIns="0" bIns="0" rtlCol="0" anchor="ctr"/>
+          <a:lstStyle/>
+          <a:p>
+            <a:pPr algn="ctr" indent="0" marL="0">
+              <a:buNone/>
+            </a:pPr>
+            <a:r>
+              <a:rPr lang="en-US" sz="1300" b="1" dirty="0">
+                <a:solidFill>
+                  <a:srgbClr val="9D174D"/>
+                </a:solidFill>
+                <a:latin typeface="Trebuchet MS" pitchFamily="34" charset="0"/>
+                <a:ea typeface="Trebuchet MS" pitchFamily="34" charset="-122"/>
+                <a:cs typeface="Trebuchet MS" pitchFamily="34" charset="-120"/>
+              </a:rPr>
+              <a:t>ing</a:t>
+            </a:r>
+            <a:endParaRPr lang="en-US" sz="1300" dirty="0"/>
+          </a:p>
+        </p:txBody>
+      </p:sp>
+      <p:sp>
+        <p:nvSpPr>
+          <p:cNvPr id="25" name="Text 23"/>
+          <p:cNvSpPr/>
+          <p:nvPr/>
+        </p:nvSpPr>
+        <p:spPr>
+          <a:xfrm>
+            <a:off x="6519672" y="2569464"/>
+            <a:ext cx="1828800" cy="201168"/>
+          </a:xfrm>
+          <a:prstGeom prst="rect">
+            <a:avLst/>
+          </a:prstGeom>
+          <a:noFill/>
+          <a:ln/>
+        </p:spPr>
+        <p:txBody>
+          <a:bodyPr wrap="square" lIns="0" tIns="0" rIns="0" bIns="0" rtlCol="0" anchor="t"/>
+          <a:lstStyle/>
+          <a:p>
+            <a:pPr algn="ctr" indent="0" marL="0">
+              <a:buNone/>
+            </a:pPr>
+            <a:r>
+              <a:rPr lang="en-US" sz="850" dirty="0">
+                <a:solidFill>
+                  <a:srgbClr val="475569"/>
+                </a:solidFill>
+                <a:latin typeface="Calibri" pitchFamily="34" charset="0"/>
+                <a:ea typeface="Calibri" pitchFamily="34" charset="-122"/>
+                <a:cs typeface="Calibri" pitchFamily="34" charset="-120"/>
+              </a:rPr>
+              <a:t>happening now, action in progress</a:t>
+            </a:r>
+            <a:endParaRPr lang="en-US" sz="850" dirty="0"/>
+          </a:p>
+        </p:txBody>
+      </p:sp>
+      <p:sp>
+        <p:nvSpPr>
+          <p:cNvPr id="26" name="Shape 24"/>
           <p:cNvSpPr/>
           <p:nvPr/>
         </p:nvSpPr>
@@ -23551,7 +25314,7 @@
       </p:sp>
       <p:sp>
         <p:nvSpPr>
-          <p:cNvPr id="23" name="Text 21"/>
+          <p:cNvPr id="27" name="Text 25"/>
           <p:cNvSpPr/>
           <p:nvPr/>
         </p:nvSpPr>
@@ -23590,7 +25353,7 @@
       </p:sp>
       <p:sp>
         <p:nvSpPr>
-          <p:cNvPr id="24" name="Shape 22"/>
+          <p:cNvPr id="28" name="Shape 26"/>
           <p:cNvSpPr/>
           <p:nvPr/>
         </p:nvSpPr>
@@ -23617,13 +25380,13 @@
       </p:sp>
       <p:sp>
         <p:nvSpPr>
-          <p:cNvPr id="25" name="Shape 23"/>
-          <p:cNvSpPr/>
-          <p:nvPr/>
-        </p:nvSpPr>
-        <p:spPr>
-          <a:xfrm>
-            <a:off x="2999232" y="3364992"/>
+          <p:cNvPr id="29" name="Shape 27"/>
+          <p:cNvSpPr/>
+          <p:nvPr/>
+        </p:nvSpPr>
+        <p:spPr>
+          <a:xfrm>
+            <a:off x="2313432" y="3364992"/>
             <a:ext cx="1645920" cy="475488"/>
           </a:xfrm>
           <a:prstGeom prst="rect">
@@ -23644,13 +25407,13 @@
       </p:sp>
       <p:sp>
         <p:nvSpPr>
-          <p:cNvPr id="26" name="Text 24"/>
-          <p:cNvSpPr/>
-          <p:nvPr/>
-        </p:nvSpPr>
-        <p:spPr>
-          <a:xfrm>
-            <a:off x="2999232" y="3364992"/>
+          <p:cNvPr id="30" name="Text 28"/>
+          <p:cNvSpPr/>
+          <p:nvPr/>
+        </p:nvSpPr>
+        <p:spPr>
+          <a:xfrm>
+            <a:off x="2313432" y="3364992"/>
             <a:ext cx="1645920" cy="475488"/>
           </a:xfrm>
           <a:prstGeom prst="rect">
@@ -23683,14 +25446,14 @@
       </p:sp>
       <p:sp>
         <p:nvSpPr>
-          <p:cNvPr id="27" name="Text 25"/>
-          <p:cNvSpPr/>
-          <p:nvPr/>
-        </p:nvSpPr>
-        <p:spPr>
-          <a:xfrm>
-            <a:off x="4645152" y="3364992"/>
-            <a:ext cx="1097280" cy="475488"/>
+          <p:cNvPr id="31" name="Text 29"/>
+          <p:cNvSpPr/>
+          <p:nvPr/>
+        </p:nvSpPr>
+        <p:spPr>
+          <a:xfrm>
+            <a:off x="3959352" y="3364992"/>
+            <a:ext cx="411480" cy="475488"/>
           </a:xfrm>
           <a:prstGeom prst="rect">
             <a:avLst/>
@@ -23722,13 +25485,13 @@
       </p:sp>
       <p:sp>
         <p:nvSpPr>
-          <p:cNvPr id="28" name="Shape 26"/>
-          <p:cNvSpPr/>
-          <p:nvPr/>
-        </p:nvSpPr>
-        <p:spPr>
-          <a:xfrm>
-            <a:off x="5742432" y="3364992"/>
+          <p:cNvPr id="32" name="Shape 30"/>
+          <p:cNvSpPr/>
+          <p:nvPr/>
+        </p:nvSpPr>
+        <p:spPr>
+          <a:xfrm>
+            <a:off x="4370832" y="3364992"/>
             <a:ext cx="1645920" cy="475488"/>
           </a:xfrm>
           <a:prstGeom prst="rect">
@@ -23749,13 +25512,13 @@
       </p:sp>
       <p:sp>
         <p:nvSpPr>
-          <p:cNvPr id="29" name="Text 27"/>
-          <p:cNvSpPr/>
-          <p:nvPr/>
-        </p:nvSpPr>
-        <p:spPr>
-          <a:xfrm>
-            <a:off x="5742432" y="3364992"/>
+          <p:cNvPr id="33" name="Text 31"/>
+          <p:cNvSpPr/>
+          <p:nvPr/>
+        </p:nvSpPr>
+        <p:spPr>
+          <a:xfrm>
+            <a:off x="4370832" y="3364992"/>
             <a:ext cx="1645920" cy="475488"/>
           </a:xfrm>
           <a:prstGeom prst="rect">
@@ -23780,7 +25543,7 @@
                 <a:ea typeface="Trebuchet MS" pitchFamily="34" charset="-122"/>
                 <a:cs typeface="Trebuchet MS" pitchFamily="34" charset="-120"/>
               </a:rPr>
-              <a:t>merge</a:t>
+              <a:t>mer</a:t>
             </a:r>
             <a:endParaRPr lang="en-US" sz="1400" dirty="0"/>
           </a:p>
@@ -23788,7 +25551,112 @@
       </p:sp>
       <p:sp>
         <p:nvSpPr>
-          <p:cNvPr id="30" name="Shape 28"/>
+          <p:cNvPr id="34" name="Text 32"/>
+          <p:cNvSpPr/>
+          <p:nvPr/>
+        </p:nvSpPr>
+        <p:spPr>
+          <a:xfrm>
+            <a:off x="6016752" y="3364992"/>
+            <a:ext cx="411480" cy="475488"/>
+          </a:xfrm>
+          <a:prstGeom prst="rect">
+            <a:avLst/>
+          </a:prstGeom>
+          <a:noFill/>
+          <a:ln/>
+        </p:spPr>
+        <p:txBody>
+          <a:bodyPr wrap="square" lIns="0" tIns="0" rIns="0" bIns="0" rtlCol="0" anchor="ctr"/>
+          <a:lstStyle/>
+          <a:p>
+            <a:pPr algn="ctr" indent="0" marL="0">
+              <a:buNone/>
+            </a:pPr>
+            <a:r>
+              <a:rPr lang="en-US" sz="1600" b="1" dirty="0">
+                <a:solidFill>
+                  <a:srgbClr val="0D9488"/>
+                </a:solidFill>
+                <a:latin typeface="Trebuchet MS" pitchFamily="34" charset="0"/>
+                <a:ea typeface="Trebuchet MS" pitchFamily="34" charset="-122"/>
+                <a:cs typeface="Trebuchet MS" pitchFamily="34" charset="-120"/>
+              </a:rPr>
+              <a:t>·</a:t>
+            </a:r>
+            <a:endParaRPr lang="en-US" sz="1600" dirty="0"/>
+          </a:p>
+        </p:txBody>
+      </p:sp>
+      <p:sp>
+        <p:nvSpPr>
+          <p:cNvPr id="35" name="Shape 33"/>
+          <p:cNvSpPr/>
+          <p:nvPr/>
+        </p:nvSpPr>
+        <p:spPr>
+          <a:xfrm>
+            <a:off x="6428232" y="3364992"/>
+            <a:ext cx="1645920" cy="475488"/>
+          </a:xfrm>
+          <a:prstGeom prst="rect">
+            <a:avLst>
+              <a:gd name="adj" fmla="val 9615"/>
+            </a:avLst>
+          </a:prstGeom>
+          <a:solidFill>
+            <a:srgbClr val="FFFFFF"/>
+          </a:solidFill>
+          <a:ln w="12700">
+            <a:solidFill>
+              <a:srgbClr val="0D9488"/>
+            </a:solidFill>
+            <a:prstDash val="solid"/>
+          </a:ln>
+        </p:spPr>
+      </p:sp>
+      <p:sp>
+        <p:nvSpPr>
+          <p:cNvPr id="36" name="Text 34"/>
+          <p:cNvSpPr/>
+          <p:nvPr/>
+        </p:nvSpPr>
+        <p:spPr>
+          <a:xfrm>
+            <a:off x="6428232" y="3364992"/>
+            <a:ext cx="1645920" cy="475488"/>
+          </a:xfrm>
+          <a:prstGeom prst="rect">
+            <a:avLst/>
+          </a:prstGeom>
+          <a:noFill/>
+          <a:ln/>
+        </p:spPr>
+        <p:txBody>
+          <a:bodyPr wrap="square" lIns="0" tIns="0" rIns="0" bIns="0" rtlCol="0" anchor="ctr"/>
+          <a:lstStyle/>
+          <a:p>
+            <a:pPr algn="ctr" indent="0" marL="0">
+              <a:buNone/>
+            </a:pPr>
+            <a:r>
+              <a:rPr lang="en-US" sz="1400" b="1" dirty="0">
+                <a:solidFill>
+                  <a:srgbClr val="0D9488"/>
+                </a:solidFill>
+                <a:latin typeface="Trebuchet MS" pitchFamily="34" charset="0"/>
+                <a:ea typeface="Trebuchet MS" pitchFamily="34" charset="-122"/>
+                <a:cs typeface="Trebuchet MS" pitchFamily="34" charset="-120"/>
+              </a:rPr>
+              <a:t>ging</a:t>
+            </a:r>
+            <a:endParaRPr lang="en-US" sz="1400" dirty="0"/>
+          </a:p>
+        </p:txBody>
+      </p:sp>
+      <p:sp>
+        <p:nvSpPr>
+          <p:cNvPr id="37" name="Shape 35"/>
           <p:cNvSpPr/>
           <p:nvPr/>
         </p:nvSpPr>
@@ -23815,7 +25683,7 @@
       </p:sp>
       <p:sp>
         <p:nvSpPr>
-          <p:cNvPr id="31" name="Text 29"/>
+          <p:cNvPr id="38" name="Text 36"/>
           <p:cNvSpPr/>
           <p:nvPr/>
         </p:nvSpPr>
@@ -23854,7 +25722,7 @@
       </p:sp>
       <p:sp>
         <p:nvSpPr>
-          <p:cNvPr id="32" name="Shape 30"/>
+          <p:cNvPr id="39" name="Shape 37"/>
           <p:cNvSpPr/>
           <p:nvPr/>
         </p:nvSpPr>
@@ -23881,7 +25749,7 @@
       </p:sp>
       <p:sp>
         <p:nvSpPr>
-          <p:cNvPr id="33" name="Text 31"/>
+          <p:cNvPr id="40" name="Text 38"/>
           <p:cNvSpPr/>
           <p:nvPr/>
         </p:nvSpPr>
@@ -24204,7 +26072,7 @@
                 <a:ea typeface="Calibri" pitchFamily="34" charset="-122"/>
                 <a:cs typeface="Calibri" pitchFamily="34" charset="-120"/>
               </a:rPr>
-              <a:t>Word Labs  •  wordlabs.app  •  Root: 'merge' = to combine, sink into</a:t>
+              <a:t>Word Labs  •  wordlabs.app  •  Root: 'merge' = join, combine, sink into</a:t>
             </a:r>
             <a:endParaRPr lang="en-US" sz="800" dirty="0"/>
           </a:p>
@@ -24343,7 +26211,7 @@
                 <a:ea typeface="Trebuchet MS" pitchFamily="34" charset="-122"/>
                 <a:cs typeface="Trebuchet MS" pitchFamily="34" charset="-120"/>
               </a:rPr>
-              <a:t>emerge</a:t>
+              <a:t>emerging</a:t>
             </a:r>
             <a:endParaRPr lang="en-US" sz="2800" dirty="0"/>
           </a:p>
@@ -24423,7 +26291,7 @@
         </p:nvSpPr>
         <p:spPr>
           <a:xfrm>
-            <a:off x="2938272" y="2258568"/>
+            <a:off x="2221992" y="2258568"/>
             <a:ext cx="1828800" cy="292608"/>
           </a:xfrm>
           <a:prstGeom prst="rect">
@@ -24457,7 +26325,7 @@
         </p:nvSpPr>
         <p:spPr>
           <a:xfrm>
-            <a:off x="2938272" y="2258568"/>
+            <a:off x="2221992" y="2258568"/>
             <a:ext cx="1828800" cy="292608"/>
           </a:xfrm>
           <a:prstGeom prst="rect">
@@ -24496,7 +26364,7 @@
         </p:nvSpPr>
         <p:spPr>
           <a:xfrm>
-            <a:off x="2938272" y="2569464"/>
+            <a:off x="2221992" y="2569464"/>
             <a:ext cx="1828800" cy="201168"/>
           </a:xfrm>
           <a:prstGeom prst="rect">
@@ -24521,7 +26389,7 @@
                 <a:ea typeface="Calibri" pitchFamily="34" charset="-122"/>
                 <a:cs typeface="Calibri" pitchFamily="34" charset="-120"/>
               </a:rPr>
-              <a:t>out of, from</a:t>
+              <a:t>out, from</a:t>
             </a:r>
             <a:endParaRPr lang="en-US" sz="850" dirty="0"/>
           </a:p>
@@ -24535,7 +26403,7 @@
         </p:nvSpPr>
         <p:spPr>
           <a:xfrm>
-            <a:off x="5803392" y="2258568"/>
+            <a:off x="4370832" y="2258568"/>
             <a:ext cx="1828800" cy="292608"/>
           </a:xfrm>
           <a:prstGeom prst="rect">
@@ -24569,7 +26437,7 @@
         </p:nvSpPr>
         <p:spPr>
           <a:xfrm>
-            <a:off x="5803392" y="2258568"/>
+            <a:off x="4370832" y="2258568"/>
             <a:ext cx="1828800" cy="292608"/>
           </a:xfrm>
           <a:prstGeom prst="rect">
@@ -24608,7 +26476,7 @@
         </p:nvSpPr>
         <p:spPr>
           <a:xfrm>
-            <a:off x="5803392" y="2569464"/>
+            <a:off x="4370832" y="2569464"/>
             <a:ext cx="1828800" cy="201168"/>
           </a:xfrm>
           <a:prstGeom prst="rect">
@@ -24633,7 +26501,7 @@
                 <a:ea typeface="Calibri" pitchFamily="34" charset="-122"/>
                 <a:cs typeface="Calibri" pitchFamily="34" charset="-120"/>
               </a:rPr>
-              <a:t>to combine, sink into</a:t>
+              <a:t>join, combine, sink into</a:t>
             </a:r>
             <a:endParaRPr lang="en-US" sz="850" dirty="0"/>
           </a:p>
@@ -24641,7 +26509,158 @@
       </p:sp>
       <p:sp>
         <p:nvSpPr>
-          <p:cNvPr id="22" name="Shape 20"/>
+          <p:cNvPr id="22" name="Text 20"/>
+          <p:cNvSpPr/>
+          <p:nvPr/>
+        </p:nvSpPr>
+        <p:spPr>
+          <a:xfrm>
+            <a:off x="4370832" y="2752344"/>
+            <a:ext cx="1828800" cy="182880"/>
+          </a:xfrm>
+          <a:prstGeom prst="rect">
+            <a:avLst/>
+          </a:prstGeom>
+          <a:noFill/>
+          <a:ln/>
+        </p:spPr>
+        <p:txBody>
+          <a:bodyPr wrap="square" lIns="0" tIns="0" rIns="0" bIns="0" rtlCol="0" anchor="t"/>
+          <a:lstStyle/>
+          <a:p>
+            <a:pPr algn="ctr" indent="0" marL="0">
+              <a:buNone/>
+            </a:pPr>
+            <a:r>
+              <a:rPr lang="en-US" sz="700" i="1" dirty="0">
+                <a:solidFill>
+                  <a:srgbClr val="94A3B8"/>
+                </a:solidFill>
+                <a:latin typeface="Calibri" pitchFamily="34" charset="0"/>
+                <a:ea typeface="Calibri" pitchFamily="34" charset="-122"/>
+                <a:cs typeface="Calibri" pitchFamily="34" charset="-120"/>
+              </a:rPr>
+              <a:t>'e' dropped before vowel suffix</a:t>
+            </a:r>
+            <a:endParaRPr lang="en-US" sz="700" dirty="0"/>
+          </a:p>
+        </p:txBody>
+      </p:sp>
+      <p:sp>
+        <p:nvSpPr>
+          <p:cNvPr id="23" name="Shape 21"/>
+          <p:cNvSpPr/>
+          <p:nvPr/>
+        </p:nvSpPr>
+        <p:spPr>
+          <a:xfrm>
+            <a:off x="6519672" y="2258568"/>
+            <a:ext cx="1828800" cy="292608"/>
+          </a:xfrm>
+          <a:prstGeom prst="rect">
+            <a:avLst>
+              <a:gd name="adj" fmla="val 25000"/>
+            </a:avLst>
+          </a:prstGeom>
+          <a:solidFill>
+            <a:srgbClr val="FCE7F3"/>
+          </a:solidFill>
+          <a:ln w="19050">
+            <a:solidFill>
+              <a:srgbClr val="DB2777"/>
+            </a:solidFill>
+            <a:prstDash val="solid"/>
+          </a:ln>
+          <a:effectLst>
+            <a:outerShdw sx="100000" sy="100000" kx="0" ky="0" algn="bl" rotWithShape="0" blurRad="101600" dist="38100" dir="8100000">
+              <a:srgbClr val="000000">
+                <a:alpha val="12000"/>
+              </a:srgbClr>
+            </a:outerShdw>
+          </a:effectLst>
+        </p:spPr>
+      </p:sp>
+      <p:sp>
+        <p:nvSpPr>
+          <p:cNvPr id="24" name="Text 22"/>
+          <p:cNvSpPr/>
+          <p:nvPr/>
+        </p:nvSpPr>
+        <p:spPr>
+          <a:xfrm>
+            <a:off x="6519672" y="2258568"/>
+            <a:ext cx="1828800" cy="292608"/>
+          </a:xfrm>
+          <a:prstGeom prst="rect">
+            <a:avLst/>
+          </a:prstGeom>
+          <a:noFill/>
+          <a:ln/>
+        </p:spPr>
+        <p:txBody>
+          <a:bodyPr wrap="square" lIns="0" tIns="0" rIns="0" bIns="0" rtlCol="0" anchor="ctr"/>
+          <a:lstStyle/>
+          <a:p>
+            <a:pPr algn="ctr" indent="0" marL="0">
+              <a:buNone/>
+            </a:pPr>
+            <a:r>
+              <a:rPr lang="en-US" sz="1300" b="1" dirty="0">
+                <a:solidFill>
+                  <a:srgbClr val="9D174D"/>
+                </a:solidFill>
+                <a:latin typeface="Trebuchet MS" pitchFamily="34" charset="0"/>
+                <a:ea typeface="Trebuchet MS" pitchFamily="34" charset="-122"/>
+                <a:cs typeface="Trebuchet MS" pitchFamily="34" charset="-120"/>
+              </a:rPr>
+              <a:t>ing</a:t>
+            </a:r>
+            <a:endParaRPr lang="en-US" sz="1300" dirty="0"/>
+          </a:p>
+        </p:txBody>
+      </p:sp>
+      <p:sp>
+        <p:nvSpPr>
+          <p:cNvPr id="25" name="Text 23"/>
+          <p:cNvSpPr/>
+          <p:nvPr/>
+        </p:nvSpPr>
+        <p:spPr>
+          <a:xfrm>
+            <a:off x="6519672" y="2569464"/>
+            <a:ext cx="1828800" cy="201168"/>
+          </a:xfrm>
+          <a:prstGeom prst="rect">
+            <a:avLst/>
+          </a:prstGeom>
+          <a:noFill/>
+          <a:ln/>
+        </p:spPr>
+        <p:txBody>
+          <a:bodyPr wrap="square" lIns="0" tIns="0" rIns="0" bIns="0" rtlCol="0" anchor="t"/>
+          <a:lstStyle/>
+          <a:p>
+            <a:pPr algn="ctr" indent="0" marL="0">
+              <a:buNone/>
+            </a:pPr>
+            <a:r>
+              <a:rPr lang="en-US" sz="850" dirty="0">
+                <a:solidFill>
+                  <a:srgbClr val="475569"/>
+                </a:solidFill>
+                <a:latin typeface="Calibri" pitchFamily="34" charset="0"/>
+                <a:ea typeface="Calibri" pitchFamily="34" charset="-122"/>
+                <a:cs typeface="Calibri" pitchFamily="34" charset="-120"/>
+              </a:rPr>
+              <a:t>happening now, action in progress</a:t>
+            </a:r>
+            <a:endParaRPr lang="en-US" sz="850" dirty="0"/>
+          </a:p>
+        </p:txBody>
+      </p:sp>
+      <p:sp>
+        <p:nvSpPr>
+          <p:cNvPr id="26" name="Shape 24"/>
           <p:cNvSpPr/>
           <p:nvPr/>
         </p:nvSpPr>
@@ -24668,7 +26687,7 @@
       </p:sp>
       <p:sp>
         <p:nvSpPr>
-          <p:cNvPr id="23" name="Text 21"/>
+          <p:cNvPr id="27" name="Text 25"/>
           <p:cNvSpPr/>
           <p:nvPr/>
         </p:nvSpPr>
@@ -24707,7 +26726,7 @@
       </p:sp>
       <p:sp>
         <p:nvSpPr>
-          <p:cNvPr id="24" name="Shape 22"/>
+          <p:cNvPr id="28" name="Shape 26"/>
           <p:cNvSpPr/>
           <p:nvPr/>
         </p:nvSpPr>
@@ -24734,13 +26753,13 @@
       </p:sp>
       <p:sp>
         <p:nvSpPr>
-          <p:cNvPr id="25" name="Shape 23"/>
-          <p:cNvSpPr/>
-          <p:nvPr/>
-        </p:nvSpPr>
-        <p:spPr>
-          <a:xfrm>
-            <a:off x="2999232" y="3364992"/>
+          <p:cNvPr id="29" name="Shape 27"/>
+          <p:cNvSpPr/>
+          <p:nvPr/>
+        </p:nvSpPr>
+        <p:spPr>
+          <a:xfrm>
+            <a:off x="2313432" y="3364992"/>
             <a:ext cx="1645920" cy="475488"/>
           </a:xfrm>
           <a:prstGeom prst="rect">
@@ -24761,13 +26780,13 @@
       </p:sp>
       <p:sp>
         <p:nvSpPr>
-          <p:cNvPr id="26" name="Text 24"/>
-          <p:cNvSpPr/>
-          <p:nvPr/>
-        </p:nvSpPr>
-        <p:spPr>
-          <a:xfrm>
-            <a:off x="2999232" y="3364992"/>
+          <p:cNvPr id="30" name="Text 28"/>
+          <p:cNvSpPr/>
+          <p:nvPr/>
+        </p:nvSpPr>
+        <p:spPr>
+          <a:xfrm>
+            <a:off x="2313432" y="3364992"/>
             <a:ext cx="1645920" cy="475488"/>
           </a:xfrm>
           <a:prstGeom prst="rect">
@@ -24800,14 +26819,14 @@
       </p:sp>
       <p:sp>
         <p:nvSpPr>
-          <p:cNvPr id="27" name="Text 25"/>
-          <p:cNvSpPr/>
-          <p:nvPr/>
-        </p:nvSpPr>
-        <p:spPr>
-          <a:xfrm>
-            <a:off x="4645152" y="3364992"/>
-            <a:ext cx="1097280" cy="475488"/>
+          <p:cNvPr id="31" name="Text 29"/>
+          <p:cNvSpPr/>
+          <p:nvPr/>
+        </p:nvSpPr>
+        <p:spPr>
+          <a:xfrm>
+            <a:off x="3959352" y="3364992"/>
+            <a:ext cx="411480" cy="475488"/>
           </a:xfrm>
           <a:prstGeom prst="rect">
             <a:avLst/>
@@ -24839,13 +26858,13 @@
       </p:sp>
       <p:sp>
         <p:nvSpPr>
-          <p:cNvPr id="28" name="Shape 26"/>
-          <p:cNvSpPr/>
-          <p:nvPr/>
-        </p:nvSpPr>
-        <p:spPr>
-          <a:xfrm>
-            <a:off x="5742432" y="3364992"/>
+          <p:cNvPr id="32" name="Shape 30"/>
+          <p:cNvSpPr/>
+          <p:nvPr/>
+        </p:nvSpPr>
+        <p:spPr>
+          <a:xfrm>
+            <a:off x="4370832" y="3364992"/>
             <a:ext cx="1645920" cy="475488"/>
           </a:xfrm>
           <a:prstGeom prst="rect">
@@ -24866,13 +26885,13 @@
       </p:sp>
       <p:sp>
         <p:nvSpPr>
-          <p:cNvPr id="29" name="Text 27"/>
-          <p:cNvSpPr/>
-          <p:nvPr/>
-        </p:nvSpPr>
-        <p:spPr>
-          <a:xfrm>
-            <a:off x="5742432" y="3364992"/>
+          <p:cNvPr id="33" name="Text 31"/>
+          <p:cNvSpPr/>
+          <p:nvPr/>
+        </p:nvSpPr>
+        <p:spPr>
+          <a:xfrm>
+            <a:off x="4370832" y="3364992"/>
             <a:ext cx="1645920" cy="475488"/>
           </a:xfrm>
           <a:prstGeom prst="rect">
@@ -24897,7 +26916,7 @@
                 <a:ea typeface="Trebuchet MS" pitchFamily="34" charset="-122"/>
                 <a:cs typeface="Trebuchet MS" pitchFamily="34" charset="-120"/>
               </a:rPr>
-              <a:t>merge</a:t>
+              <a:t>mer</a:t>
             </a:r>
             <a:endParaRPr lang="en-US" sz="1400" dirty="0"/>
           </a:p>
@@ -24905,7 +26924,112 @@
       </p:sp>
       <p:sp>
         <p:nvSpPr>
-          <p:cNvPr id="30" name="Shape 28"/>
+          <p:cNvPr id="34" name="Text 32"/>
+          <p:cNvSpPr/>
+          <p:nvPr/>
+        </p:nvSpPr>
+        <p:spPr>
+          <a:xfrm>
+            <a:off x="6016752" y="3364992"/>
+            <a:ext cx="411480" cy="475488"/>
+          </a:xfrm>
+          <a:prstGeom prst="rect">
+            <a:avLst/>
+          </a:prstGeom>
+          <a:noFill/>
+          <a:ln/>
+        </p:spPr>
+        <p:txBody>
+          <a:bodyPr wrap="square" lIns="0" tIns="0" rIns="0" bIns="0" rtlCol="0" anchor="ctr"/>
+          <a:lstStyle/>
+          <a:p>
+            <a:pPr algn="ctr" indent="0" marL="0">
+              <a:buNone/>
+            </a:pPr>
+            <a:r>
+              <a:rPr lang="en-US" sz="1600" b="1" dirty="0">
+                <a:solidFill>
+                  <a:srgbClr val="0D9488"/>
+                </a:solidFill>
+                <a:latin typeface="Trebuchet MS" pitchFamily="34" charset="0"/>
+                <a:ea typeface="Trebuchet MS" pitchFamily="34" charset="-122"/>
+                <a:cs typeface="Trebuchet MS" pitchFamily="34" charset="-120"/>
+              </a:rPr>
+              <a:t>·</a:t>
+            </a:r>
+            <a:endParaRPr lang="en-US" sz="1600" dirty="0"/>
+          </a:p>
+        </p:txBody>
+      </p:sp>
+      <p:sp>
+        <p:nvSpPr>
+          <p:cNvPr id="35" name="Shape 33"/>
+          <p:cNvSpPr/>
+          <p:nvPr/>
+        </p:nvSpPr>
+        <p:spPr>
+          <a:xfrm>
+            <a:off x="6428232" y="3364992"/>
+            <a:ext cx="1645920" cy="475488"/>
+          </a:xfrm>
+          <a:prstGeom prst="rect">
+            <a:avLst>
+              <a:gd name="adj" fmla="val 9615"/>
+            </a:avLst>
+          </a:prstGeom>
+          <a:solidFill>
+            <a:srgbClr val="FFFFFF"/>
+          </a:solidFill>
+          <a:ln w="12700">
+            <a:solidFill>
+              <a:srgbClr val="0D9488"/>
+            </a:solidFill>
+            <a:prstDash val="solid"/>
+          </a:ln>
+        </p:spPr>
+      </p:sp>
+      <p:sp>
+        <p:nvSpPr>
+          <p:cNvPr id="36" name="Text 34"/>
+          <p:cNvSpPr/>
+          <p:nvPr/>
+        </p:nvSpPr>
+        <p:spPr>
+          <a:xfrm>
+            <a:off x="6428232" y="3364992"/>
+            <a:ext cx="1645920" cy="475488"/>
+          </a:xfrm>
+          <a:prstGeom prst="rect">
+            <a:avLst/>
+          </a:prstGeom>
+          <a:noFill/>
+          <a:ln/>
+        </p:spPr>
+        <p:txBody>
+          <a:bodyPr wrap="square" lIns="0" tIns="0" rIns="0" bIns="0" rtlCol="0" anchor="ctr"/>
+          <a:lstStyle/>
+          <a:p>
+            <a:pPr algn="ctr" indent="0" marL="0">
+              <a:buNone/>
+            </a:pPr>
+            <a:r>
+              <a:rPr lang="en-US" sz="1400" b="1" dirty="0">
+                <a:solidFill>
+                  <a:srgbClr val="0D9488"/>
+                </a:solidFill>
+                <a:latin typeface="Trebuchet MS" pitchFamily="34" charset="0"/>
+                <a:ea typeface="Trebuchet MS" pitchFamily="34" charset="-122"/>
+                <a:cs typeface="Trebuchet MS" pitchFamily="34" charset="-120"/>
+              </a:rPr>
+              <a:t>ging</a:t>
+            </a:r>
+            <a:endParaRPr lang="en-US" sz="1400" dirty="0"/>
+          </a:p>
+        </p:txBody>
+      </p:sp>
+      <p:sp>
+        <p:nvSpPr>
+          <p:cNvPr id="37" name="Shape 35"/>
           <p:cNvSpPr/>
           <p:nvPr/>
         </p:nvSpPr>
@@ -24932,7 +27056,7 @@
       </p:sp>
       <p:sp>
         <p:nvSpPr>
-          <p:cNvPr id="31" name="Text 29"/>
+          <p:cNvPr id="38" name="Text 36"/>
           <p:cNvSpPr/>
           <p:nvPr/>
         </p:nvSpPr>
@@ -24971,18 +27095,18 @@
       </p:sp>
       <p:sp>
         <p:nvSpPr>
-          <p:cNvPr id="32" name="Shape 30"/>
+          <p:cNvPr id="39" name="Shape 37"/>
           <p:cNvSpPr/>
           <p:nvPr/>
         </p:nvSpPr>
         <p:spPr>
           <a:xfrm>
             <a:off x="1874520" y="4096512"/>
-            <a:ext cx="6903720" cy="804672"/>
+            <a:ext cx="6903720" cy="658368"/>
           </a:xfrm>
           <a:prstGeom prst="rect">
             <a:avLst>
-              <a:gd name="adj" fmla="val 6818"/>
+              <a:gd name="adj" fmla="val 8333"/>
             </a:avLst>
           </a:prstGeom>
           <a:solidFill>
@@ -24998,18 +27122,18 @@
       </p:sp>
       <p:sp>
         <p:nvSpPr>
-          <p:cNvPr id="33" name="Shape 31"/>
-          <p:cNvSpPr/>
-          <p:nvPr/>
-        </p:nvSpPr>
-        <p:spPr>
-          <a:xfrm>
-            <a:off x="2670048" y="4169664"/>
-            <a:ext cx="685800" cy="384048"/>
+          <p:cNvPr id="40" name="Shape 38"/>
+          <p:cNvSpPr/>
+          <p:nvPr/>
+        </p:nvSpPr>
+        <p:spPr>
+          <a:xfrm>
+            <a:off x="2427732" y="4169664"/>
+            <a:ext cx="685800" cy="475488"/>
           </a:xfrm>
           <a:prstGeom prst="rect">
             <a:avLst>
-              <a:gd name="adj" fmla="val 9524"/>
+              <a:gd name="adj" fmla="val 7692"/>
             </a:avLst>
           </a:prstGeom>
           <a:solidFill>
@@ -25025,14 +27149,14 @@
       </p:sp>
       <p:sp>
         <p:nvSpPr>
-          <p:cNvPr id="34" name="Text 32"/>
-          <p:cNvSpPr/>
-          <p:nvPr/>
-        </p:nvSpPr>
-        <p:spPr>
-          <a:xfrm>
-            <a:off x="2670048" y="4169664"/>
-            <a:ext cx="685800" cy="384048"/>
+          <p:cNvPr id="41" name="Text 39"/>
+          <p:cNvSpPr/>
+          <p:nvPr/>
+        </p:nvSpPr>
+        <p:spPr>
+          <a:xfrm>
+            <a:off x="2427732" y="4169664"/>
+            <a:ext cx="685800" cy="475488"/>
           </a:xfrm>
           <a:prstGeom prst="rect">
             <a:avLst/>
@@ -25064,18 +27188,18 @@
       </p:sp>
       <p:sp>
         <p:nvSpPr>
-          <p:cNvPr id="35" name="Shape 33"/>
-          <p:cNvSpPr/>
-          <p:nvPr/>
-        </p:nvSpPr>
-        <p:spPr>
-          <a:xfrm>
-            <a:off x="4123944" y="4169664"/>
-            <a:ext cx="685800" cy="384048"/>
+          <p:cNvPr id="42" name="Shape 40"/>
+          <p:cNvSpPr/>
+          <p:nvPr/>
+        </p:nvSpPr>
+        <p:spPr>
+          <a:xfrm>
+            <a:off x="3639312" y="4169664"/>
+            <a:ext cx="685800" cy="475488"/>
           </a:xfrm>
           <a:prstGeom prst="rect">
             <a:avLst>
-              <a:gd name="adj" fmla="val 9524"/>
+              <a:gd name="adj" fmla="val 7692"/>
             </a:avLst>
           </a:prstGeom>
           <a:solidFill>
@@ -25091,14 +27215,14 @@
       </p:sp>
       <p:sp>
         <p:nvSpPr>
-          <p:cNvPr id="36" name="Text 34"/>
-          <p:cNvSpPr/>
-          <p:nvPr/>
-        </p:nvSpPr>
-        <p:spPr>
-          <a:xfrm>
-            <a:off x="4123944" y="4169664"/>
-            <a:ext cx="685800" cy="384048"/>
+          <p:cNvPr id="43" name="Text 41"/>
+          <p:cNvSpPr/>
+          <p:nvPr/>
+        </p:nvSpPr>
+        <p:spPr>
+          <a:xfrm>
+            <a:off x="3639312" y="4169664"/>
+            <a:ext cx="685800" cy="475488"/>
           </a:xfrm>
           <a:prstGeom prst="rect">
             <a:avLst/>
@@ -25130,18 +27254,18 @@
       </p:sp>
       <p:sp>
         <p:nvSpPr>
-          <p:cNvPr id="37" name="Shape 35"/>
-          <p:cNvSpPr/>
-          <p:nvPr/>
-        </p:nvSpPr>
-        <p:spPr>
-          <a:xfrm>
-            <a:off x="5577840" y="4169664"/>
-            <a:ext cx="685800" cy="384048"/>
+          <p:cNvPr id="44" name="Shape 42"/>
+          <p:cNvSpPr/>
+          <p:nvPr/>
+        </p:nvSpPr>
+        <p:spPr>
+          <a:xfrm>
+            <a:off x="4850892" y="4169664"/>
+            <a:ext cx="685800" cy="475488"/>
           </a:xfrm>
           <a:prstGeom prst="rect">
             <a:avLst>
-              <a:gd name="adj" fmla="val 9524"/>
+              <a:gd name="adj" fmla="val 7692"/>
             </a:avLst>
           </a:prstGeom>
           <a:solidFill>
@@ -25157,14 +27281,14 @@
       </p:sp>
       <p:sp>
         <p:nvSpPr>
-          <p:cNvPr id="38" name="Text 36"/>
-          <p:cNvSpPr/>
-          <p:nvPr/>
-        </p:nvSpPr>
-        <p:spPr>
-          <a:xfrm>
-            <a:off x="5577840" y="4169664"/>
-            <a:ext cx="685800" cy="384048"/>
+          <p:cNvPr id="45" name="Text 43"/>
+          <p:cNvSpPr/>
+          <p:nvPr/>
+        </p:nvSpPr>
+        <p:spPr>
+          <a:xfrm>
+            <a:off x="4850892" y="4169664"/>
+            <a:ext cx="685800" cy="475488"/>
           </a:xfrm>
           <a:prstGeom prst="rect">
             <a:avLst/>
@@ -25196,18 +27320,18 @@
       </p:sp>
       <p:sp>
         <p:nvSpPr>
-          <p:cNvPr id="39" name="Shape 37"/>
-          <p:cNvSpPr/>
-          <p:nvPr/>
-        </p:nvSpPr>
-        <p:spPr>
-          <a:xfrm>
-            <a:off x="7031736" y="4169664"/>
-            <a:ext cx="685800" cy="384048"/>
+          <p:cNvPr id="46" name="Shape 44"/>
+          <p:cNvSpPr/>
+          <p:nvPr/>
+        </p:nvSpPr>
+        <p:spPr>
+          <a:xfrm>
+            <a:off x="6062472" y="4169664"/>
+            <a:ext cx="685800" cy="475488"/>
           </a:xfrm>
           <a:prstGeom prst="rect">
             <a:avLst>
-              <a:gd name="adj" fmla="val 9524"/>
+              <a:gd name="adj" fmla="val 7692"/>
             </a:avLst>
           </a:prstGeom>
           <a:solidFill>
@@ -25223,14 +27347,14 @@
       </p:sp>
       <p:sp>
         <p:nvSpPr>
-          <p:cNvPr id="40" name="Text 38"/>
-          <p:cNvSpPr/>
-          <p:nvPr/>
-        </p:nvSpPr>
-        <p:spPr>
-          <a:xfrm>
-            <a:off x="7031736" y="4169664"/>
-            <a:ext cx="685800" cy="384048"/>
+          <p:cNvPr id="47" name="Text 45"/>
+          <p:cNvSpPr/>
+          <p:nvPr/>
+        </p:nvSpPr>
+        <p:spPr>
+          <a:xfrm>
+            <a:off x="6062472" y="4169664"/>
+            <a:ext cx="685800" cy="475488"/>
           </a:xfrm>
           <a:prstGeom prst="rect">
             <a:avLst/>
@@ -25254,7 +27378,7 @@
                 <a:ea typeface="Trebuchet MS" pitchFamily="34" charset="-122"/>
                 <a:cs typeface="Trebuchet MS" pitchFamily="34" charset="-120"/>
               </a:rPr>
-              <a:t>ge</a:t>
+              <a:t>g</a:t>
             </a:r>
             <a:endParaRPr lang="en-US" sz="900" dirty="0"/>
           </a:p>
@@ -25262,40 +27386,67 @@
       </p:sp>
       <p:sp>
         <p:nvSpPr>
-          <p:cNvPr id="41" name="Text 39"/>
-          <p:cNvSpPr/>
-          <p:nvPr/>
-        </p:nvSpPr>
-        <p:spPr>
-          <a:xfrm>
-            <a:off x="7031736" y="4572000"/>
-            <a:ext cx="685800" cy="219456"/>
-          </a:xfrm>
-          <a:prstGeom prst="rect">
-            <a:avLst/>
-          </a:prstGeom>
-          <a:noFill/>
-          <a:ln/>
-        </p:spPr>
-        <p:txBody>
-          <a:bodyPr wrap="square" lIns="0" tIns="0" rIns="0" bIns="0" rtlCol="0" anchor="t"/>
-          <a:lstStyle/>
-          <a:p>
-            <a:pPr algn="ctr" indent="0" marL="0">
-              <a:buNone/>
-            </a:pPr>
-            <a:r>
-              <a:rPr lang="en-US" sz="750" i="1" dirty="0">
-                <a:solidFill>
-                  <a:srgbClr val="94A3B8"/>
-                </a:solidFill>
-                <a:latin typeface="Calibri" pitchFamily="34" charset="0"/>
-                <a:ea typeface="Calibri" pitchFamily="34" charset="-122"/>
-                <a:cs typeface="Calibri" pitchFamily="34" charset="-120"/>
-              </a:rPr>
-              <a:t>/j/</a:t>
-            </a:r>
-            <a:endParaRPr lang="en-US" sz="750" dirty="0"/>
+          <p:cNvPr id="48" name="Shape 46"/>
+          <p:cNvSpPr/>
+          <p:nvPr/>
+        </p:nvSpPr>
+        <p:spPr>
+          <a:xfrm>
+            <a:off x="7274052" y="4169664"/>
+            <a:ext cx="685800" cy="475488"/>
+          </a:xfrm>
+          <a:prstGeom prst="rect">
+            <a:avLst>
+              <a:gd name="adj" fmla="val 7692"/>
+            </a:avLst>
+          </a:prstGeom>
+          <a:solidFill>
+            <a:srgbClr val="FFFFFF"/>
+          </a:solidFill>
+          <a:ln w="12700">
+            <a:solidFill>
+              <a:srgbClr val="DB2777"/>
+            </a:solidFill>
+            <a:prstDash val="solid"/>
+          </a:ln>
+        </p:spPr>
+      </p:sp>
+      <p:sp>
+        <p:nvSpPr>
+          <p:cNvPr id="49" name="Text 47"/>
+          <p:cNvSpPr/>
+          <p:nvPr/>
+        </p:nvSpPr>
+        <p:spPr>
+          <a:xfrm>
+            <a:off x="7274052" y="4169664"/>
+            <a:ext cx="685800" cy="475488"/>
+          </a:xfrm>
+          <a:prstGeom prst="rect">
+            <a:avLst/>
+          </a:prstGeom>
+          <a:noFill/>
+          <a:ln/>
+        </p:spPr>
+        <p:txBody>
+          <a:bodyPr wrap="square" lIns="0" tIns="0" rIns="0" bIns="0" rtlCol="0" anchor="ctr"/>
+          <a:lstStyle/>
+          <a:p>
+            <a:pPr algn="ctr" indent="0" marL="0">
+              <a:buNone/>
+            </a:pPr>
+            <a:r>
+              <a:rPr lang="en-US" sz="900" b="1" dirty="0">
+                <a:solidFill>
+                  <a:srgbClr val="9D174D"/>
+                </a:solidFill>
+                <a:latin typeface="Trebuchet MS" pitchFamily="34" charset="0"/>
+                <a:ea typeface="Trebuchet MS" pitchFamily="34" charset="-122"/>
+                <a:cs typeface="Trebuchet MS" pitchFamily="34" charset="-120"/>
+              </a:rPr>
+              <a:t>ing</a:t>
+            </a:r>
+            <a:endParaRPr lang="en-US" sz="900" dirty="0"/>
           </a:p>
         </p:txBody>
       </p:sp>
@@ -25585,7 +27736,7 @@
                 <a:ea typeface="Calibri" pitchFamily="34" charset="-122"/>
                 <a:cs typeface="Calibri" pitchFamily="34" charset="-120"/>
               </a:rPr>
-              <a:t>Word Labs  •  wordlabs.app  •  Root: 'merge' = to combine, sink into</a:t>
+              <a:t>Word Labs  •  wordlabs.app  •  Root: 'merge' = join, combine, sink into</a:t>
             </a:r>
             <a:endParaRPr lang="en-US" sz="800" dirty="0"/>
           </a:p>
@@ -25724,7 +27875,7 @@
                 <a:ea typeface="Trebuchet MS" pitchFamily="34" charset="-122"/>
                 <a:cs typeface="Trebuchet MS" pitchFamily="34" charset="-120"/>
               </a:rPr>
-              <a:t>submerge</a:t>
+              <a:t>submerged</a:t>
             </a:r>
             <a:endParaRPr lang="en-US" sz="2800" dirty="0"/>
           </a:p>
@@ -26412,7 +28563,7 @@
                 <a:ea typeface="Calibri" pitchFamily="34" charset="-122"/>
                 <a:cs typeface="Calibri" pitchFamily="34" charset="-120"/>
               </a:rPr>
-              <a:t>Word Labs  •  wordlabs.app  •  Root: 'merge' = to combine, sink into</a:t>
+              <a:t>Word Labs  •  wordlabs.app  •  Root: 'merge' = join, combine, sink into</a:t>
             </a:r>
             <a:endParaRPr lang="en-US" sz="800" dirty="0"/>
           </a:p>
@@ -26551,7 +28702,7 @@
                 <a:ea typeface="Trebuchet MS" pitchFamily="34" charset="-122"/>
                 <a:cs typeface="Trebuchet MS" pitchFamily="34" charset="-120"/>
               </a:rPr>
-              <a:t>submerge</a:t>
+              <a:t>submerged</a:t>
             </a:r>
             <a:endParaRPr lang="en-US" sz="2800" dirty="0"/>
           </a:p>
@@ -26631,7 +28782,7 @@
         </p:nvSpPr>
         <p:spPr>
           <a:xfrm>
-            <a:off x="2938272" y="2258568"/>
+            <a:off x="2221992" y="2258568"/>
             <a:ext cx="1828800" cy="292608"/>
           </a:xfrm>
           <a:prstGeom prst="rect">
@@ -26665,7 +28816,7 @@
         </p:nvSpPr>
         <p:spPr>
           <a:xfrm>
-            <a:off x="2938272" y="2258568"/>
+            <a:off x="2221992" y="2258568"/>
             <a:ext cx="1828800" cy="292608"/>
           </a:xfrm>
           <a:prstGeom prst="rect">
@@ -26704,7 +28855,7 @@
         </p:nvSpPr>
         <p:spPr>
           <a:xfrm>
-            <a:off x="2938272" y="2569464"/>
+            <a:off x="2221992" y="2569464"/>
             <a:ext cx="1828800" cy="201168"/>
           </a:xfrm>
           <a:prstGeom prst="rect">
@@ -26743,7 +28894,7 @@
         </p:nvSpPr>
         <p:spPr>
           <a:xfrm>
-            <a:off x="5803392" y="2258568"/>
+            <a:off x="4370832" y="2258568"/>
             <a:ext cx="1828800" cy="292608"/>
           </a:xfrm>
           <a:prstGeom prst="rect">
@@ -26777,7 +28928,7 @@
         </p:nvSpPr>
         <p:spPr>
           <a:xfrm>
-            <a:off x="5803392" y="2258568"/>
+            <a:off x="4370832" y="2258568"/>
             <a:ext cx="1828800" cy="292608"/>
           </a:xfrm>
           <a:prstGeom prst="rect">
@@ -26816,7 +28967,7 @@
         </p:nvSpPr>
         <p:spPr>
           <a:xfrm>
-            <a:off x="5803392" y="2569464"/>
+            <a:off x="4370832" y="2569464"/>
             <a:ext cx="1828800" cy="201168"/>
           </a:xfrm>
           <a:prstGeom prst="rect">
@@ -26841,7 +28992,7 @@
                 <a:ea typeface="Calibri" pitchFamily="34" charset="-122"/>
                 <a:cs typeface="Calibri" pitchFamily="34" charset="-120"/>
               </a:rPr>
-              <a:t>to combine, sink into</a:t>
+              <a:t>join, combine, sink into</a:t>
             </a:r>
             <a:endParaRPr lang="en-US" sz="850" dirty="0"/>
           </a:p>
@@ -26850,6 +29001,118 @@
       <p:sp>
         <p:nvSpPr>
           <p:cNvPr id="22" name="Shape 20"/>
+          <p:cNvSpPr/>
+          <p:nvPr/>
+        </p:nvSpPr>
+        <p:spPr>
+          <a:xfrm>
+            <a:off x="6519672" y="2258568"/>
+            <a:ext cx="1828800" cy="292608"/>
+          </a:xfrm>
+          <a:prstGeom prst="rect">
+            <a:avLst>
+              <a:gd name="adj" fmla="val 25000"/>
+            </a:avLst>
+          </a:prstGeom>
+          <a:solidFill>
+            <a:srgbClr val="FCE7F3"/>
+          </a:solidFill>
+          <a:ln w="19050">
+            <a:solidFill>
+              <a:srgbClr val="DB2777"/>
+            </a:solidFill>
+            <a:prstDash val="solid"/>
+          </a:ln>
+          <a:effectLst>
+            <a:outerShdw sx="100000" sy="100000" kx="0" ky="0" algn="bl" rotWithShape="0" blurRad="101600" dist="38100" dir="8100000">
+              <a:srgbClr val="000000">
+                <a:alpha val="12000"/>
+              </a:srgbClr>
+            </a:outerShdw>
+          </a:effectLst>
+        </p:spPr>
+      </p:sp>
+      <p:sp>
+        <p:nvSpPr>
+          <p:cNvPr id="23" name="Text 21"/>
+          <p:cNvSpPr/>
+          <p:nvPr/>
+        </p:nvSpPr>
+        <p:spPr>
+          <a:xfrm>
+            <a:off x="6519672" y="2258568"/>
+            <a:ext cx="1828800" cy="292608"/>
+          </a:xfrm>
+          <a:prstGeom prst="rect">
+            <a:avLst/>
+          </a:prstGeom>
+          <a:noFill/>
+          <a:ln/>
+        </p:spPr>
+        <p:txBody>
+          <a:bodyPr wrap="square" lIns="0" tIns="0" rIns="0" bIns="0" rtlCol="0" anchor="ctr"/>
+          <a:lstStyle/>
+          <a:p>
+            <a:pPr algn="ctr" indent="0" marL="0">
+              <a:buNone/>
+            </a:pPr>
+            <a:r>
+              <a:rPr lang="en-US" sz="1300" b="1" dirty="0">
+                <a:solidFill>
+                  <a:srgbClr val="9D174D"/>
+                </a:solidFill>
+                <a:latin typeface="Trebuchet MS" pitchFamily="34" charset="0"/>
+                <a:ea typeface="Trebuchet MS" pitchFamily="34" charset="-122"/>
+                <a:cs typeface="Trebuchet MS" pitchFamily="34" charset="-120"/>
+              </a:rPr>
+              <a:t>d</a:t>
+            </a:r>
+            <a:endParaRPr lang="en-US" sz="1300" dirty="0"/>
+          </a:p>
+        </p:txBody>
+      </p:sp>
+      <p:sp>
+        <p:nvSpPr>
+          <p:cNvPr id="24" name="Text 22"/>
+          <p:cNvSpPr/>
+          <p:nvPr/>
+        </p:nvSpPr>
+        <p:spPr>
+          <a:xfrm>
+            <a:off x="6519672" y="2569464"/>
+            <a:ext cx="1828800" cy="201168"/>
+          </a:xfrm>
+          <a:prstGeom prst="rect">
+            <a:avLst/>
+          </a:prstGeom>
+          <a:noFill/>
+          <a:ln/>
+        </p:spPr>
+        <p:txBody>
+          <a:bodyPr wrap="square" lIns="0" tIns="0" rIns="0" bIns="0" rtlCol="0" anchor="t"/>
+          <a:lstStyle/>
+          <a:p>
+            <a:pPr algn="ctr" indent="0" marL="0">
+              <a:buNone/>
+            </a:pPr>
+            <a:r>
+              <a:rPr lang="en-US" sz="850" dirty="0">
+                <a:solidFill>
+                  <a:srgbClr val="475569"/>
+                </a:solidFill>
+                <a:latin typeface="Calibri" pitchFamily="34" charset="0"/>
+                <a:ea typeface="Calibri" pitchFamily="34" charset="-122"/>
+                <a:cs typeface="Calibri" pitchFamily="34" charset="-120"/>
+              </a:rPr>
+              <a:t>in the past</a:t>
+            </a:r>
+            <a:endParaRPr lang="en-US" sz="850" dirty="0"/>
+          </a:p>
+        </p:txBody>
+      </p:sp>
+      <p:sp>
+        <p:nvSpPr>
+          <p:cNvPr id="25" name="Shape 23"/>
           <p:cNvSpPr/>
           <p:nvPr/>
         </p:nvSpPr>
@@ -26876,7 +29139,7 @@
       </p:sp>
       <p:sp>
         <p:nvSpPr>
-          <p:cNvPr id="23" name="Text 21"/>
+          <p:cNvPr id="26" name="Text 24"/>
           <p:cNvSpPr/>
           <p:nvPr/>
         </p:nvSpPr>
@@ -26915,7 +29178,7 @@
       </p:sp>
       <p:sp>
         <p:nvSpPr>
-          <p:cNvPr id="24" name="Shape 22"/>
+          <p:cNvPr id="27" name="Shape 25"/>
           <p:cNvSpPr/>
           <p:nvPr/>
         </p:nvSpPr>
@@ -26942,7 +29205,7 @@
       </p:sp>
       <p:sp>
         <p:nvSpPr>
-          <p:cNvPr id="25" name="Text 23"/>
+          <p:cNvPr id="28" name="Text 26"/>
           <p:cNvSpPr/>
           <p:nvPr/>
         </p:nvSpPr>
@@ -26981,7 +29244,7 @@
       </p:sp>
       <p:sp>
         <p:nvSpPr>
-          <p:cNvPr id="26" name="Shape 24"/>
+          <p:cNvPr id="29" name="Shape 27"/>
           <p:cNvSpPr/>
           <p:nvPr/>
         </p:nvSpPr>
@@ -27008,7 +29271,7 @@
       </p:sp>
       <p:sp>
         <p:nvSpPr>
-          <p:cNvPr id="27" name="Text 25"/>
+          <p:cNvPr id="30" name="Text 28"/>
           <p:cNvSpPr/>
           <p:nvPr/>
         </p:nvSpPr>
@@ -27047,7 +29310,7 @@
       </p:sp>
       <p:sp>
         <p:nvSpPr>
-          <p:cNvPr id="28" name="Shape 26"/>
+          <p:cNvPr id="31" name="Shape 29"/>
           <p:cNvSpPr/>
           <p:nvPr/>
         </p:nvSpPr>
@@ -27074,7 +29337,7 @@
       </p:sp>
       <p:sp>
         <p:nvSpPr>
-          <p:cNvPr id="29" name="Text 27"/>
+          <p:cNvPr id="32" name="Text 30"/>
           <p:cNvSpPr/>
           <p:nvPr/>
         </p:nvSpPr>
@@ -27397,7 +29660,7 @@
                 <a:ea typeface="Calibri" pitchFamily="34" charset="-122"/>
                 <a:cs typeface="Calibri" pitchFamily="34" charset="-120"/>
               </a:rPr>
-              <a:t>Word Labs  •  wordlabs.app  •  Root: 'merge' = to combine, sink into</a:t>
+              <a:t>Word Labs  •  wordlabs.app  •  Root: 'merge' = join, combine, sink into</a:t>
             </a:r>
             <a:endParaRPr lang="en-US" sz="800" dirty="0"/>
           </a:p>
@@ -27536,7 +29799,7 @@
                 <a:ea typeface="Trebuchet MS" pitchFamily="34" charset="-122"/>
                 <a:cs typeface="Trebuchet MS" pitchFamily="34" charset="-120"/>
               </a:rPr>
-              <a:t>submerge</a:t>
+              <a:t>submerged</a:t>
             </a:r>
             <a:endParaRPr lang="en-US" sz="2800" dirty="0"/>
           </a:p>
@@ -27616,7 +29879,7 @@
         </p:nvSpPr>
         <p:spPr>
           <a:xfrm>
-            <a:off x="2938272" y="2258568"/>
+            <a:off x="2221992" y="2258568"/>
             <a:ext cx="1828800" cy="292608"/>
           </a:xfrm>
           <a:prstGeom prst="rect">
@@ -27650,7 +29913,7 @@
         </p:nvSpPr>
         <p:spPr>
           <a:xfrm>
-            <a:off x="2938272" y="2258568"/>
+            <a:off x="2221992" y="2258568"/>
             <a:ext cx="1828800" cy="292608"/>
           </a:xfrm>
           <a:prstGeom prst="rect">
@@ -27689,7 +29952,7 @@
         </p:nvSpPr>
         <p:spPr>
           <a:xfrm>
-            <a:off x="2938272" y="2569464"/>
+            <a:off x="2221992" y="2569464"/>
             <a:ext cx="1828800" cy="201168"/>
           </a:xfrm>
           <a:prstGeom prst="rect">
@@ -27728,7 +29991,7 @@
         </p:nvSpPr>
         <p:spPr>
           <a:xfrm>
-            <a:off x="5803392" y="2258568"/>
+            <a:off x="4370832" y="2258568"/>
             <a:ext cx="1828800" cy="292608"/>
           </a:xfrm>
           <a:prstGeom prst="rect">
@@ -27762,7 +30025,7 @@
         </p:nvSpPr>
         <p:spPr>
           <a:xfrm>
-            <a:off x="5803392" y="2258568"/>
+            <a:off x="4370832" y="2258568"/>
             <a:ext cx="1828800" cy="292608"/>
           </a:xfrm>
           <a:prstGeom prst="rect">
@@ -27801,7 +30064,7 @@
         </p:nvSpPr>
         <p:spPr>
           <a:xfrm>
-            <a:off x="5803392" y="2569464"/>
+            <a:off x="4370832" y="2569464"/>
             <a:ext cx="1828800" cy="201168"/>
           </a:xfrm>
           <a:prstGeom prst="rect">
@@ -27826,7 +30089,7 @@
                 <a:ea typeface="Calibri" pitchFamily="34" charset="-122"/>
                 <a:cs typeface="Calibri" pitchFamily="34" charset="-120"/>
               </a:rPr>
-              <a:t>to combine, sink into</a:t>
+              <a:t>join, combine, sink into</a:t>
             </a:r>
             <a:endParaRPr lang="en-US" sz="850" dirty="0"/>
           </a:p>
@@ -27835,6 +30098,118 @@
       <p:sp>
         <p:nvSpPr>
           <p:cNvPr id="22" name="Shape 20"/>
+          <p:cNvSpPr/>
+          <p:nvPr/>
+        </p:nvSpPr>
+        <p:spPr>
+          <a:xfrm>
+            <a:off x="6519672" y="2258568"/>
+            <a:ext cx="1828800" cy="292608"/>
+          </a:xfrm>
+          <a:prstGeom prst="rect">
+            <a:avLst>
+              <a:gd name="adj" fmla="val 25000"/>
+            </a:avLst>
+          </a:prstGeom>
+          <a:solidFill>
+            <a:srgbClr val="FCE7F3"/>
+          </a:solidFill>
+          <a:ln w="19050">
+            <a:solidFill>
+              <a:srgbClr val="DB2777"/>
+            </a:solidFill>
+            <a:prstDash val="solid"/>
+          </a:ln>
+          <a:effectLst>
+            <a:outerShdw sx="100000" sy="100000" kx="0" ky="0" algn="bl" rotWithShape="0" blurRad="101600" dist="38100" dir="8100000">
+              <a:srgbClr val="000000">
+                <a:alpha val="12000"/>
+              </a:srgbClr>
+            </a:outerShdw>
+          </a:effectLst>
+        </p:spPr>
+      </p:sp>
+      <p:sp>
+        <p:nvSpPr>
+          <p:cNvPr id="23" name="Text 21"/>
+          <p:cNvSpPr/>
+          <p:nvPr/>
+        </p:nvSpPr>
+        <p:spPr>
+          <a:xfrm>
+            <a:off x="6519672" y="2258568"/>
+            <a:ext cx="1828800" cy="292608"/>
+          </a:xfrm>
+          <a:prstGeom prst="rect">
+            <a:avLst/>
+          </a:prstGeom>
+          <a:noFill/>
+          <a:ln/>
+        </p:spPr>
+        <p:txBody>
+          <a:bodyPr wrap="square" lIns="0" tIns="0" rIns="0" bIns="0" rtlCol="0" anchor="ctr"/>
+          <a:lstStyle/>
+          <a:p>
+            <a:pPr algn="ctr" indent="0" marL="0">
+              <a:buNone/>
+            </a:pPr>
+            <a:r>
+              <a:rPr lang="en-US" sz="1300" b="1" dirty="0">
+                <a:solidFill>
+                  <a:srgbClr val="9D174D"/>
+                </a:solidFill>
+                <a:latin typeface="Trebuchet MS" pitchFamily="34" charset="0"/>
+                <a:ea typeface="Trebuchet MS" pitchFamily="34" charset="-122"/>
+                <a:cs typeface="Trebuchet MS" pitchFamily="34" charset="-120"/>
+              </a:rPr>
+              <a:t>d</a:t>
+            </a:r>
+            <a:endParaRPr lang="en-US" sz="1300" dirty="0"/>
+          </a:p>
+        </p:txBody>
+      </p:sp>
+      <p:sp>
+        <p:nvSpPr>
+          <p:cNvPr id="24" name="Text 22"/>
+          <p:cNvSpPr/>
+          <p:nvPr/>
+        </p:nvSpPr>
+        <p:spPr>
+          <a:xfrm>
+            <a:off x="6519672" y="2569464"/>
+            <a:ext cx="1828800" cy="201168"/>
+          </a:xfrm>
+          <a:prstGeom prst="rect">
+            <a:avLst/>
+          </a:prstGeom>
+          <a:noFill/>
+          <a:ln/>
+        </p:spPr>
+        <p:txBody>
+          <a:bodyPr wrap="square" lIns="0" tIns="0" rIns="0" bIns="0" rtlCol="0" anchor="t"/>
+          <a:lstStyle/>
+          <a:p>
+            <a:pPr algn="ctr" indent="0" marL="0">
+              <a:buNone/>
+            </a:pPr>
+            <a:r>
+              <a:rPr lang="en-US" sz="850" dirty="0">
+                <a:solidFill>
+                  <a:srgbClr val="475569"/>
+                </a:solidFill>
+                <a:latin typeface="Calibri" pitchFamily="34" charset="0"/>
+                <a:ea typeface="Calibri" pitchFamily="34" charset="-122"/>
+                <a:cs typeface="Calibri" pitchFamily="34" charset="-120"/>
+              </a:rPr>
+              <a:t>in the past</a:t>
+            </a:r>
+            <a:endParaRPr lang="en-US" sz="850" dirty="0"/>
+          </a:p>
+        </p:txBody>
+      </p:sp>
+      <p:sp>
+        <p:nvSpPr>
+          <p:cNvPr id="25" name="Shape 23"/>
           <p:cNvSpPr/>
           <p:nvPr/>
         </p:nvSpPr>
@@ -27861,7 +30236,7 @@
       </p:sp>
       <p:sp>
         <p:nvSpPr>
-          <p:cNvPr id="23" name="Text 21"/>
+          <p:cNvPr id="26" name="Text 24"/>
           <p:cNvSpPr/>
           <p:nvPr/>
         </p:nvSpPr>
@@ -27900,7 +30275,7 @@
       </p:sp>
       <p:sp>
         <p:nvSpPr>
-          <p:cNvPr id="24" name="Shape 22"/>
+          <p:cNvPr id="27" name="Shape 25"/>
           <p:cNvSpPr/>
           <p:nvPr/>
         </p:nvSpPr>
@@ -27927,7 +30302,7 @@
       </p:sp>
       <p:sp>
         <p:nvSpPr>
-          <p:cNvPr id="25" name="Shape 23"/>
+          <p:cNvPr id="28" name="Shape 26"/>
           <p:cNvSpPr/>
           <p:nvPr/>
         </p:nvSpPr>
@@ -27954,7 +30329,7 @@
       </p:sp>
       <p:sp>
         <p:nvSpPr>
-          <p:cNvPr id="26" name="Text 24"/>
+          <p:cNvPr id="29" name="Text 27"/>
           <p:cNvSpPr/>
           <p:nvPr/>
         </p:nvSpPr>
@@ -27993,7 +30368,7 @@
       </p:sp>
       <p:sp>
         <p:nvSpPr>
-          <p:cNvPr id="27" name="Text 25"/>
+          <p:cNvPr id="30" name="Text 28"/>
           <p:cNvSpPr/>
           <p:nvPr/>
         </p:nvSpPr>
@@ -28032,7 +30407,7 @@
       </p:sp>
       <p:sp>
         <p:nvSpPr>
-          <p:cNvPr id="28" name="Shape 26"/>
+          <p:cNvPr id="31" name="Shape 29"/>
           <p:cNvSpPr/>
           <p:nvPr/>
         </p:nvSpPr>
@@ -28059,7 +30434,7 @@
       </p:sp>
       <p:sp>
         <p:nvSpPr>
-          <p:cNvPr id="29" name="Text 27"/>
+          <p:cNvPr id="32" name="Text 30"/>
           <p:cNvSpPr/>
           <p:nvPr/>
         </p:nvSpPr>
@@ -28090,7 +30465,7 @@
                 <a:ea typeface="Trebuchet MS" pitchFamily="34" charset="-122"/>
                 <a:cs typeface="Trebuchet MS" pitchFamily="34" charset="-120"/>
               </a:rPr>
-              <a:t>merge</a:t>
+              <a:t>merged</a:t>
             </a:r>
             <a:endParaRPr lang="en-US" sz="1400" dirty="0"/>
           </a:p>
@@ -28098,7 +30473,7 @@
       </p:sp>
       <p:sp>
         <p:nvSpPr>
-          <p:cNvPr id="30" name="Shape 28"/>
+          <p:cNvPr id="33" name="Shape 31"/>
           <p:cNvSpPr/>
           <p:nvPr/>
         </p:nvSpPr>
@@ -28125,7 +30500,7 @@
       </p:sp>
       <p:sp>
         <p:nvSpPr>
-          <p:cNvPr id="31" name="Text 29"/>
+          <p:cNvPr id="34" name="Text 32"/>
           <p:cNvSpPr/>
           <p:nvPr/>
         </p:nvSpPr>
@@ -28164,7 +30539,7 @@
       </p:sp>
       <p:sp>
         <p:nvSpPr>
-          <p:cNvPr id="32" name="Shape 30"/>
+          <p:cNvPr id="35" name="Shape 33"/>
           <p:cNvSpPr/>
           <p:nvPr/>
         </p:nvSpPr>
@@ -28191,7 +30566,7 @@
       </p:sp>
       <p:sp>
         <p:nvSpPr>
-          <p:cNvPr id="33" name="Text 31"/>
+          <p:cNvPr id="36" name="Text 34"/>
           <p:cNvSpPr/>
           <p:nvPr/>
         </p:nvSpPr>
@@ -28514,7 +30889,7 @@
                 <a:ea typeface="Calibri" pitchFamily="34" charset="-122"/>
                 <a:cs typeface="Calibri" pitchFamily="34" charset="-120"/>
               </a:rPr>
-              <a:t>Word Labs  •  wordlabs.app  •  Root: 'merge' = to combine, sink into</a:t>
+              <a:t>Word Labs  •  wordlabs.app  •  Root: 'merge' = join, combine, sink into</a:t>
             </a:r>
             <a:endParaRPr lang="en-US" sz="800" dirty="0"/>
           </a:p>
@@ -28653,7 +31028,7 @@
                 <a:ea typeface="Trebuchet MS" pitchFamily="34" charset="-122"/>
                 <a:cs typeface="Trebuchet MS" pitchFamily="34" charset="-120"/>
               </a:rPr>
-              <a:t>submerge</a:t>
+              <a:t>submerged</a:t>
             </a:r>
             <a:endParaRPr lang="en-US" sz="2800" dirty="0"/>
           </a:p>
@@ -28733,7 +31108,7 @@
         </p:nvSpPr>
         <p:spPr>
           <a:xfrm>
-            <a:off x="2938272" y="2258568"/>
+            <a:off x="2221992" y="2258568"/>
             <a:ext cx="1828800" cy="292608"/>
           </a:xfrm>
           <a:prstGeom prst="rect">
@@ -28767,7 +31142,7 @@
         </p:nvSpPr>
         <p:spPr>
           <a:xfrm>
-            <a:off x="2938272" y="2258568"/>
+            <a:off x="2221992" y="2258568"/>
             <a:ext cx="1828800" cy="292608"/>
           </a:xfrm>
           <a:prstGeom prst="rect">
@@ -28806,7 +31181,7 @@
         </p:nvSpPr>
         <p:spPr>
           <a:xfrm>
-            <a:off x="2938272" y="2569464"/>
+            <a:off x="2221992" y="2569464"/>
             <a:ext cx="1828800" cy="201168"/>
           </a:xfrm>
           <a:prstGeom prst="rect">
@@ -28845,7 +31220,7 @@
         </p:nvSpPr>
         <p:spPr>
           <a:xfrm>
-            <a:off x="5803392" y="2258568"/>
+            <a:off x="4370832" y="2258568"/>
             <a:ext cx="1828800" cy="292608"/>
           </a:xfrm>
           <a:prstGeom prst="rect">
@@ -28879,7 +31254,7 @@
         </p:nvSpPr>
         <p:spPr>
           <a:xfrm>
-            <a:off x="5803392" y="2258568"/>
+            <a:off x="4370832" y="2258568"/>
             <a:ext cx="1828800" cy="292608"/>
           </a:xfrm>
           <a:prstGeom prst="rect">
@@ -28918,7 +31293,7 @@
         </p:nvSpPr>
         <p:spPr>
           <a:xfrm>
-            <a:off x="5803392" y="2569464"/>
+            <a:off x="4370832" y="2569464"/>
             <a:ext cx="1828800" cy="201168"/>
           </a:xfrm>
           <a:prstGeom prst="rect">
@@ -28943,7 +31318,7 @@
                 <a:ea typeface="Calibri" pitchFamily="34" charset="-122"/>
                 <a:cs typeface="Calibri" pitchFamily="34" charset="-120"/>
               </a:rPr>
-              <a:t>to combine, sink into</a:t>
+              <a:t>join, combine, sink into</a:t>
             </a:r>
             <a:endParaRPr lang="en-US" sz="850" dirty="0"/>
           </a:p>
@@ -28952,6 +31327,118 @@
       <p:sp>
         <p:nvSpPr>
           <p:cNvPr id="22" name="Shape 20"/>
+          <p:cNvSpPr/>
+          <p:nvPr/>
+        </p:nvSpPr>
+        <p:spPr>
+          <a:xfrm>
+            <a:off x="6519672" y="2258568"/>
+            <a:ext cx="1828800" cy="292608"/>
+          </a:xfrm>
+          <a:prstGeom prst="rect">
+            <a:avLst>
+              <a:gd name="adj" fmla="val 25000"/>
+            </a:avLst>
+          </a:prstGeom>
+          <a:solidFill>
+            <a:srgbClr val="FCE7F3"/>
+          </a:solidFill>
+          <a:ln w="19050">
+            <a:solidFill>
+              <a:srgbClr val="DB2777"/>
+            </a:solidFill>
+            <a:prstDash val="solid"/>
+          </a:ln>
+          <a:effectLst>
+            <a:outerShdw sx="100000" sy="100000" kx="0" ky="0" algn="bl" rotWithShape="0" blurRad="101600" dist="38100" dir="8100000">
+              <a:srgbClr val="000000">
+                <a:alpha val="12000"/>
+              </a:srgbClr>
+            </a:outerShdw>
+          </a:effectLst>
+        </p:spPr>
+      </p:sp>
+      <p:sp>
+        <p:nvSpPr>
+          <p:cNvPr id="23" name="Text 21"/>
+          <p:cNvSpPr/>
+          <p:nvPr/>
+        </p:nvSpPr>
+        <p:spPr>
+          <a:xfrm>
+            <a:off x="6519672" y="2258568"/>
+            <a:ext cx="1828800" cy="292608"/>
+          </a:xfrm>
+          <a:prstGeom prst="rect">
+            <a:avLst/>
+          </a:prstGeom>
+          <a:noFill/>
+          <a:ln/>
+        </p:spPr>
+        <p:txBody>
+          <a:bodyPr wrap="square" lIns="0" tIns="0" rIns="0" bIns="0" rtlCol="0" anchor="ctr"/>
+          <a:lstStyle/>
+          <a:p>
+            <a:pPr algn="ctr" indent="0" marL="0">
+              <a:buNone/>
+            </a:pPr>
+            <a:r>
+              <a:rPr lang="en-US" sz="1300" b="1" dirty="0">
+                <a:solidFill>
+                  <a:srgbClr val="9D174D"/>
+                </a:solidFill>
+                <a:latin typeface="Trebuchet MS" pitchFamily="34" charset="0"/>
+                <a:ea typeface="Trebuchet MS" pitchFamily="34" charset="-122"/>
+                <a:cs typeface="Trebuchet MS" pitchFamily="34" charset="-120"/>
+              </a:rPr>
+              <a:t>d</a:t>
+            </a:r>
+            <a:endParaRPr lang="en-US" sz="1300" dirty="0"/>
+          </a:p>
+        </p:txBody>
+      </p:sp>
+      <p:sp>
+        <p:nvSpPr>
+          <p:cNvPr id="24" name="Text 22"/>
+          <p:cNvSpPr/>
+          <p:nvPr/>
+        </p:nvSpPr>
+        <p:spPr>
+          <a:xfrm>
+            <a:off x="6519672" y="2569464"/>
+            <a:ext cx="1828800" cy="201168"/>
+          </a:xfrm>
+          <a:prstGeom prst="rect">
+            <a:avLst/>
+          </a:prstGeom>
+          <a:noFill/>
+          <a:ln/>
+        </p:spPr>
+        <p:txBody>
+          <a:bodyPr wrap="square" lIns="0" tIns="0" rIns="0" bIns="0" rtlCol="0" anchor="t"/>
+          <a:lstStyle/>
+          <a:p>
+            <a:pPr algn="ctr" indent="0" marL="0">
+              <a:buNone/>
+            </a:pPr>
+            <a:r>
+              <a:rPr lang="en-US" sz="850" dirty="0">
+                <a:solidFill>
+                  <a:srgbClr val="475569"/>
+                </a:solidFill>
+                <a:latin typeface="Calibri" pitchFamily="34" charset="0"/>
+                <a:ea typeface="Calibri" pitchFamily="34" charset="-122"/>
+                <a:cs typeface="Calibri" pitchFamily="34" charset="-120"/>
+              </a:rPr>
+              <a:t>in the past</a:t>
+            </a:r>
+            <a:endParaRPr lang="en-US" sz="850" dirty="0"/>
+          </a:p>
+        </p:txBody>
+      </p:sp>
+      <p:sp>
+        <p:nvSpPr>
+          <p:cNvPr id="25" name="Shape 23"/>
           <p:cNvSpPr/>
           <p:nvPr/>
         </p:nvSpPr>
@@ -28978,7 +31465,7 @@
       </p:sp>
       <p:sp>
         <p:nvSpPr>
-          <p:cNvPr id="23" name="Text 21"/>
+          <p:cNvPr id="26" name="Text 24"/>
           <p:cNvSpPr/>
           <p:nvPr/>
         </p:nvSpPr>
@@ -29017,7 +31504,7 @@
       </p:sp>
       <p:sp>
         <p:nvSpPr>
-          <p:cNvPr id="24" name="Shape 22"/>
+          <p:cNvPr id="27" name="Shape 25"/>
           <p:cNvSpPr/>
           <p:nvPr/>
         </p:nvSpPr>
@@ -29044,7 +31531,7 @@
       </p:sp>
       <p:sp>
         <p:nvSpPr>
-          <p:cNvPr id="25" name="Shape 23"/>
+          <p:cNvPr id="28" name="Shape 26"/>
           <p:cNvSpPr/>
           <p:nvPr/>
         </p:nvSpPr>
@@ -29071,7 +31558,7 @@
       </p:sp>
       <p:sp>
         <p:nvSpPr>
-          <p:cNvPr id="26" name="Text 24"/>
+          <p:cNvPr id="29" name="Text 27"/>
           <p:cNvSpPr/>
           <p:nvPr/>
         </p:nvSpPr>
@@ -29110,7 +31597,7 @@
       </p:sp>
       <p:sp>
         <p:nvSpPr>
-          <p:cNvPr id="27" name="Text 25"/>
+          <p:cNvPr id="30" name="Text 28"/>
           <p:cNvSpPr/>
           <p:nvPr/>
         </p:nvSpPr>
@@ -29149,7 +31636,7 @@
       </p:sp>
       <p:sp>
         <p:nvSpPr>
-          <p:cNvPr id="28" name="Shape 26"/>
+          <p:cNvPr id="31" name="Shape 29"/>
           <p:cNvSpPr/>
           <p:nvPr/>
         </p:nvSpPr>
@@ -29176,7 +31663,7 @@
       </p:sp>
       <p:sp>
         <p:nvSpPr>
-          <p:cNvPr id="29" name="Text 27"/>
+          <p:cNvPr id="32" name="Text 30"/>
           <p:cNvSpPr/>
           <p:nvPr/>
         </p:nvSpPr>
@@ -29207,7 +31694,7 @@
                 <a:ea typeface="Trebuchet MS" pitchFamily="34" charset="-122"/>
                 <a:cs typeface="Trebuchet MS" pitchFamily="34" charset="-120"/>
               </a:rPr>
-              <a:t>merge</a:t>
+              <a:t>merged</a:t>
             </a:r>
             <a:endParaRPr lang="en-US" sz="1400" dirty="0"/>
           </a:p>
@@ -29215,7 +31702,7 @@
       </p:sp>
       <p:sp>
         <p:nvSpPr>
-          <p:cNvPr id="30" name="Shape 28"/>
+          <p:cNvPr id="33" name="Shape 31"/>
           <p:cNvSpPr/>
           <p:nvPr/>
         </p:nvSpPr>
@@ -29242,7 +31729,7 @@
       </p:sp>
       <p:sp>
         <p:nvSpPr>
-          <p:cNvPr id="31" name="Text 29"/>
+          <p:cNvPr id="34" name="Text 32"/>
           <p:cNvSpPr/>
           <p:nvPr/>
         </p:nvSpPr>
@@ -29281,7 +31768,7 @@
       </p:sp>
       <p:sp>
         <p:nvSpPr>
-          <p:cNvPr id="32" name="Shape 30"/>
+          <p:cNvPr id="35" name="Shape 33"/>
           <p:cNvSpPr/>
           <p:nvPr/>
         </p:nvSpPr>
@@ -29308,13 +31795,13 @@
       </p:sp>
       <p:sp>
         <p:nvSpPr>
-          <p:cNvPr id="33" name="Shape 31"/>
-          <p:cNvSpPr/>
-          <p:nvPr/>
-        </p:nvSpPr>
-        <p:spPr>
-          <a:xfrm>
-            <a:off x="2254649" y="4169664"/>
+          <p:cNvPr id="36" name="Shape 34"/>
+          <p:cNvSpPr/>
+          <p:nvPr/>
+        </p:nvSpPr>
+        <p:spPr>
+          <a:xfrm>
+            <a:off x="2124837" y="4169664"/>
             <a:ext cx="685800" cy="384048"/>
           </a:xfrm>
           <a:prstGeom prst="rect">
@@ -29335,13 +31822,13 @@
       </p:sp>
       <p:sp>
         <p:nvSpPr>
-          <p:cNvPr id="34" name="Text 32"/>
-          <p:cNvSpPr/>
-          <p:nvPr/>
-        </p:nvSpPr>
-        <p:spPr>
-          <a:xfrm>
-            <a:off x="2254649" y="4169664"/>
+          <p:cNvPr id="37" name="Text 35"/>
+          <p:cNvSpPr/>
+          <p:nvPr/>
+        </p:nvSpPr>
+        <p:spPr>
+          <a:xfrm>
+            <a:off x="2124837" y="4169664"/>
             <a:ext cx="685800" cy="384048"/>
           </a:xfrm>
           <a:prstGeom prst="rect">
@@ -29374,13 +31861,13 @@
       </p:sp>
       <p:sp>
         <p:nvSpPr>
-          <p:cNvPr id="35" name="Shape 33"/>
-          <p:cNvSpPr/>
-          <p:nvPr/>
-        </p:nvSpPr>
-        <p:spPr>
-          <a:xfrm>
-            <a:off x="3293146" y="4169664"/>
+          <p:cNvPr id="38" name="Shape 36"/>
+          <p:cNvSpPr/>
+          <p:nvPr/>
+        </p:nvSpPr>
+        <p:spPr>
+          <a:xfrm>
+            <a:off x="3033522" y="4169664"/>
             <a:ext cx="685800" cy="384048"/>
           </a:xfrm>
           <a:prstGeom prst="rect">
@@ -29401,13 +31888,13 @@
       </p:sp>
       <p:sp>
         <p:nvSpPr>
-          <p:cNvPr id="36" name="Text 34"/>
-          <p:cNvSpPr/>
-          <p:nvPr/>
-        </p:nvSpPr>
-        <p:spPr>
-          <a:xfrm>
-            <a:off x="3293146" y="4169664"/>
+          <p:cNvPr id="39" name="Text 37"/>
+          <p:cNvSpPr/>
+          <p:nvPr/>
+        </p:nvSpPr>
+        <p:spPr>
+          <a:xfrm>
+            <a:off x="3033522" y="4169664"/>
             <a:ext cx="685800" cy="384048"/>
           </a:xfrm>
           <a:prstGeom prst="rect">
@@ -29440,13 +31927,13 @@
       </p:sp>
       <p:sp>
         <p:nvSpPr>
-          <p:cNvPr id="37" name="Shape 35"/>
-          <p:cNvSpPr/>
-          <p:nvPr/>
-        </p:nvSpPr>
-        <p:spPr>
-          <a:xfrm>
-            <a:off x="4331643" y="4169664"/>
+          <p:cNvPr id="40" name="Shape 38"/>
+          <p:cNvSpPr/>
+          <p:nvPr/>
+        </p:nvSpPr>
+        <p:spPr>
+          <a:xfrm>
+            <a:off x="3942207" y="4169664"/>
             <a:ext cx="685800" cy="384048"/>
           </a:xfrm>
           <a:prstGeom prst="rect">
@@ -29467,13 +31954,13 @@
       </p:sp>
       <p:sp>
         <p:nvSpPr>
-          <p:cNvPr id="38" name="Text 36"/>
-          <p:cNvSpPr/>
-          <p:nvPr/>
-        </p:nvSpPr>
-        <p:spPr>
-          <a:xfrm>
-            <a:off x="4331643" y="4169664"/>
+          <p:cNvPr id="41" name="Text 39"/>
+          <p:cNvSpPr/>
+          <p:nvPr/>
+        </p:nvSpPr>
+        <p:spPr>
+          <a:xfrm>
+            <a:off x="3942207" y="4169664"/>
             <a:ext cx="685800" cy="384048"/>
           </a:xfrm>
           <a:prstGeom prst="rect">
@@ -29506,13 +31993,13 @@
       </p:sp>
       <p:sp>
         <p:nvSpPr>
-          <p:cNvPr id="39" name="Shape 37"/>
-          <p:cNvSpPr/>
-          <p:nvPr/>
-        </p:nvSpPr>
-        <p:spPr>
-          <a:xfrm>
-            <a:off x="5370141" y="4169664"/>
+          <p:cNvPr id="42" name="Shape 40"/>
+          <p:cNvSpPr/>
+          <p:nvPr/>
+        </p:nvSpPr>
+        <p:spPr>
+          <a:xfrm>
+            <a:off x="4850892" y="4169664"/>
             <a:ext cx="685800" cy="384048"/>
           </a:xfrm>
           <a:prstGeom prst="rect">
@@ -29533,13 +32020,13 @@
       </p:sp>
       <p:sp>
         <p:nvSpPr>
-          <p:cNvPr id="40" name="Text 38"/>
-          <p:cNvSpPr/>
-          <p:nvPr/>
-        </p:nvSpPr>
-        <p:spPr>
-          <a:xfrm>
-            <a:off x="5370141" y="4169664"/>
+          <p:cNvPr id="43" name="Text 41"/>
+          <p:cNvSpPr/>
+          <p:nvPr/>
+        </p:nvSpPr>
+        <p:spPr>
+          <a:xfrm>
+            <a:off x="4850892" y="4169664"/>
             <a:ext cx="685800" cy="384048"/>
           </a:xfrm>
           <a:prstGeom prst="rect">
@@ -29572,13 +32059,13 @@
       </p:sp>
       <p:sp>
         <p:nvSpPr>
-          <p:cNvPr id="41" name="Shape 39"/>
-          <p:cNvSpPr/>
-          <p:nvPr/>
-        </p:nvSpPr>
-        <p:spPr>
-          <a:xfrm>
-            <a:off x="6408638" y="4169664"/>
+          <p:cNvPr id="44" name="Shape 42"/>
+          <p:cNvSpPr/>
+          <p:nvPr/>
+        </p:nvSpPr>
+        <p:spPr>
+          <a:xfrm>
+            <a:off x="5759577" y="4169664"/>
             <a:ext cx="685800" cy="384048"/>
           </a:xfrm>
           <a:prstGeom prst="rect">
@@ -29599,13 +32086,13 @@
       </p:sp>
       <p:sp>
         <p:nvSpPr>
-          <p:cNvPr id="42" name="Text 40"/>
-          <p:cNvSpPr/>
-          <p:nvPr/>
-        </p:nvSpPr>
-        <p:spPr>
-          <a:xfrm>
-            <a:off x="6408638" y="4169664"/>
+          <p:cNvPr id="45" name="Text 43"/>
+          <p:cNvSpPr/>
+          <p:nvPr/>
+        </p:nvSpPr>
+        <p:spPr>
+          <a:xfrm>
+            <a:off x="5759577" y="4169664"/>
             <a:ext cx="685800" cy="384048"/>
           </a:xfrm>
           <a:prstGeom prst="rect">
@@ -29638,13 +32125,13 @@
       </p:sp>
       <p:sp>
         <p:nvSpPr>
-          <p:cNvPr id="43" name="Shape 41"/>
-          <p:cNvSpPr/>
-          <p:nvPr/>
-        </p:nvSpPr>
-        <p:spPr>
-          <a:xfrm>
-            <a:off x="7447135" y="4169664"/>
+          <p:cNvPr id="46" name="Shape 44"/>
+          <p:cNvSpPr/>
+          <p:nvPr/>
+        </p:nvSpPr>
+        <p:spPr>
+          <a:xfrm>
+            <a:off x="6668262" y="4169664"/>
             <a:ext cx="685800" cy="384048"/>
           </a:xfrm>
           <a:prstGeom prst="rect">
@@ -29665,13 +32152,13 @@
       </p:sp>
       <p:sp>
         <p:nvSpPr>
-          <p:cNvPr id="44" name="Text 42"/>
-          <p:cNvSpPr/>
-          <p:nvPr/>
-        </p:nvSpPr>
-        <p:spPr>
-          <a:xfrm>
-            <a:off x="7447135" y="4169664"/>
+          <p:cNvPr id="47" name="Text 45"/>
+          <p:cNvSpPr/>
+          <p:nvPr/>
+        </p:nvSpPr>
+        <p:spPr>
+          <a:xfrm>
+            <a:off x="6668262" y="4169664"/>
             <a:ext cx="685800" cy="384048"/>
           </a:xfrm>
           <a:prstGeom prst="rect">
@@ -29704,13 +32191,13 @@
       </p:sp>
       <p:sp>
         <p:nvSpPr>
-          <p:cNvPr id="45" name="Text 43"/>
-          <p:cNvSpPr/>
-          <p:nvPr/>
-        </p:nvSpPr>
-        <p:spPr>
-          <a:xfrm>
-            <a:off x="7447135" y="4572000"/>
+          <p:cNvPr id="48" name="Text 46"/>
+          <p:cNvSpPr/>
+          <p:nvPr/>
+        </p:nvSpPr>
+        <p:spPr>
+          <a:xfrm>
+            <a:off x="6668262" y="4572000"/>
             <a:ext cx="685800" cy="219456"/>
           </a:xfrm>
           <a:prstGeom prst="rect">
@@ -29738,6 +32225,72 @@
               <a:t>/j/</a:t>
             </a:r>
             <a:endParaRPr lang="en-US" sz="750" dirty="0"/>
+          </a:p>
+        </p:txBody>
+      </p:sp>
+      <p:sp>
+        <p:nvSpPr>
+          <p:cNvPr id="49" name="Shape 47"/>
+          <p:cNvSpPr/>
+          <p:nvPr/>
+        </p:nvSpPr>
+        <p:spPr>
+          <a:xfrm>
+            <a:off x="7576947" y="4169664"/>
+            <a:ext cx="685800" cy="384048"/>
+          </a:xfrm>
+          <a:prstGeom prst="rect">
+            <a:avLst>
+              <a:gd name="adj" fmla="val 9524"/>
+            </a:avLst>
+          </a:prstGeom>
+          <a:solidFill>
+            <a:srgbClr val="FFFFFF"/>
+          </a:solidFill>
+          <a:ln w="12700">
+            <a:solidFill>
+              <a:srgbClr val="DB2777"/>
+            </a:solidFill>
+            <a:prstDash val="solid"/>
+          </a:ln>
+        </p:spPr>
+      </p:sp>
+      <p:sp>
+        <p:nvSpPr>
+          <p:cNvPr id="50" name="Text 48"/>
+          <p:cNvSpPr/>
+          <p:nvPr/>
+        </p:nvSpPr>
+        <p:spPr>
+          <a:xfrm>
+            <a:off x="7576947" y="4169664"/>
+            <a:ext cx="685800" cy="384048"/>
+          </a:xfrm>
+          <a:prstGeom prst="rect">
+            <a:avLst/>
+          </a:prstGeom>
+          <a:noFill/>
+          <a:ln/>
+        </p:spPr>
+        <p:txBody>
+          <a:bodyPr wrap="square" lIns="0" tIns="0" rIns="0" bIns="0" rtlCol="0" anchor="ctr"/>
+          <a:lstStyle/>
+          <a:p>
+            <a:pPr algn="ctr" indent="0" marL="0">
+              <a:buNone/>
+            </a:pPr>
+            <a:r>
+              <a:rPr lang="en-US" sz="900" b="1" dirty="0">
+                <a:solidFill>
+                  <a:srgbClr val="9D174D"/>
+                </a:solidFill>
+                <a:latin typeface="Trebuchet MS" pitchFamily="34" charset="0"/>
+                <a:ea typeface="Trebuchet MS" pitchFamily="34" charset="-122"/>
+                <a:cs typeface="Trebuchet MS" pitchFamily="34" charset="-120"/>
+              </a:rPr>
+              <a:t>d</a:t>
+            </a:r>
+            <a:endParaRPr lang="en-US" sz="900" dirty="0"/>
           </a:p>
         </p:txBody>
       </p:sp>
@@ -30027,7 +32580,7 @@
                 <a:ea typeface="Calibri" pitchFamily="34" charset="-122"/>
                 <a:cs typeface="Calibri" pitchFamily="34" charset="-120"/>
               </a:rPr>
-              <a:t>Word Labs  •  wordlabs.app  •  Root: 'merge' = to combine, sink into</a:t>
+              <a:t>Word Labs  •  wordlabs.app  •  Root: 'merge' = join, combine, sink into</a:t>
             </a:r>
             <a:endParaRPr lang="en-US" sz="800" dirty="0"/>
           </a:p>
@@ -31196,7 +33749,7 @@
                 <a:ea typeface="Calibri" pitchFamily="34" charset="-122"/>
                 <a:cs typeface="Calibri" pitchFamily="34" charset="-120"/>
               </a:rPr>
-              <a:t>Word Labs  •  wordlabs.app  •  Root: 'merge' = to combine, sink into</a:t>
+              <a:t>Word Labs  •  wordlabs.app  •  Root: 'merge' = join, combine, sink into</a:t>
             </a:r>
             <a:endParaRPr lang="en-US" sz="800" dirty="0"/>
           </a:p>
@@ -31778,7 +34331,7 @@
                 <a:ea typeface="Trebuchet MS" pitchFamily="34" charset="-122"/>
                 <a:cs typeface="Trebuchet MS" pitchFamily="34" charset="-120"/>
               </a:rPr>
-              <a:t>-s</a:t>
+              <a:t>-r</a:t>
             </a:r>
             <a:endParaRPr lang="en-US" sz="1300" dirty="0"/>
           </a:p>
@@ -31931,7 +34484,7 @@
                 <a:ea typeface="Trebuchet MS" pitchFamily="34" charset="-122"/>
                 <a:cs typeface="Trebuchet MS" pitchFamily="34" charset="-120"/>
               </a:rPr>
-              <a:t>-ing</a:t>
+              <a:t>-rs</a:t>
             </a:r>
             <a:endParaRPr lang="en-US" sz="1300" dirty="0"/>
           </a:p>
@@ -31995,7 +34548,7 @@
                 <a:ea typeface="Trebuchet MS" pitchFamily="34" charset="-122"/>
                 <a:cs typeface="Trebuchet MS" pitchFamily="34" charset="-120"/>
               </a:rPr>
-              <a:t>re-</a:t>
+              <a:t>de-</a:t>
             </a:r>
             <a:endParaRPr lang="en-US" sz="1300" dirty="0"/>
           </a:p>
@@ -32084,7 +34637,7 @@
                 <a:ea typeface="Trebuchet MS" pitchFamily="34" charset="-122"/>
                 <a:cs typeface="Trebuchet MS" pitchFamily="34" charset="-120"/>
               </a:rPr>
-              <a:t>-er</a:t>
+              <a:t>-nce</a:t>
             </a:r>
             <a:endParaRPr lang="en-US" sz="1300" dirty="0"/>
           </a:p>
@@ -32148,7 +34701,7 @@
                 <a:ea typeface="Trebuchet MS" pitchFamily="34" charset="-122"/>
                 <a:cs typeface="Trebuchet MS" pitchFamily="34" charset="-120"/>
               </a:rPr>
-              <a:t>de-</a:t>
+              <a:t>re-</a:t>
             </a:r>
             <a:endParaRPr lang="en-US" sz="1300" dirty="0"/>
           </a:p>
@@ -32237,7 +34790,7 @@
                 <a:ea typeface="Trebuchet MS" pitchFamily="34" charset="-122"/>
                 <a:cs typeface="Trebuchet MS" pitchFamily="34" charset="-120"/>
               </a:rPr>
-              <a:t>-ence</a:t>
+              <a:t>-nt</a:t>
             </a:r>
             <a:endParaRPr lang="en-US" sz="1300" dirty="0"/>
           </a:p>
@@ -32474,7 +35027,7 @@
                 <a:ea typeface="Trebuchet MS" pitchFamily="34" charset="-122"/>
                 <a:cs typeface="Trebuchet MS" pitchFamily="34" charset="-120"/>
               </a:rPr>
-              <a:t>merging</a:t>
+              <a:t>merger</a:t>
             </a:r>
             <a:endParaRPr lang="en-US" sz="1200" dirty="0"/>
           </a:p>
@@ -32606,7 +35159,7 @@
                 <a:ea typeface="Trebuchet MS" pitchFamily="34" charset="-122"/>
                 <a:cs typeface="Trebuchet MS" pitchFamily="34" charset="-120"/>
               </a:rPr>
-              <a:t>emerging</a:t>
+              <a:t>emerged</a:t>
             </a:r>
             <a:endParaRPr lang="en-US" sz="1200" dirty="0"/>
           </a:p>
@@ -32672,7 +35225,7 @@
                 <a:ea typeface="Trebuchet MS" pitchFamily="34" charset="-122"/>
                 <a:cs typeface="Trebuchet MS" pitchFamily="34" charset="-120"/>
               </a:rPr>
-              <a:t>submerge</a:t>
+              <a:t>emergence</a:t>
             </a:r>
             <a:endParaRPr lang="en-US" sz="1200" dirty="0"/>
           </a:p>
@@ -32738,7 +35291,7 @@
                 <a:ea typeface="Trebuchet MS" pitchFamily="34" charset="-122"/>
                 <a:cs typeface="Trebuchet MS" pitchFamily="34" charset="-120"/>
               </a:rPr>
-              <a:t>immerse</a:t>
+              <a:t>submerge</a:t>
             </a:r>
             <a:endParaRPr lang="en-US" sz="1200" dirty="0"/>
           </a:p>
@@ -32804,7 +35357,7 @@
                 <a:ea typeface="Trebuchet MS" pitchFamily="34" charset="-122"/>
                 <a:cs typeface="Trebuchet MS" pitchFamily="34" charset="-120"/>
               </a:rPr>
-              <a:t>emergence</a:t>
+              <a:t>immerse</a:t>
             </a:r>
             <a:endParaRPr lang="en-US" sz="1200" dirty="0"/>
           </a:p>
@@ -33096,7 +35649,7 @@
                 <a:ea typeface="Calibri" pitchFamily="34" charset="-122"/>
                 <a:cs typeface="Calibri" pitchFamily="34" charset="-120"/>
               </a:rPr>
-              <a:t>Word Labs  •  wordlabs.app  •  Root: 'merge' = to combine, sink into</a:t>
+              <a:t>Word Labs  •  wordlabs.app  •  Root: 'merge' = join, combine, sink into</a:t>
             </a:r>
             <a:endParaRPr lang="en-US" sz="800" dirty="0"/>
           </a:p>
@@ -33260,7 +35813,7 @@
                 <a:ea typeface="Calibri" pitchFamily="34" charset="-122"/>
                 <a:cs typeface="Calibri" pitchFamily="34" charset="-120"/>
               </a:rPr>
-              <a:t>The core part of a word carrying its basic meaning. For example, 'merge' means 'to combine, sink into'.</a:t>
+              <a:t>The core part of a word carrying its basic meaning. For example, 'merge' means 'join, combine, sink into'.</a:t>
             </a:r>
             <a:endParaRPr lang="en-US" sz="1350" dirty="0"/>
           </a:p>
@@ -33880,7 +36433,7 @@
                 <a:ea typeface="Calibri" pitchFamily="34" charset="-122"/>
                 <a:cs typeface="Calibri" pitchFamily="34" charset="-120"/>
               </a:rPr>
-              <a:t>Word Labs  •  wordlabs.app  •  Root: 'merge' = to combine, sink into</a:t>
+              <a:t>Word Labs  •  wordlabs.app  •  Root: 'merge' = join, combine, sink into</a:t>
             </a:r>
             <a:endParaRPr lang="en-US" sz="800" dirty="0"/>
           </a:p>
@@ -33992,7 +36545,7 @@
                 <a:ea typeface="Calibri" pitchFamily="34" charset="-122"/>
                 <a:cs typeface="Calibri" pitchFamily="34" charset="-120"/>
               </a:rPr>
-              <a:t>1.  The root 'merge' comes from Latin and means to combine or sink into.</a:t>
+              <a:t>1.  The root 'merge' can only be used at the start of a word.</a:t>
             </a:r>
             <a:endParaRPr lang="en-US" sz="1300" dirty="0"/>
           </a:p>
@@ -34015,11 +36568,11 @@
             </a:avLst>
           </a:prstGeom>
           <a:solidFill>
-            <a:srgbClr val="DCFCE7"/>
-          </a:solidFill>
-          <a:ln w="12700">
-            <a:solidFill>
-              <a:srgbClr val="16A34A"/>
+            <a:srgbClr val="FEE2E2"/>
+          </a:solidFill>
+          <a:ln w="12700">
+            <a:solidFill>
+              <a:srgbClr val="DC2626"/>
             </a:solidFill>
             <a:prstDash val="solid"/>
           </a:ln>
@@ -34052,13 +36605,13 @@
             <a:r>
               <a:rPr lang="en-US" sz="1100" b="1" dirty="0">
                 <a:solidFill>
-                  <a:srgbClr val="16A34A"/>
+                  <a:srgbClr val="DC2626"/>
                 </a:solidFill>
                 <a:latin typeface="Trebuchet MS" pitchFamily="34" charset="0"/>
                 <a:ea typeface="Trebuchet MS" pitchFamily="34" charset="-122"/>
                 <a:cs typeface="Trebuchet MS" pitchFamily="34" charset="-120"/>
               </a:rPr>
-              <a:t>TRUE</a:t>
+              <a:t>FALSE</a:t>
             </a:r>
             <a:endParaRPr lang="en-US" sz="1100" dirty="0"/>
           </a:p>
@@ -34131,7 +36684,7 @@
                 <a:ea typeface="Calibri" pitchFamily="34" charset="-122"/>
                 <a:cs typeface="Calibri" pitchFamily="34" charset="-120"/>
               </a:rPr>
-              <a:t>2.  The word 'submerge' means to rise above the surface of the water.</a:t>
+              <a:t>2.  The prefix 'sub' in 'submerge' means under or below.</a:t>
             </a:r>
             <a:endParaRPr lang="en-US" sz="1300" dirty="0"/>
           </a:p>
@@ -34154,11 +36707,11 @@
             </a:avLst>
           </a:prstGeom>
           <a:solidFill>
-            <a:srgbClr val="FEE2E2"/>
-          </a:solidFill>
-          <a:ln w="12700">
-            <a:solidFill>
-              <a:srgbClr val="DC2626"/>
+            <a:srgbClr val="DCFCE7"/>
+          </a:solidFill>
+          <a:ln w="12700">
+            <a:solidFill>
+              <a:srgbClr val="16A34A"/>
             </a:solidFill>
             <a:prstDash val="solid"/>
           </a:ln>
@@ -34191,13 +36744,13 @@
             <a:r>
               <a:rPr lang="en-US" sz="1100" b="1" dirty="0">
                 <a:solidFill>
-                  <a:srgbClr val="DC2626"/>
+                  <a:srgbClr val="16A34A"/>
                 </a:solidFill>
                 <a:latin typeface="Trebuchet MS" pitchFamily="34" charset="0"/>
                 <a:ea typeface="Trebuchet MS" pitchFamily="34" charset="-122"/>
                 <a:cs typeface="Trebuchet MS" pitchFamily="34" charset="-120"/>
               </a:rPr>
-              <a:t>FALSE</a:t>
+              <a:t>TRUE</a:t>
             </a:r>
             <a:endParaRPr lang="en-US" sz="1100" dirty="0"/>
           </a:p>
@@ -34270,7 +36823,7 @@
                 <a:ea typeface="Calibri" pitchFamily="34" charset="-122"/>
                 <a:cs typeface="Calibri" pitchFamily="34" charset="-120"/>
               </a:rPr>
-              <a:t>3.  The word 'emerge' contains the prefix 'e-' meaning 'out of'.</a:t>
+              <a:t>3.  The root 'merge' comes from a Latin word meaning to join or sink into.</a:t>
             </a:r>
             <a:endParaRPr lang="en-US" sz="1300" dirty="0"/>
           </a:p>
@@ -34409,7 +36962,7 @@
                 <a:ea typeface="Calibri" pitchFamily="34" charset="-122"/>
                 <a:cs typeface="Calibri" pitchFamily="34" charset="-120"/>
               </a:rPr>
-              <a:t>4.  When two rivers merge, they join together into one river.</a:t>
+              <a:t>4.  A merger is when two companies join together to become one.</a:t>
             </a:r>
             <a:endParaRPr lang="en-US" sz="1300" dirty="0"/>
           </a:p>
@@ -34548,7 +37101,7 @@
                 <a:ea typeface="Calibri" pitchFamily="34" charset="-122"/>
                 <a:cs typeface="Calibri" pitchFamily="34" charset="-120"/>
               </a:rPr>
-              <a:t>5.  The word 'emergence' is a verb because it ends in '-ence'.</a:t>
+              <a:t>5.  The word 'emerge' means to hide something deep underground.</a:t>
             </a:r>
             <a:endParaRPr lang="en-US" sz="1300" dirty="0"/>
           </a:p>
@@ -34906,7 +37459,7 @@
                 <a:ea typeface="Calibri" pitchFamily="34" charset="-122"/>
                 <a:cs typeface="Calibri" pitchFamily="34" charset="-120"/>
               </a:rPr>
-              <a:t>Word Labs  •  wordlabs.app  •  Root: 'merge' = to combine, sink into</a:t>
+              <a:t>Word Labs  •  wordlabs.app  •  Root: 'merge' = join, combine, sink into</a:t>
             </a:r>
             <a:endParaRPr lang="en-US" sz="800" dirty="0"/>
           </a:p>
@@ -35043,7 +37596,7 @@
                 <a:ea typeface="Trebuchet MS" pitchFamily="34" charset="-122"/>
                 <a:cs typeface="Trebuchet MS" pitchFamily="34" charset="-120"/>
               </a:rPr>
-              <a:t>to combine, sink into</a:t>
+              <a:t>join, combine, sink into</a:t>
             </a:r>
             <a:endParaRPr lang="en-US" sz="2000" dirty="0"/>
           </a:p>
@@ -35319,7 +37872,7 @@
                 <a:ea typeface="Trebuchet MS" pitchFamily="34" charset="-122"/>
                 <a:cs typeface="Trebuchet MS" pitchFamily="34" charset="-120"/>
               </a:rPr>
-              <a:t>merging</a:t>
+              <a:t>merger</a:t>
             </a:r>
             <a:endParaRPr lang="en-US" sz="1300" dirty="0"/>
           </a:p>
@@ -35451,7 +38004,7 @@
                 <a:ea typeface="Trebuchet MS" pitchFamily="34" charset="-122"/>
                 <a:cs typeface="Trebuchet MS" pitchFamily="34" charset="-120"/>
               </a:rPr>
-              <a:t>emerging</a:t>
+              <a:t>emerged</a:t>
             </a:r>
             <a:endParaRPr lang="en-US" sz="1300" dirty="0"/>
           </a:p>
@@ -35517,7 +38070,7 @@
                 <a:ea typeface="Trebuchet MS" pitchFamily="34" charset="-122"/>
                 <a:cs typeface="Trebuchet MS" pitchFamily="34" charset="-120"/>
               </a:rPr>
-              <a:t>submerge</a:t>
+              <a:t>emergence</a:t>
             </a:r>
             <a:endParaRPr lang="en-US" sz="1300" dirty="0"/>
           </a:p>
@@ -35583,7 +38136,7 @@
                 <a:ea typeface="Trebuchet MS" pitchFamily="34" charset="-122"/>
                 <a:cs typeface="Trebuchet MS" pitchFamily="34" charset="-120"/>
               </a:rPr>
-              <a:t>immerse</a:t>
+              <a:t>submerge</a:t>
             </a:r>
             <a:endParaRPr lang="en-US" sz="1300" dirty="0"/>
           </a:p>
@@ -35875,7 +38428,7 @@
                 <a:ea typeface="Calibri" pitchFamily="34" charset="-122"/>
                 <a:cs typeface="Calibri" pitchFamily="34" charset="-120"/>
               </a:rPr>
-              <a:t>Word Labs  •  wordlabs.app  •  Root: 'merge' = to combine, sink into</a:t>
+              <a:t>Word Labs  •  wordlabs.app  •  Root: 'merge' = join, combine, sink into</a:t>
             </a:r>
             <a:endParaRPr lang="en-US" sz="800" dirty="0"/>
           </a:p>
@@ -36457,7 +39010,7 @@
                 <a:ea typeface="Trebuchet MS" pitchFamily="34" charset="-122"/>
                 <a:cs typeface="Trebuchet MS" pitchFamily="34" charset="-120"/>
               </a:rPr>
-              <a:t>-s</a:t>
+              <a:t>-r</a:t>
             </a:r>
             <a:endParaRPr lang="en-US" sz="1300" dirty="0"/>
           </a:p>
@@ -36610,7 +39163,7 @@
                 <a:ea typeface="Trebuchet MS" pitchFamily="34" charset="-122"/>
                 <a:cs typeface="Trebuchet MS" pitchFamily="34" charset="-120"/>
               </a:rPr>
-              <a:t>-ing</a:t>
+              <a:t>-rs</a:t>
             </a:r>
             <a:endParaRPr lang="en-US" sz="1300" dirty="0"/>
           </a:p>
@@ -36674,7 +39227,7 @@
                 <a:ea typeface="Trebuchet MS" pitchFamily="34" charset="-122"/>
                 <a:cs typeface="Trebuchet MS" pitchFamily="34" charset="-120"/>
               </a:rPr>
-              <a:t>re-</a:t>
+              <a:t>de-</a:t>
             </a:r>
             <a:endParaRPr lang="en-US" sz="1300" dirty="0"/>
           </a:p>
@@ -36763,7 +39316,7 @@
                 <a:ea typeface="Trebuchet MS" pitchFamily="34" charset="-122"/>
                 <a:cs typeface="Trebuchet MS" pitchFamily="34" charset="-120"/>
               </a:rPr>
-              <a:t>-er</a:t>
+              <a:t>-nce</a:t>
             </a:r>
             <a:endParaRPr lang="en-US" sz="1300" dirty="0"/>
           </a:p>
@@ -36827,7 +39380,7 @@
                 <a:ea typeface="Trebuchet MS" pitchFamily="34" charset="-122"/>
                 <a:cs typeface="Trebuchet MS" pitchFamily="34" charset="-120"/>
               </a:rPr>
-              <a:t>de-</a:t>
+              <a:t>re-</a:t>
             </a:r>
             <a:endParaRPr lang="en-US" sz="1300" dirty="0"/>
           </a:p>
@@ -36916,7 +39469,7 @@
                 <a:ea typeface="Trebuchet MS" pitchFamily="34" charset="-122"/>
                 <a:cs typeface="Trebuchet MS" pitchFamily="34" charset="-120"/>
               </a:rPr>
-              <a:t>-ence</a:t>
+              <a:t>-nt</a:t>
             </a:r>
             <a:endParaRPr lang="en-US" sz="1300" dirty="0"/>
           </a:p>
@@ -37649,7 +40202,7 @@
                 <a:ea typeface="Calibri" pitchFamily="34" charset="-122"/>
                 <a:cs typeface="Calibri" pitchFamily="34" charset="-120"/>
               </a:rPr>
-              <a:t>Word Labs  •  wordlabs.app  •  Root: 'merge' = to combine, sink into</a:t>
+              <a:t>Word Labs  •  wordlabs.app  •  Root: 'merge' = join, combine, sink into</a:t>
             </a:r>
             <a:endParaRPr lang="en-US" sz="800" dirty="0"/>
           </a:p>
@@ -37827,7 +40380,7 @@
                 <a:ea typeface="Calibri" pitchFamily="34" charset="-122"/>
                 <a:cs typeface="Calibri" pitchFamily="34" charset="-120"/>
               </a:rPr>
-              <a:t>To dip something fully into a liquid, or to get completely involved in something, like immersing yourself in a good book.</a:t>
+              <a:t>To go completely under water or to cover something fully with liquid.</a:t>
             </a:r>
             <a:endParaRPr lang="en-US" sz="1200" dirty="0"/>
           </a:p>
@@ -37966,7 +40519,7 @@
                 <a:ea typeface="Calibri" pitchFamily="34" charset="-122"/>
                 <a:cs typeface="Calibri" pitchFamily="34" charset="-120"/>
               </a:rPr>
-              <a:t>To come out from somewhere and appear, like a butterfly emerging from a cocoon.</a:t>
+              <a:t>To come out from somewhere or to appear from hiding.</a:t>
             </a:r>
             <a:endParaRPr lang="en-US" sz="1200" dirty="0"/>
           </a:p>
@@ -38039,7 +40592,7 @@
                 <a:ea typeface="Trebuchet MS" pitchFamily="34" charset="-122"/>
                 <a:cs typeface="Trebuchet MS" pitchFamily="34" charset="-120"/>
               </a:rPr>
-              <a:t>merging</a:t>
+              <a:t>merger</a:t>
             </a:r>
             <a:endParaRPr lang="en-US" sz="1200" dirty="0"/>
           </a:p>
@@ -38105,7 +40658,7 @@
                 <a:ea typeface="Calibri" pitchFamily="34" charset="-122"/>
                 <a:cs typeface="Calibri" pitchFamily="34" charset="-120"/>
               </a:rPr>
-              <a:t>Coming out or appearing for the first time, like new ideas emerging in science.</a:t>
+              <a:t>Came out into the open or appeared after being hidden.</a:t>
             </a:r>
             <a:endParaRPr lang="en-US" sz="1200" dirty="0"/>
           </a:p>
@@ -38244,7 +40797,7 @@
                 <a:ea typeface="Calibri" pitchFamily="34" charset="-122"/>
                 <a:cs typeface="Calibri" pitchFamily="34" charset="-120"/>
               </a:rPr>
-              <a:t>The action of joining together right now, like lanes of traffic coming together on a highway.</a:t>
+              <a:t>When two companies or groups join together to become one organisation.</a:t>
             </a:r>
             <a:endParaRPr lang="en-US" sz="1200" dirty="0"/>
           </a:p>
@@ -38317,7 +40870,7 @@
                 <a:ea typeface="Trebuchet MS" pitchFamily="34" charset="-122"/>
                 <a:cs typeface="Trebuchet MS" pitchFamily="34" charset="-120"/>
               </a:rPr>
-              <a:t>emerging</a:t>
+              <a:t>emerged</a:t>
             </a:r>
             <a:endParaRPr lang="en-US" sz="1200" dirty="0"/>
           </a:p>
@@ -38383,7 +40936,7 @@
                 <a:ea typeface="Calibri" pitchFamily="34" charset="-122"/>
                 <a:cs typeface="Calibri" pitchFamily="34" charset="-120"/>
               </a:rPr>
-              <a:t>To go completely under water or another liquid, like a submarine submerging beneath the ocean.</a:t>
+              <a:t>The moment when something comes out or becomes known for the first time.</a:t>
             </a:r>
             <a:endParaRPr lang="en-US" sz="1200" dirty="0"/>
           </a:p>
@@ -38456,7 +41009,7 @@
                 <a:ea typeface="Trebuchet MS" pitchFamily="34" charset="-122"/>
                 <a:cs typeface="Trebuchet MS" pitchFamily="34" charset="-120"/>
               </a:rPr>
-              <a:t>submerge</a:t>
+              <a:t>emergence</a:t>
             </a:r>
             <a:endParaRPr lang="en-US" sz="1200" dirty="0"/>
           </a:p>
@@ -38522,7 +41075,7 @@
                 <a:ea typeface="Calibri" pitchFamily="34" charset="-122"/>
                 <a:cs typeface="Calibri" pitchFamily="34" charset="-120"/>
               </a:rPr>
-              <a:t>When two or more things join together to become one, like two roads joining into one.</a:t>
+              <a:t>To join together or combine into one thing.</a:t>
             </a:r>
             <a:endParaRPr lang="en-US" sz="1200" dirty="0"/>
           </a:p>
@@ -38595,7 +41148,7 @@
                 <a:ea typeface="Trebuchet MS" pitchFamily="34" charset="-122"/>
                 <a:cs typeface="Trebuchet MS" pitchFamily="34" charset="-120"/>
               </a:rPr>
-              <a:t>immerse</a:t>
+              <a:t>submerge</a:t>
             </a:r>
             <a:endParaRPr lang="en-US" sz="1200" dirty="0"/>
           </a:p>
@@ -38661,7 +41214,7 @@
                 <a:ea typeface="Calibri" pitchFamily="34" charset="-122"/>
                 <a:cs typeface="Calibri" pitchFamily="34" charset="-120"/>
               </a:rPr>
-              <a:t>When things have already joined together, like two companies that joined to become one big company.</a:t>
+              <a:t>When two or more things have joined together to become one.</a:t>
             </a:r>
             <a:endParaRPr lang="en-US" sz="1200" dirty="0"/>
           </a:p>
@@ -38953,7 +41506,7 @@
                 <a:ea typeface="Calibri" pitchFamily="34" charset="-122"/>
                 <a:cs typeface="Calibri" pitchFamily="34" charset="-120"/>
               </a:rPr>
-              <a:t>Word Labs  •  wordlabs.app  •  Root: 'merge' = to combine, sink into</a:t>
+              <a:t>Word Labs  •  wordlabs.app  •  Root: 'merge' = join, combine, sink into</a:t>
             </a:r>
             <a:endParaRPr lang="en-US" sz="800" dirty="0"/>
           </a:p>
@@ -39156,7 +41709,7 @@
                 <a:ea typeface="Calibri" pitchFamily="34" charset="-122"/>
                 <a:cs typeface="Calibri" pitchFamily="34" charset="-120"/>
               </a:rPr>
-              <a:t>Watch how the two streams merge into one wide river as we walk along the trail.</a:t>
+              <a:t>Watch how the two rivers merge together at the bottom of the valley to form one wide river.</a:t>
             </a:r>
             <a:endParaRPr lang="en-US" sz="1500" dirty="0"/>
           </a:p>
@@ -39320,7 +41873,7 @@
                 <a:ea typeface="Calibri" pitchFamily="34" charset="-122"/>
                 <a:cs typeface="Calibri" pitchFamily="34" charset="-120"/>
               </a:rPr>
-              <a:t>A beautiful butterfly will emerge from the chrysalis after several weeks of change.</a:t>
+              <a:t>The butterfly began to emerge slowly from its chrysalis after many days of waiting.</a:t>
             </a:r>
             <a:endParaRPr lang="en-US" sz="1500" dirty="0"/>
           </a:p>
@@ -39484,7 +42037,7 @@
                 <a:ea typeface="Calibri" pitchFamily="34" charset="-122"/>
                 <a:cs typeface="Calibri" pitchFamily="34" charset="-120"/>
               </a:rPr>
-              <a:t>The diver had to submerge completely beneath the water to explore the coral reef.</a:t>
+              <a:t>The two small schools decided to merge so that students could share teachers and resources.</a:t>
             </a:r>
             <a:endParaRPr lang="en-US" sz="1500" dirty="0"/>
           </a:p>

--- a/output/wordlabs-merge-3day.pptx
+++ b/output/wordlabs-merge-3day.pptx
@@ -4240,7 +4240,7 @@
                 <a:ea typeface="Calibri" pitchFamily="34" charset="-122"/>
                 <a:cs typeface="Calibri" pitchFamily="34" charset="-120"/>
               </a:rPr>
-              <a:t>"join, combine, sink into"</a:t>
+              <a:t>"to join together into one"</a:t>
             </a:r>
             <a:endParaRPr lang="en-US" sz="2200" dirty="0"/>
           </a:p>
@@ -4279,7 +4279,7 @@
                 <a:ea typeface="Calibri" pitchFamily="34" charset="-122"/>
                 <a:cs typeface="Calibri" pitchFamily="34" charset="-120"/>
               </a:rPr>
-              <a:t>Origin: Latin: mergere</a:t>
+              <a:t>Origin: Anglo-Saxon (Old English) root</a:t>
             </a:r>
             <a:endParaRPr lang="en-US" sz="1300" dirty="0"/>
           </a:p>
@@ -5288,7 +5288,7 @@
                 <a:ea typeface="Calibri" pitchFamily="34" charset="-122"/>
                 <a:cs typeface="Calibri" pitchFamily="34" charset="-120"/>
               </a:rPr>
-              <a:t>Word Labs  •  wordlabs.app  •  Root: 'merge' = join, combine, sink into</a:t>
+              <a:t>Word Labs  •  wordlabs.app  •  Root: 'merge' = to join together into one</a:t>
             </a:r>
             <a:endParaRPr lang="en-US" sz="800" dirty="0"/>
           </a:p>
@@ -5622,7 +5622,7 @@
                 <a:ea typeface="Trebuchet MS" pitchFamily="34" charset="-122"/>
                 <a:cs typeface="Trebuchet MS" pitchFamily="34" charset="-120"/>
               </a:rPr>
-              <a:t>1</a:t>
+              <a:t>0</a:t>
             </a:r>
             <a:pPr algn="ctr" indent="0" marL="0">
               <a:buNone/>
@@ -5928,7 +5928,7 @@
                 <a:ea typeface="Calibri" pitchFamily="34" charset="-122"/>
                 <a:cs typeface="Calibri" pitchFamily="34" charset="-120"/>
               </a:rPr>
-              <a:t>Word Labs  •  wordlabs.app  •  Root: 'merge' = join, combine, sink into</a:t>
+              <a:t>Word Labs  •  wordlabs.app  •  Root: 'merge' = to join together into one</a:t>
             </a:r>
             <a:endParaRPr lang="en-US" sz="800" dirty="0"/>
           </a:p>
@@ -6040,7 +6040,7 @@
                 <a:ea typeface="Calibri" pitchFamily="34" charset="-122"/>
                 <a:cs typeface="Calibri" pitchFamily="34" charset="-120"/>
               </a:rPr>
-              <a:t>When the two streams </a:t>
+              <a:t>The butterfly began to </a:t>
             </a:r>
             <a:pPr algn="l" indent="0" marL="0">
               <a:buNone/>
@@ -6057,7 +6057,7 @@
                 <a:ea typeface="Calibri" pitchFamily="34" charset="-122"/>
                 <a:cs typeface="Calibri" pitchFamily="34" charset="-120"/>
               </a:rPr>
-              <a:t>merge</a:t>
+              <a:t>emerge</a:t>
             </a:r>
             <a:pPr algn="l" indent="0" marL="0">
               <a:buNone/>
@@ -6071,7 +6071,7 @@
                 <a:ea typeface="Calibri" pitchFamily="34" charset="-122"/>
                 <a:cs typeface="Calibri" pitchFamily="34" charset="-120"/>
               </a:rPr>
-              <a:t>, a beautiful </a:t>
+              <a:t> from its cocoon. The sun </a:t>
             </a:r>
             <a:pPr algn="l" indent="0" marL="0">
               <a:buNone/>
@@ -6088,7 +6088,7 @@
                 <a:ea typeface="Calibri" pitchFamily="34" charset="-122"/>
                 <a:cs typeface="Calibri" pitchFamily="34" charset="-120"/>
               </a:rPr>
-              <a:t>emergence</a:t>
+              <a:t>emerged</a:t>
             </a:r>
             <a:pPr algn="l" indent="0" marL="0">
               <a:buNone/>
@@ -6102,7 +6102,7 @@
                 <a:ea typeface="Calibri" pitchFamily="34" charset="-122"/>
                 <a:cs typeface="Calibri" pitchFamily="34" charset="-120"/>
               </a:rPr>
-              <a:t> of wildlife can be seen along the bank.</a:t>
+              <a:t> from behind the clouds after the storm.</a:t>
             </a:r>
             <a:endParaRPr lang="en-US" sz="1800" dirty="0"/>
           </a:p>
@@ -6257,7 +6257,7 @@
                 <a:ea typeface="Trebuchet MS" pitchFamily="34" charset="-122"/>
                 <a:cs typeface="Trebuchet MS" pitchFamily="34" charset="-120"/>
               </a:rPr>
-              <a:t>merge</a:t>
+              <a:t>emerge</a:t>
             </a:r>
             <a:endParaRPr lang="en-US" sz="1400" dirty="0"/>
           </a:p>
@@ -6385,7 +6385,7 @@
                 <a:ea typeface="Trebuchet MS" pitchFamily="34" charset="-122"/>
                 <a:cs typeface="Trebuchet MS" pitchFamily="34" charset="-120"/>
               </a:rPr>
-              <a:t>emergence</a:t>
+              <a:t>emerged</a:t>
             </a:r>
             <a:endParaRPr lang="en-US" sz="1400" dirty="0"/>
           </a:p>
@@ -6716,7 +6716,7 @@
                 <a:ea typeface="Calibri" pitchFamily="34" charset="-122"/>
                 <a:cs typeface="Calibri" pitchFamily="34" charset="-120"/>
               </a:rPr>
-              <a:t>Word Labs  •  wordlabs.app  •  Root: 'merge' = join, combine, sink into</a:t>
+              <a:t>Word Labs  •  wordlabs.app  •  Root: 'merge' = to join together into one</a:t>
             </a:r>
             <a:endParaRPr lang="en-US" sz="800" dirty="0"/>
           </a:p>
@@ -6855,7 +6855,7 @@
                 <a:ea typeface="Trebuchet MS" pitchFamily="34" charset="-122"/>
                 <a:cs typeface="Trebuchet MS" pitchFamily="34" charset="-120"/>
               </a:rPr>
-              <a:t>merge</a:t>
+              <a:t>emerge</a:t>
             </a:r>
             <a:endParaRPr lang="en-US" sz="2800" dirty="0"/>
           </a:p>
@@ -7543,7 +7543,7 @@
                 <a:ea typeface="Calibri" pitchFamily="34" charset="-122"/>
                 <a:cs typeface="Calibri" pitchFamily="34" charset="-120"/>
               </a:rPr>
-              <a:t>Word Labs  •  wordlabs.app  •  Root: 'merge' = join, combine, sink into</a:t>
+              <a:t>Word Labs  •  wordlabs.app  •  Root: 'merge' = to join together into one</a:t>
             </a:r>
             <a:endParaRPr lang="en-US" sz="800" dirty="0"/>
           </a:p>
@@ -7682,7 +7682,7 @@
                 <a:ea typeface="Trebuchet MS" pitchFamily="34" charset="-122"/>
                 <a:cs typeface="Trebuchet MS" pitchFamily="34" charset="-120"/>
               </a:rPr>
-              <a:t>merge</a:t>
+              <a:t>emerge</a:t>
             </a:r>
             <a:endParaRPr lang="en-US" sz="2800" dirty="0"/>
           </a:p>
@@ -7762,7 +7762,7 @@
         </p:nvSpPr>
         <p:spPr>
           <a:xfrm>
-            <a:off x="4370832" y="2258568"/>
+            <a:off x="2938272" y="2258568"/>
             <a:ext cx="1828800" cy="292608"/>
           </a:xfrm>
           <a:prstGeom prst="rect">
@@ -7771,11 +7771,11 @@
             </a:avLst>
           </a:prstGeom>
           <a:solidFill>
-            <a:srgbClr val="CCFBF1"/>
+            <a:srgbClr val="DDD6FE"/>
           </a:solidFill>
           <a:ln w="19050">
             <a:solidFill>
-              <a:srgbClr val="0D9488"/>
+              <a:srgbClr val="7C3AED"/>
             </a:solidFill>
             <a:prstDash val="solid"/>
           </a:ln>
@@ -7796,7 +7796,7 @@
         </p:nvSpPr>
         <p:spPr>
           <a:xfrm>
-            <a:off x="4370832" y="2258568"/>
+            <a:off x="2938272" y="2258568"/>
             <a:ext cx="1828800" cy="292608"/>
           </a:xfrm>
           <a:prstGeom prst="rect">
@@ -7815,13 +7815,13 @@
             <a:r>
               <a:rPr lang="en-US" sz="1300" b="1" dirty="0">
                 <a:solidFill>
-                  <a:srgbClr val="0F766E"/>
+                  <a:srgbClr val="4C1D95"/>
                 </a:solidFill>
                 <a:latin typeface="Trebuchet MS" pitchFamily="34" charset="0"/>
                 <a:ea typeface="Trebuchet MS" pitchFamily="34" charset="-122"/>
                 <a:cs typeface="Trebuchet MS" pitchFamily="34" charset="-120"/>
               </a:rPr>
-              <a:t>merge</a:t>
+              <a:t>e</a:t>
             </a:r>
             <a:endParaRPr lang="en-US" sz="1300" dirty="0"/>
           </a:p>
@@ -7835,7 +7835,7 @@
         </p:nvSpPr>
         <p:spPr>
           <a:xfrm>
-            <a:off x="4370832" y="2569464"/>
+            <a:off x="2938272" y="2569464"/>
             <a:ext cx="1828800" cy="201168"/>
           </a:xfrm>
           <a:prstGeom prst="rect">
@@ -7860,7 +7860,7 @@
                 <a:ea typeface="Calibri" pitchFamily="34" charset="-122"/>
                 <a:cs typeface="Calibri" pitchFamily="34" charset="-120"/>
               </a:rPr>
-              <a:t>join, combine, sink into</a:t>
+              <a:t>electronic; online</a:t>
             </a:r>
             <a:endParaRPr lang="en-US" sz="850" dirty="0"/>
           </a:p>
@@ -7869,6 +7869,118 @@
       <p:sp>
         <p:nvSpPr>
           <p:cNvPr id="19" name="Shape 17"/>
+          <p:cNvSpPr/>
+          <p:nvPr/>
+        </p:nvSpPr>
+        <p:spPr>
+          <a:xfrm>
+            <a:off x="5803392" y="2258568"/>
+            <a:ext cx="1828800" cy="292608"/>
+          </a:xfrm>
+          <a:prstGeom prst="rect">
+            <a:avLst>
+              <a:gd name="adj" fmla="val 25000"/>
+            </a:avLst>
+          </a:prstGeom>
+          <a:solidFill>
+            <a:srgbClr val="CCFBF1"/>
+          </a:solidFill>
+          <a:ln w="19050">
+            <a:solidFill>
+              <a:srgbClr val="0D9488"/>
+            </a:solidFill>
+            <a:prstDash val="solid"/>
+          </a:ln>
+          <a:effectLst>
+            <a:outerShdw sx="100000" sy="100000" kx="0" ky="0" algn="bl" rotWithShape="0" blurRad="101600" dist="38100" dir="8100000">
+              <a:srgbClr val="000000">
+                <a:alpha val="12000"/>
+              </a:srgbClr>
+            </a:outerShdw>
+          </a:effectLst>
+        </p:spPr>
+      </p:sp>
+      <p:sp>
+        <p:nvSpPr>
+          <p:cNvPr id="20" name="Text 18"/>
+          <p:cNvSpPr/>
+          <p:nvPr/>
+        </p:nvSpPr>
+        <p:spPr>
+          <a:xfrm>
+            <a:off x="5803392" y="2258568"/>
+            <a:ext cx="1828800" cy="292608"/>
+          </a:xfrm>
+          <a:prstGeom prst="rect">
+            <a:avLst/>
+          </a:prstGeom>
+          <a:noFill/>
+          <a:ln/>
+        </p:spPr>
+        <p:txBody>
+          <a:bodyPr wrap="square" lIns="0" tIns="0" rIns="0" bIns="0" rtlCol="0" anchor="ctr"/>
+          <a:lstStyle/>
+          <a:p>
+            <a:pPr algn="ctr" indent="0" marL="0">
+              <a:buNone/>
+            </a:pPr>
+            <a:r>
+              <a:rPr lang="en-US" sz="1300" b="1" dirty="0">
+                <a:solidFill>
+                  <a:srgbClr val="0F766E"/>
+                </a:solidFill>
+                <a:latin typeface="Trebuchet MS" pitchFamily="34" charset="0"/>
+                <a:ea typeface="Trebuchet MS" pitchFamily="34" charset="-122"/>
+                <a:cs typeface="Trebuchet MS" pitchFamily="34" charset="-120"/>
+              </a:rPr>
+              <a:t>merge</a:t>
+            </a:r>
+            <a:endParaRPr lang="en-US" sz="1300" dirty="0"/>
+          </a:p>
+        </p:txBody>
+      </p:sp>
+      <p:sp>
+        <p:nvSpPr>
+          <p:cNvPr id="21" name="Text 19"/>
+          <p:cNvSpPr/>
+          <p:nvPr/>
+        </p:nvSpPr>
+        <p:spPr>
+          <a:xfrm>
+            <a:off x="5803392" y="2569464"/>
+            <a:ext cx="1828800" cy="201168"/>
+          </a:xfrm>
+          <a:prstGeom prst="rect">
+            <a:avLst/>
+          </a:prstGeom>
+          <a:noFill/>
+          <a:ln/>
+        </p:spPr>
+        <p:txBody>
+          <a:bodyPr wrap="square" lIns="0" tIns="0" rIns="0" bIns="0" rtlCol="0" anchor="t"/>
+          <a:lstStyle/>
+          <a:p>
+            <a:pPr algn="ctr" indent="0" marL="0">
+              <a:buNone/>
+            </a:pPr>
+            <a:r>
+              <a:rPr lang="en-US" sz="850" dirty="0">
+                <a:solidFill>
+                  <a:srgbClr val="475569"/>
+                </a:solidFill>
+                <a:latin typeface="Calibri" pitchFamily="34" charset="0"/>
+                <a:ea typeface="Calibri" pitchFamily="34" charset="-122"/>
+                <a:cs typeface="Calibri" pitchFamily="34" charset="-120"/>
+              </a:rPr>
+              <a:t>to join together into one</a:t>
+            </a:r>
+            <a:endParaRPr lang="en-US" sz="850" dirty="0"/>
+          </a:p>
+        </p:txBody>
+      </p:sp>
+      <p:sp>
+        <p:nvSpPr>
+          <p:cNvPr id="22" name="Shape 20"/>
           <p:cNvSpPr/>
           <p:nvPr/>
         </p:nvSpPr>
@@ -7895,7 +8007,7 @@
       </p:sp>
       <p:sp>
         <p:nvSpPr>
-          <p:cNvPr id="20" name="Text 18"/>
+          <p:cNvPr id="23" name="Text 21"/>
           <p:cNvSpPr/>
           <p:nvPr/>
         </p:nvSpPr>
@@ -7934,7 +8046,7 @@
       </p:sp>
       <p:sp>
         <p:nvSpPr>
-          <p:cNvPr id="21" name="Shape 19"/>
+          <p:cNvPr id="24" name="Shape 22"/>
           <p:cNvSpPr/>
           <p:nvPr/>
         </p:nvSpPr>
@@ -7961,7 +8073,7 @@
       </p:sp>
       <p:sp>
         <p:nvSpPr>
-          <p:cNvPr id="22" name="Text 20"/>
+          <p:cNvPr id="25" name="Text 23"/>
           <p:cNvSpPr/>
           <p:nvPr/>
         </p:nvSpPr>
@@ -8000,7 +8112,7 @@
       </p:sp>
       <p:sp>
         <p:nvSpPr>
-          <p:cNvPr id="23" name="Shape 21"/>
+          <p:cNvPr id="26" name="Shape 24"/>
           <p:cNvSpPr/>
           <p:nvPr/>
         </p:nvSpPr>
@@ -8027,7 +8139,7 @@
       </p:sp>
       <p:sp>
         <p:nvSpPr>
-          <p:cNvPr id="24" name="Text 22"/>
+          <p:cNvPr id="27" name="Text 25"/>
           <p:cNvSpPr/>
           <p:nvPr/>
         </p:nvSpPr>
@@ -8066,7 +8178,7 @@
       </p:sp>
       <p:sp>
         <p:nvSpPr>
-          <p:cNvPr id="25" name="Shape 23"/>
+          <p:cNvPr id="28" name="Shape 26"/>
           <p:cNvSpPr/>
           <p:nvPr/>
         </p:nvSpPr>
@@ -8093,7 +8205,7 @@
       </p:sp>
       <p:sp>
         <p:nvSpPr>
-          <p:cNvPr id="26" name="Text 24"/>
+          <p:cNvPr id="29" name="Text 27"/>
           <p:cNvSpPr/>
           <p:nvPr/>
         </p:nvSpPr>
@@ -8416,7 +8528,7 @@
                 <a:ea typeface="Calibri" pitchFamily="34" charset="-122"/>
                 <a:cs typeface="Calibri" pitchFamily="34" charset="-120"/>
               </a:rPr>
-              <a:t>Word Labs  •  wordlabs.app  •  Root: 'merge' = join, combine, sink into</a:t>
+              <a:t>Word Labs  •  wordlabs.app  •  Root: 'merge' = to join together into one</a:t>
             </a:r>
             <a:endParaRPr lang="en-US" sz="800" dirty="0"/>
           </a:p>
@@ -8555,7 +8667,7 @@
                 <a:ea typeface="Trebuchet MS" pitchFamily="34" charset="-122"/>
                 <a:cs typeface="Trebuchet MS" pitchFamily="34" charset="-120"/>
               </a:rPr>
-              <a:t>merge</a:t>
+              <a:t>emerge</a:t>
             </a:r>
             <a:endParaRPr lang="en-US" sz="2800" dirty="0"/>
           </a:p>
@@ -8635,7 +8747,7 @@
         </p:nvSpPr>
         <p:spPr>
           <a:xfrm>
-            <a:off x="4370832" y="2258568"/>
+            <a:off x="2938272" y="2258568"/>
             <a:ext cx="1828800" cy="292608"/>
           </a:xfrm>
           <a:prstGeom prst="rect">
@@ -8644,11 +8756,11 @@
             </a:avLst>
           </a:prstGeom>
           <a:solidFill>
-            <a:srgbClr val="CCFBF1"/>
+            <a:srgbClr val="DDD6FE"/>
           </a:solidFill>
           <a:ln w="19050">
             <a:solidFill>
-              <a:srgbClr val="0D9488"/>
+              <a:srgbClr val="7C3AED"/>
             </a:solidFill>
             <a:prstDash val="solid"/>
           </a:ln>
@@ -8669,7 +8781,7 @@
         </p:nvSpPr>
         <p:spPr>
           <a:xfrm>
-            <a:off x="4370832" y="2258568"/>
+            <a:off x="2938272" y="2258568"/>
             <a:ext cx="1828800" cy="292608"/>
           </a:xfrm>
           <a:prstGeom prst="rect">
@@ -8688,13 +8800,13 @@
             <a:r>
               <a:rPr lang="en-US" sz="1300" b="1" dirty="0">
                 <a:solidFill>
-                  <a:srgbClr val="0F766E"/>
+                  <a:srgbClr val="4C1D95"/>
                 </a:solidFill>
                 <a:latin typeface="Trebuchet MS" pitchFamily="34" charset="0"/>
                 <a:ea typeface="Trebuchet MS" pitchFamily="34" charset="-122"/>
                 <a:cs typeface="Trebuchet MS" pitchFamily="34" charset="-120"/>
               </a:rPr>
-              <a:t>merge</a:t>
+              <a:t>e</a:t>
             </a:r>
             <a:endParaRPr lang="en-US" sz="1300" dirty="0"/>
           </a:p>
@@ -8708,7 +8820,7 @@
         </p:nvSpPr>
         <p:spPr>
           <a:xfrm>
-            <a:off x="4370832" y="2569464"/>
+            <a:off x="2938272" y="2569464"/>
             <a:ext cx="1828800" cy="201168"/>
           </a:xfrm>
           <a:prstGeom prst="rect">
@@ -8733,7 +8845,7 @@
                 <a:ea typeface="Calibri" pitchFamily="34" charset="-122"/>
                 <a:cs typeface="Calibri" pitchFamily="34" charset="-120"/>
               </a:rPr>
-              <a:t>join, combine, sink into</a:t>
+              <a:t>electronic; online</a:t>
             </a:r>
             <a:endParaRPr lang="en-US" sz="850" dirty="0"/>
           </a:p>
@@ -8742,6 +8854,118 @@
       <p:sp>
         <p:nvSpPr>
           <p:cNvPr id="19" name="Shape 17"/>
+          <p:cNvSpPr/>
+          <p:nvPr/>
+        </p:nvSpPr>
+        <p:spPr>
+          <a:xfrm>
+            <a:off x="5803392" y="2258568"/>
+            <a:ext cx="1828800" cy="292608"/>
+          </a:xfrm>
+          <a:prstGeom prst="rect">
+            <a:avLst>
+              <a:gd name="adj" fmla="val 25000"/>
+            </a:avLst>
+          </a:prstGeom>
+          <a:solidFill>
+            <a:srgbClr val="CCFBF1"/>
+          </a:solidFill>
+          <a:ln w="19050">
+            <a:solidFill>
+              <a:srgbClr val="0D9488"/>
+            </a:solidFill>
+            <a:prstDash val="solid"/>
+          </a:ln>
+          <a:effectLst>
+            <a:outerShdw sx="100000" sy="100000" kx="0" ky="0" algn="bl" rotWithShape="0" blurRad="101600" dist="38100" dir="8100000">
+              <a:srgbClr val="000000">
+                <a:alpha val="12000"/>
+              </a:srgbClr>
+            </a:outerShdw>
+          </a:effectLst>
+        </p:spPr>
+      </p:sp>
+      <p:sp>
+        <p:nvSpPr>
+          <p:cNvPr id="20" name="Text 18"/>
+          <p:cNvSpPr/>
+          <p:nvPr/>
+        </p:nvSpPr>
+        <p:spPr>
+          <a:xfrm>
+            <a:off x="5803392" y="2258568"/>
+            <a:ext cx="1828800" cy="292608"/>
+          </a:xfrm>
+          <a:prstGeom prst="rect">
+            <a:avLst/>
+          </a:prstGeom>
+          <a:noFill/>
+          <a:ln/>
+        </p:spPr>
+        <p:txBody>
+          <a:bodyPr wrap="square" lIns="0" tIns="0" rIns="0" bIns="0" rtlCol="0" anchor="ctr"/>
+          <a:lstStyle/>
+          <a:p>
+            <a:pPr algn="ctr" indent="0" marL="0">
+              <a:buNone/>
+            </a:pPr>
+            <a:r>
+              <a:rPr lang="en-US" sz="1300" b="1" dirty="0">
+                <a:solidFill>
+                  <a:srgbClr val="0F766E"/>
+                </a:solidFill>
+                <a:latin typeface="Trebuchet MS" pitchFamily="34" charset="0"/>
+                <a:ea typeface="Trebuchet MS" pitchFamily="34" charset="-122"/>
+                <a:cs typeface="Trebuchet MS" pitchFamily="34" charset="-120"/>
+              </a:rPr>
+              <a:t>merge</a:t>
+            </a:r>
+            <a:endParaRPr lang="en-US" sz="1300" dirty="0"/>
+          </a:p>
+        </p:txBody>
+      </p:sp>
+      <p:sp>
+        <p:nvSpPr>
+          <p:cNvPr id="21" name="Text 19"/>
+          <p:cNvSpPr/>
+          <p:nvPr/>
+        </p:nvSpPr>
+        <p:spPr>
+          <a:xfrm>
+            <a:off x="5803392" y="2569464"/>
+            <a:ext cx="1828800" cy="201168"/>
+          </a:xfrm>
+          <a:prstGeom prst="rect">
+            <a:avLst/>
+          </a:prstGeom>
+          <a:noFill/>
+          <a:ln/>
+        </p:spPr>
+        <p:txBody>
+          <a:bodyPr wrap="square" lIns="0" tIns="0" rIns="0" bIns="0" rtlCol="0" anchor="t"/>
+          <a:lstStyle/>
+          <a:p>
+            <a:pPr algn="ctr" indent="0" marL="0">
+              <a:buNone/>
+            </a:pPr>
+            <a:r>
+              <a:rPr lang="en-US" sz="850" dirty="0">
+                <a:solidFill>
+                  <a:srgbClr val="475569"/>
+                </a:solidFill>
+                <a:latin typeface="Calibri" pitchFamily="34" charset="0"/>
+                <a:ea typeface="Calibri" pitchFamily="34" charset="-122"/>
+                <a:cs typeface="Calibri" pitchFamily="34" charset="-120"/>
+              </a:rPr>
+              <a:t>to join together into one</a:t>
+            </a:r>
+            <a:endParaRPr lang="en-US" sz="850" dirty="0"/>
+          </a:p>
+        </p:txBody>
+      </p:sp>
+      <p:sp>
+        <p:nvSpPr>
+          <p:cNvPr id="22" name="Shape 20"/>
           <p:cNvSpPr/>
           <p:nvPr/>
         </p:nvSpPr>
@@ -8768,7 +8992,7 @@
       </p:sp>
       <p:sp>
         <p:nvSpPr>
-          <p:cNvPr id="20" name="Text 18"/>
+          <p:cNvPr id="23" name="Text 21"/>
           <p:cNvSpPr/>
           <p:nvPr/>
         </p:nvSpPr>
@@ -8807,7 +9031,7 @@
       </p:sp>
       <p:sp>
         <p:nvSpPr>
-          <p:cNvPr id="21" name="Shape 19"/>
+          <p:cNvPr id="24" name="Shape 22"/>
           <p:cNvSpPr/>
           <p:nvPr/>
         </p:nvSpPr>
@@ -8834,13 +9058,13 @@
       </p:sp>
       <p:sp>
         <p:nvSpPr>
-          <p:cNvPr id="22" name="Shape 20"/>
-          <p:cNvSpPr/>
-          <p:nvPr/>
-        </p:nvSpPr>
-        <p:spPr>
-          <a:xfrm>
-            <a:off x="4370832" y="3364992"/>
+          <p:cNvPr id="25" name="Shape 23"/>
+          <p:cNvSpPr/>
+          <p:nvPr/>
+        </p:nvSpPr>
+        <p:spPr>
+          <a:xfrm>
+            <a:off x="2999232" y="3364992"/>
             <a:ext cx="1645920" cy="475488"/>
           </a:xfrm>
           <a:prstGeom prst="rect">
@@ -8861,13 +9085,13 @@
       </p:sp>
       <p:sp>
         <p:nvSpPr>
-          <p:cNvPr id="23" name="Text 21"/>
-          <p:cNvSpPr/>
-          <p:nvPr/>
-        </p:nvSpPr>
-        <p:spPr>
-          <a:xfrm>
-            <a:off x="4370832" y="3364992"/>
+          <p:cNvPr id="26" name="Text 24"/>
+          <p:cNvSpPr/>
+          <p:nvPr/>
+        </p:nvSpPr>
+        <p:spPr>
+          <a:xfrm>
+            <a:off x="2999232" y="3364992"/>
             <a:ext cx="1645920" cy="475488"/>
           </a:xfrm>
           <a:prstGeom prst="rect">
@@ -8892,6 +9116,111 @@
                 <a:ea typeface="Trebuchet MS" pitchFamily="34" charset="-122"/>
                 <a:cs typeface="Trebuchet MS" pitchFamily="34" charset="-120"/>
               </a:rPr>
+              <a:t>e</a:t>
+            </a:r>
+            <a:endParaRPr lang="en-US" sz="1400" dirty="0"/>
+          </a:p>
+        </p:txBody>
+      </p:sp>
+      <p:sp>
+        <p:nvSpPr>
+          <p:cNvPr id="27" name="Text 25"/>
+          <p:cNvSpPr/>
+          <p:nvPr/>
+        </p:nvSpPr>
+        <p:spPr>
+          <a:xfrm>
+            <a:off x="4645152" y="3364992"/>
+            <a:ext cx="1097280" cy="475488"/>
+          </a:xfrm>
+          <a:prstGeom prst="rect">
+            <a:avLst/>
+          </a:prstGeom>
+          <a:noFill/>
+          <a:ln/>
+        </p:spPr>
+        <p:txBody>
+          <a:bodyPr wrap="square" lIns="0" tIns="0" rIns="0" bIns="0" rtlCol="0" anchor="ctr"/>
+          <a:lstStyle/>
+          <a:p>
+            <a:pPr algn="ctr" indent="0" marL="0">
+              <a:buNone/>
+            </a:pPr>
+            <a:r>
+              <a:rPr lang="en-US" sz="1600" b="1" dirty="0">
+                <a:solidFill>
+                  <a:srgbClr val="0D9488"/>
+                </a:solidFill>
+                <a:latin typeface="Trebuchet MS" pitchFamily="34" charset="0"/>
+                <a:ea typeface="Trebuchet MS" pitchFamily="34" charset="-122"/>
+                <a:cs typeface="Trebuchet MS" pitchFamily="34" charset="-120"/>
+              </a:rPr>
+              <a:t>·</a:t>
+            </a:r>
+            <a:endParaRPr lang="en-US" sz="1600" dirty="0"/>
+          </a:p>
+        </p:txBody>
+      </p:sp>
+      <p:sp>
+        <p:nvSpPr>
+          <p:cNvPr id="28" name="Shape 26"/>
+          <p:cNvSpPr/>
+          <p:nvPr/>
+        </p:nvSpPr>
+        <p:spPr>
+          <a:xfrm>
+            <a:off x="5742432" y="3364992"/>
+            <a:ext cx="1645920" cy="475488"/>
+          </a:xfrm>
+          <a:prstGeom prst="rect">
+            <a:avLst>
+              <a:gd name="adj" fmla="val 9615"/>
+            </a:avLst>
+          </a:prstGeom>
+          <a:solidFill>
+            <a:srgbClr val="FFFFFF"/>
+          </a:solidFill>
+          <a:ln w="12700">
+            <a:solidFill>
+              <a:srgbClr val="0D9488"/>
+            </a:solidFill>
+            <a:prstDash val="solid"/>
+          </a:ln>
+        </p:spPr>
+      </p:sp>
+      <p:sp>
+        <p:nvSpPr>
+          <p:cNvPr id="29" name="Text 27"/>
+          <p:cNvSpPr/>
+          <p:nvPr/>
+        </p:nvSpPr>
+        <p:spPr>
+          <a:xfrm>
+            <a:off x="5742432" y="3364992"/>
+            <a:ext cx="1645920" cy="475488"/>
+          </a:xfrm>
+          <a:prstGeom prst="rect">
+            <a:avLst/>
+          </a:prstGeom>
+          <a:noFill/>
+          <a:ln/>
+        </p:spPr>
+        <p:txBody>
+          <a:bodyPr wrap="square" lIns="0" tIns="0" rIns="0" bIns="0" rtlCol="0" anchor="ctr"/>
+          <a:lstStyle/>
+          <a:p>
+            <a:pPr algn="ctr" indent="0" marL="0">
+              <a:buNone/>
+            </a:pPr>
+            <a:r>
+              <a:rPr lang="en-US" sz="1400" b="1" dirty="0">
+                <a:solidFill>
+                  <a:srgbClr val="0D9488"/>
+                </a:solidFill>
+                <a:latin typeface="Trebuchet MS" pitchFamily="34" charset="0"/>
+                <a:ea typeface="Trebuchet MS" pitchFamily="34" charset="-122"/>
+                <a:cs typeface="Trebuchet MS" pitchFamily="34" charset="-120"/>
+              </a:rPr>
               <a:t>merge</a:t>
             </a:r>
             <a:endParaRPr lang="en-US" sz="1400" dirty="0"/>
@@ -8900,7 +9229,7 @@
       </p:sp>
       <p:sp>
         <p:nvSpPr>
-          <p:cNvPr id="24" name="Shape 22"/>
+          <p:cNvPr id="30" name="Shape 28"/>
           <p:cNvSpPr/>
           <p:nvPr/>
         </p:nvSpPr>
@@ -8927,7 +9256,7 @@
       </p:sp>
       <p:sp>
         <p:nvSpPr>
-          <p:cNvPr id="25" name="Text 23"/>
+          <p:cNvPr id="31" name="Text 29"/>
           <p:cNvSpPr/>
           <p:nvPr/>
         </p:nvSpPr>
@@ -8966,7 +9295,7 @@
       </p:sp>
       <p:sp>
         <p:nvSpPr>
-          <p:cNvPr id="26" name="Shape 24"/>
+          <p:cNvPr id="32" name="Shape 30"/>
           <p:cNvSpPr/>
           <p:nvPr/>
         </p:nvSpPr>
@@ -8993,7 +9322,7 @@
       </p:sp>
       <p:sp>
         <p:nvSpPr>
-          <p:cNvPr id="27" name="Text 25"/>
+          <p:cNvPr id="33" name="Text 31"/>
           <p:cNvSpPr/>
           <p:nvPr/>
         </p:nvSpPr>
@@ -9316,7 +9645,7 @@
                 <a:ea typeface="Calibri" pitchFamily="34" charset="-122"/>
                 <a:cs typeface="Calibri" pitchFamily="34" charset="-120"/>
               </a:rPr>
-              <a:t>Word Labs  •  wordlabs.app  •  Root: 'merge' = join, combine, sink into</a:t>
+              <a:t>Word Labs  •  wordlabs.app  •  Root: 'merge' = to join together into one</a:t>
             </a:r>
             <a:endParaRPr lang="en-US" sz="800" dirty="0"/>
           </a:p>
@@ -9455,7 +9784,7 @@
                 <a:ea typeface="Trebuchet MS" pitchFamily="34" charset="-122"/>
                 <a:cs typeface="Trebuchet MS" pitchFamily="34" charset="-120"/>
               </a:rPr>
-              <a:t>merge</a:t>
+              <a:t>emerge</a:t>
             </a:r>
             <a:endParaRPr lang="en-US" sz="2800" dirty="0"/>
           </a:p>
@@ -9535,7 +9864,7 @@
         </p:nvSpPr>
         <p:spPr>
           <a:xfrm>
-            <a:off x="4370832" y="2258568"/>
+            <a:off x="2938272" y="2258568"/>
             <a:ext cx="1828800" cy="292608"/>
           </a:xfrm>
           <a:prstGeom prst="rect">
@@ -9544,11 +9873,11 @@
             </a:avLst>
           </a:prstGeom>
           <a:solidFill>
-            <a:srgbClr val="CCFBF1"/>
+            <a:srgbClr val="DDD6FE"/>
           </a:solidFill>
           <a:ln w="19050">
             <a:solidFill>
-              <a:srgbClr val="0D9488"/>
+              <a:srgbClr val="7C3AED"/>
             </a:solidFill>
             <a:prstDash val="solid"/>
           </a:ln>
@@ -9569,7 +9898,7 @@
         </p:nvSpPr>
         <p:spPr>
           <a:xfrm>
-            <a:off x="4370832" y="2258568"/>
+            <a:off x="2938272" y="2258568"/>
             <a:ext cx="1828800" cy="292608"/>
           </a:xfrm>
           <a:prstGeom prst="rect">
@@ -9588,13 +9917,13 @@
             <a:r>
               <a:rPr lang="en-US" sz="1300" b="1" dirty="0">
                 <a:solidFill>
-                  <a:srgbClr val="0F766E"/>
+                  <a:srgbClr val="4C1D95"/>
                 </a:solidFill>
                 <a:latin typeface="Trebuchet MS" pitchFamily="34" charset="0"/>
                 <a:ea typeface="Trebuchet MS" pitchFamily="34" charset="-122"/>
                 <a:cs typeface="Trebuchet MS" pitchFamily="34" charset="-120"/>
               </a:rPr>
-              <a:t>merge</a:t>
+              <a:t>e</a:t>
             </a:r>
             <a:endParaRPr lang="en-US" sz="1300" dirty="0"/>
           </a:p>
@@ -9608,7 +9937,7 @@
         </p:nvSpPr>
         <p:spPr>
           <a:xfrm>
-            <a:off x="4370832" y="2569464"/>
+            <a:off x="2938272" y="2569464"/>
             <a:ext cx="1828800" cy="201168"/>
           </a:xfrm>
           <a:prstGeom prst="rect">
@@ -9633,7 +9962,7 @@
                 <a:ea typeface="Calibri" pitchFamily="34" charset="-122"/>
                 <a:cs typeface="Calibri" pitchFamily="34" charset="-120"/>
               </a:rPr>
-              <a:t>join, combine, sink into</a:t>
+              <a:t>electronic; online</a:t>
             </a:r>
             <a:endParaRPr lang="en-US" sz="850" dirty="0"/>
           </a:p>
@@ -9642,6 +9971,118 @@
       <p:sp>
         <p:nvSpPr>
           <p:cNvPr id="19" name="Shape 17"/>
+          <p:cNvSpPr/>
+          <p:nvPr/>
+        </p:nvSpPr>
+        <p:spPr>
+          <a:xfrm>
+            <a:off x="5803392" y="2258568"/>
+            <a:ext cx="1828800" cy="292608"/>
+          </a:xfrm>
+          <a:prstGeom prst="rect">
+            <a:avLst>
+              <a:gd name="adj" fmla="val 25000"/>
+            </a:avLst>
+          </a:prstGeom>
+          <a:solidFill>
+            <a:srgbClr val="CCFBF1"/>
+          </a:solidFill>
+          <a:ln w="19050">
+            <a:solidFill>
+              <a:srgbClr val="0D9488"/>
+            </a:solidFill>
+            <a:prstDash val="solid"/>
+          </a:ln>
+          <a:effectLst>
+            <a:outerShdw sx="100000" sy="100000" kx="0" ky="0" algn="bl" rotWithShape="0" blurRad="101600" dist="38100" dir="8100000">
+              <a:srgbClr val="000000">
+                <a:alpha val="12000"/>
+              </a:srgbClr>
+            </a:outerShdw>
+          </a:effectLst>
+        </p:spPr>
+      </p:sp>
+      <p:sp>
+        <p:nvSpPr>
+          <p:cNvPr id="20" name="Text 18"/>
+          <p:cNvSpPr/>
+          <p:nvPr/>
+        </p:nvSpPr>
+        <p:spPr>
+          <a:xfrm>
+            <a:off x="5803392" y="2258568"/>
+            <a:ext cx="1828800" cy="292608"/>
+          </a:xfrm>
+          <a:prstGeom prst="rect">
+            <a:avLst/>
+          </a:prstGeom>
+          <a:noFill/>
+          <a:ln/>
+        </p:spPr>
+        <p:txBody>
+          <a:bodyPr wrap="square" lIns="0" tIns="0" rIns="0" bIns="0" rtlCol="0" anchor="ctr"/>
+          <a:lstStyle/>
+          <a:p>
+            <a:pPr algn="ctr" indent="0" marL="0">
+              <a:buNone/>
+            </a:pPr>
+            <a:r>
+              <a:rPr lang="en-US" sz="1300" b="1" dirty="0">
+                <a:solidFill>
+                  <a:srgbClr val="0F766E"/>
+                </a:solidFill>
+                <a:latin typeface="Trebuchet MS" pitchFamily="34" charset="0"/>
+                <a:ea typeface="Trebuchet MS" pitchFamily="34" charset="-122"/>
+                <a:cs typeface="Trebuchet MS" pitchFamily="34" charset="-120"/>
+              </a:rPr>
+              <a:t>merge</a:t>
+            </a:r>
+            <a:endParaRPr lang="en-US" sz="1300" dirty="0"/>
+          </a:p>
+        </p:txBody>
+      </p:sp>
+      <p:sp>
+        <p:nvSpPr>
+          <p:cNvPr id="21" name="Text 19"/>
+          <p:cNvSpPr/>
+          <p:nvPr/>
+        </p:nvSpPr>
+        <p:spPr>
+          <a:xfrm>
+            <a:off x="5803392" y="2569464"/>
+            <a:ext cx="1828800" cy="201168"/>
+          </a:xfrm>
+          <a:prstGeom prst="rect">
+            <a:avLst/>
+          </a:prstGeom>
+          <a:noFill/>
+          <a:ln/>
+        </p:spPr>
+        <p:txBody>
+          <a:bodyPr wrap="square" lIns="0" tIns="0" rIns="0" bIns="0" rtlCol="0" anchor="t"/>
+          <a:lstStyle/>
+          <a:p>
+            <a:pPr algn="ctr" indent="0" marL="0">
+              <a:buNone/>
+            </a:pPr>
+            <a:r>
+              <a:rPr lang="en-US" sz="850" dirty="0">
+                <a:solidFill>
+                  <a:srgbClr val="475569"/>
+                </a:solidFill>
+                <a:latin typeface="Calibri" pitchFamily="34" charset="0"/>
+                <a:ea typeface="Calibri" pitchFamily="34" charset="-122"/>
+                <a:cs typeface="Calibri" pitchFamily="34" charset="-120"/>
+              </a:rPr>
+              <a:t>to join together into one</a:t>
+            </a:r>
+            <a:endParaRPr lang="en-US" sz="850" dirty="0"/>
+          </a:p>
+        </p:txBody>
+      </p:sp>
+      <p:sp>
+        <p:nvSpPr>
+          <p:cNvPr id="22" name="Shape 20"/>
           <p:cNvSpPr/>
           <p:nvPr/>
         </p:nvSpPr>
@@ -9668,7 +10109,7 @@
       </p:sp>
       <p:sp>
         <p:nvSpPr>
-          <p:cNvPr id="20" name="Text 18"/>
+          <p:cNvPr id="23" name="Text 21"/>
           <p:cNvSpPr/>
           <p:nvPr/>
         </p:nvSpPr>
@@ -9707,7 +10148,7 @@
       </p:sp>
       <p:sp>
         <p:nvSpPr>
-          <p:cNvPr id="21" name="Shape 19"/>
+          <p:cNvPr id="24" name="Shape 22"/>
           <p:cNvSpPr/>
           <p:nvPr/>
         </p:nvSpPr>
@@ -9734,13 +10175,13 @@
       </p:sp>
       <p:sp>
         <p:nvSpPr>
-          <p:cNvPr id="22" name="Shape 20"/>
-          <p:cNvSpPr/>
-          <p:nvPr/>
-        </p:nvSpPr>
-        <p:spPr>
-          <a:xfrm>
-            <a:off x="4370832" y="3364992"/>
+          <p:cNvPr id="25" name="Shape 23"/>
+          <p:cNvSpPr/>
+          <p:nvPr/>
+        </p:nvSpPr>
+        <p:spPr>
+          <a:xfrm>
+            <a:off x="2999232" y="3364992"/>
             <a:ext cx="1645920" cy="475488"/>
           </a:xfrm>
           <a:prstGeom prst="rect">
@@ -9761,13 +10202,13 @@
       </p:sp>
       <p:sp>
         <p:nvSpPr>
-          <p:cNvPr id="23" name="Text 21"/>
-          <p:cNvSpPr/>
-          <p:nvPr/>
-        </p:nvSpPr>
-        <p:spPr>
-          <a:xfrm>
-            <a:off x="4370832" y="3364992"/>
+          <p:cNvPr id="26" name="Text 24"/>
+          <p:cNvSpPr/>
+          <p:nvPr/>
+        </p:nvSpPr>
+        <p:spPr>
+          <a:xfrm>
+            <a:off x="2999232" y="3364992"/>
             <a:ext cx="1645920" cy="475488"/>
           </a:xfrm>
           <a:prstGeom prst="rect">
@@ -9792,6 +10233,111 @@
                 <a:ea typeface="Trebuchet MS" pitchFamily="34" charset="-122"/>
                 <a:cs typeface="Trebuchet MS" pitchFamily="34" charset="-120"/>
               </a:rPr>
+              <a:t>e</a:t>
+            </a:r>
+            <a:endParaRPr lang="en-US" sz="1400" dirty="0"/>
+          </a:p>
+        </p:txBody>
+      </p:sp>
+      <p:sp>
+        <p:nvSpPr>
+          <p:cNvPr id="27" name="Text 25"/>
+          <p:cNvSpPr/>
+          <p:nvPr/>
+        </p:nvSpPr>
+        <p:spPr>
+          <a:xfrm>
+            <a:off x="4645152" y="3364992"/>
+            <a:ext cx="1097280" cy="475488"/>
+          </a:xfrm>
+          <a:prstGeom prst="rect">
+            <a:avLst/>
+          </a:prstGeom>
+          <a:noFill/>
+          <a:ln/>
+        </p:spPr>
+        <p:txBody>
+          <a:bodyPr wrap="square" lIns="0" tIns="0" rIns="0" bIns="0" rtlCol="0" anchor="ctr"/>
+          <a:lstStyle/>
+          <a:p>
+            <a:pPr algn="ctr" indent="0" marL="0">
+              <a:buNone/>
+            </a:pPr>
+            <a:r>
+              <a:rPr lang="en-US" sz="1600" b="1" dirty="0">
+                <a:solidFill>
+                  <a:srgbClr val="0D9488"/>
+                </a:solidFill>
+                <a:latin typeface="Trebuchet MS" pitchFamily="34" charset="0"/>
+                <a:ea typeface="Trebuchet MS" pitchFamily="34" charset="-122"/>
+                <a:cs typeface="Trebuchet MS" pitchFamily="34" charset="-120"/>
+              </a:rPr>
+              <a:t>·</a:t>
+            </a:r>
+            <a:endParaRPr lang="en-US" sz="1600" dirty="0"/>
+          </a:p>
+        </p:txBody>
+      </p:sp>
+      <p:sp>
+        <p:nvSpPr>
+          <p:cNvPr id="28" name="Shape 26"/>
+          <p:cNvSpPr/>
+          <p:nvPr/>
+        </p:nvSpPr>
+        <p:spPr>
+          <a:xfrm>
+            <a:off x="5742432" y="3364992"/>
+            <a:ext cx="1645920" cy="475488"/>
+          </a:xfrm>
+          <a:prstGeom prst="rect">
+            <a:avLst>
+              <a:gd name="adj" fmla="val 9615"/>
+            </a:avLst>
+          </a:prstGeom>
+          <a:solidFill>
+            <a:srgbClr val="FFFFFF"/>
+          </a:solidFill>
+          <a:ln w="12700">
+            <a:solidFill>
+              <a:srgbClr val="0D9488"/>
+            </a:solidFill>
+            <a:prstDash val="solid"/>
+          </a:ln>
+        </p:spPr>
+      </p:sp>
+      <p:sp>
+        <p:nvSpPr>
+          <p:cNvPr id="29" name="Text 27"/>
+          <p:cNvSpPr/>
+          <p:nvPr/>
+        </p:nvSpPr>
+        <p:spPr>
+          <a:xfrm>
+            <a:off x="5742432" y="3364992"/>
+            <a:ext cx="1645920" cy="475488"/>
+          </a:xfrm>
+          <a:prstGeom prst="rect">
+            <a:avLst/>
+          </a:prstGeom>
+          <a:noFill/>
+          <a:ln/>
+        </p:spPr>
+        <p:txBody>
+          <a:bodyPr wrap="square" lIns="0" tIns="0" rIns="0" bIns="0" rtlCol="0" anchor="ctr"/>
+          <a:lstStyle/>
+          <a:p>
+            <a:pPr algn="ctr" indent="0" marL="0">
+              <a:buNone/>
+            </a:pPr>
+            <a:r>
+              <a:rPr lang="en-US" sz="1400" b="1" dirty="0">
+                <a:solidFill>
+                  <a:srgbClr val="0D9488"/>
+                </a:solidFill>
+                <a:latin typeface="Trebuchet MS" pitchFamily="34" charset="0"/>
+                <a:ea typeface="Trebuchet MS" pitchFamily="34" charset="-122"/>
+                <a:cs typeface="Trebuchet MS" pitchFamily="34" charset="-120"/>
+              </a:rPr>
               <a:t>merge</a:t>
             </a:r>
             <a:endParaRPr lang="en-US" sz="1400" dirty="0"/>
@@ -9800,7 +10346,7 @@
       </p:sp>
       <p:sp>
         <p:nvSpPr>
-          <p:cNvPr id="24" name="Shape 22"/>
+          <p:cNvPr id="30" name="Shape 28"/>
           <p:cNvSpPr/>
           <p:nvPr/>
         </p:nvSpPr>
@@ -9827,7 +10373,7 @@
       </p:sp>
       <p:sp>
         <p:nvSpPr>
-          <p:cNvPr id="25" name="Text 23"/>
+          <p:cNvPr id="31" name="Text 29"/>
           <p:cNvSpPr/>
           <p:nvPr/>
         </p:nvSpPr>
@@ -9866,18 +10412,18 @@
       </p:sp>
       <p:sp>
         <p:nvSpPr>
-          <p:cNvPr id="26" name="Shape 24"/>
+          <p:cNvPr id="32" name="Shape 30"/>
           <p:cNvSpPr/>
           <p:nvPr/>
         </p:nvSpPr>
         <p:spPr>
           <a:xfrm>
             <a:off x="1874520" y="4096512"/>
-            <a:ext cx="6903720" cy="804672"/>
+            <a:ext cx="6903720" cy="658368"/>
           </a:xfrm>
           <a:prstGeom prst="rect">
             <a:avLst>
-              <a:gd name="adj" fmla="val 6818"/>
+              <a:gd name="adj" fmla="val 8333"/>
             </a:avLst>
           </a:prstGeom>
           <a:solidFill>
@@ -9893,18 +10439,18 @@
       </p:sp>
       <p:sp>
         <p:nvSpPr>
-          <p:cNvPr id="27" name="Shape 25"/>
-          <p:cNvSpPr/>
-          <p:nvPr/>
-        </p:nvSpPr>
-        <p:spPr>
-          <a:xfrm>
-            <a:off x="3033522" y="4169664"/>
-            <a:ext cx="685800" cy="384048"/>
+          <p:cNvPr id="33" name="Shape 31"/>
+          <p:cNvSpPr/>
+          <p:nvPr/>
+        </p:nvSpPr>
+        <p:spPr>
+          <a:xfrm>
+            <a:off x="2254649" y="4169664"/>
+            <a:ext cx="685800" cy="475488"/>
           </a:xfrm>
           <a:prstGeom prst="rect">
             <a:avLst>
-              <a:gd name="adj" fmla="val 9524"/>
+              <a:gd name="adj" fmla="val 7692"/>
             </a:avLst>
           </a:prstGeom>
           <a:solidFill>
@@ -9920,14 +10466,14 @@
       </p:sp>
       <p:sp>
         <p:nvSpPr>
-          <p:cNvPr id="28" name="Text 26"/>
-          <p:cNvSpPr/>
-          <p:nvPr/>
-        </p:nvSpPr>
-        <p:spPr>
-          <a:xfrm>
-            <a:off x="3033522" y="4169664"/>
-            <a:ext cx="685800" cy="384048"/>
+          <p:cNvPr id="34" name="Text 32"/>
+          <p:cNvSpPr/>
+          <p:nvPr/>
+        </p:nvSpPr>
+        <p:spPr>
+          <a:xfrm>
+            <a:off x="2254649" y="4169664"/>
+            <a:ext cx="685800" cy="475488"/>
           </a:xfrm>
           <a:prstGeom prst="rect">
             <a:avLst/>
@@ -9943,7 +10489,7 @@
               <a:buNone/>
             </a:pPr>
             <a:r>
-              <a:rPr lang="en-US" sz="1000" b="1" dirty="0">
+              <a:rPr lang="en-US" sz="900" b="1" dirty="0">
                 <a:solidFill>
                   <a:srgbClr val="9D174D"/>
                 </a:solidFill>
@@ -9951,26 +10497,26 @@
                 <a:ea typeface="Trebuchet MS" pitchFamily="34" charset="-122"/>
                 <a:cs typeface="Trebuchet MS" pitchFamily="34" charset="-120"/>
               </a:rPr>
-              <a:t>m</a:t>
-            </a:r>
-            <a:endParaRPr lang="en-US" sz="1000" dirty="0"/>
-          </a:p>
-        </p:txBody>
-      </p:sp>
-      <p:sp>
-        <p:nvSpPr>
-          <p:cNvPr id="29" name="Shape 27"/>
-          <p:cNvSpPr/>
-          <p:nvPr/>
-        </p:nvSpPr>
-        <p:spPr>
-          <a:xfrm>
-            <a:off x="4850892" y="4169664"/>
-            <a:ext cx="685800" cy="384048"/>
+              <a:t>e</a:t>
+            </a:r>
+            <a:endParaRPr lang="en-US" sz="900" dirty="0"/>
+          </a:p>
+        </p:txBody>
+      </p:sp>
+      <p:sp>
+        <p:nvSpPr>
+          <p:cNvPr id="35" name="Shape 33"/>
+          <p:cNvSpPr/>
+          <p:nvPr/>
+        </p:nvSpPr>
+        <p:spPr>
+          <a:xfrm>
+            <a:off x="3293146" y="4169664"/>
+            <a:ext cx="685800" cy="475488"/>
           </a:xfrm>
           <a:prstGeom prst="rect">
             <a:avLst>
-              <a:gd name="adj" fmla="val 9524"/>
+              <a:gd name="adj" fmla="val 7692"/>
             </a:avLst>
           </a:prstGeom>
           <a:solidFill>
@@ -9986,14 +10532,14 @@
       </p:sp>
       <p:sp>
         <p:nvSpPr>
-          <p:cNvPr id="30" name="Text 28"/>
-          <p:cNvSpPr/>
-          <p:nvPr/>
-        </p:nvSpPr>
-        <p:spPr>
-          <a:xfrm>
-            <a:off x="4850892" y="4169664"/>
-            <a:ext cx="685800" cy="384048"/>
+          <p:cNvPr id="36" name="Text 34"/>
+          <p:cNvSpPr/>
+          <p:nvPr/>
+        </p:nvSpPr>
+        <p:spPr>
+          <a:xfrm>
+            <a:off x="3293146" y="4169664"/>
+            <a:ext cx="685800" cy="475488"/>
           </a:xfrm>
           <a:prstGeom prst="rect">
             <a:avLst/>
@@ -10009,7 +10555,7 @@
               <a:buNone/>
             </a:pPr>
             <a:r>
-              <a:rPr lang="en-US" sz="1000" b="1" dirty="0">
+              <a:rPr lang="en-US" sz="900" b="1" dirty="0">
                 <a:solidFill>
                   <a:srgbClr val="9D174D"/>
                 </a:solidFill>
@@ -10017,26 +10563,26 @@
                 <a:ea typeface="Trebuchet MS" pitchFamily="34" charset="-122"/>
                 <a:cs typeface="Trebuchet MS" pitchFamily="34" charset="-120"/>
               </a:rPr>
-              <a:t>er</a:t>
-            </a:r>
-            <a:endParaRPr lang="en-US" sz="1000" dirty="0"/>
-          </a:p>
-        </p:txBody>
-      </p:sp>
-      <p:sp>
-        <p:nvSpPr>
-          <p:cNvPr id="31" name="Shape 29"/>
-          <p:cNvSpPr/>
-          <p:nvPr/>
-        </p:nvSpPr>
-        <p:spPr>
-          <a:xfrm>
-            <a:off x="6668262" y="4169664"/>
-            <a:ext cx="685800" cy="384048"/>
+              <a:t>m</a:t>
+            </a:r>
+            <a:endParaRPr lang="en-US" sz="900" dirty="0"/>
+          </a:p>
+        </p:txBody>
+      </p:sp>
+      <p:sp>
+        <p:nvSpPr>
+          <p:cNvPr id="37" name="Shape 35"/>
+          <p:cNvSpPr/>
+          <p:nvPr/>
+        </p:nvSpPr>
+        <p:spPr>
+          <a:xfrm>
+            <a:off x="4331643" y="4169664"/>
+            <a:ext cx="685800" cy="475488"/>
           </a:xfrm>
           <a:prstGeom prst="rect">
             <a:avLst>
-              <a:gd name="adj" fmla="val 9524"/>
+              <a:gd name="adj" fmla="val 7692"/>
             </a:avLst>
           </a:prstGeom>
           <a:solidFill>
@@ -10052,14 +10598,14 @@
       </p:sp>
       <p:sp>
         <p:nvSpPr>
-          <p:cNvPr id="32" name="Text 30"/>
-          <p:cNvSpPr/>
-          <p:nvPr/>
-        </p:nvSpPr>
-        <p:spPr>
-          <a:xfrm>
-            <a:off x="6668262" y="4169664"/>
-            <a:ext cx="685800" cy="384048"/>
+          <p:cNvPr id="38" name="Text 36"/>
+          <p:cNvSpPr/>
+          <p:nvPr/>
+        </p:nvSpPr>
+        <p:spPr>
+          <a:xfrm>
+            <a:off x="4331643" y="4169664"/>
+            <a:ext cx="685800" cy="475488"/>
           </a:xfrm>
           <a:prstGeom prst="rect">
             <a:avLst/>
@@ -10075,7 +10621,7 @@
               <a:buNone/>
             </a:pPr>
             <a:r>
-              <a:rPr lang="en-US" sz="1000" b="1" dirty="0">
+              <a:rPr lang="en-US" sz="900" b="1" dirty="0">
                 <a:solidFill>
                   <a:srgbClr val="9D174D"/>
                 </a:solidFill>
@@ -10083,48 +10629,207 @@
                 <a:ea typeface="Trebuchet MS" pitchFamily="34" charset="-122"/>
                 <a:cs typeface="Trebuchet MS" pitchFamily="34" charset="-120"/>
               </a:rPr>
-              <a:t>ge</a:t>
-            </a:r>
-            <a:endParaRPr lang="en-US" sz="1000" dirty="0"/>
-          </a:p>
-        </p:txBody>
-      </p:sp>
-      <p:sp>
-        <p:nvSpPr>
-          <p:cNvPr id="33" name="Text 31"/>
-          <p:cNvSpPr/>
-          <p:nvPr/>
-        </p:nvSpPr>
-        <p:spPr>
-          <a:xfrm>
-            <a:off x="6668262" y="4572000"/>
-            <a:ext cx="685800" cy="219456"/>
-          </a:xfrm>
-          <a:prstGeom prst="rect">
-            <a:avLst/>
-          </a:prstGeom>
-          <a:noFill/>
-          <a:ln/>
-        </p:spPr>
-        <p:txBody>
-          <a:bodyPr wrap="square" lIns="0" tIns="0" rIns="0" bIns="0" rtlCol="0" anchor="t"/>
-          <a:lstStyle/>
-          <a:p>
-            <a:pPr algn="ctr" indent="0" marL="0">
-              <a:buNone/>
-            </a:pPr>
-            <a:r>
-              <a:rPr lang="en-US" sz="750" i="1" dirty="0">
-                <a:solidFill>
-                  <a:srgbClr val="94A3B8"/>
-                </a:solidFill>
-                <a:latin typeface="Calibri" pitchFamily="34" charset="0"/>
-                <a:ea typeface="Calibri" pitchFamily="34" charset="-122"/>
-                <a:cs typeface="Calibri" pitchFamily="34" charset="-120"/>
-              </a:rPr>
-              <a:t>/j/</a:t>
-            </a:r>
-            <a:endParaRPr lang="en-US" sz="750" dirty="0"/>
+              <a:t>e</a:t>
+            </a:r>
+            <a:endParaRPr lang="en-US" sz="900" dirty="0"/>
+          </a:p>
+        </p:txBody>
+      </p:sp>
+      <p:sp>
+        <p:nvSpPr>
+          <p:cNvPr id="39" name="Shape 37"/>
+          <p:cNvSpPr/>
+          <p:nvPr/>
+        </p:nvSpPr>
+        <p:spPr>
+          <a:xfrm>
+            <a:off x="5370141" y="4169664"/>
+            <a:ext cx="685800" cy="475488"/>
+          </a:xfrm>
+          <a:prstGeom prst="rect">
+            <a:avLst>
+              <a:gd name="adj" fmla="val 7692"/>
+            </a:avLst>
+          </a:prstGeom>
+          <a:solidFill>
+            <a:srgbClr val="FFFFFF"/>
+          </a:solidFill>
+          <a:ln w="12700">
+            <a:solidFill>
+              <a:srgbClr val="DB2777"/>
+            </a:solidFill>
+            <a:prstDash val="solid"/>
+          </a:ln>
+        </p:spPr>
+      </p:sp>
+      <p:sp>
+        <p:nvSpPr>
+          <p:cNvPr id="40" name="Text 38"/>
+          <p:cNvSpPr/>
+          <p:nvPr/>
+        </p:nvSpPr>
+        <p:spPr>
+          <a:xfrm>
+            <a:off x="5370141" y="4169664"/>
+            <a:ext cx="685800" cy="475488"/>
+          </a:xfrm>
+          <a:prstGeom prst="rect">
+            <a:avLst/>
+          </a:prstGeom>
+          <a:noFill/>
+          <a:ln/>
+        </p:spPr>
+        <p:txBody>
+          <a:bodyPr wrap="square" lIns="0" tIns="0" rIns="0" bIns="0" rtlCol="0" anchor="ctr"/>
+          <a:lstStyle/>
+          <a:p>
+            <a:pPr algn="ctr" indent="0" marL="0">
+              <a:buNone/>
+            </a:pPr>
+            <a:r>
+              <a:rPr lang="en-US" sz="900" b="1" dirty="0">
+                <a:solidFill>
+                  <a:srgbClr val="9D174D"/>
+                </a:solidFill>
+                <a:latin typeface="Trebuchet MS" pitchFamily="34" charset="0"/>
+                <a:ea typeface="Trebuchet MS" pitchFamily="34" charset="-122"/>
+                <a:cs typeface="Trebuchet MS" pitchFamily="34" charset="-120"/>
+              </a:rPr>
+              <a:t>r</a:t>
+            </a:r>
+            <a:endParaRPr lang="en-US" sz="900" dirty="0"/>
+          </a:p>
+        </p:txBody>
+      </p:sp>
+      <p:sp>
+        <p:nvSpPr>
+          <p:cNvPr id="41" name="Shape 39"/>
+          <p:cNvSpPr/>
+          <p:nvPr/>
+        </p:nvSpPr>
+        <p:spPr>
+          <a:xfrm>
+            <a:off x="6408638" y="4169664"/>
+            <a:ext cx="685800" cy="475488"/>
+          </a:xfrm>
+          <a:prstGeom prst="rect">
+            <a:avLst>
+              <a:gd name="adj" fmla="val 7692"/>
+            </a:avLst>
+          </a:prstGeom>
+          <a:solidFill>
+            <a:srgbClr val="FFFFFF"/>
+          </a:solidFill>
+          <a:ln w="12700">
+            <a:solidFill>
+              <a:srgbClr val="DB2777"/>
+            </a:solidFill>
+            <a:prstDash val="solid"/>
+          </a:ln>
+        </p:spPr>
+      </p:sp>
+      <p:sp>
+        <p:nvSpPr>
+          <p:cNvPr id="42" name="Text 40"/>
+          <p:cNvSpPr/>
+          <p:nvPr/>
+        </p:nvSpPr>
+        <p:spPr>
+          <a:xfrm>
+            <a:off x="6408638" y="4169664"/>
+            <a:ext cx="685800" cy="475488"/>
+          </a:xfrm>
+          <a:prstGeom prst="rect">
+            <a:avLst/>
+          </a:prstGeom>
+          <a:noFill/>
+          <a:ln/>
+        </p:spPr>
+        <p:txBody>
+          <a:bodyPr wrap="square" lIns="0" tIns="0" rIns="0" bIns="0" rtlCol="0" anchor="ctr"/>
+          <a:lstStyle/>
+          <a:p>
+            <a:pPr algn="ctr" indent="0" marL="0">
+              <a:buNone/>
+            </a:pPr>
+            <a:r>
+              <a:rPr lang="en-US" sz="900" b="1" dirty="0">
+                <a:solidFill>
+                  <a:srgbClr val="9D174D"/>
+                </a:solidFill>
+                <a:latin typeface="Trebuchet MS" pitchFamily="34" charset="0"/>
+                <a:ea typeface="Trebuchet MS" pitchFamily="34" charset="-122"/>
+                <a:cs typeface="Trebuchet MS" pitchFamily="34" charset="-120"/>
+              </a:rPr>
+              <a:t>g</a:t>
+            </a:r>
+            <a:endParaRPr lang="en-US" sz="900" dirty="0"/>
+          </a:p>
+        </p:txBody>
+      </p:sp>
+      <p:sp>
+        <p:nvSpPr>
+          <p:cNvPr id="43" name="Shape 41"/>
+          <p:cNvSpPr/>
+          <p:nvPr/>
+        </p:nvSpPr>
+        <p:spPr>
+          <a:xfrm>
+            <a:off x="7447135" y="4169664"/>
+            <a:ext cx="685800" cy="475488"/>
+          </a:xfrm>
+          <a:prstGeom prst="rect">
+            <a:avLst>
+              <a:gd name="adj" fmla="val 7692"/>
+            </a:avLst>
+          </a:prstGeom>
+          <a:solidFill>
+            <a:srgbClr val="FFFFFF"/>
+          </a:solidFill>
+          <a:ln w="12700">
+            <a:solidFill>
+              <a:srgbClr val="DB2777"/>
+            </a:solidFill>
+            <a:prstDash val="solid"/>
+          </a:ln>
+        </p:spPr>
+      </p:sp>
+      <p:sp>
+        <p:nvSpPr>
+          <p:cNvPr id="44" name="Text 42"/>
+          <p:cNvSpPr/>
+          <p:nvPr/>
+        </p:nvSpPr>
+        <p:spPr>
+          <a:xfrm>
+            <a:off x="7447135" y="4169664"/>
+            <a:ext cx="685800" cy="475488"/>
+          </a:xfrm>
+          <a:prstGeom prst="rect">
+            <a:avLst/>
+          </a:prstGeom>
+          <a:noFill/>
+          <a:ln/>
+        </p:spPr>
+        <p:txBody>
+          <a:bodyPr wrap="square" lIns="0" tIns="0" rIns="0" bIns="0" rtlCol="0" anchor="ctr"/>
+          <a:lstStyle/>
+          <a:p>
+            <a:pPr algn="ctr" indent="0" marL="0">
+              <a:buNone/>
+            </a:pPr>
+            <a:r>
+              <a:rPr lang="en-US" sz="900" b="1" dirty="0">
+                <a:solidFill>
+                  <a:srgbClr val="9D174D"/>
+                </a:solidFill>
+                <a:latin typeface="Trebuchet MS" pitchFamily="34" charset="0"/>
+                <a:ea typeface="Trebuchet MS" pitchFamily="34" charset="-122"/>
+                <a:cs typeface="Trebuchet MS" pitchFamily="34" charset="-120"/>
+              </a:rPr>
+              <a:t>e</a:t>
+            </a:r>
+            <a:endParaRPr lang="en-US" sz="900" dirty="0"/>
           </a:p>
         </p:txBody>
       </p:sp>
@@ -10414,7 +11119,7 @@
                 <a:ea typeface="Calibri" pitchFamily="34" charset="-122"/>
                 <a:cs typeface="Calibri" pitchFamily="34" charset="-120"/>
               </a:rPr>
-              <a:t>Word Labs  •  wordlabs.app  •  Root: 'merge' = join, combine, sink into</a:t>
+              <a:t>Word Labs  •  wordlabs.app  •  Root: 'merge' = to join together into one</a:t>
             </a:r>
             <a:endParaRPr lang="en-US" sz="800" dirty="0"/>
           </a:p>
@@ -10553,7 +11258,7 @@
                 <a:ea typeface="Trebuchet MS" pitchFamily="34" charset="-122"/>
                 <a:cs typeface="Trebuchet MS" pitchFamily="34" charset="-120"/>
               </a:rPr>
-              <a:t>emergence</a:t>
+              <a:t>emerged</a:t>
             </a:r>
             <a:endParaRPr lang="en-US" sz="2800" dirty="0"/>
           </a:p>
@@ -11241,7 +11946,7 @@
                 <a:ea typeface="Calibri" pitchFamily="34" charset="-122"/>
                 <a:cs typeface="Calibri" pitchFamily="34" charset="-120"/>
               </a:rPr>
-              <a:t>Word Labs  •  wordlabs.app  •  Root: 'merge' = join, combine, sink into</a:t>
+              <a:t>Word Labs  •  wordlabs.app  •  Root: 'merge' = to join together into one</a:t>
             </a:r>
             <a:endParaRPr lang="en-US" sz="800" dirty="0"/>
           </a:p>
@@ -11380,7 +12085,7 @@
                 <a:ea typeface="Trebuchet MS" pitchFamily="34" charset="-122"/>
                 <a:cs typeface="Trebuchet MS" pitchFamily="34" charset="-120"/>
               </a:rPr>
-              <a:t>emergence</a:t>
+              <a:t>emerged</a:t>
             </a:r>
             <a:endParaRPr lang="en-US" sz="2800" dirty="0"/>
           </a:p>
@@ -11558,7 +12263,7 @@
                 <a:ea typeface="Calibri" pitchFamily="34" charset="-122"/>
                 <a:cs typeface="Calibri" pitchFamily="34" charset="-120"/>
               </a:rPr>
-              <a:t>out, from</a:t>
+              <a:t>electronic; online</a:t>
             </a:r>
             <a:endParaRPr lang="en-US" sz="850" dirty="0"/>
           </a:p>
@@ -11670,7 +12375,7 @@
                 <a:ea typeface="Calibri" pitchFamily="34" charset="-122"/>
                 <a:cs typeface="Calibri" pitchFamily="34" charset="-120"/>
               </a:rPr>
-              <a:t>join, combine, sink into</a:t>
+              <a:t>to join together into one</a:t>
             </a:r>
             <a:endParaRPr lang="en-US" sz="850" dirty="0"/>
           </a:p>
@@ -11743,7 +12448,7 @@
                 <a:ea typeface="Trebuchet MS" pitchFamily="34" charset="-122"/>
                 <a:cs typeface="Trebuchet MS" pitchFamily="34" charset="-120"/>
               </a:rPr>
-              <a:t>nce</a:t>
+              <a:t>ed</a:t>
             </a:r>
             <a:endParaRPr lang="en-US" sz="1300" dirty="0"/>
           </a:p>
@@ -11782,7 +12487,7 @@
                 <a:ea typeface="Calibri" pitchFamily="34" charset="-122"/>
                 <a:cs typeface="Calibri" pitchFamily="34" charset="-120"/>
               </a:rPr>
-              <a:t>state or quality of</a:t>
+              <a:t>past tense</a:t>
             </a:r>
             <a:endParaRPr lang="en-US" sz="850" dirty="0"/>
           </a:p>
@@ -12338,7 +13043,7 @@
                 <a:ea typeface="Calibri" pitchFamily="34" charset="-122"/>
                 <a:cs typeface="Calibri" pitchFamily="34" charset="-120"/>
               </a:rPr>
-              <a:t>Word Labs  •  wordlabs.app  •  Root: 'merge' = join, combine, sink into</a:t>
+              <a:t>Word Labs  •  wordlabs.app  •  Root: 'merge' = to join together into one</a:t>
             </a:r>
             <a:endParaRPr lang="en-US" sz="800" dirty="0"/>
           </a:p>
@@ -12477,7 +13182,7 @@
                 <a:ea typeface="Trebuchet MS" pitchFamily="34" charset="-122"/>
                 <a:cs typeface="Trebuchet MS" pitchFamily="34" charset="-120"/>
               </a:rPr>
-              <a:t>emergence</a:t>
+              <a:t>emerged</a:t>
             </a:r>
             <a:endParaRPr lang="en-US" sz="2800" dirty="0"/>
           </a:p>
@@ -12655,7 +13360,7 @@
                 <a:ea typeface="Calibri" pitchFamily="34" charset="-122"/>
                 <a:cs typeface="Calibri" pitchFamily="34" charset="-120"/>
               </a:rPr>
-              <a:t>out, from</a:t>
+              <a:t>electronic; online</a:t>
             </a:r>
             <a:endParaRPr lang="en-US" sz="850" dirty="0"/>
           </a:p>
@@ -12767,7 +13472,7 @@
                 <a:ea typeface="Calibri" pitchFamily="34" charset="-122"/>
                 <a:cs typeface="Calibri" pitchFamily="34" charset="-120"/>
               </a:rPr>
-              <a:t>join, combine, sink into</a:t>
+              <a:t>to join together into one</a:t>
             </a:r>
             <a:endParaRPr lang="en-US" sz="850" dirty="0"/>
           </a:p>
@@ -12840,7 +13545,7 @@
                 <a:ea typeface="Trebuchet MS" pitchFamily="34" charset="-122"/>
                 <a:cs typeface="Trebuchet MS" pitchFamily="34" charset="-120"/>
               </a:rPr>
-              <a:t>nce</a:t>
+              <a:t>ed</a:t>
             </a:r>
             <a:endParaRPr lang="en-US" sz="1300" dirty="0"/>
           </a:p>
@@ -12879,7 +13584,7 @@
                 <a:ea typeface="Calibri" pitchFamily="34" charset="-122"/>
                 <a:cs typeface="Calibri" pitchFamily="34" charset="-120"/>
               </a:rPr>
-              <a:t>state or quality of</a:t>
+              <a:t>past tense</a:t>
             </a:r>
             <a:endParaRPr lang="en-US" sz="850" dirty="0"/>
           </a:p>
@@ -12986,7 +13691,7 @@
         </p:nvSpPr>
         <p:spPr>
           <a:xfrm>
-            <a:off x="2313432" y="3364992"/>
+            <a:off x="2999232" y="3364992"/>
             <a:ext cx="1645920" cy="475488"/>
           </a:xfrm>
           <a:prstGeom prst="rect">
@@ -13013,7 +13718,7 @@
         </p:nvSpPr>
         <p:spPr>
           <a:xfrm>
-            <a:off x="2313432" y="3364992"/>
+            <a:off x="2999232" y="3364992"/>
             <a:ext cx="1645920" cy="475488"/>
           </a:xfrm>
           <a:prstGeom prst="rect">
@@ -13052,8 +13757,8 @@
         </p:nvSpPr>
         <p:spPr>
           <a:xfrm>
-            <a:off x="3959352" y="3364992"/>
-            <a:ext cx="411480" cy="475488"/>
+            <a:off x="4645152" y="3364992"/>
+            <a:ext cx="1097280" cy="475488"/>
           </a:xfrm>
           <a:prstGeom prst="rect">
             <a:avLst/>
@@ -13091,7 +13796,7 @@
         </p:nvSpPr>
         <p:spPr>
           <a:xfrm>
-            <a:off x="4370832" y="3364992"/>
+            <a:off x="5742432" y="3364992"/>
             <a:ext cx="1645920" cy="475488"/>
           </a:xfrm>
           <a:prstGeom prst="rect">
@@ -13118,7 +13823,7 @@
         </p:nvSpPr>
         <p:spPr>
           <a:xfrm>
-            <a:off x="4370832" y="3364992"/>
+            <a:off x="5742432" y="3364992"/>
             <a:ext cx="1645920" cy="475488"/>
           </a:xfrm>
           <a:prstGeom prst="rect">
@@ -13143,7 +13848,7 @@
                 <a:ea typeface="Trebuchet MS" pitchFamily="34" charset="-122"/>
                 <a:cs typeface="Trebuchet MS" pitchFamily="34" charset="-120"/>
               </a:rPr>
-              <a:t>mer</a:t>
+              <a:t>merged</a:t>
             </a:r>
             <a:endParaRPr lang="en-US" sz="1400" dirty="0"/>
           </a:p>
@@ -13151,14 +13856,41 @@
       </p:sp>
       <p:sp>
         <p:nvSpPr>
-          <p:cNvPr id="33" name="Text 31"/>
-          <p:cNvSpPr/>
-          <p:nvPr/>
-        </p:nvSpPr>
-        <p:spPr>
-          <a:xfrm>
-            <a:off x="6016752" y="3364992"/>
-            <a:ext cx="411480" cy="475488"/>
+          <p:cNvPr id="33" name="Shape 31"/>
+          <p:cNvSpPr/>
+          <p:nvPr/>
+        </p:nvSpPr>
+        <p:spPr>
+          <a:xfrm>
+            <a:off x="365760" y="4096512"/>
+            <a:ext cx="1371600" cy="804672"/>
+          </a:xfrm>
+          <a:prstGeom prst="rect">
+            <a:avLst>
+              <a:gd name="adj" fmla="val 6818"/>
+            </a:avLst>
+          </a:prstGeom>
+          <a:solidFill>
+            <a:srgbClr val="E2E8F0"/>
+          </a:solidFill>
+          <a:ln w="12700">
+            <a:solidFill>
+              <a:srgbClr val="E2E8F0"/>
+            </a:solidFill>
+            <a:prstDash val="solid"/>
+          </a:ln>
+        </p:spPr>
+      </p:sp>
+      <p:sp>
+        <p:nvSpPr>
+          <p:cNvPr id="34" name="Text 32"/>
+          <p:cNvSpPr/>
+          <p:nvPr/>
+        </p:nvSpPr>
+        <p:spPr>
+          <a:xfrm>
+            <a:off x="365760" y="4096512"/>
+            <a:ext cx="1371600" cy="804672"/>
           </a:xfrm>
           <a:prstGeom prst="rect">
             <a:avLst/>
@@ -13174,96 +13906,30 @@
               <a:buNone/>
             </a:pPr>
             <a:r>
-              <a:rPr lang="en-US" sz="1600" b="1" dirty="0">
-                <a:solidFill>
-                  <a:srgbClr val="0D9488"/>
+              <a:rPr lang="en-US" sz="1100" b="1" dirty="0">
+                <a:solidFill>
+                  <a:srgbClr val="475569"/>
                 </a:solidFill>
                 <a:latin typeface="Trebuchet MS" pitchFamily="34" charset="0"/>
                 <a:ea typeface="Trebuchet MS" pitchFamily="34" charset="-122"/>
                 <a:cs typeface="Trebuchet MS" pitchFamily="34" charset="-120"/>
               </a:rPr>
-              <a:t>·</a:t>
-            </a:r>
-            <a:endParaRPr lang="en-US" sz="1600" dirty="0"/>
-          </a:p>
-        </p:txBody>
-      </p:sp>
-      <p:sp>
-        <p:nvSpPr>
-          <p:cNvPr id="34" name="Shape 32"/>
-          <p:cNvSpPr/>
-          <p:nvPr/>
-        </p:nvSpPr>
-        <p:spPr>
-          <a:xfrm>
-            <a:off x="6428232" y="3364992"/>
-            <a:ext cx="1645920" cy="475488"/>
-          </a:xfrm>
-          <a:prstGeom prst="rect">
-            <a:avLst>
-              <a:gd name="adj" fmla="val 9615"/>
-            </a:avLst>
-          </a:prstGeom>
-          <a:solidFill>
-            <a:srgbClr val="FFFFFF"/>
-          </a:solidFill>
-          <a:ln w="12700">
-            <a:solidFill>
-              <a:srgbClr val="0D9488"/>
-            </a:solidFill>
-            <a:prstDash val="solid"/>
-          </a:ln>
-        </p:spPr>
-      </p:sp>
-      <p:sp>
-        <p:nvSpPr>
-          <p:cNvPr id="35" name="Text 33"/>
-          <p:cNvSpPr/>
-          <p:nvPr/>
-        </p:nvSpPr>
-        <p:spPr>
-          <a:xfrm>
-            <a:off x="6428232" y="3364992"/>
-            <a:ext cx="1645920" cy="475488"/>
-          </a:xfrm>
-          <a:prstGeom prst="rect">
-            <a:avLst/>
-          </a:prstGeom>
-          <a:noFill/>
-          <a:ln/>
-        </p:spPr>
-        <p:txBody>
-          <a:bodyPr wrap="square" lIns="0" tIns="0" rIns="0" bIns="0" rtlCol="0" anchor="ctr"/>
-          <a:lstStyle/>
-          <a:p>
-            <a:pPr algn="ctr" indent="0" marL="0">
-              <a:buNone/>
-            </a:pPr>
-            <a:r>
-              <a:rPr lang="en-US" sz="1400" b="1" dirty="0">
-                <a:solidFill>
-                  <a:srgbClr val="0D9488"/>
-                </a:solidFill>
-                <a:latin typeface="Trebuchet MS" pitchFamily="34" charset="0"/>
-                <a:ea typeface="Trebuchet MS" pitchFamily="34" charset="-122"/>
-                <a:cs typeface="Trebuchet MS" pitchFamily="34" charset="-120"/>
-              </a:rPr>
-              <a:t>gence</a:t>
-            </a:r>
-            <a:endParaRPr lang="en-US" sz="1400" dirty="0"/>
-          </a:p>
-        </p:txBody>
-      </p:sp>
-      <p:sp>
-        <p:nvSpPr>
-          <p:cNvPr id="36" name="Shape 34"/>
-          <p:cNvSpPr/>
-          <p:nvPr/>
-        </p:nvSpPr>
-        <p:spPr>
-          <a:xfrm>
-            <a:off x="365760" y="4096512"/>
-            <a:ext cx="1371600" cy="804672"/>
+              <a:t>Phonemes</a:t>
+            </a:r>
+            <a:endParaRPr lang="en-US" sz="1100" dirty="0"/>
+          </a:p>
+        </p:txBody>
+      </p:sp>
+      <p:sp>
+        <p:nvSpPr>
+          <p:cNvPr id="35" name="Shape 33"/>
+          <p:cNvSpPr/>
+          <p:nvPr/>
+        </p:nvSpPr>
+        <p:spPr>
+          <a:xfrm>
+            <a:off x="1874520" y="4096512"/>
+            <a:ext cx="6903720" cy="804672"/>
           </a:xfrm>
           <a:prstGeom prst="rect">
             <a:avLst>
@@ -13271,85 +13937,19 @@
             </a:avLst>
           </a:prstGeom>
           <a:solidFill>
-            <a:srgbClr val="E2E8F0"/>
+            <a:srgbClr val="F8FAFC"/>
           </a:solidFill>
           <a:ln w="12700">
             <a:solidFill>
               <a:srgbClr val="E2E8F0"/>
             </a:solidFill>
-            <a:prstDash val="solid"/>
-          </a:ln>
-        </p:spPr>
-      </p:sp>
-      <p:sp>
-        <p:nvSpPr>
-          <p:cNvPr id="37" name="Text 35"/>
-          <p:cNvSpPr/>
-          <p:nvPr/>
-        </p:nvSpPr>
-        <p:spPr>
-          <a:xfrm>
-            <a:off x="365760" y="4096512"/>
-            <a:ext cx="1371600" cy="804672"/>
-          </a:xfrm>
-          <a:prstGeom prst="rect">
-            <a:avLst/>
-          </a:prstGeom>
-          <a:noFill/>
-          <a:ln/>
-        </p:spPr>
-        <p:txBody>
-          <a:bodyPr wrap="square" lIns="0" tIns="0" rIns="0" bIns="0" rtlCol="0" anchor="ctr"/>
-          <a:lstStyle/>
-          <a:p>
-            <a:pPr algn="ctr" indent="0" marL="0">
-              <a:buNone/>
-            </a:pPr>
-            <a:r>
-              <a:rPr lang="en-US" sz="1100" b="1" dirty="0">
-                <a:solidFill>
-                  <a:srgbClr val="475569"/>
-                </a:solidFill>
-                <a:latin typeface="Trebuchet MS" pitchFamily="34" charset="0"/>
-                <a:ea typeface="Trebuchet MS" pitchFamily="34" charset="-122"/>
-                <a:cs typeface="Trebuchet MS" pitchFamily="34" charset="-120"/>
-              </a:rPr>
-              <a:t>Phonemes</a:t>
-            </a:r>
-            <a:endParaRPr lang="en-US" sz="1100" dirty="0"/>
-          </a:p>
-        </p:txBody>
-      </p:sp>
-      <p:sp>
-        <p:nvSpPr>
-          <p:cNvPr id="38" name="Shape 36"/>
-          <p:cNvSpPr/>
-          <p:nvPr/>
-        </p:nvSpPr>
-        <p:spPr>
-          <a:xfrm>
-            <a:off x="1874520" y="4096512"/>
-            <a:ext cx="6903720" cy="804672"/>
-          </a:xfrm>
-          <a:prstGeom prst="rect">
-            <a:avLst>
-              <a:gd name="adj" fmla="val 6818"/>
-            </a:avLst>
-          </a:prstGeom>
-          <a:solidFill>
-            <a:srgbClr val="F8FAFC"/>
-          </a:solidFill>
-          <a:ln w="12700">
-            <a:solidFill>
-              <a:srgbClr val="E2E8F0"/>
-            </a:solidFill>
             <a:prstDash val="dash"/>
           </a:ln>
         </p:spPr>
       </p:sp>
       <p:sp>
         <p:nvSpPr>
-          <p:cNvPr id="39" name="Text 37"/>
+          <p:cNvPr id="36" name="Text 34"/>
           <p:cNvSpPr/>
           <p:nvPr/>
         </p:nvSpPr>
@@ -13581,7 +14181,7 @@
                 <a:ea typeface="Calibri" pitchFamily="34" charset="-122"/>
                 <a:cs typeface="Calibri" pitchFamily="34" charset="-120"/>
               </a:rPr>
-              <a:t>Root 'merge' — join, combine, sink into</a:t>
+              <a:t>Root 'merge' — to join together into one</a:t>
             </a:r>
             <a:endParaRPr lang="en-US" sz="1600" dirty="0"/>
           </a:p>
@@ -13937,7 +14537,7 @@
                 <a:ea typeface="Calibri" pitchFamily="34" charset="-122"/>
                 <a:cs typeface="Calibri" pitchFamily="34" charset="-120"/>
               </a:rPr>
-              <a:t>Word Labs  •  wordlabs.app  •  Root: 'merge' = join, combine, sink into</a:t>
+              <a:t>Word Labs  •  wordlabs.app  •  Root: 'merge' = to join together into one</a:t>
             </a:r>
             <a:endParaRPr lang="en-US" sz="800" dirty="0"/>
           </a:p>
@@ -14076,7 +14676,7 @@
                 <a:ea typeface="Trebuchet MS" pitchFamily="34" charset="-122"/>
                 <a:cs typeface="Trebuchet MS" pitchFamily="34" charset="-120"/>
               </a:rPr>
-              <a:t>emergence</a:t>
+              <a:t>emerged</a:t>
             </a:r>
             <a:endParaRPr lang="en-US" sz="2800" dirty="0"/>
           </a:p>
@@ -14254,7 +14854,7 @@
                 <a:ea typeface="Calibri" pitchFamily="34" charset="-122"/>
                 <a:cs typeface="Calibri" pitchFamily="34" charset="-120"/>
               </a:rPr>
-              <a:t>out, from</a:t>
+              <a:t>electronic; online</a:t>
             </a:r>
             <a:endParaRPr lang="en-US" sz="850" dirty="0"/>
           </a:p>
@@ -14366,7 +14966,7 @@
                 <a:ea typeface="Calibri" pitchFamily="34" charset="-122"/>
                 <a:cs typeface="Calibri" pitchFamily="34" charset="-120"/>
               </a:rPr>
-              <a:t>join, combine, sink into</a:t>
+              <a:t>to join together into one</a:t>
             </a:r>
             <a:endParaRPr lang="en-US" sz="850" dirty="0"/>
           </a:p>
@@ -14439,7 +15039,7 @@
                 <a:ea typeface="Trebuchet MS" pitchFamily="34" charset="-122"/>
                 <a:cs typeface="Trebuchet MS" pitchFamily="34" charset="-120"/>
               </a:rPr>
-              <a:t>nce</a:t>
+              <a:t>ed</a:t>
             </a:r>
             <a:endParaRPr lang="en-US" sz="1300" dirty="0"/>
           </a:p>
@@ -14478,7 +15078,7 @@
                 <a:ea typeface="Calibri" pitchFamily="34" charset="-122"/>
                 <a:cs typeface="Calibri" pitchFamily="34" charset="-120"/>
               </a:rPr>
-              <a:t>state or quality of</a:t>
+              <a:t>past tense</a:t>
             </a:r>
             <a:endParaRPr lang="en-US" sz="850" dirty="0"/>
           </a:p>
@@ -14585,7 +15185,7 @@
         </p:nvSpPr>
         <p:spPr>
           <a:xfrm>
-            <a:off x="2313432" y="3364992"/>
+            <a:off x="2999232" y="3364992"/>
             <a:ext cx="1645920" cy="475488"/>
           </a:xfrm>
           <a:prstGeom prst="rect">
@@ -14612,7 +15212,7 @@
         </p:nvSpPr>
         <p:spPr>
           <a:xfrm>
-            <a:off x="2313432" y="3364992"/>
+            <a:off x="2999232" y="3364992"/>
             <a:ext cx="1645920" cy="475488"/>
           </a:xfrm>
           <a:prstGeom prst="rect">
@@ -14651,8 +15251,8 @@
         </p:nvSpPr>
         <p:spPr>
           <a:xfrm>
-            <a:off x="3959352" y="3364992"/>
-            <a:ext cx="411480" cy="475488"/>
+            <a:off x="4645152" y="3364992"/>
+            <a:ext cx="1097280" cy="475488"/>
           </a:xfrm>
           <a:prstGeom prst="rect">
             <a:avLst/>
@@ -14690,7 +15290,7 @@
         </p:nvSpPr>
         <p:spPr>
           <a:xfrm>
-            <a:off x="4370832" y="3364992"/>
+            <a:off x="5742432" y="3364992"/>
             <a:ext cx="1645920" cy="475488"/>
           </a:xfrm>
           <a:prstGeom prst="rect">
@@ -14717,7 +15317,7 @@
         </p:nvSpPr>
         <p:spPr>
           <a:xfrm>
-            <a:off x="4370832" y="3364992"/>
+            <a:off x="5742432" y="3364992"/>
             <a:ext cx="1645920" cy="475488"/>
           </a:xfrm>
           <a:prstGeom prst="rect">
@@ -14742,7 +15342,7 @@
                 <a:ea typeface="Trebuchet MS" pitchFamily="34" charset="-122"/>
                 <a:cs typeface="Trebuchet MS" pitchFamily="34" charset="-120"/>
               </a:rPr>
-              <a:t>mer</a:t>
+              <a:t>merged</a:t>
             </a:r>
             <a:endParaRPr lang="en-US" sz="1400" dirty="0"/>
           </a:p>
@@ -14750,14 +15350,41 @@
       </p:sp>
       <p:sp>
         <p:nvSpPr>
-          <p:cNvPr id="33" name="Text 31"/>
-          <p:cNvSpPr/>
-          <p:nvPr/>
-        </p:nvSpPr>
-        <p:spPr>
-          <a:xfrm>
-            <a:off x="6016752" y="3364992"/>
-            <a:ext cx="411480" cy="475488"/>
+          <p:cNvPr id="33" name="Shape 31"/>
+          <p:cNvSpPr/>
+          <p:nvPr/>
+        </p:nvSpPr>
+        <p:spPr>
+          <a:xfrm>
+            <a:off x="365760" y="4096512"/>
+            <a:ext cx="1371600" cy="804672"/>
+          </a:xfrm>
+          <a:prstGeom prst="rect">
+            <a:avLst>
+              <a:gd name="adj" fmla="val 6818"/>
+            </a:avLst>
+          </a:prstGeom>
+          <a:solidFill>
+            <a:srgbClr val="E2E8F0"/>
+          </a:solidFill>
+          <a:ln w="12700">
+            <a:solidFill>
+              <a:srgbClr val="E2E8F0"/>
+            </a:solidFill>
+            <a:prstDash val="solid"/>
+          </a:ln>
+        </p:spPr>
+      </p:sp>
+      <p:sp>
+        <p:nvSpPr>
+          <p:cNvPr id="34" name="Text 32"/>
+          <p:cNvSpPr/>
+          <p:nvPr/>
+        </p:nvSpPr>
+        <p:spPr>
+          <a:xfrm>
+            <a:off x="365760" y="4096512"/>
+            <a:ext cx="1371600" cy="804672"/>
           </a:xfrm>
           <a:prstGeom prst="rect">
             <a:avLst/>
@@ -14773,57 +15400,84 @@
               <a:buNone/>
             </a:pPr>
             <a:r>
-              <a:rPr lang="en-US" sz="1600" b="1" dirty="0">
-                <a:solidFill>
-                  <a:srgbClr val="0D9488"/>
+              <a:rPr lang="en-US" sz="1100" b="1" dirty="0">
+                <a:solidFill>
+                  <a:srgbClr val="475569"/>
                 </a:solidFill>
                 <a:latin typeface="Trebuchet MS" pitchFamily="34" charset="0"/>
                 <a:ea typeface="Trebuchet MS" pitchFamily="34" charset="-122"/>
                 <a:cs typeface="Trebuchet MS" pitchFamily="34" charset="-120"/>
               </a:rPr>
-              <a:t>·</a:t>
-            </a:r>
-            <a:endParaRPr lang="en-US" sz="1600" dirty="0"/>
-          </a:p>
-        </p:txBody>
-      </p:sp>
-      <p:sp>
-        <p:nvSpPr>
-          <p:cNvPr id="34" name="Shape 32"/>
-          <p:cNvSpPr/>
-          <p:nvPr/>
-        </p:nvSpPr>
-        <p:spPr>
-          <a:xfrm>
-            <a:off x="6428232" y="3364992"/>
-            <a:ext cx="1645920" cy="475488"/>
+              <a:t>Phonemes</a:t>
+            </a:r>
+            <a:endParaRPr lang="en-US" sz="1100" dirty="0"/>
+          </a:p>
+        </p:txBody>
+      </p:sp>
+      <p:sp>
+        <p:nvSpPr>
+          <p:cNvPr id="35" name="Shape 33"/>
+          <p:cNvSpPr/>
+          <p:nvPr/>
+        </p:nvSpPr>
+        <p:spPr>
+          <a:xfrm>
+            <a:off x="1874520" y="4096512"/>
+            <a:ext cx="6903720" cy="658368"/>
           </a:xfrm>
           <a:prstGeom prst="rect">
             <a:avLst>
-              <a:gd name="adj" fmla="val 9615"/>
+              <a:gd name="adj" fmla="val 8333"/>
             </a:avLst>
           </a:prstGeom>
           <a:solidFill>
+            <a:srgbClr val="FCE7F3"/>
+          </a:solidFill>
+          <a:ln w="12700">
+            <a:solidFill>
+              <a:srgbClr val="DB2777"/>
+            </a:solidFill>
+            <a:prstDash val="solid"/>
+          </a:ln>
+        </p:spPr>
+      </p:sp>
+      <p:sp>
+        <p:nvSpPr>
+          <p:cNvPr id="36" name="Shape 34"/>
+          <p:cNvSpPr/>
+          <p:nvPr/>
+        </p:nvSpPr>
+        <p:spPr>
+          <a:xfrm>
+            <a:off x="2124837" y="4169664"/>
+            <a:ext cx="685800" cy="475488"/>
+          </a:xfrm>
+          <a:prstGeom prst="rect">
+            <a:avLst>
+              <a:gd name="adj" fmla="val 7692"/>
+            </a:avLst>
+          </a:prstGeom>
+          <a:solidFill>
             <a:srgbClr val="FFFFFF"/>
           </a:solidFill>
           <a:ln w="12700">
             <a:solidFill>
-              <a:srgbClr val="0D9488"/>
-            </a:solidFill>
-            <a:prstDash val="solid"/>
-          </a:ln>
-        </p:spPr>
-      </p:sp>
-      <p:sp>
-        <p:nvSpPr>
-          <p:cNvPr id="35" name="Text 33"/>
-          <p:cNvSpPr/>
-          <p:nvPr/>
-        </p:nvSpPr>
-        <p:spPr>
-          <a:xfrm>
-            <a:off x="6428232" y="3364992"/>
-            <a:ext cx="1645920" cy="475488"/>
+              <a:srgbClr val="DB2777"/>
+            </a:solidFill>
+            <a:prstDash val="solid"/>
+          </a:ln>
+        </p:spPr>
+      </p:sp>
+      <p:sp>
+        <p:nvSpPr>
+          <p:cNvPr id="37" name="Text 35"/>
+          <p:cNvSpPr/>
+          <p:nvPr/>
+        </p:nvSpPr>
+        <p:spPr>
+          <a:xfrm>
+            <a:off x="2124837" y="4169664"/>
+            <a:ext cx="685800" cy="475488"/>
           </a:xfrm>
           <a:prstGeom prst="rect">
             <a:avLst/>
@@ -14839,57 +15493,57 @@
               <a:buNone/>
             </a:pPr>
             <a:r>
-              <a:rPr lang="en-US" sz="1400" b="1" dirty="0">
-                <a:solidFill>
-                  <a:srgbClr val="0D9488"/>
+              <a:rPr lang="en-US" sz="900" b="1" dirty="0">
+                <a:solidFill>
+                  <a:srgbClr val="9D174D"/>
                 </a:solidFill>
                 <a:latin typeface="Trebuchet MS" pitchFamily="34" charset="0"/>
                 <a:ea typeface="Trebuchet MS" pitchFamily="34" charset="-122"/>
                 <a:cs typeface="Trebuchet MS" pitchFamily="34" charset="-120"/>
               </a:rPr>
-              <a:t>gence</a:t>
-            </a:r>
-            <a:endParaRPr lang="en-US" sz="1400" dirty="0"/>
-          </a:p>
-        </p:txBody>
-      </p:sp>
-      <p:sp>
-        <p:nvSpPr>
-          <p:cNvPr id="36" name="Shape 34"/>
-          <p:cNvSpPr/>
-          <p:nvPr/>
-        </p:nvSpPr>
-        <p:spPr>
-          <a:xfrm>
-            <a:off x="365760" y="4096512"/>
-            <a:ext cx="1371600" cy="804672"/>
+              <a:t>e</a:t>
+            </a:r>
+            <a:endParaRPr lang="en-US" sz="900" dirty="0"/>
+          </a:p>
+        </p:txBody>
+      </p:sp>
+      <p:sp>
+        <p:nvSpPr>
+          <p:cNvPr id="38" name="Shape 36"/>
+          <p:cNvSpPr/>
+          <p:nvPr/>
+        </p:nvSpPr>
+        <p:spPr>
+          <a:xfrm>
+            <a:off x="3033522" y="4169664"/>
+            <a:ext cx="685800" cy="475488"/>
           </a:xfrm>
           <a:prstGeom prst="rect">
             <a:avLst>
-              <a:gd name="adj" fmla="val 6818"/>
+              <a:gd name="adj" fmla="val 7692"/>
             </a:avLst>
           </a:prstGeom>
           <a:solidFill>
-            <a:srgbClr val="E2E8F0"/>
-          </a:solidFill>
-          <a:ln w="12700">
-            <a:solidFill>
-              <a:srgbClr val="E2E8F0"/>
-            </a:solidFill>
-            <a:prstDash val="solid"/>
-          </a:ln>
-        </p:spPr>
-      </p:sp>
-      <p:sp>
-        <p:nvSpPr>
-          <p:cNvPr id="37" name="Text 35"/>
-          <p:cNvSpPr/>
-          <p:nvPr/>
-        </p:nvSpPr>
-        <p:spPr>
-          <a:xfrm>
-            <a:off x="365760" y="4096512"/>
-            <a:ext cx="1371600" cy="804672"/>
+            <a:srgbClr val="FFFFFF"/>
+          </a:solidFill>
+          <a:ln w="12700">
+            <a:solidFill>
+              <a:srgbClr val="DB2777"/>
+            </a:solidFill>
+            <a:prstDash val="solid"/>
+          </a:ln>
+        </p:spPr>
+      </p:sp>
+      <p:sp>
+        <p:nvSpPr>
+          <p:cNvPr id="39" name="Text 37"/>
+          <p:cNvSpPr/>
+          <p:nvPr/>
+        </p:nvSpPr>
+        <p:spPr>
+          <a:xfrm>
+            <a:off x="3033522" y="4169664"/>
+            <a:ext cx="685800" cy="475488"/>
           </a:xfrm>
           <a:prstGeom prst="rect">
             <a:avLst/>
@@ -14905,38 +15559,38 @@
               <a:buNone/>
             </a:pPr>
             <a:r>
-              <a:rPr lang="en-US" sz="1100" b="1" dirty="0">
-                <a:solidFill>
-                  <a:srgbClr val="475569"/>
+              <a:rPr lang="en-US" sz="900" b="1" dirty="0">
+                <a:solidFill>
+                  <a:srgbClr val="9D174D"/>
                 </a:solidFill>
                 <a:latin typeface="Trebuchet MS" pitchFamily="34" charset="0"/>
                 <a:ea typeface="Trebuchet MS" pitchFamily="34" charset="-122"/>
                 <a:cs typeface="Trebuchet MS" pitchFamily="34" charset="-120"/>
               </a:rPr>
-              <a:t>Phonemes</a:t>
-            </a:r>
-            <a:endParaRPr lang="en-US" sz="1100" dirty="0"/>
-          </a:p>
-        </p:txBody>
-      </p:sp>
-      <p:sp>
-        <p:nvSpPr>
-          <p:cNvPr id="38" name="Shape 36"/>
-          <p:cNvSpPr/>
-          <p:nvPr/>
-        </p:nvSpPr>
-        <p:spPr>
-          <a:xfrm>
-            <a:off x="1874520" y="4096512"/>
-            <a:ext cx="6903720" cy="804672"/>
+              <a:t>m</a:t>
+            </a:r>
+            <a:endParaRPr lang="en-US" sz="900" dirty="0"/>
+          </a:p>
+        </p:txBody>
+      </p:sp>
+      <p:sp>
+        <p:nvSpPr>
+          <p:cNvPr id="40" name="Shape 38"/>
+          <p:cNvSpPr/>
+          <p:nvPr/>
+        </p:nvSpPr>
+        <p:spPr>
+          <a:xfrm>
+            <a:off x="3942207" y="4169664"/>
+            <a:ext cx="685800" cy="475488"/>
           </a:xfrm>
           <a:prstGeom prst="rect">
             <a:avLst>
-              <a:gd name="adj" fmla="val 6818"/>
+              <a:gd name="adj" fmla="val 7692"/>
             </a:avLst>
           </a:prstGeom>
           <a:solidFill>
-            <a:srgbClr val="FCE7F3"/>
+            <a:srgbClr val="FFFFFF"/>
           </a:solidFill>
           <a:ln w="12700">
             <a:solidFill>
@@ -14948,41 +15602,14 @@
       </p:sp>
       <p:sp>
         <p:nvSpPr>
-          <p:cNvPr id="39" name="Shape 37"/>
-          <p:cNvSpPr/>
-          <p:nvPr/>
-        </p:nvSpPr>
-        <p:spPr>
-          <a:xfrm>
-            <a:off x="2254649" y="4169664"/>
-            <a:ext cx="685800" cy="384048"/>
-          </a:xfrm>
-          <a:prstGeom prst="rect">
-            <a:avLst>
-              <a:gd name="adj" fmla="val 9524"/>
-            </a:avLst>
-          </a:prstGeom>
-          <a:solidFill>
-            <a:srgbClr val="FFFFFF"/>
-          </a:solidFill>
-          <a:ln w="12700">
-            <a:solidFill>
-              <a:srgbClr val="DB2777"/>
-            </a:solidFill>
-            <a:prstDash val="solid"/>
-          </a:ln>
-        </p:spPr>
-      </p:sp>
-      <p:sp>
-        <p:nvSpPr>
-          <p:cNvPr id="40" name="Text 38"/>
-          <p:cNvSpPr/>
-          <p:nvPr/>
-        </p:nvSpPr>
-        <p:spPr>
-          <a:xfrm>
-            <a:off x="2254649" y="4169664"/>
-            <a:ext cx="685800" cy="384048"/>
+          <p:cNvPr id="41" name="Text 39"/>
+          <p:cNvSpPr/>
+          <p:nvPr/>
+        </p:nvSpPr>
+        <p:spPr>
+          <a:xfrm>
+            <a:off x="3942207" y="4169664"/>
+            <a:ext cx="685800" cy="475488"/>
           </a:xfrm>
           <a:prstGeom prst="rect">
             <a:avLst/>
@@ -15014,18 +15641,18 @@
       </p:sp>
       <p:sp>
         <p:nvSpPr>
-          <p:cNvPr id="41" name="Shape 39"/>
-          <p:cNvSpPr/>
-          <p:nvPr/>
-        </p:nvSpPr>
-        <p:spPr>
-          <a:xfrm>
-            <a:off x="3293146" y="4169664"/>
-            <a:ext cx="685800" cy="384048"/>
+          <p:cNvPr id="42" name="Shape 40"/>
+          <p:cNvSpPr/>
+          <p:nvPr/>
+        </p:nvSpPr>
+        <p:spPr>
+          <a:xfrm>
+            <a:off x="4850892" y="4169664"/>
+            <a:ext cx="685800" cy="475488"/>
           </a:xfrm>
           <a:prstGeom prst="rect">
             <a:avLst>
-              <a:gd name="adj" fmla="val 9524"/>
+              <a:gd name="adj" fmla="val 7692"/>
             </a:avLst>
           </a:prstGeom>
           <a:solidFill>
@@ -15041,14 +15668,14 @@
       </p:sp>
       <p:sp>
         <p:nvSpPr>
-          <p:cNvPr id="42" name="Text 40"/>
-          <p:cNvSpPr/>
-          <p:nvPr/>
-        </p:nvSpPr>
-        <p:spPr>
-          <a:xfrm>
-            <a:off x="3293146" y="4169664"/>
-            <a:ext cx="685800" cy="384048"/>
+          <p:cNvPr id="43" name="Text 41"/>
+          <p:cNvSpPr/>
+          <p:nvPr/>
+        </p:nvSpPr>
+        <p:spPr>
+          <a:xfrm>
+            <a:off x="4850892" y="4169664"/>
+            <a:ext cx="685800" cy="475488"/>
           </a:xfrm>
           <a:prstGeom prst="rect">
             <a:avLst/>
@@ -15072,7 +15699,7 @@
                 <a:ea typeface="Trebuchet MS" pitchFamily="34" charset="-122"/>
                 <a:cs typeface="Trebuchet MS" pitchFamily="34" charset="-120"/>
               </a:rPr>
-              <a:t>m</a:t>
+              <a:t>r</a:t>
             </a:r>
             <a:endParaRPr lang="en-US" sz="900" dirty="0"/>
           </a:p>
@@ -15080,18 +15707,18 @@
       </p:sp>
       <p:sp>
         <p:nvSpPr>
-          <p:cNvPr id="43" name="Shape 41"/>
-          <p:cNvSpPr/>
-          <p:nvPr/>
-        </p:nvSpPr>
-        <p:spPr>
-          <a:xfrm>
-            <a:off x="4331643" y="4169664"/>
-            <a:ext cx="685800" cy="384048"/>
+          <p:cNvPr id="44" name="Shape 42"/>
+          <p:cNvSpPr/>
+          <p:nvPr/>
+        </p:nvSpPr>
+        <p:spPr>
+          <a:xfrm>
+            <a:off x="5759577" y="4169664"/>
+            <a:ext cx="685800" cy="475488"/>
           </a:xfrm>
           <a:prstGeom prst="rect">
             <a:avLst>
-              <a:gd name="adj" fmla="val 9524"/>
+              <a:gd name="adj" fmla="val 7692"/>
             </a:avLst>
           </a:prstGeom>
           <a:solidFill>
@@ -15107,14 +15734,14 @@
       </p:sp>
       <p:sp>
         <p:nvSpPr>
-          <p:cNvPr id="44" name="Text 42"/>
-          <p:cNvSpPr/>
-          <p:nvPr/>
-        </p:nvSpPr>
-        <p:spPr>
-          <a:xfrm>
-            <a:off x="4331643" y="4169664"/>
-            <a:ext cx="685800" cy="384048"/>
+          <p:cNvPr id="45" name="Text 43"/>
+          <p:cNvSpPr/>
+          <p:nvPr/>
+        </p:nvSpPr>
+        <p:spPr>
+          <a:xfrm>
+            <a:off x="5759577" y="4169664"/>
+            <a:ext cx="685800" cy="475488"/>
           </a:xfrm>
           <a:prstGeom prst="rect">
             <a:avLst/>
@@ -15138,7 +15765,7 @@
                 <a:ea typeface="Trebuchet MS" pitchFamily="34" charset="-122"/>
                 <a:cs typeface="Trebuchet MS" pitchFamily="34" charset="-120"/>
               </a:rPr>
-              <a:t>er</a:t>
+              <a:t>g</a:t>
             </a:r>
             <a:endParaRPr lang="en-US" sz="900" dirty="0"/>
           </a:p>
@@ -15146,18 +15773,18 @@
       </p:sp>
       <p:sp>
         <p:nvSpPr>
-          <p:cNvPr id="45" name="Shape 43"/>
-          <p:cNvSpPr/>
-          <p:nvPr/>
-        </p:nvSpPr>
-        <p:spPr>
-          <a:xfrm>
-            <a:off x="5370141" y="4169664"/>
-            <a:ext cx="685800" cy="384048"/>
+          <p:cNvPr id="46" name="Shape 44"/>
+          <p:cNvSpPr/>
+          <p:nvPr/>
+        </p:nvSpPr>
+        <p:spPr>
+          <a:xfrm>
+            <a:off x="6668262" y="4169664"/>
+            <a:ext cx="685800" cy="475488"/>
           </a:xfrm>
           <a:prstGeom prst="rect">
             <a:avLst>
-              <a:gd name="adj" fmla="val 9524"/>
+              <a:gd name="adj" fmla="val 7692"/>
             </a:avLst>
           </a:prstGeom>
           <a:solidFill>
@@ -15173,14 +15800,14 @@
       </p:sp>
       <p:sp>
         <p:nvSpPr>
-          <p:cNvPr id="46" name="Text 44"/>
-          <p:cNvSpPr/>
-          <p:nvPr/>
-        </p:nvSpPr>
-        <p:spPr>
-          <a:xfrm>
-            <a:off x="5370141" y="4169664"/>
-            <a:ext cx="685800" cy="384048"/>
+          <p:cNvPr id="47" name="Text 45"/>
+          <p:cNvSpPr/>
+          <p:nvPr/>
+        </p:nvSpPr>
+        <p:spPr>
+          <a:xfrm>
+            <a:off x="6668262" y="4169664"/>
+            <a:ext cx="685800" cy="475488"/>
           </a:xfrm>
           <a:prstGeom prst="rect">
             <a:avLst/>
@@ -15204,7 +15831,7 @@
                 <a:ea typeface="Trebuchet MS" pitchFamily="34" charset="-122"/>
                 <a:cs typeface="Trebuchet MS" pitchFamily="34" charset="-120"/>
               </a:rPr>
-              <a:t>ge</a:t>
+              <a:t>e</a:t>
             </a:r>
             <a:endParaRPr lang="en-US" sz="900" dirty="0"/>
           </a:p>
@@ -15212,57 +15839,18 @@
       </p:sp>
       <p:sp>
         <p:nvSpPr>
-          <p:cNvPr id="47" name="Text 45"/>
-          <p:cNvSpPr/>
-          <p:nvPr/>
-        </p:nvSpPr>
-        <p:spPr>
-          <a:xfrm>
-            <a:off x="5370141" y="4572000"/>
-            <a:ext cx="685800" cy="219456"/>
-          </a:xfrm>
-          <a:prstGeom prst="rect">
-            <a:avLst/>
-          </a:prstGeom>
-          <a:noFill/>
-          <a:ln/>
-        </p:spPr>
-        <p:txBody>
-          <a:bodyPr wrap="square" lIns="0" tIns="0" rIns="0" bIns="0" rtlCol="0" anchor="t"/>
-          <a:lstStyle/>
-          <a:p>
-            <a:pPr algn="ctr" indent="0" marL="0">
-              <a:buNone/>
-            </a:pPr>
-            <a:r>
-              <a:rPr lang="en-US" sz="750" i="1" dirty="0">
-                <a:solidFill>
-                  <a:srgbClr val="94A3B8"/>
-                </a:solidFill>
-                <a:latin typeface="Calibri" pitchFamily="34" charset="0"/>
-                <a:ea typeface="Calibri" pitchFamily="34" charset="-122"/>
-                <a:cs typeface="Calibri" pitchFamily="34" charset="-120"/>
-              </a:rPr>
-              <a:t>/j/</a:t>
-            </a:r>
-            <a:endParaRPr lang="en-US" sz="750" dirty="0"/>
-          </a:p>
-        </p:txBody>
-      </p:sp>
-      <p:sp>
-        <p:nvSpPr>
           <p:cNvPr id="48" name="Shape 46"/>
           <p:cNvSpPr/>
           <p:nvPr/>
         </p:nvSpPr>
         <p:spPr>
           <a:xfrm>
-            <a:off x="6408638" y="4169664"/>
-            <a:ext cx="685800" cy="384048"/>
+            <a:off x="7576947" y="4169664"/>
+            <a:ext cx="685800" cy="475488"/>
           </a:xfrm>
           <a:prstGeom prst="rect">
             <a:avLst>
-              <a:gd name="adj" fmla="val 9524"/>
+              <a:gd name="adj" fmla="val 7692"/>
             </a:avLst>
           </a:prstGeom>
           <a:solidFill>
@@ -15284,8 +15872,8 @@
         </p:nvSpPr>
         <p:spPr>
           <a:xfrm>
-            <a:off x="6408638" y="4169664"/>
-            <a:ext cx="685800" cy="384048"/>
+            <a:off x="7576947" y="4169664"/>
+            <a:ext cx="685800" cy="475488"/>
           </a:xfrm>
           <a:prstGeom prst="rect">
             <a:avLst/>
@@ -15309,114 +15897,9 @@
                 <a:ea typeface="Trebuchet MS" pitchFamily="34" charset="-122"/>
                 <a:cs typeface="Trebuchet MS" pitchFamily="34" charset="-120"/>
               </a:rPr>
-              <a:t>n</a:t>
+              <a:t>d</a:t>
             </a:r>
             <a:endParaRPr lang="en-US" sz="900" dirty="0"/>
-          </a:p>
-        </p:txBody>
-      </p:sp>
-      <p:sp>
-        <p:nvSpPr>
-          <p:cNvPr id="50" name="Shape 48"/>
-          <p:cNvSpPr/>
-          <p:nvPr/>
-        </p:nvSpPr>
-        <p:spPr>
-          <a:xfrm>
-            <a:off x="7447135" y="4169664"/>
-            <a:ext cx="685800" cy="384048"/>
-          </a:xfrm>
-          <a:prstGeom prst="rect">
-            <a:avLst>
-              <a:gd name="adj" fmla="val 9524"/>
-            </a:avLst>
-          </a:prstGeom>
-          <a:solidFill>
-            <a:srgbClr val="FFFFFF"/>
-          </a:solidFill>
-          <a:ln w="12700">
-            <a:solidFill>
-              <a:srgbClr val="DB2777"/>
-            </a:solidFill>
-            <a:prstDash val="solid"/>
-          </a:ln>
-        </p:spPr>
-      </p:sp>
-      <p:sp>
-        <p:nvSpPr>
-          <p:cNvPr id="51" name="Text 49"/>
-          <p:cNvSpPr/>
-          <p:nvPr/>
-        </p:nvSpPr>
-        <p:spPr>
-          <a:xfrm>
-            <a:off x="7447135" y="4169664"/>
-            <a:ext cx="685800" cy="384048"/>
-          </a:xfrm>
-          <a:prstGeom prst="rect">
-            <a:avLst/>
-          </a:prstGeom>
-          <a:noFill/>
-          <a:ln/>
-        </p:spPr>
-        <p:txBody>
-          <a:bodyPr wrap="square" lIns="0" tIns="0" rIns="0" bIns="0" rtlCol="0" anchor="ctr"/>
-          <a:lstStyle/>
-          <a:p>
-            <a:pPr algn="ctr" indent="0" marL="0">
-              <a:buNone/>
-            </a:pPr>
-            <a:r>
-              <a:rPr lang="en-US" sz="900" b="1" dirty="0">
-                <a:solidFill>
-                  <a:srgbClr val="9D174D"/>
-                </a:solidFill>
-                <a:latin typeface="Trebuchet MS" pitchFamily="34" charset="0"/>
-                <a:ea typeface="Trebuchet MS" pitchFamily="34" charset="-122"/>
-                <a:cs typeface="Trebuchet MS" pitchFamily="34" charset="-120"/>
-              </a:rPr>
-              <a:t>ce</a:t>
-            </a:r>
-            <a:endParaRPr lang="en-US" sz="900" dirty="0"/>
-          </a:p>
-        </p:txBody>
-      </p:sp>
-      <p:sp>
-        <p:nvSpPr>
-          <p:cNvPr id="52" name="Text 50"/>
-          <p:cNvSpPr/>
-          <p:nvPr/>
-        </p:nvSpPr>
-        <p:spPr>
-          <a:xfrm>
-            <a:off x="7447135" y="4572000"/>
-            <a:ext cx="685800" cy="219456"/>
-          </a:xfrm>
-          <a:prstGeom prst="rect">
-            <a:avLst/>
-          </a:prstGeom>
-          <a:noFill/>
-          <a:ln/>
-        </p:spPr>
-        <p:txBody>
-          <a:bodyPr wrap="square" lIns="0" tIns="0" rIns="0" bIns="0" rtlCol="0" anchor="t"/>
-          <a:lstStyle/>
-          <a:p>
-            <a:pPr algn="ctr" indent="0" marL="0">
-              <a:buNone/>
-            </a:pPr>
-            <a:r>
-              <a:rPr lang="en-US" sz="750" i="1" dirty="0">
-                <a:solidFill>
-                  <a:srgbClr val="94A3B8"/>
-                </a:solidFill>
-                <a:latin typeface="Calibri" pitchFamily="34" charset="0"/>
-                <a:ea typeface="Calibri" pitchFamily="34" charset="-122"/>
-                <a:cs typeface="Calibri" pitchFamily="34" charset="-120"/>
-              </a:rPr>
-              <a:t>/s/</a:t>
-            </a:r>
-            <a:endParaRPr lang="en-US" sz="750" dirty="0"/>
           </a:p>
         </p:txBody>
       </p:sp>
@@ -15988,7 +16471,7 @@
                 <a:ea typeface="Calibri" pitchFamily="34" charset="-122"/>
                 <a:cs typeface="Calibri" pitchFamily="34" charset="-120"/>
               </a:rPr>
-              <a:t>Word Labs  •  wordlabs.app  •  Root: 'merge' = join, combine, sink into</a:t>
+              <a:t>Word Labs  •  wordlabs.app  •  Root: 'merge' = to join together into one</a:t>
             </a:r>
             <a:endParaRPr lang="en-US" sz="800" dirty="0"/>
           </a:p>
@@ -16322,7 +16805,7 @@
                 <a:ea typeface="Trebuchet MS" pitchFamily="34" charset="-122"/>
                 <a:cs typeface="Trebuchet MS" pitchFamily="34" charset="-120"/>
               </a:rPr>
-              <a:t>2</a:t>
+              <a:t>1</a:t>
             </a:r>
             <a:pPr algn="ctr" indent="0" marL="0">
               <a:buNone/>
@@ -16336,7 +16819,7 @@
                 <a:ea typeface="Trebuchet MS" pitchFamily="34" charset="-122"/>
                 <a:cs typeface="Trebuchet MS" pitchFamily="34" charset="-120"/>
               </a:rPr>
-              <a:t>  punctuation marks</a:t>
+              <a:t>  punctuation mark</a:t>
             </a:r>
             <a:endParaRPr lang="en-US" sz="2800" dirty="0"/>
           </a:p>
@@ -16628,7 +17111,7 @@
                 <a:ea typeface="Calibri" pitchFamily="34" charset="-122"/>
                 <a:cs typeface="Calibri" pitchFamily="34" charset="-120"/>
               </a:rPr>
-              <a:t>Word Labs  •  wordlabs.app  •  Root: 'merge' = join, combine, sink into</a:t>
+              <a:t>Word Labs  •  wordlabs.app  •  Root: 'merge' = to join together into one</a:t>
             </a:r>
             <a:endParaRPr lang="en-US" sz="800" dirty="0"/>
           </a:p>
@@ -16740,7 +17223,7 @@
                 <a:ea typeface="Calibri" pitchFamily="34" charset="-122"/>
                 <a:cs typeface="Calibri" pitchFamily="34" charset="-120"/>
               </a:rPr>
-              <a:t>The submarine had to </a:t>
+              <a:t>A chick </a:t>
             </a:r>
             <a:pPr algn="l" indent="0" marL="0">
               <a:buNone/>
@@ -16757,7 +17240,7 @@
                 <a:ea typeface="Calibri" pitchFamily="34" charset="-122"/>
                 <a:cs typeface="Calibri" pitchFamily="34" charset="-120"/>
               </a:rPr>
-              <a:t>submerge</a:t>
+              <a:t>emerges</a:t>
             </a:r>
             <a:pPr algn="l" indent="0" marL="0">
               <a:buNone/>
@@ -16771,7 +17254,7 @@
                 <a:ea typeface="Calibri" pitchFamily="34" charset="-122"/>
                 <a:cs typeface="Calibri" pitchFamily="34" charset="-120"/>
               </a:rPr>
-              <a:t> quickly, but the </a:t>
+              <a:t> from its egg after about three weeks. </a:t>
             </a:r>
             <a:pPr algn="l" indent="0" marL="0">
               <a:buNone/>
@@ -16788,7 +17271,7 @@
                 <a:ea typeface="Calibri" pitchFamily="34" charset="-122"/>
                 <a:cs typeface="Calibri" pitchFamily="34" charset="-120"/>
               </a:rPr>
-              <a:t>emerging</a:t>
+              <a:t>Emerging</a:t>
             </a:r>
             <a:pPr algn="l" indent="0" marL="0">
               <a:buNone/>
@@ -16802,7 +17285,7 @@
                 <a:ea typeface="Calibri" pitchFamily="34" charset="-122"/>
                 <a:cs typeface="Calibri" pitchFamily="34" charset="-120"/>
               </a:rPr>
-              <a:t> danger meant the crew had to stay </a:t>
+              <a:t> from the tent, they saw a beautiful sunrise. Scientists studied the </a:t>
             </a:r>
             <a:pPr algn="l" indent="0" marL="0">
               <a:buNone/>
@@ -16819,7 +17302,7 @@
                 <a:ea typeface="Calibri" pitchFamily="34" charset="-122"/>
                 <a:cs typeface="Calibri" pitchFamily="34" charset="-120"/>
               </a:rPr>
-              <a:t>submerged</a:t>
+              <a:t>emergence</a:t>
             </a:r>
             <a:pPr algn="l" indent="0" marL="0">
               <a:buNone/>
@@ -16833,7 +17316,7 @@
                 <a:ea typeface="Calibri" pitchFamily="34" charset="-122"/>
                 <a:cs typeface="Calibri" pitchFamily="34" charset="-120"/>
               </a:rPr>
-              <a:t> for hours.</a:t>
+              <a:t> of new species over time.</a:t>
             </a:r>
             <a:endParaRPr lang="en-US" sz="1800" dirty="0"/>
           </a:p>
@@ -16988,7 +17471,7 @@
                 <a:ea typeface="Trebuchet MS" pitchFamily="34" charset="-122"/>
                 <a:cs typeface="Trebuchet MS" pitchFamily="34" charset="-120"/>
               </a:rPr>
-              <a:t>submerge</a:t>
+              <a:t>emerges</a:t>
             </a:r>
             <a:endParaRPr lang="en-US" sz="1400" dirty="0"/>
           </a:p>
@@ -17244,7 +17727,7 @@
                 <a:ea typeface="Trebuchet MS" pitchFamily="34" charset="-122"/>
                 <a:cs typeface="Trebuchet MS" pitchFamily="34" charset="-120"/>
               </a:rPr>
-              <a:t>submerged</a:t>
+              <a:t>emergence</a:t>
             </a:r>
             <a:endParaRPr lang="en-US" sz="1400" dirty="0"/>
           </a:p>
@@ -17575,7 +18058,7 @@
                 <a:ea typeface="Calibri" pitchFamily="34" charset="-122"/>
                 <a:cs typeface="Calibri" pitchFamily="34" charset="-120"/>
               </a:rPr>
-              <a:t>Word Labs  •  wordlabs.app  •  Root: 'merge' = join, combine, sink into</a:t>
+              <a:t>Word Labs  •  wordlabs.app  •  Root: 'merge' = to join together into one</a:t>
             </a:r>
             <a:endParaRPr lang="en-US" sz="800" dirty="0"/>
           </a:p>
@@ -17714,7 +18197,7 @@
                 <a:ea typeface="Trebuchet MS" pitchFamily="34" charset="-122"/>
                 <a:cs typeface="Trebuchet MS" pitchFamily="34" charset="-120"/>
               </a:rPr>
-              <a:t>submerge</a:t>
+              <a:t>emerges</a:t>
             </a:r>
             <a:endParaRPr lang="en-US" sz="2800" dirty="0"/>
           </a:p>
@@ -18402,7 +18885,7 @@
                 <a:ea typeface="Calibri" pitchFamily="34" charset="-122"/>
                 <a:cs typeface="Calibri" pitchFamily="34" charset="-120"/>
               </a:rPr>
-              <a:t>Word Labs  •  wordlabs.app  •  Root: 'merge' = join, combine, sink into</a:t>
+              <a:t>Word Labs  •  wordlabs.app  •  Root: 'merge' = to join together into one</a:t>
             </a:r>
             <a:endParaRPr lang="en-US" sz="800" dirty="0"/>
           </a:p>
@@ -18541,7 +19024,7 @@
                 <a:ea typeface="Trebuchet MS" pitchFamily="34" charset="-122"/>
                 <a:cs typeface="Trebuchet MS" pitchFamily="34" charset="-120"/>
               </a:rPr>
-              <a:t>submerge</a:t>
+              <a:t>emerges</a:t>
             </a:r>
             <a:endParaRPr lang="en-US" sz="2800" dirty="0"/>
           </a:p>
@@ -18621,7 +19104,7 @@
         </p:nvSpPr>
         <p:spPr>
           <a:xfrm>
-            <a:off x="2938272" y="2258568"/>
+            <a:off x="2221992" y="2258568"/>
             <a:ext cx="1828800" cy="292608"/>
           </a:xfrm>
           <a:prstGeom prst="rect">
@@ -18655,7 +19138,7 @@
         </p:nvSpPr>
         <p:spPr>
           <a:xfrm>
-            <a:off x="2938272" y="2258568"/>
+            <a:off x="2221992" y="2258568"/>
             <a:ext cx="1828800" cy="292608"/>
           </a:xfrm>
           <a:prstGeom prst="rect">
@@ -18680,7 +19163,7 @@
                 <a:ea typeface="Trebuchet MS" pitchFamily="34" charset="-122"/>
                 <a:cs typeface="Trebuchet MS" pitchFamily="34" charset="-120"/>
               </a:rPr>
-              <a:t>sub</a:t>
+              <a:t>e</a:t>
             </a:r>
             <a:endParaRPr lang="en-US" sz="1300" dirty="0"/>
           </a:p>
@@ -18694,7 +19177,7 @@
         </p:nvSpPr>
         <p:spPr>
           <a:xfrm>
-            <a:off x="2938272" y="2569464"/>
+            <a:off x="2221992" y="2569464"/>
             <a:ext cx="1828800" cy="201168"/>
           </a:xfrm>
           <a:prstGeom prst="rect">
@@ -18719,7 +19202,7 @@
                 <a:ea typeface="Calibri" pitchFamily="34" charset="-122"/>
                 <a:cs typeface="Calibri" pitchFamily="34" charset="-120"/>
               </a:rPr>
-              <a:t>under, below</a:t>
+              <a:t>electronic; online</a:t>
             </a:r>
             <a:endParaRPr lang="en-US" sz="850" dirty="0"/>
           </a:p>
@@ -18733,7 +19216,7 @@
         </p:nvSpPr>
         <p:spPr>
           <a:xfrm>
-            <a:off x="5803392" y="2258568"/>
+            <a:off x="4370832" y="2258568"/>
             <a:ext cx="1828800" cy="292608"/>
           </a:xfrm>
           <a:prstGeom prst="rect">
@@ -18767,7 +19250,7 @@
         </p:nvSpPr>
         <p:spPr>
           <a:xfrm>
-            <a:off x="5803392" y="2258568"/>
+            <a:off x="4370832" y="2258568"/>
             <a:ext cx="1828800" cy="292608"/>
           </a:xfrm>
           <a:prstGeom prst="rect">
@@ -18806,7 +19289,7 @@
         </p:nvSpPr>
         <p:spPr>
           <a:xfrm>
-            <a:off x="5803392" y="2569464"/>
+            <a:off x="4370832" y="2569464"/>
             <a:ext cx="1828800" cy="201168"/>
           </a:xfrm>
           <a:prstGeom prst="rect">
@@ -18831,7 +19314,7 @@
                 <a:ea typeface="Calibri" pitchFamily="34" charset="-122"/>
                 <a:cs typeface="Calibri" pitchFamily="34" charset="-120"/>
               </a:rPr>
-              <a:t>join, combine, sink into</a:t>
+              <a:t>to join together into one</a:t>
             </a:r>
             <a:endParaRPr lang="en-US" sz="850" dirty="0"/>
           </a:p>
@@ -18840,6 +19323,118 @@
       <p:sp>
         <p:nvSpPr>
           <p:cNvPr id="22" name="Shape 20"/>
+          <p:cNvSpPr/>
+          <p:nvPr/>
+        </p:nvSpPr>
+        <p:spPr>
+          <a:xfrm>
+            <a:off x="6519672" y="2258568"/>
+            <a:ext cx="1828800" cy="292608"/>
+          </a:xfrm>
+          <a:prstGeom prst="rect">
+            <a:avLst>
+              <a:gd name="adj" fmla="val 25000"/>
+            </a:avLst>
+          </a:prstGeom>
+          <a:solidFill>
+            <a:srgbClr val="FCE7F3"/>
+          </a:solidFill>
+          <a:ln w="19050">
+            <a:solidFill>
+              <a:srgbClr val="DB2777"/>
+            </a:solidFill>
+            <a:prstDash val="solid"/>
+          </a:ln>
+          <a:effectLst>
+            <a:outerShdw sx="100000" sy="100000" kx="0" ky="0" algn="bl" rotWithShape="0" blurRad="101600" dist="38100" dir="8100000">
+              <a:srgbClr val="000000">
+                <a:alpha val="12000"/>
+              </a:srgbClr>
+            </a:outerShdw>
+          </a:effectLst>
+        </p:spPr>
+      </p:sp>
+      <p:sp>
+        <p:nvSpPr>
+          <p:cNvPr id="23" name="Text 21"/>
+          <p:cNvSpPr/>
+          <p:nvPr/>
+        </p:nvSpPr>
+        <p:spPr>
+          <a:xfrm>
+            <a:off x="6519672" y="2258568"/>
+            <a:ext cx="1828800" cy="292608"/>
+          </a:xfrm>
+          <a:prstGeom prst="rect">
+            <a:avLst/>
+          </a:prstGeom>
+          <a:noFill/>
+          <a:ln/>
+        </p:spPr>
+        <p:txBody>
+          <a:bodyPr wrap="square" lIns="0" tIns="0" rIns="0" bIns="0" rtlCol="0" anchor="ctr"/>
+          <a:lstStyle/>
+          <a:p>
+            <a:pPr algn="ctr" indent="0" marL="0">
+              <a:buNone/>
+            </a:pPr>
+            <a:r>
+              <a:rPr lang="en-US" sz="1300" b="1" dirty="0">
+                <a:solidFill>
+                  <a:srgbClr val="9D174D"/>
+                </a:solidFill>
+                <a:latin typeface="Trebuchet MS" pitchFamily="34" charset="0"/>
+                <a:ea typeface="Trebuchet MS" pitchFamily="34" charset="-122"/>
+                <a:cs typeface="Trebuchet MS" pitchFamily="34" charset="-120"/>
+              </a:rPr>
+              <a:t>s</a:t>
+            </a:r>
+            <a:endParaRPr lang="en-US" sz="1300" dirty="0"/>
+          </a:p>
+        </p:txBody>
+      </p:sp>
+      <p:sp>
+        <p:nvSpPr>
+          <p:cNvPr id="24" name="Text 22"/>
+          <p:cNvSpPr/>
+          <p:nvPr/>
+        </p:nvSpPr>
+        <p:spPr>
+          <a:xfrm>
+            <a:off x="6519672" y="2569464"/>
+            <a:ext cx="1828800" cy="201168"/>
+          </a:xfrm>
+          <a:prstGeom prst="rect">
+            <a:avLst/>
+          </a:prstGeom>
+          <a:noFill/>
+          <a:ln/>
+        </p:spPr>
+        <p:txBody>
+          <a:bodyPr wrap="square" lIns="0" tIns="0" rIns="0" bIns="0" rtlCol="0" anchor="t"/>
+          <a:lstStyle/>
+          <a:p>
+            <a:pPr algn="ctr" indent="0" marL="0">
+              <a:buNone/>
+            </a:pPr>
+            <a:r>
+              <a:rPr lang="en-US" sz="850" dirty="0">
+                <a:solidFill>
+                  <a:srgbClr val="475569"/>
+                </a:solidFill>
+                <a:latin typeface="Calibri" pitchFamily="34" charset="0"/>
+                <a:ea typeface="Calibri" pitchFamily="34" charset="-122"/>
+                <a:cs typeface="Calibri" pitchFamily="34" charset="-120"/>
+              </a:rPr>
+              <a:t>plural or present tense</a:t>
+            </a:r>
+            <a:endParaRPr lang="en-US" sz="850" dirty="0"/>
+          </a:p>
+        </p:txBody>
+      </p:sp>
+      <p:sp>
+        <p:nvSpPr>
+          <p:cNvPr id="25" name="Shape 23"/>
           <p:cNvSpPr/>
           <p:nvPr/>
         </p:nvSpPr>
@@ -18866,7 +19461,7 @@
       </p:sp>
       <p:sp>
         <p:nvSpPr>
-          <p:cNvPr id="23" name="Text 21"/>
+          <p:cNvPr id="26" name="Text 24"/>
           <p:cNvSpPr/>
           <p:nvPr/>
         </p:nvSpPr>
@@ -18905,7 +19500,7 @@
       </p:sp>
       <p:sp>
         <p:nvSpPr>
-          <p:cNvPr id="24" name="Shape 22"/>
+          <p:cNvPr id="27" name="Shape 25"/>
           <p:cNvSpPr/>
           <p:nvPr/>
         </p:nvSpPr>
@@ -18932,7 +19527,7 @@
       </p:sp>
       <p:sp>
         <p:nvSpPr>
-          <p:cNvPr id="25" name="Text 23"/>
+          <p:cNvPr id="28" name="Text 26"/>
           <p:cNvSpPr/>
           <p:nvPr/>
         </p:nvSpPr>
@@ -18971,7 +19566,7 @@
       </p:sp>
       <p:sp>
         <p:nvSpPr>
-          <p:cNvPr id="26" name="Shape 24"/>
+          <p:cNvPr id="29" name="Shape 27"/>
           <p:cNvSpPr/>
           <p:nvPr/>
         </p:nvSpPr>
@@ -18998,7 +19593,7 @@
       </p:sp>
       <p:sp>
         <p:nvSpPr>
-          <p:cNvPr id="27" name="Text 25"/>
+          <p:cNvPr id="30" name="Text 28"/>
           <p:cNvSpPr/>
           <p:nvPr/>
         </p:nvSpPr>
@@ -19037,7 +19632,7 @@
       </p:sp>
       <p:sp>
         <p:nvSpPr>
-          <p:cNvPr id="28" name="Shape 26"/>
+          <p:cNvPr id="31" name="Shape 29"/>
           <p:cNvSpPr/>
           <p:nvPr/>
         </p:nvSpPr>
@@ -19064,7 +19659,7 @@
       </p:sp>
       <p:sp>
         <p:nvSpPr>
-          <p:cNvPr id="29" name="Text 27"/>
+          <p:cNvPr id="32" name="Text 30"/>
           <p:cNvSpPr/>
           <p:nvPr/>
         </p:nvSpPr>
@@ -19387,7 +19982,7 @@
                 <a:ea typeface="Calibri" pitchFamily="34" charset="-122"/>
                 <a:cs typeface="Calibri" pitchFamily="34" charset="-120"/>
               </a:rPr>
-              <a:t>Word Labs  •  wordlabs.app  •  Root: 'merge' = join, combine, sink into</a:t>
+              <a:t>Word Labs  •  wordlabs.app  •  Root: 'merge' = to join together into one</a:t>
             </a:r>
             <a:endParaRPr lang="en-US" sz="800" dirty="0"/>
           </a:p>
@@ -19526,7 +20121,7 @@
                 <a:ea typeface="Trebuchet MS" pitchFamily="34" charset="-122"/>
                 <a:cs typeface="Trebuchet MS" pitchFamily="34" charset="-120"/>
               </a:rPr>
-              <a:t>submerge</a:t>
+              <a:t>emerges</a:t>
             </a:r>
             <a:endParaRPr lang="en-US" sz="2800" dirty="0"/>
           </a:p>
@@ -19606,7 +20201,7 @@
         </p:nvSpPr>
         <p:spPr>
           <a:xfrm>
-            <a:off x="2938272" y="2258568"/>
+            <a:off x="2221992" y="2258568"/>
             <a:ext cx="1828800" cy="292608"/>
           </a:xfrm>
           <a:prstGeom prst="rect">
@@ -19640,7 +20235,7 @@
         </p:nvSpPr>
         <p:spPr>
           <a:xfrm>
-            <a:off x="2938272" y="2258568"/>
+            <a:off x="2221992" y="2258568"/>
             <a:ext cx="1828800" cy="292608"/>
           </a:xfrm>
           <a:prstGeom prst="rect">
@@ -19665,7 +20260,7 @@
                 <a:ea typeface="Trebuchet MS" pitchFamily="34" charset="-122"/>
                 <a:cs typeface="Trebuchet MS" pitchFamily="34" charset="-120"/>
               </a:rPr>
-              <a:t>sub</a:t>
+              <a:t>e</a:t>
             </a:r>
             <a:endParaRPr lang="en-US" sz="1300" dirty="0"/>
           </a:p>
@@ -19679,7 +20274,7 @@
         </p:nvSpPr>
         <p:spPr>
           <a:xfrm>
-            <a:off x="2938272" y="2569464"/>
+            <a:off x="2221992" y="2569464"/>
             <a:ext cx="1828800" cy="201168"/>
           </a:xfrm>
           <a:prstGeom prst="rect">
@@ -19704,7 +20299,7 @@
                 <a:ea typeface="Calibri" pitchFamily="34" charset="-122"/>
                 <a:cs typeface="Calibri" pitchFamily="34" charset="-120"/>
               </a:rPr>
-              <a:t>under, below</a:t>
+              <a:t>electronic; online</a:t>
             </a:r>
             <a:endParaRPr lang="en-US" sz="850" dirty="0"/>
           </a:p>
@@ -19718,7 +20313,7 @@
         </p:nvSpPr>
         <p:spPr>
           <a:xfrm>
-            <a:off x="5803392" y="2258568"/>
+            <a:off x="4370832" y="2258568"/>
             <a:ext cx="1828800" cy="292608"/>
           </a:xfrm>
           <a:prstGeom prst="rect">
@@ -19752,7 +20347,7 @@
         </p:nvSpPr>
         <p:spPr>
           <a:xfrm>
-            <a:off x="5803392" y="2258568"/>
+            <a:off x="4370832" y="2258568"/>
             <a:ext cx="1828800" cy="292608"/>
           </a:xfrm>
           <a:prstGeom prst="rect">
@@ -19791,7 +20386,7 @@
         </p:nvSpPr>
         <p:spPr>
           <a:xfrm>
-            <a:off x="5803392" y="2569464"/>
+            <a:off x="4370832" y="2569464"/>
             <a:ext cx="1828800" cy="201168"/>
           </a:xfrm>
           <a:prstGeom prst="rect">
@@ -19816,7 +20411,7 @@
                 <a:ea typeface="Calibri" pitchFamily="34" charset="-122"/>
                 <a:cs typeface="Calibri" pitchFamily="34" charset="-120"/>
               </a:rPr>
-              <a:t>join, combine, sink into</a:t>
+              <a:t>to join together into one</a:t>
             </a:r>
             <a:endParaRPr lang="en-US" sz="850" dirty="0"/>
           </a:p>
@@ -19825,6 +20420,118 @@
       <p:sp>
         <p:nvSpPr>
           <p:cNvPr id="22" name="Shape 20"/>
+          <p:cNvSpPr/>
+          <p:nvPr/>
+        </p:nvSpPr>
+        <p:spPr>
+          <a:xfrm>
+            <a:off x="6519672" y="2258568"/>
+            <a:ext cx="1828800" cy="292608"/>
+          </a:xfrm>
+          <a:prstGeom prst="rect">
+            <a:avLst>
+              <a:gd name="adj" fmla="val 25000"/>
+            </a:avLst>
+          </a:prstGeom>
+          <a:solidFill>
+            <a:srgbClr val="FCE7F3"/>
+          </a:solidFill>
+          <a:ln w="19050">
+            <a:solidFill>
+              <a:srgbClr val="DB2777"/>
+            </a:solidFill>
+            <a:prstDash val="solid"/>
+          </a:ln>
+          <a:effectLst>
+            <a:outerShdw sx="100000" sy="100000" kx="0" ky="0" algn="bl" rotWithShape="0" blurRad="101600" dist="38100" dir="8100000">
+              <a:srgbClr val="000000">
+                <a:alpha val="12000"/>
+              </a:srgbClr>
+            </a:outerShdw>
+          </a:effectLst>
+        </p:spPr>
+      </p:sp>
+      <p:sp>
+        <p:nvSpPr>
+          <p:cNvPr id="23" name="Text 21"/>
+          <p:cNvSpPr/>
+          <p:nvPr/>
+        </p:nvSpPr>
+        <p:spPr>
+          <a:xfrm>
+            <a:off x="6519672" y="2258568"/>
+            <a:ext cx="1828800" cy="292608"/>
+          </a:xfrm>
+          <a:prstGeom prst="rect">
+            <a:avLst/>
+          </a:prstGeom>
+          <a:noFill/>
+          <a:ln/>
+        </p:spPr>
+        <p:txBody>
+          <a:bodyPr wrap="square" lIns="0" tIns="0" rIns="0" bIns="0" rtlCol="0" anchor="ctr"/>
+          <a:lstStyle/>
+          <a:p>
+            <a:pPr algn="ctr" indent="0" marL="0">
+              <a:buNone/>
+            </a:pPr>
+            <a:r>
+              <a:rPr lang="en-US" sz="1300" b="1" dirty="0">
+                <a:solidFill>
+                  <a:srgbClr val="9D174D"/>
+                </a:solidFill>
+                <a:latin typeface="Trebuchet MS" pitchFamily="34" charset="0"/>
+                <a:ea typeface="Trebuchet MS" pitchFamily="34" charset="-122"/>
+                <a:cs typeface="Trebuchet MS" pitchFamily="34" charset="-120"/>
+              </a:rPr>
+              <a:t>s</a:t>
+            </a:r>
+            <a:endParaRPr lang="en-US" sz="1300" dirty="0"/>
+          </a:p>
+        </p:txBody>
+      </p:sp>
+      <p:sp>
+        <p:nvSpPr>
+          <p:cNvPr id="24" name="Text 22"/>
+          <p:cNvSpPr/>
+          <p:nvPr/>
+        </p:nvSpPr>
+        <p:spPr>
+          <a:xfrm>
+            <a:off x="6519672" y="2569464"/>
+            <a:ext cx="1828800" cy="201168"/>
+          </a:xfrm>
+          <a:prstGeom prst="rect">
+            <a:avLst/>
+          </a:prstGeom>
+          <a:noFill/>
+          <a:ln/>
+        </p:spPr>
+        <p:txBody>
+          <a:bodyPr wrap="square" lIns="0" tIns="0" rIns="0" bIns="0" rtlCol="0" anchor="t"/>
+          <a:lstStyle/>
+          <a:p>
+            <a:pPr algn="ctr" indent="0" marL="0">
+              <a:buNone/>
+            </a:pPr>
+            <a:r>
+              <a:rPr lang="en-US" sz="850" dirty="0">
+                <a:solidFill>
+                  <a:srgbClr val="475569"/>
+                </a:solidFill>
+                <a:latin typeface="Calibri" pitchFamily="34" charset="0"/>
+                <a:ea typeface="Calibri" pitchFamily="34" charset="-122"/>
+                <a:cs typeface="Calibri" pitchFamily="34" charset="-120"/>
+              </a:rPr>
+              <a:t>plural or present tense</a:t>
+            </a:r>
+            <a:endParaRPr lang="en-US" sz="850" dirty="0"/>
+          </a:p>
+        </p:txBody>
+      </p:sp>
+      <p:sp>
+        <p:nvSpPr>
+          <p:cNvPr id="25" name="Shape 23"/>
           <p:cNvSpPr/>
           <p:nvPr/>
         </p:nvSpPr>
@@ -19851,7 +20558,7 @@
       </p:sp>
       <p:sp>
         <p:nvSpPr>
-          <p:cNvPr id="23" name="Text 21"/>
+          <p:cNvPr id="26" name="Text 24"/>
           <p:cNvSpPr/>
           <p:nvPr/>
         </p:nvSpPr>
@@ -19890,7 +20597,7 @@
       </p:sp>
       <p:sp>
         <p:nvSpPr>
-          <p:cNvPr id="24" name="Shape 22"/>
+          <p:cNvPr id="27" name="Shape 25"/>
           <p:cNvSpPr/>
           <p:nvPr/>
         </p:nvSpPr>
@@ -19917,7 +20624,7 @@
       </p:sp>
       <p:sp>
         <p:nvSpPr>
-          <p:cNvPr id="25" name="Shape 23"/>
+          <p:cNvPr id="28" name="Shape 26"/>
           <p:cNvSpPr/>
           <p:nvPr/>
         </p:nvSpPr>
@@ -19944,7 +20651,7 @@
       </p:sp>
       <p:sp>
         <p:nvSpPr>
-          <p:cNvPr id="26" name="Text 24"/>
+          <p:cNvPr id="29" name="Text 27"/>
           <p:cNvSpPr/>
           <p:nvPr/>
         </p:nvSpPr>
@@ -19975,7 +20682,7 @@
                 <a:ea typeface="Trebuchet MS" pitchFamily="34" charset="-122"/>
                 <a:cs typeface="Trebuchet MS" pitchFamily="34" charset="-120"/>
               </a:rPr>
-              <a:t>sub</a:t>
+              <a:t>e</a:t>
             </a:r>
             <a:endParaRPr lang="en-US" sz="1400" dirty="0"/>
           </a:p>
@@ -19983,7 +20690,7 @@
       </p:sp>
       <p:sp>
         <p:nvSpPr>
-          <p:cNvPr id="27" name="Text 25"/>
+          <p:cNvPr id="30" name="Text 28"/>
           <p:cNvSpPr/>
           <p:nvPr/>
         </p:nvSpPr>
@@ -20022,7 +20729,7 @@
       </p:sp>
       <p:sp>
         <p:nvSpPr>
-          <p:cNvPr id="28" name="Shape 26"/>
+          <p:cNvPr id="31" name="Shape 29"/>
           <p:cNvSpPr/>
           <p:nvPr/>
         </p:nvSpPr>
@@ -20049,7 +20756,7 @@
       </p:sp>
       <p:sp>
         <p:nvSpPr>
-          <p:cNvPr id="29" name="Text 27"/>
+          <p:cNvPr id="32" name="Text 30"/>
           <p:cNvSpPr/>
           <p:nvPr/>
         </p:nvSpPr>
@@ -20080,7 +20787,7 @@
                 <a:ea typeface="Trebuchet MS" pitchFamily="34" charset="-122"/>
                 <a:cs typeface="Trebuchet MS" pitchFamily="34" charset="-120"/>
               </a:rPr>
-              <a:t>merge</a:t>
+              <a:t>merges</a:t>
             </a:r>
             <a:endParaRPr lang="en-US" sz="1400" dirty="0"/>
           </a:p>
@@ -20088,7 +20795,7 @@
       </p:sp>
       <p:sp>
         <p:nvSpPr>
-          <p:cNvPr id="30" name="Shape 28"/>
+          <p:cNvPr id="33" name="Shape 31"/>
           <p:cNvSpPr/>
           <p:nvPr/>
         </p:nvSpPr>
@@ -20115,7 +20822,7 @@
       </p:sp>
       <p:sp>
         <p:nvSpPr>
-          <p:cNvPr id="31" name="Text 29"/>
+          <p:cNvPr id="34" name="Text 32"/>
           <p:cNvSpPr/>
           <p:nvPr/>
         </p:nvSpPr>
@@ -20154,7 +20861,7 @@
       </p:sp>
       <p:sp>
         <p:nvSpPr>
-          <p:cNvPr id="32" name="Shape 30"/>
+          <p:cNvPr id="35" name="Shape 33"/>
           <p:cNvSpPr/>
           <p:nvPr/>
         </p:nvSpPr>
@@ -20181,7 +20888,7 @@
       </p:sp>
       <p:sp>
         <p:nvSpPr>
-          <p:cNvPr id="33" name="Text 31"/>
+          <p:cNvPr id="36" name="Text 34"/>
           <p:cNvSpPr/>
           <p:nvPr/>
         </p:nvSpPr>
@@ -20504,7 +21211,7 @@
                 <a:ea typeface="Calibri" pitchFamily="34" charset="-122"/>
                 <a:cs typeface="Calibri" pitchFamily="34" charset="-120"/>
               </a:rPr>
-              <a:t>Word Labs  •  wordlabs.app  •  Root: 'merge' = join, combine, sink into</a:t>
+              <a:t>Word Labs  •  wordlabs.app  •  Root: 'merge' = to join together into one</a:t>
             </a:r>
             <a:endParaRPr lang="en-US" sz="800" dirty="0"/>
           </a:p>
@@ -20643,7 +21350,7 @@
                 <a:ea typeface="Trebuchet MS" pitchFamily="34" charset="-122"/>
                 <a:cs typeface="Trebuchet MS" pitchFamily="34" charset="-120"/>
               </a:rPr>
-              <a:t>submerge</a:t>
+              <a:t>emerges</a:t>
             </a:r>
             <a:endParaRPr lang="en-US" sz="2800" dirty="0"/>
           </a:p>
@@ -20723,7 +21430,7 @@
         </p:nvSpPr>
         <p:spPr>
           <a:xfrm>
-            <a:off x="2938272" y="2258568"/>
+            <a:off x="2221992" y="2258568"/>
             <a:ext cx="1828800" cy="292608"/>
           </a:xfrm>
           <a:prstGeom prst="rect">
@@ -20757,7 +21464,7 @@
         </p:nvSpPr>
         <p:spPr>
           <a:xfrm>
-            <a:off x="2938272" y="2258568"/>
+            <a:off x="2221992" y="2258568"/>
             <a:ext cx="1828800" cy="292608"/>
           </a:xfrm>
           <a:prstGeom prst="rect">
@@ -20782,7 +21489,7 @@
                 <a:ea typeface="Trebuchet MS" pitchFamily="34" charset="-122"/>
                 <a:cs typeface="Trebuchet MS" pitchFamily="34" charset="-120"/>
               </a:rPr>
-              <a:t>sub</a:t>
+              <a:t>e</a:t>
             </a:r>
             <a:endParaRPr lang="en-US" sz="1300" dirty="0"/>
           </a:p>
@@ -20796,7 +21503,7 @@
         </p:nvSpPr>
         <p:spPr>
           <a:xfrm>
-            <a:off x="2938272" y="2569464"/>
+            <a:off x="2221992" y="2569464"/>
             <a:ext cx="1828800" cy="201168"/>
           </a:xfrm>
           <a:prstGeom prst="rect">
@@ -20821,7 +21528,7 @@
                 <a:ea typeface="Calibri" pitchFamily="34" charset="-122"/>
                 <a:cs typeface="Calibri" pitchFamily="34" charset="-120"/>
               </a:rPr>
-              <a:t>under, below</a:t>
+              <a:t>electronic; online</a:t>
             </a:r>
             <a:endParaRPr lang="en-US" sz="850" dirty="0"/>
           </a:p>
@@ -20835,7 +21542,7 @@
         </p:nvSpPr>
         <p:spPr>
           <a:xfrm>
-            <a:off x="5803392" y="2258568"/>
+            <a:off x="4370832" y="2258568"/>
             <a:ext cx="1828800" cy="292608"/>
           </a:xfrm>
           <a:prstGeom prst="rect">
@@ -20869,7 +21576,7 @@
         </p:nvSpPr>
         <p:spPr>
           <a:xfrm>
-            <a:off x="5803392" y="2258568"/>
+            <a:off x="4370832" y="2258568"/>
             <a:ext cx="1828800" cy="292608"/>
           </a:xfrm>
           <a:prstGeom prst="rect">
@@ -20908,7 +21615,7 @@
         </p:nvSpPr>
         <p:spPr>
           <a:xfrm>
-            <a:off x="5803392" y="2569464"/>
+            <a:off x="4370832" y="2569464"/>
             <a:ext cx="1828800" cy="201168"/>
           </a:xfrm>
           <a:prstGeom prst="rect">
@@ -20933,7 +21640,7 @@
                 <a:ea typeface="Calibri" pitchFamily="34" charset="-122"/>
                 <a:cs typeface="Calibri" pitchFamily="34" charset="-120"/>
               </a:rPr>
-              <a:t>join, combine, sink into</a:t>
+              <a:t>to join together into one</a:t>
             </a:r>
             <a:endParaRPr lang="en-US" sz="850" dirty="0"/>
           </a:p>
@@ -20942,6 +21649,118 @@
       <p:sp>
         <p:nvSpPr>
           <p:cNvPr id="22" name="Shape 20"/>
+          <p:cNvSpPr/>
+          <p:nvPr/>
+        </p:nvSpPr>
+        <p:spPr>
+          <a:xfrm>
+            <a:off x="6519672" y="2258568"/>
+            <a:ext cx="1828800" cy="292608"/>
+          </a:xfrm>
+          <a:prstGeom prst="rect">
+            <a:avLst>
+              <a:gd name="adj" fmla="val 25000"/>
+            </a:avLst>
+          </a:prstGeom>
+          <a:solidFill>
+            <a:srgbClr val="FCE7F3"/>
+          </a:solidFill>
+          <a:ln w="19050">
+            <a:solidFill>
+              <a:srgbClr val="DB2777"/>
+            </a:solidFill>
+            <a:prstDash val="solid"/>
+          </a:ln>
+          <a:effectLst>
+            <a:outerShdw sx="100000" sy="100000" kx="0" ky="0" algn="bl" rotWithShape="0" blurRad="101600" dist="38100" dir="8100000">
+              <a:srgbClr val="000000">
+                <a:alpha val="12000"/>
+              </a:srgbClr>
+            </a:outerShdw>
+          </a:effectLst>
+        </p:spPr>
+      </p:sp>
+      <p:sp>
+        <p:nvSpPr>
+          <p:cNvPr id="23" name="Text 21"/>
+          <p:cNvSpPr/>
+          <p:nvPr/>
+        </p:nvSpPr>
+        <p:spPr>
+          <a:xfrm>
+            <a:off x="6519672" y="2258568"/>
+            <a:ext cx="1828800" cy="292608"/>
+          </a:xfrm>
+          <a:prstGeom prst="rect">
+            <a:avLst/>
+          </a:prstGeom>
+          <a:noFill/>
+          <a:ln/>
+        </p:spPr>
+        <p:txBody>
+          <a:bodyPr wrap="square" lIns="0" tIns="0" rIns="0" bIns="0" rtlCol="0" anchor="ctr"/>
+          <a:lstStyle/>
+          <a:p>
+            <a:pPr algn="ctr" indent="0" marL="0">
+              <a:buNone/>
+            </a:pPr>
+            <a:r>
+              <a:rPr lang="en-US" sz="1300" b="1" dirty="0">
+                <a:solidFill>
+                  <a:srgbClr val="9D174D"/>
+                </a:solidFill>
+                <a:latin typeface="Trebuchet MS" pitchFamily="34" charset="0"/>
+                <a:ea typeface="Trebuchet MS" pitchFamily="34" charset="-122"/>
+                <a:cs typeface="Trebuchet MS" pitchFamily="34" charset="-120"/>
+              </a:rPr>
+              <a:t>s</a:t>
+            </a:r>
+            <a:endParaRPr lang="en-US" sz="1300" dirty="0"/>
+          </a:p>
+        </p:txBody>
+      </p:sp>
+      <p:sp>
+        <p:nvSpPr>
+          <p:cNvPr id="24" name="Text 22"/>
+          <p:cNvSpPr/>
+          <p:nvPr/>
+        </p:nvSpPr>
+        <p:spPr>
+          <a:xfrm>
+            <a:off x="6519672" y="2569464"/>
+            <a:ext cx="1828800" cy="201168"/>
+          </a:xfrm>
+          <a:prstGeom prst="rect">
+            <a:avLst/>
+          </a:prstGeom>
+          <a:noFill/>
+          <a:ln/>
+        </p:spPr>
+        <p:txBody>
+          <a:bodyPr wrap="square" lIns="0" tIns="0" rIns="0" bIns="0" rtlCol="0" anchor="t"/>
+          <a:lstStyle/>
+          <a:p>
+            <a:pPr algn="ctr" indent="0" marL="0">
+              <a:buNone/>
+            </a:pPr>
+            <a:r>
+              <a:rPr lang="en-US" sz="850" dirty="0">
+                <a:solidFill>
+                  <a:srgbClr val="475569"/>
+                </a:solidFill>
+                <a:latin typeface="Calibri" pitchFamily="34" charset="0"/>
+                <a:ea typeface="Calibri" pitchFamily="34" charset="-122"/>
+                <a:cs typeface="Calibri" pitchFamily="34" charset="-120"/>
+              </a:rPr>
+              <a:t>plural or present tense</a:t>
+            </a:r>
+            <a:endParaRPr lang="en-US" sz="850" dirty="0"/>
+          </a:p>
+        </p:txBody>
+      </p:sp>
+      <p:sp>
+        <p:nvSpPr>
+          <p:cNvPr id="25" name="Shape 23"/>
           <p:cNvSpPr/>
           <p:nvPr/>
         </p:nvSpPr>
@@ -20968,7 +21787,7 @@
       </p:sp>
       <p:sp>
         <p:nvSpPr>
-          <p:cNvPr id="23" name="Text 21"/>
+          <p:cNvPr id="26" name="Text 24"/>
           <p:cNvSpPr/>
           <p:nvPr/>
         </p:nvSpPr>
@@ -21007,7 +21826,7 @@
       </p:sp>
       <p:sp>
         <p:nvSpPr>
-          <p:cNvPr id="24" name="Shape 22"/>
+          <p:cNvPr id="27" name="Shape 25"/>
           <p:cNvSpPr/>
           <p:nvPr/>
         </p:nvSpPr>
@@ -21034,7 +21853,7 @@
       </p:sp>
       <p:sp>
         <p:nvSpPr>
-          <p:cNvPr id="25" name="Shape 23"/>
+          <p:cNvPr id="28" name="Shape 26"/>
           <p:cNvSpPr/>
           <p:nvPr/>
         </p:nvSpPr>
@@ -21061,7 +21880,7 @@
       </p:sp>
       <p:sp>
         <p:nvSpPr>
-          <p:cNvPr id="26" name="Text 24"/>
+          <p:cNvPr id="29" name="Text 27"/>
           <p:cNvSpPr/>
           <p:nvPr/>
         </p:nvSpPr>
@@ -21092,7 +21911,7 @@
                 <a:ea typeface="Trebuchet MS" pitchFamily="34" charset="-122"/>
                 <a:cs typeface="Trebuchet MS" pitchFamily="34" charset="-120"/>
               </a:rPr>
-              <a:t>sub</a:t>
+              <a:t>e</a:t>
             </a:r>
             <a:endParaRPr lang="en-US" sz="1400" dirty="0"/>
           </a:p>
@@ -21100,7 +21919,7 @@
       </p:sp>
       <p:sp>
         <p:nvSpPr>
-          <p:cNvPr id="27" name="Text 25"/>
+          <p:cNvPr id="30" name="Text 28"/>
           <p:cNvSpPr/>
           <p:nvPr/>
         </p:nvSpPr>
@@ -21139,7 +21958,7 @@
       </p:sp>
       <p:sp>
         <p:nvSpPr>
-          <p:cNvPr id="28" name="Shape 26"/>
+          <p:cNvPr id="31" name="Shape 29"/>
           <p:cNvSpPr/>
           <p:nvPr/>
         </p:nvSpPr>
@@ -21166,7 +21985,7 @@
       </p:sp>
       <p:sp>
         <p:nvSpPr>
-          <p:cNvPr id="29" name="Text 27"/>
+          <p:cNvPr id="32" name="Text 30"/>
           <p:cNvSpPr/>
           <p:nvPr/>
         </p:nvSpPr>
@@ -21197,7 +22016,7 @@
                 <a:ea typeface="Trebuchet MS" pitchFamily="34" charset="-122"/>
                 <a:cs typeface="Trebuchet MS" pitchFamily="34" charset="-120"/>
               </a:rPr>
-              <a:t>merge</a:t>
+              <a:t>merges</a:t>
             </a:r>
             <a:endParaRPr lang="en-US" sz="1400" dirty="0"/>
           </a:p>
@@ -21205,7 +22024,7 @@
       </p:sp>
       <p:sp>
         <p:nvSpPr>
-          <p:cNvPr id="30" name="Shape 28"/>
+          <p:cNvPr id="33" name="Shape 31"/>
           <p:cNvSpPr/>
           <p:nvPr/>
         </p:nvSpPr>
@@ -21232,7 +22051,7 @@
       </p:sp>
       <p:sp>
         <p:nvSpPr>
-          <p:cNvPr id="31" name="Text 29"/>
+          <p:cNvPr id="34" name="Text 32"/>
           <p:cNvSpPr/>
           <p:nvPr/>
         </p:nvSpPr>
@@ -21271,18 +22090,18 @@
       </p:sp>
       <p:sp>
         <p:nvSpPr>
-          <p:cNvPr id="32" name="Shape 30"/>
+          <p:cNvPr id="35" name="Shape 33"/>
           <p:cNvSpPr/>
           <p:nvPr/>
         </p:nvSpPr>
         <p:spPr>
           <a:xfrm>
             <a:off x="1874520" y="4096512"/>
-            <a:ext cx="6903720" cy="804672"/>
+            <a:ext cx="6903720" cy="658368"/>
           </a:xfrm>
           <a:prstGeom prst="rect">
             <a:avLst>
-              <a:gd name="adj" fmla="val 6818"/>
+              <a:gd name="adj" fmla="val 8333"/>
             </a:avLst>
           </a:prstGeom>
           <a:solidFill>
@@ -21298,18 +22117,18 @@
       </p:sp>
       <p:sp>
         <p:nvSpPr>
-          <p:cNvPr id="33" name="Shape 31"/>
-          <p:cNvSpPr/>
-          <p:nvPr/>
-        </p:nvSpPr>
-        <p:spPr>
-          <a:xfrm>
-            <a:off x="2254649" y="4169664"/>
-            <a:ext cx="685800" cy="384048"/>
+          <p:cNvPr id="36" name="Shape 34"/>
+          <p:cNvSpPr/>
+          <p:nvPr/>
+        </p:nvSpPr>
+        <p:spPr>
+          <a:xfrm>
+            <a:off x="2124837" y="4169664"/>
+            <a:ext cx="685800" cy="475488"/>
           </a:xfrm>
           <a:prstGeom prst="rect">
             <a:avLst>
-              <a:gd name="adj" fmla="val 9524"/>
+              <a:gd name="adj" fmla="val 7692"/>
             </a:avLst>
           </a:prstGeom>
           <a:solidFill>
@@ -21325,14 +22144,14 @@
       </p:sp>
       <p:sp>
         <p:nvSpPr>
-          <p:cNvPr id="34" name="Text 32"/>
-          <p:cNvSpPr/>
-          <p:nvPr/>
-        </p:nvSpPr>
-        <p:spPr>
-          <a:xfrm>
-            <a:off x="2254649" y="4169664"/>
-            <a:ext cx="685800" cy="384048"/>
+          <p:cNvPr id="37" name="Text 35"/>
+          <p:cNvSpPr/>
+          <p:nvPr/>
+        </p:nvSpPr>
+        <p:spPr>
+          <a:xfrm>
+            <a:off x="2124837" y="4169664"/>
+            <a:ext cx="685800" cy="475488"/>
           </a:xfrm>
           <a:prstGeom prst="rect">
             <a:avLst/>
@@ -21356,7 +22175,7 @@
                 <a:ea typeface="Trebuchet MS" pitchFamily="34" charset="-122"/>
                 <a:cs typeface="Trebuchet MS" pitchFamily="34" charset="-120"/>
               </a:rPr>
-              <a:t>s</a:t>
+              <a:t>e</a:t>
             </a:r>
             <a:endParaRPr lang="en-US" sz="900" dirty="0"/>
           </a:p>
@@ -21364,18 +22183,18 @@
       </p:sp>
       <p:sp>
         <p:nvSpPr>
-          <p:cNvPr id="35" name="Shape 33"/>
-          <p:cNvSpPr/>
-          <p:nvPr/>
-        </p:nvSpPr>
-        <p:spPr>
-          <a:xfrm>
-            <a:off x="3293146" y="4169664"/>
-            <a:ext cx="685800" cy="384048"/>
+          <p:cNvPr id="38" name="Shape 36"/>
+          <p:cNvSpPr/>
+          <p:nvPr/>
+        </p:nvSpPr>
+        <p:spPr>
+          <a:xfrm>
+            <a:off x="3033522" y="4169664"/>
+            <a:ext cx="685800" cy="475488"/>
           </a:xfrm>
           <a:prstGeom prst="rect">
             <a:avLst>
-              <a:gd name="adj" fmla="val 9524"/>
+              <a:gd name="adj" fmla="val 7692"/>
             </a:avLst>
           </a:prstGeom>
           <a:solidFill>
@@ -21391,14 +22210,14 @@
       </p:sp>
       <p:sp>
         <p:nvSpPr>
-          <p:cNvPr id="36" name="Text 34"/>
-          <p:cNvSpPr/>
-          <p:nvPr/>
-        </p:nvSpPr>
-        <p:spPr>
-          <a:xfrm>
-            <a:off x="3293146" y="4169664"/>
-            <a:ext cx="685800" cy="384048"/>
+          <p:cNvPr id="39" name="Text 37"/>
+          <p:cNvSpPr/>
+          <p:nvPr/>
+        </p:nvSpPr>
+        <p:spPr>
+          <a:xfrm>
+            <a:off x="3033522" y="4169664"/>
+            <a:ext cx="685800" cy="475488"/>
           </a:xfrm>
           <a:prstGeom prst="rect">
             <a:avLst/>
@@ -21422,7 +22241,7 @@
                 <a:ea typeface="Trebuchet MS" pitchFamily="34" charset="-122"/>
                 <a:cs typeface="Trebuchet MS" pitchFamily="34" charset="-120"/>
               </a:rPr>
-              <a:t>u</a:t>
+              <a:t>m</a:t>
             </a:r>
             <a:endParaRPr lang="en-US" sz="900" dirty="0"/>
           </a:p>
@@ -21430,18 +22249,18 @@
       </p:sp>
       <p:sp>
         <p:nvSpPr>
-          <p:cNvPr id="37" name="Shape 35"/>
-          <p:cNvSpPr/>
-          <p:nvPr/>
-        </p:nvSpPr>
-        <p:spPr>
-          <a:xfrm>
-            <a:off x="4331643" y="4169664"/>
-            <a:ext cx="685800" cy="384048"/>
+          <p:cNvPr id="40" name="Shape 38"/>
+          <p:cNvSpPr/>
+          <p:nvPr/>
+        </p:nvSpPr>
+        <p:spPr>
+          <a:xfrm>
+            <a:off x="3942207" y="4169664"/>
+            <a:ext cx="685800" cy="475488"/>
           </a:xfrm>
           <a:prstGeom prst="rect">
             <a:avLst>
-              <a:gd name="adj" fmla="val 9524"/>
+              <a:gd name="adj" fmla="val 7692"/>
             </a:avLst>
           </a:prstGeom>
           <a:solidFill>
@@ -21457,14 +22276,14 @@
       </p:sp>
       <p:sp>
         <p:nvSpPr>
-          <p:cNvPr id="38" name="Text 36"/>
-          <p:cNvSpPr/>
-          <p:nvPr/>
-        </p:nvSpPr>
-        <p:spPr>
-          <a:xfrm>
-            <a:off x="4331643" y="4169664"/>
-            <a:ext cx="685800" cy="384048"/>
+          <p:cNvPr id="41" name="Text 39"/>
+          <p:cNvSpPr/>
+          <p:nvPr/>
+        </p:nvSpPr>
+        <p:spPr>
+          <a:xfrm>
+            <a:off x="3942207" y="4169664"/>
+            <a:ext cx="685800" cy="475488"/>
           </a:xfrm>
           <a:prstGeom prst="rect">
             <a:avLst/>
@@ -21488,7 +22307,7 @@
                 <a:ea typeface="Trebuchet MS" pitchFamily="34" charset="-122"/>
                 <a:cs typeface="Trebuchet MS" pitchFamily="34" charset="-120"/>
               </a:rPr>
-              <a:t>b</a:t>
+              <a:t>e</a:t>
             </a:r>
             <a:endParaRPr lang="en-US" sz="900" dirty="0"/>
           </a:p>
@@ -21496,18 +22315,18 @@
       </p:sp>
       <p:sp>
         <p:nvSpPr>
-          <p:cNvPr id="39" name="Shape 37"/>
-          <p:cNvSpPr/>
-          <p:nvPr/>
-        </p:nvSpPr>
-        <p:spPr>
-          <a:xfrm>
-            <a:off x="5370141" y="4169664"/>
-            <a:ext cx="685800" cy="384048"/>
+          <p:cNvPr id="42" name="Shape 40"/>
+          <p:cNvSpPr/>
+          <p:nvPr/>
+        </p:nvSpPr>
+        <p:spPr>
+          <a:xfrm>
+            <a:off x="4850892" y="4169664"/>
+            <a:ext cx="685800" cy="475488"/>
           </a:xfrm>
           <a:prstGeom prst="rect">
             <a:avLst>
-              <a:gd name="adj" fmla="val 9524"/>
+              <a:gd name="adj" fmla="val 7692"/>
             </a:avLst>
           </a:prstGeom>
           <a:solidFill>
@@ -21523,14 +22342,14 @@
       </p:sp>
       <p:sp>
         <p:nvSpPr>
-          <p:cNvPr id="40" name="Text 38"/>
-          <p:cNvSpPr/>
-          <p:nvPr/>
-        </p:nvSpPr>
-        <p:spPr>
-          <a:xfrm>
-            <a:off x="5370141" y="4169664"/>
-            <a:ext cx="685800" cy="384048"/>
+          <p:cNvPr id="43" name="Text 41"/>
+          <p:cNvSpPr/>
+          <p:nvPr/>
+        </p:nvSpPr>
+        <p:spPr>
+          <a:xfrm>
+            <a:off x="4850892" y="4169664"/>
+            <a:ext cx="685800" cy="475488"/>
           </a:xfrm>
           <a:prstGeom prst="rect">
             <a:avLst/>
@@ -21554,7 +22373,7 @@
                 <a:ea typeface="Trebuchet MS" pitchFamily="34" charset="-122"/>
                 <a:cs typeface="Trebuchet MS" pitchFamily="34" charset="-120"/>
               </a:rPr>
-              <a:t>m</a:t>
+              <a:t>r</a:t>
             </a:r>
             <a:endParaRPr lang="en-US" sz="900" dirty="0"/>
           </a:p>
@@ -21562,18 +22381,18 @@
       </p:sp>
       <p:sp>
         <p:nvSpPr>
-          <p:cNvPr id="41" name="Shape 39"/>
-          <p:cNvSpPr/>
-          <p:nvPr/>
-        </p:nvSpPr>
-        <p:spPr>
-          <a:xfrm>
-            <a:off x="6408638" y="4169664"/>
-            <a:ext cx="685800" cy="384048"/>
+          <p:cNvPr id="44" name="Shape 42"/>
+          <p:cNvSpPr/>
+          <p:nvPr/>
+        </p:nvSpPr>
+        <p:spPr>
+          <a:xfrm>
+            <a:off x="5759577" y="4169664"/>
+            <a:ext cx="685800" cy="475488"/>
           </a:xfrm>
           <a:prstGeom prst="rect">
             <a:avLst>
-              <a:gd name="adj" fmla="val 9524"/>
+              <a:gd name="adj" fmla="val 7692"/>
             </a:avLst>
           </a:prstGeom>
           <a:solidFill>
@@ -21589,14 +22408,14 @@
       </p:sp>
       <p:sp>
         <p:nvSpPr>
-          <p:cNvPr id="42" name="Text 40"/>
-          <p:cNvSpPr/>
-          <p:nvPr/>
-        </p:nvSpPr>
-        <p:spPr>
-          <a:xfrm>
-            <a:off x="6408638" y="4169664"/>
-            <a:ext cx="685800" cy="384048"/>
+          <p:cNvPr id="45" name="Text 43"/>
+          <p:cNvSpPr/>
+          <p:nvPr/>
+        </p:nvSpPr>
+        <p:spPr>
+          <a:xfrm>
+            <a:off x="5759577" y="4169664"/>
+            <a:ext cx="685800" cy="475488"/>
           </a:xfrm>
           <a:prstGeom prst="rect">
             <a:avLst/>
@@ -21620,7 +22439,7 @@
                 <a:ea typeface="Trebuchet MS" pitchFamily="34" charset="-122"/>
                 <a:cs typeface="Trebuchet MS" pitchFamily="34" charset="-120"/>
               </a:rPr>
-              <a:t>er</a:t>
+              <a:t>g</a:t>
             </a:r>
             <a:endParaRPr lang="en-US" sz="900" dirty="0"/>
           </a:p>
@@ -21628,18 +22447,18 @@
       </p:sp>
       <p:sp>
         <p:nvSpPr>
-          <p:cNvPr id="43" name="Shape 41"/>
-          <p:cNvSpPr/>
-          <p:nvPr/>
-        </p:nvSpPr>
-        <p:spPr>
-          <a:xfrm>
-            <a:off x="7447135" y="4169664"/>
-            <a:ext cx="685800" cy="384048"/>
+          <p:cNvPr id="46" name="Shape 44"/>
+          <p:cNvSpPr/>
+          <p:nvPr/>
+        </p:nvSpPr>
+        <p:spPr>
+          <a:xfrm>
+            <a:off x="6668262" y="4169664"/>
+            <a:ext cx="685800" cy="475488"/>
           </a:xfrm>
           <a:prstGeom prst="rect">
             <a:avLst>
-              <a:gd name="adj" fmla="val 9524"/>
+              <a:gd name="adj" fmla="val 7692"/>
             </a:avLst>
           </a:prstGeom>
           <a:solidFill>
@@ -21655,14 +22474,14 @@
       </p:sp>
       <p:sp>
         <p:nvSpPr>
-          <p:cNvPr id="44" name="Text 42"/>
-          <p:cNvSpPr/>
-          <p:nvPr/>
-        </p:nvSpPr>
-        <p:spPr>
-          <a:xfrm>
-            <a:off x="7447135" y="4169664"/>
-            <a:ext cx="685800" cy="384048"/>
+          <p:cNvPr id="47" name="Text 45"/>
+          <p:cNvSpPr/>
+          <p:nvPr/>
+        </p:nvSpPr>
+        <p:spPr>
+          <a:xfrm>
+            <a:off x="6668262" y="4169664"/>
+            <a:ext cx="685800" cy="475488"/>
           </a:xfrm>
           <a:prstGeom prst="rect">
             <a:avLst/>
@@ -21686,7 +22505,7 @@
                 <a:ea typeface="Trebuchet MS" pitchFamily="34" charset="-122"/>
                 <a:cs typeface="Trebuchet MS" pitchFamily="34" charset="-120"/>
               </a:rPr>
-              <a:t>ge</a:t>
+              <a:t>e</a:t>
             </a:r>
             <a:endParaRPr lang="en-US" sz="900" dirty="0"/>
           </a:p>
@@ -21694,40 +22513,67 @@
       </p:sp>
       <p:sp>
         <p:nvSpPr>
-          <p:cNvPr id="45" name="Text 43"/>
-          <p:cNvSpPr/>
-          <p:nvPr/>
-        </p:nvSpPr>
-        <p:spPr>
-          <a:xfrm>
-            <a:off x="7447135" y="4572000"/>
-            <a:ext cx="685800" cy="219456"/>
-          </a:xfrm>
-          <a:prstGeom prst="rect">
-            <a:avLst/>
-          </a:prstGeom>
-          <a:noFill/>
-          <a:ln/>
-        </p:spPr>
-        <p:txBody>
-          <a:bodyPr wrap="square" lIns="0" tIns="0" rIns="0" bIns="0" rtlCol="0" anchor="t"/>
-          <a:lstStyle/>
-          <a:p>
-            <a:pPr algn="ctr" indent="0" marL="0">
-              <a:buNone/>
-            </a:pPr>
-            <a:r>
-              <a:rPr lang="en-US" sz="750" i="1" dirty="0">
-                <a:solidFill>
-                  <a:srgbClr val="94A3B8"/>
-                </a:solidFill>
-                <a:latin typeface="Calibri" pitchFamily="34" charset="0"/>
-                <a:ea typeface="Calibri" pitchFamily="34" charset="-122"/>
-                <a:cs typeface="Calibri" pitchFamily="34" charset="-120"/>
-              </a:rPr>
-              <a:t>/j/</a:t>
-            </a:r>
-            <a:endParaRPr lang="en-US" sz="750" dirty="0"/>
+          <p:cNvPr id="48" name="Shape 46"/>
+          <p:cNvSpPr/>
+          <p:nvPr/>
+        </p:nvSpPr>
+        <p:spPr>
+          <a:xfrm>
+            <a:off x="7576947" y="4169664"/>
+            <a:ext cx="685800" cy="475488"/>
+          </a:xfrm>
+          <a:prstGeom prst="rect">
+            <a:avLst>
+              <a:gd name="adj" fmla="val 7692"/>
+            </a:avLst>
+          </a:prstGeom>
+          <a:solidFill>
+            <a:srgbClr val="FFFFFF"/>
+          </a:solidFill>
+          <a:ln w="12700">
+            <a:solidFill>
+              <a:srgbClr val="DB2777"/>
+            </a:solidFill>
+            <a:prstDash val="solid"/>
+          </a:ln>
+        </p:spPr>
+      </p:sp>
+      <p:sp>
+        <p:nvSpPr>
+          <p:cNvPr id="49" name="Text 47"/>
+          <p:cNvSpPr/>
+          <p:nvPr/>
+        </p:nvSpPr>
+        <p:spPr>
+          <a:xfrm>
+            <a:off x="7576947" y="4169664"/>
+            <a:ext cx="685800" cy="475488"/>
+          </a:xfrm>
+          <a:prstGeom prst="rect">
+            <a:avLst/>
+          </a:prstGeom>
+          <a:noFill/>
+          <a:ln/>
+        </p:spPr>
+        <p:txBody>
+          <a:bodyPr wrap="square" lIns="0" tIns="0" rIns="0" bIns="0" rtlCol="0" anchor="ctr"/>
+          <a:lstStyle/>
+          <a:p>
+            <a:pPr algn="ctr" indent="0" marL="0">
+              <a:buNone/>
+            </a:pPr>
+            <a:r>
+              <a:rPr lang="en-US" sz="900" b="1" dirty="0">
+                <a:solidFill>
+                  <a:srgbClr val="9D174D"/>
+                </a:solidFill>
+                <a:latin typeface="Trebuchet MS" pitchFamily="34" charset="0"/>
+                <a:ea typeface="Trebuchet MS" pitchFamily="34" charset="-122"/>
+                <a:cs typeface="Trebuchet MS" pitchFamily="34" charset="-120"/>
+              </a:rPr>
+              <a:t>s</a:t>
+            </a:r>
+            <a:endParaRPr lang="en-US" sz="900" dirty="0"/>
           </a:p>
         </p:txBody>
       </p:sp>
@@ -22017,7 +22863,7 @@
                 <a:ea typeface="Calibri" pitchFamily="34" charset="-122"/>
                 <a:cs typeface="Calibri" pitchFamily="34" charset="-120"/>
               </a:rPr>
-              <a:t>Word Labs  •  wordlabs.app  •  Root: 'merge' = join, combine, sink into</a:t>
+              <a:t>Word Labs  •  wordlabs.app  •  Root: 'merge' = to join together into one</a:t>
             </a:r>
             <a:endParaRPr lang="en-US" sz="800" dirty="0"/>
           </a:p>
@@ -22844,7 +23690,7 @@
                 <a:ea typeface="Calibri" pitchFamily="34" charset="-122"/>
                 <a:cs typeface="Calibri" pitchFamily="34" charset="-120"/>
               </a:rPr>
-              <a:t>Word Labs  •  wordlabs.app  •  Root: 'merge' = join, combine, sink into</a:t>
+              <a:t>Word Labs  •  wordlabs.app  •  Root: 'merge' = to join together into one</a:t>
             </a:r>
             <a:endParaRPr lang="en-US" sz="800" dirty="0"/>
           </a:p>
@@ -23161,7 +24007,7 @@
                 <a:ea typeface="Calibri" pitchFamily="34" charset="-122"/>
                 <a:cs typeface="Calibri" pitchFamily="34" charset="-120"/>
               </a:rPr>
-              <a:t>out, from</a:t>
+              <a:t>electronic; online</a:t>
             </a:r>
             <a:endParaRPr lang="en-US" sz="850" dirty="0"/>
           </a:p>
@@ -23273,7 +24119,7 @@
                 <a:ea typeface="Calibri" pitchFamily="34" charset="-122"/>
                 <a:cs typeface="Calibri" pitchFamily="34" charset="-120"/>
               </a:rPr>
-              <a:t>join, combine, sink into</a:t>
+              <a:t>to join together into one</a:t>
             </a:r>
             <a:endParaRPr lang="en-US" sz="850" dirty="0"/>
           </a:p>
@@ -23281,46 +24127,7 @@
       </p:sp>
       <p:sp>
         <p:nvSpPr>
-          <p:cNvPr id="22" name="Text 20"/>
-          <p:cNvSpPr/>
-          <p:nvPr/>
-        </p:nvSpPr>
-        <p:spPr>
-          <a:xfrm>
-            <a:off x="4370832" y="2752344"/>
-            <a:ext cx="1828800" cy="182880"/>
-          </a:xfrm>
-          <a:prstGeom prst="rect">
-            <a:avLst/>
-          </a:prstGeom>
-          <a:noFill/>
-          <a:ln/>
-        </p:spPr>
-        <p:txBody>
-          <a:bodyPr wrap="square" lIns="0" tIns="0" rIns="0" bIns="0" rtlCol="0" anchor="t"/>
-          <a:lstStyle/>
-          <a:p>
-            <a:pPr algn="ctr" indent="0" marL="0">
-              <a:buNone/>
-            </a:pPr>
-            <a:r>
-              <a:rPr lang="en-US" sz="700" i="1" dirty="0">
-                <a:solidFill>
-                  <a:srgbClr val="94A3B8"/>
-                </a:solidFill>
-                <a:latin typeface="Calibri" pitchFamily="34" charset="0"/>
-                <a:ea typeface="Calibri" pitchFamily="34" charset="-122"/>
-                <a:cs typeface="Calibri" pitchFamily="34" charset="-120"/>
-              </a:rPr>
-              <a:t>'e' dropped before vowel suffix</a:t>
-            </a:r>
-            <a:endParaRPr lang="en-US" sz="700" dirty="0"/>
-          </a:p>
-        </p:txBody>
-      </p:sp>
-      <p:sp>
-        <p:nvSpPr>
-          <p:cNvPr id="23" name="Shape 21"/>
+          <p:cNvPr id="22" name="Shape 20"/>
           <p:cNvSpPr/>
           <p:nvPr/>
         </p:nvSpPr>
@@ -23354,7 +24161,7 @@
       </p:sp>
       <p:sp>
         <p:nvSpPr>
-          <p:cNvPr id="24" name="Text 22"/>
+          <p:cNvPr id="23" name="Text 21"/>
           <p:cNvSpPr/>
           <p:nvPr/>
         </p:nvSpPr>
@@ -23393,7 +24200,7 @@
       </p:sp>
       <p:sp>
         <p:nvSpPr>
-          <p:cNvPr id="25" name="Text 23"/>
+          <p:cNvPr id="24" name="Text 22"/>
           <p:cNvSpPr/>
           <p:nvPr/>
         </p:nvSpPr>
@@ -23424,7 +24231,7 @@
                 <a:ea typeface="Calibri" pitchFamily="34" charset="-122"/>
                 <a:cs typeface="Calibri" pitchFamily="34" charset="-120"/>
               </a:rPr>
-              <a:t>happening now, action in progress</a:t>
+              <a:t>happening now</a:t>
             </a:r>
             <a:endParaRPr lang="en-US" sz="850" dirty="0"/>
           </a:p>
@@ -23432,7 +24239,7 @@
       </p:sp>
       <p:sp>
         <p:nvSpPr>
-          <p:cNvPr id="26" name="Shape 24"/>
+          <p:cNvPr id="25" name="Shape 23"/>
           <p:cNvSpPr/>
           <p:nvPr/>
         </p:nvSpPr>
@@ -23459,7 +24266,7 @@
       </p:sp>
       <p:sp>
         <p:nvSpPr>
-          <p:cNvPr id="27" name="Text 25"/>
+          <p:cNvPr id="26" name="Text 24"/>
           <p:cNvSpPr/>
           <p:nvPr/>
         </p:nvSpPr>
@@ -23498,7 +24305,7 @@
       </p:sp>
       <p:sp>
         <p:nvSpPr>
-          <p:cNvPr id="28" name="Shape 26"/>
+          <p:cNvPr id="27" name="Shape 25"/>
           <p:cNvSpPr/>
           <p:nvPr/>
         </p:nvSpPr>
@@ -23525,7 +24332,7 @@
       </p:sp>
       <p:sp>
         <p:nvSpPr>
-          <p:cNvPr id="29" name="Text 27"/>
+          <p:cNvPr id="28" name="Text 26"/>
           <p:cNvSpPr/>
           <p:nvPr/>
         </p:nvSpPr>
@@ -23564,7 +24371,7 @@
       </p:sp>
       <p:sp>
         <p:nvSpPr>
-          <p:cNvPr id="30" name="Shape 28"/>
+          <p:cNvPr id="29" name="Shape 27"/>
           <p:cNvSpPr/>
           <p:nvPr/>
         </p:nvSpPr>
@@ -23591,7 +24398,7 @@
       </p:sp>
       <p:sp>
         <p:nvSpPr>
-          <p:cNvPr id="31" name="Text 29"/>
+          <p:cNvPr id="30" name="Text 28"/>
           <p:cNvSpPr/>
           <p:nvPr/>
         </p:nvSpPr>
@@ -23630,7 +24437,7 @@
       </p:sp>
       <p:sp>
         <p:nvSpPr>
-          <p:cNvPr id="32" name="Shape 30"/>
+          <p:cNvPr id="31" name="Shape 29"/>
           <p:cNvSpPr/>
           <p:nvPr/>
         </p:nvSpPr>
@@ -23657,7 +24464,7 @@
       </p:sp>
       <p:sp>
         <p:nvSpPr>
-          <p:cNvPr id="33" name="Text 31"/>
+          <p:cNvPr id="32" name="Text 30"/>
           <p:cNvSpPr/>
           <p:nvPr/>
         </p:nvSpPr>
@@ -23980,7 +24787,7 @@
                 <a:ea typeface="Calibri" pitchFamily="34" charset="-122"/>
                 <a:cs typeface="Calibri" pitchFamily="34" charset="-120"/>
               </a:rPr>
-              <a:t>Word Labs  •  wordlabs.app  •  Root: 'merge' = join, combine, sink into</a:t>
+              <a:t>Word Labs  •  wordlabs.app  •  Root: 'merge' = to join together into one</a:t>
             </a:r>
             <a:endParaRPr lang="en-US" sz="800" dirty="0"/>
           </a:p>
@@ -24053,7 +24860,7 @@
                 <a:ea typeface="Trebuchet MS" pitchFamily="34" charset="-122"/>
                 <a:cs typeface="Trebuchet MS" pitchFamily="34" charset="-120"/>
               </a:rPr>
-              <a:t>We are learning that the root 'merge' means 'join, combine, sink into'.</a:t>
+              <a:t>We are learning that the root 'merge' means 'to join together into one'.</a:t>
             </a:r>
             <a:endParaRPr lang="en-US" sz="2000" dirty="0"/>
           </a:p>
@@ -24699,7 +25506,7 @@
                 <a:ea typeface="Calibri" pitchFamily="34" charset="-122"/>
                 <a:cs typeface="Calibri" pitchFamily="34" charset="-120"/>
               </a:rPr>
-              <a:t>Word Labs  •  wordlabs.app  •  Root: 'merge' = join, combine, sink into</a:t>
+              <a:t>Word Labs  •  wordlabs.app  •  Root: 'merge' = to join together into one</a:t>
             </a:r>
             <a:endParaRPr lang="en-US" sz="800" dirty="0"/>
           </a:p>
@@ -25016,7 +25823,7 @@
                 <a:ea typeface="Calibri" pitchFamily="34" charset="-122"/>
                 <a:cs typeface="Calibri" pitchFamily="34" charset="-120"/>
               </a:rPr>
-              <a:t>out, from</a:t>
+              <a:t>electronic; online</a:t>
             </a:r>
             <a:endParaRPr lang="en-US" sz="850" dirty="0"/>
           </a:p>
@@ -25128,7 +25935,7 @@
                 <a:ea typeface="Calibri" pitchFamily="34" charset="-122"/>
                 <a:cs typeface="Calibri" pitchFamily="34" charset="-120"/>
               </a:rPr>
-              <a:t>join, combine, sink into</a:t>
+              <a:t>to join together into one</a:t>
             </a:r>
             <a:endParaRPr lang="en-US" sz="850" dirty="0"/>
           </a:p>
@@ -25136,46 +25943,7 @@
       </p:sp>
       <p:sp>
         <p:nvSpPr>
-          <p:cNvPr id="22" name="Text 20"/>
-          <p:cNvSpPr/>
-          <p:nvPr/>
-        </p:nvSpPr>
-        <p:spPr>
-          <a:xfrm>
-            <a:off x="4370832" y="2752344"/>
-            <a:ext cx="1828800" cy="182880"/>
-          </a:xfrm>
-          <a:prstGeom prst="rect">
-            <a:avLst/>
-          </a:prstGeom>
-          <a:noFill/>
-          <a:ln/>
-        </p:spPr>
-        <p:txBody>
-          <a:bodyPr wrap="square" lIns="0" tIns="0" rIns="0" bIns="0" rtlCol="0" anchor="t"/>
-          <a:lstStyle/>
-          <a:p>
-            <a:pPr algn="ctr" indent="0" marL="0">
-              <a:buNone/>
-            </a:pPr>
-            <a:r>
-              <a:rPr lang="en-US" sz="700" i="1" dirty="0">
-                <a:solidFill>
-                  <a:srgbClr val="94A3B8"/>
-                </a:solidFill>
-                <a:latin typeface="Calibri" pitchFamily="34" charset="0"/>
-                <a:ea typeface="Calibri" pitchFamily="34" charset="-122"/>
-                <a:cs typeface="Calibri" pitchFamily="34" charset="-120"/>
-              </a:rPr>
-              <a:t>'e' dropped before vowel suffix</a:t>
-            </a:r>
-            <a:endParaRPr lang="en-US" sz="700" dirty="0"/>
-          </a:p>
-        </p:txBody>
-      </p:sp>
-      <p:sp>
-        <p:nvSpPr>
-          <p:cNvPr id="23" name="Shape 21"/>
+          <p:cNvPr id="22" name="Shape 20"/>
           <p:cNvSpPr/>
           <p:nvPr/>
         </p:nvSpPr>
@@ -25209,7 +25977,7 @@
       </p:sp>
       <p:sp>
         <p:nvSpPr>
-          <p:cNvPr id="24" name="Text 22"/>
+          <p:cNvPr id="23" name="Text 21"/>
           <p:cNvSpPr/>
           <p:nvPr/>
         </p:nvSpPr>
@@ -25248,7 +26016,7 @@
       </p:sp>
       <p:sp>
         <p:nvSpPr>
-          <p:cNvPr id="25" name="Text 23"/>
+          <p:cNvPr id="24" name="Text 22"/>
           <p:cNvSpPr/>
           <p:nvPr/>
         </p:nvSpPr>
@@ -25279,7 +26047,7 @@
                 <a:ea typeface="Calibri" pitchFamily="34" charset="-122"/>
                 <a:cs typeface="Calibri" pitchFamily="34" charset="-120"/>
               </a:rPr>
-              <a:t>happening now, action in progress</a:t>
+              <a:t>happening now</a:t>
             </a:r>
             <a:endParaRPr lang="en-US" sz="850" dirty="0"/>
           </a:p>
@@ -25287,7 +26055,7 @@
       </p:sp>
       <p:sp>
         <p:nvSpPr>
-          <p:cNvPr id="26" name="Shape 24"/>
+          <p:cNvPr id="25" name="Shape 23"/>
           <p:cNvSpPr/>
           <p:nvPr/>
         </p:nvSpPr>
@@ -25314,7 +26082,7 @@
       </p:sp>
       <p:sp>
         <p:nvSpPr>
-          <p:cNvPr id="27" name="Text 25"/>
+          <p:cNvPr id="26" name="Text 24"/>
           <p:cNvSpPr/>
           <p:nvPr/>
         </p:nvSpPr>
@@ -25353,7 +26121,7 @@
       </p:sp>
       <p:sp>
         <p:nvSpPr>
-          <p:cNvPr id="28" name="Shape 26"/>
+          <p:cNvPr id="27" name="Shape 25"/>
           <p:cNvSpPr/>
           <p:nvPr/>
         </p:nvSpPr>
@@ -25380,7 +26148,7 @@
       </p:sp>
       <p:sp>
         <p:nvSpPr>
-          <p:cNvPr id="29" name="Shape 27"/>
+          <p:cNvPr id="28" name="Shape 26"/>
           <p:cNvSpPr/>
           <p:nvPr/>
         </p:nvSpPr>
@@ -25407,7 +26175,7 @@
       </p:sp>
       <p:sp>
         <p:nvSpPr>
-          <p:cNvPr id="30" name="Text 28"/>
+          <p:cNvPr id="29" name="Text 27"/>
           <p:cNvSpPr/>
           <p:nvPr/>
         </p:nvSpPr>
@@ -25446,7 +26214,7 @@
       </p:sp>
       <p:sp>
         <p:nvSpPr>
-          <p:cNvPr id="31" name="Text 29"/>
+          <p:cNvPr id="30" name="Text 28"/>
           <p:cNvSpPr/>
           <p:nvPr/>
         </p:nvSpPr>
@@ -25485,7 +26253,7 @@
       </p:sp>
       <p:sp>
         <p:nvSpPr>
-          <p:cNvPr id="32" name="Shape 30"/>
+          <p:cNvPr id="31" name="Shape 29"/>
           <p:cNvSpPr/>
           <p:nvPr/>
         </p:nvSpPr>
@@ -25512,7 +26280,7 @@
       </p:sp>
       <p:sp>
         <p:nvSpPr>
-          <p:cNvPr id="33" name="Text 31"/>
+          <p:cNvPr id="32" name="Text 30"/>
           <p:cNvSpPr/>
           <p:nvPr/>
         </p:nvSpPr>
@@ -25543,7 +26311,7 @@
                 <a:ea typeface="Trebuchet MS" pitchFamily="34" charset="-122"/>
                 <a:cs typeface="Trebuchet MS" pitchFamily="34" charset="-120"/>
               </a:rPr>
-              <a:t>mer</a:t>
+              <a:t>merg</a:t>
             </a:r>
             <a:endParaRPr lang="en-US" sz="1400" dirty="0"/>
           </a:p>
@@ -25551,7 +26319,7 @@
       </p:sp>
       <p:sp>
         <p:nvSpPr>
-          <p:cNvPr id="34" name="Text 32"/>
+          <p:cNvPr id="33" name="Text 31"/>
           <p:cNvSpPr/>
           <p:nvPr/>
         </p:nvSpPr>
@@ -25590,7 +26358,7 @@
       </p:sp>
       <p:sp>
         <p:nvSpPr>
-          <p:cNvPr id="35" name="Shape 33"/>
+          <p:cNvPr id="34" name="Shape 32"/>
           <p:cNvSpPr/>
           <p:nvPr/>
         </p:nvSpPr>
@@ -25617,7 +26385,7 @@
       </p:sp>
       <p:sp>
         <p:nvSpPr>
-          <p:cNvPr id="36" name="Text 34"/>
+          <p:cNvPr id="35" name="Text 33"/>
           <p:cNvSpPr/>
           <p:nvPr/>
         </p:nvSpPr>
@@ -25648,7 +26416,7 @@
                 <a:ea typeface="Trebuchet MS" pitchFamily="34" charset="-122"/>
                 <a:cs typeface="Trebuchet MS" pitchFamily="34" charset="-120"/>
               </a:rPr>
-              <a:t>ging</a:t>
+              <a:t>ing</a:t>
             </a:r>
             <a:endParaRPr lang="en-US" sz="1400" dirty="0"/>
           </a:p>
@@ -25656,7 +26424,7 @@
       </p:sp>
       <p:sp>
         <p:nvSpPr>
-          <p:cNvPr id="37" name="Shape 35"/>
+          <p:cNvPr id="36" name="Shape 34"/>
           <p:cNvSpPr/>
           <p:nvPr/>
         </p:nvSpPr>
@@ -25683,7 +26451,7 @@
       </p:sp>
       <p:sp>
         <p:nvSpPr>
-          <p:cNvPr id="38" name="Text 36"/>
+          <p:cNvPr id="37" name="Text 35"/>
           <p:cNvSpPr/>
           <p:nvPr/>
         </p:nvSpPr>
@@ -25722,7 +26490,7 @@
       </p:sp>
       <p:sp>
         <p:nvSpPr>
-          <p:cNvPr id="39" name="Shape 37"/>
+          <p:cNvPr id="38" name="Shape 36"/>
           <p:cNvSpPr/>
           <p:nvPr/>
         </p:nvSpPr>
@@ -25749,7 +26517,7 @@
       </p:sp>
       <p:sp>
         <p:nvSpPr>
-          <p:cNvPr id="40" name="Text 38"/>
+          <p:cNvPr id="39" name="Text 37"/>
           <p:cNvSpPr/>
           <p:nvPr/>
         </p:nvSpPr>
@@ -26072,7 +26840,7 @@
                 <a:ea typeface="Calibri" pitchFamily="34" charset="-122"/>
                 <a:cs typeface="Calibri" pitchFamily="34" charset="-120"/>
               </a:rPr>
-              <a:t>Word Labs  •  wordlabs.app  •  Root: 'merge' = join, combine, sink into</a:t>
+              <a:t>Word Labs  •  wordlabs.app  •  Root: 'merge' = to join together into one</a:t>
             </a:r>
             <a:endParaRPr lang="en-US" sz="800" dirty="0"/>
           </a:p>
@@ -26389,7 +27157,7 @@
                 <a:ea typeface="Calibri" pitchFamily="34" charset="-122"/>
                 <a:cs typeface="Calibri" pitchFamily="34" charset="-120"/>
               </a:rPr>
-              <a:t>out, from</a:t>
+              <a:t>electronic; online</a:t>
             </a:r>
             <a:endParaRPr lang="en-US" sz="850" dirty="0"/>
           </a:p>
@@ -26501,7 +27269,7 @@
                 <a:ea typeface="Calibri" pitchFamily="34" charset="-122"/>
                 <a:cs typeface="Calibri" pitchFamily="34" charset="-120"/>
               </a:rPr>
-              <a:t>join, combine, sink into</a:t>
+              <a:t>to join together into one</a:t>
             </a:r>
             <a:endParaRPr lang="en-US" sz="850" dirty="0"/>
           </a:p>
@@ -26509,46 +27277,7 @@
       </p:sp>
       <p:sp>
         <p:nvSpPr>
-          <p:cNvPr id="22" name="Text 20"/>
-          <p:cNvSpPr/>
-          <p:nvPr/>
-        </p:nvSpPr>
-        <p:spPr>
-          <a:xfrm>
-            <a:off x="4370832" y="2752344"/>
-            <a:ext cx="1828800" cy="182880"/>
-          </a:xfrm>
-          <a:prstGeom prst="rect">
-            <a:avLst/>
-          </a:prstGeom>
-          <a:noFill/>
-          <a:ln/>
-        </p:spPr>
-        <p:txBody>
-          <a:bodyPr wrap="square" lIns="0" tIns="0" rIns="0" bIns="0" rtlCol="0" anchor="t"/>
-          <a:lstStyle/>
-          <a:p>
-            <a:pPr algn="ctr" indent="0" marL="0">
-              <a:buNone/>
-            </a:pPr>
-            <a:r>
-              <a:rPr lang="en-US" sz="700" i="1" dirty="0">
-                <a:solidFill>
-                  <a:srgbClr val="94A3B8"/>
-                </a:solidFill>
-                <a:latin typeface="Calibri" pitchFamily="34" charset="0"/>
-                <a:ea typeface="Calibri" pitchFamily="34" charset="-122"/>
-                <a:cs typeface="Calibri" pitchFamily="34" charset="-120"/>
-              </a:rPr>
-              <a:t>'e' dropped before vowel suffix</a:t>
-            </a:r>
-            <a:endParaRPr lang="en-US" sz="700" dirty="0"/>
-          </a:p>
-        </p:txBody>
-      </p:sp>
-      <p:sp>
-        <p:nvSpPr>
-          <p:cNvPr id="23" name="Shape 21"/>
+          <p:cNvPr id="22" name="Shape 20"/>
           <p:cNvSpPr/>
           <p:nvPr/>
         </p:nvSpPr>
@@ -26582,7 +27311,7 @@
       </p:sp>
       <p:sp>
         <p:nvSpPr>
-          <p:cNvPr id="24" name="Text 22"/>
+          <p:cNvPr id="23" name="Text 21"/>
           <p:cNvSpPr/>
           <p:nvPr/>
         </p:nvSpPr>
@@ -26621,7 +27350,7 @@
       </p:sp>
       <p:sp>
         <p:nvSpPr>
-          <p:cNvPr id="25" name="Text 23"/>
+          <p:cNvPr id="24" name="Text 22"/>
           <p:cNvSpPr/>
           <p:nvPr/>
         </p:nvSpPr>
@@ -26652,7 +27381,7 @@
                 <a:ea typeface="Calibri" pitchFamily="34" charset="-122"/>
                 <a:cs typeface="Calibri" pitchFamily="34" charset="-120"/>
               </a:rPr>
-              <a:t>happening now, action in progress</a:t>
+              <a:t>happening now</a:t>
             </a:r>
             <a:endParaRPr lang="en-US" sz="850" dirty="0"/>
           </a:p>
@@ -26660,7 +27389,7 @@
       </p:sp>
       <p:sp>
         <p:nvSpPr>
-          <p:cNvPr id="26" name="Shape 24"/>
+          <p:cNvPr id="25" name="Shape 23"/>
           <p:cNvSpPr/>
           <p:nvPr/>
         </p:nvSpPr>
@@ -26687,7 +27416,7 @@
       </p:sp>
       <p:sp>
         <p:nvSpPr>
-          <p:cNvPr id="27" name="Text 25"/>
+          <p:cNvPr id="26" name="Text 24"/>
           <p:cNvSpPr/>
           <p:nvPr/>
         </p:nvSpPr>
@@ -26726,7 +27455,7 @@
       </p:sp>
       <p:sp>
         <p:nvSpPr>
-          <p:cNvPr id="28" name="Shape 26"/>
+          <p:cNvPr id="27" name="Shape 25"/>
           <p:cNvSpPr/>
           <p:nvPr/>
         </p:nvSpPr>
@@ -26753,7 +27482,7 @@
       </p:sp>
       <p:sp>
         <p:nvSpPr>
-          <p:cNvPr id="29" name="Shape 27"/>
+          <p:cNvPr id="28" name="Shape 26"/>
           <p:cNvSpPr/>
           <p:nvPr/>
         </p:nvSpPr>
@@ -26780,7 +27509,7 @@
       </p:sp>
       <p:sp>
         <p:nvSpPr>
-          <p:cNvPr id="30" name="Text 28"/>
+          <p:cNvPr id="29" name="Text 27"/>
           <p:cNvSpPr/>
           <p:nvPr/>
         </p:nvSpPr>
@@ -26819,7 +27548,7 @@
       </p:sp>
       <p:sp>
         <p:nvSpPr>
-          <p:cNvPr id="31" name="Text 29"/>
+          <p:cNvPr id="30" name="Text 28"/>
           <p:cNvSpPr/>
           <p:nvPr/>
         </p:nvSpPr>
@@ -26858,7 +27587,7 @@
       </p:sp>
       <p:sp>
         <p:nvSpPr>
-          <p:cNvPr id="32" name="Shape 30"/>
+          <p:cNvPr id="31" name="Shape 29"/>
           <p:cNvSpPr/>
           <p:nvPr/>
         </p:nvSpPr>
@@ -26885,7 +27614,7 @@
       </p:sp>
       <p:sp>
         <p:nvSpPr>
-          <p:cNvPr id="33" name="Text 31"/>
+          <p:cNvPr id="32" name="Text 30"/>
           <p:cNvSpPr/>
           <p:nvPr/>
         </p:nvSpPr>
@@ -26916,7 +27645,7 @@
                 <a:ea typeface="Trebuchet MS" pitchFamily="34" charset="-122"/>
                 <a:cs typeface="Trebuchet MS" pitchFamily="34" charset="-120"/>
               </a:rPr>
-              <a:t>mer</a:t>
+              <a:t>merg</a:t>
             </a:r>
             <a:endParaRPr lang="en-US" sz="1400" dirty="0"/>
           </a:p>
@@ -26924,7 +27653,7 @@
       </p:sp>
       <p:sp>
         <p:nvSpPr>
-          <p:cNvPr id="34" name="Text 32"/>
+          <p:cNvPr id="33" name="Text 31"/>
           <p:cNvSpPr/>
           <p:nvPr/>
         </p:nvSpPr>
@@ -26963,7 +27692,7 @@
       </p:sp>
       <p:sp>
         <p:nvSpPr>
-          <p:cNvPr id="35" name="Shape 33"/>
+          <p:cNvPr id="34" name="Shape 32"/>
           <p:cNvSpPr/>
           <p:nvPr/>
         </p:nvSpPr>
@@ -26990,7 +27719,7 @@
       </p:sp>
       <p:sp>
         <p:nvSpPr>
-          <p:cNvPr id="36" name="Text 34"/>
+          <p:cNvPr id="35" name="Text 33"/>
           <p:cNvSpPr/>
           <p:nvPr/>
         </p:nvSpPr>
@@ -27021,7 +27750,7 @@
                 <a:ea typeface="Trebuchet MS" pitchFamily="34" charset="-122"/>
                 <a:cs typeface="Trebuchet MS" pitchFamily="34" charset="-120"/>
               </a:rPr>
-              <a:t>ging</a:t>
+              <a:t>ing</a:t>
             </a:r>
             <a:endParaRPr lang="en-US" sz="1400" dirty="0"/>
           </a:p>
@@ -27029,7 +27758,7 @@
       </p:sp>
       <p:sp>
         <p:nvSpPr>
-          <p:cNvPr id="37" name="Shape 35"/>
+          <p:cNvPr id="36" name="Shape 34"/>
           <p:cNvSpPr/>
           <p:nvPr/>
         </p:nvSpPr>
@@ -27056,7 +27785,7 @@
       </p:sp>
       <p:sp>
         <p:nvSpPr>
-          <p:cNvPr id="38" name="Text 36"/>
+          <p:cNvPr id="37" name="Text 35"/>
           <p:cNvSpPr/>
           <p:nvPr/>
         </p:nvSpPr>
@@ -27095,7 +27824,7 @@
       </p:sp>
       <p:sp>
         <p:nvSpPr>
-          <p:cNvPr id="39" name="Shape 37"/>
+          <p:cNvPr id="38" name="Shape 36"/>
           <p:cNvSpPr/>
           <p:nvPr/>
         </p:nvSpPr>
@@ -27122,13 +27851,13 @@
       </p:sp>
       <p:sp>
         <p:nvSpPr>
-          <p:cNvPr id="40" name="Shape 38"/>
-          <p:cNvSpPr/>
-          <p:nvPr/>
-        </p:nvSpPr>
-        <p:spPr>
-          <a:xfrm>
-            <a:off x="2427732" y="4169664"/>
+          <p:cNvPr id="39" name="Shape 37"/>
+          <p:cNvSpPr/>
+          <p:nvPr/>
+        </p:nvSpPr>
+        <p:spPr>
+          <a:xfrm>
+            <a:off x="2124837" y="4169664"/>
             <a:ext cx="685800" cy="475488"/>
           </a:xfrm>
           <a:prstGeom prst="rect">
@@ -27149,13 +27878,13 @@
       </p:sp>
       <p:sp>
         <p:nvSpPr>
-          <p:cNvPr id="41" name="Text 39"/>
-          <p:cNvSpPr/>
-          <p:nvPr/>
-        </p:nvSpPr>
-        <p:spPr>
-          <a:xfrm>
-            <a:off x="2427732" y="4169664"/>
+          <p:cNvPr id="40" name="Text 38"/>
+          <p:cNvSpPr/>
+          <p:nvPr/>
+        </p:nvSpPr>
+        <p:spPr>
+          <a:xfrm>
+            <a:off x="2124837" y="4169664"/>
             <a:ext cx="685800" cy="475488"/>
           </a:xfrm>
           <a:prstGeom prst="rect">
@@ -27188,13 +27917,13 @@
       </p:sp>
       <p:sp>
         <p:nvSpPr>
-          <p:cNvPr id="42" name="Shape 40"/>
-          <p:cNvSpPr/>
-          <p:nvPr/>
-        </p:nvSpPr>
-        <p:spPr>
-          <a:xfrm>
-            <a:off x="3639312" y="4169664"/>
+          <p:cNvPr id="41" name="Shape 39"/>
+          <p:cNvSpPr/>
+          <p:nvPr/>
+        </p:nvSpPr>
+        <p:spPr>
+          <a:xfrm>
+            <a:off x="3033522" y="4169664"/>
             <a:ext cx="685800" cy="475488"/>
           </a:xfrm>
           <a:prstGeom prst="rect">
@@ -27215,13 +27944,13 @@
       </p:sp>
       <p:sp>
         <p:nvSpPr>
-          <p:cNvPr id="43" name="Text 41"/>
-          <p:cNvSpPr/>
-          <p:nvPr/>
-        </p:nvSpPr>
-        <p:spPr>
-          <a:xfrm>
-            <a:off x="3639312" y="4169664"/>
+          <p:cNvPr id="42" name="Text 40"/>
+          <p:cNvSpPr/>
+          <p:nvPr/>
+        </p:nvSpPr>
+        <p:spPr>
+          <a:xfrm>
+            <a:off x="3033522" y="4169664"/>
             <a:ext cx="685800" cy="475488"/>
           </a:xfrm>
           <a:prstGeom prst="rect">
@@ -27254,13 +27983,13 @@
       </p:sp>
       <p:sp>
         <p:nvSpPr>
-          <p:cNvPr id="44" name="Shape 42"/>
-          <p:cNvSpPr/>
-          <p:nvPr/>
-        </p:nvSpPr>
-        <p:spPr>
-          <a:xfrm>
-            <a:off x="4850892" y="4169664"/>
+          <p:cNvPr id="43" name="Shape 41"/>
+          <p:cNvSpPr/>
+          <p:nvPr/>
+        </p:nvSpPr>
+        <p:spPr>
+          <a:xfrm>
+            <a:off x="3942207" y="4169664"/>
             <a:ext cx="685800" cy="475488"/>
           </a:xfrm>
           <a:prstGeom prst="rect">
@@ -27281,13 +28010,13 @@
       </p:sp>
       <p:sp>
         <p:nvSpPr>
-          <p:cNvPr id="45" name="Text 43"/>
-          <p:cNvSpPr/>
-          <p:nvPr/>
-        </p:nvSpPr>
-        <p:spPr>
-          <a:xfrm>
-            <a:off x="4850892" y="4169664"/>
+          <p:cNvPr id="44" name="Text 42"/>
+          <p:cNvSpPr/>
+          <p:nvPr/>
+        </p:nvSpPr>
+        <p:spPr>
+          <a:xfrm>
+            <a:off x="3942207" y="4169664"/>
             <a:ext cx="685800" cy="475488"/>
           </a:xfrm>
           <a:prstGeom prst="rect">
@@ -27312,7 +28041,7 @@
                 <a:ea typeface="Trebuchet MS" pitchFamily="34" charset="-122"/>
                 <a:cs typeface="Trebuchet MS" pitchFamily="34" charset="-120"/>
               </a:rPr>
-              <a:t>er</a:t>
+              <a:t>e</a:t>
             </a:r>
             <a:endParaRPr lang="en-US" sz="900" dirty="0"/>
           </a:p>
@@ -27320,13 +28049,13 @@
       </p:sp>
       <p:sp>
         <p:nvSpPr>
-          <p:cNvPr id="46" name="Shape 44"/>
-          <p:cNvSpPr/>
-          <p:nvPr/>
-        </p:nvSpPr>
-        <p:spPr>
-          <a:xfrm>
-            <a:off x="6062472" y="4169664"/>
+          <p:cNvPr id="45" name="Shape 43"/>
+          <p:cNvSpPr/>
+          <p:nvPr/>
+        </p:nvSpPr>
+        <p:spPr>
+          <a:xfrm>
+            <a:off x="4850892" y="4169664"/>
             <a:ext cx="685800" cy="475488"/>
           </a:xfrm>
           <a:prstGeom prst="rect">
@@ -27347,13 +28076,13 @@
       </p:sp>
       <p:sp>
         <p:nvSpPr>
-          <p:cNvPr id="47" name="Text 45"/>
-          <p:cNvSpPr/>
-          <p:nvPr/>
-        </p:nvSpPr>
-        <p:spPr>
-          <a:xfrm>
-            <a:off x="6062472" y="4169664"/>
+          <p:cNvPr id="46" name="Text 44"/>
+          <p:cNvSpPr/>
+          <p:nvPr/>
+        </p:nvSpPr>
+        <p:spPr>
+          <a:xfrm>
+            <a:off x="4850892" y="4169664"/>
             <a:ext cx="685800" cy="475488"/>
           </a:xfrm>
           <a:prstGeom prst="rect">
@@ -27378,7 +28107,7 @@
                 <a:ea typeface="Trebuchet MS" pitchFamily="34" charset="-122"/>
                 <a:cs typeface="Trebuchet MS" pitchFamily="34" charset="-120"/>
               </a:rPr>
-              <a:t>g</a:t>
+              <a:t>r</a:t>
             </a:r>
             <a:endParaRPr lang="en-US" sz="900" dirty="0"/>
           </a:p>
@@ -27386,13 +28115,13 @@
       </p:sp>
       <p:sp>
         <p:nvSpPr>
-          <p:cNvPr id="48" name="Shape 46"/>
-          <p:cNvSpPr/>
-          <p:nvPr/>
-        </p:nvSpPr>
-        <p:spPr>
-          <a:xfrm>
-            <a:off x="7274052" y="4169664"/>
+          <p:cNvPr id="47" name="Shape 45"/>
+          <p:cNvSpPr/>
+          <p:nvPr/>
+        </p:nvSpPr>
+        <p:spPr>
+          <a:xfrm>
+            <a:off x="5759577" y="4169664"/>
             <a:ext cx="685800" cy="475488"/>
           </a:xfrm>
           <a:prstGeom prst="rect">
@@ -27413,13 +28142,13 @@
       </p:sp>
       <p:sp>
         <p:nvSpPr>
-          <p:cNvPr id="49" name="Text 47"/>
-          <p:cNvSpPr/>
-          <p:nvPr/>
-        </p:nvSpPr>
-        <p:spPr>
-          <a:xfrm>
-            <a:off x="7274052" y="4169664"/>
+          <p:cNvPr id="48" name="Text 46"/>
+          <p:cNvSpPr/>
+          <p:nvPr/>
+        </p:nvSpPr>
+        <p:spPr>
+          <a:xfrm>
+            <a:off x="5759577" y="4169664"/>
             <a:ext cx="685800" cy="475488"/>
           </a:xfrm>
           <a:prstGeom prst="rect">
@@ -27444,7 +28173,139 @@
                 <a:ea typeface="Trebuchet MS" pitchFamily="34" charset="-122"/>
                 <a:cs typeface="Trebuchet MS" pitchFamily="34" charset="-120"/>
               </a:rPr>
-              <a:t>ing</a:t>
+              <a:t>g</a:t>
+            </a:r>
+            <a:endParaRPr lang="en-US" sz="900" dirty="0"/>
+          </a:p>
+        </p:txBody>
+      </p:sp>
+      <p:sp>
+        <p:nvSpPr>
+          <p:cNvPr id="49" name="Shape 47"/>
+          <p:cNvSpPr/>
+          <p:nvPr/>
+        </p:nvSpPr>
+        <p:spPr>
+          <a:xfrm>
+            <a:off x="6668262" y="4169664"/>
+            <a:ext cx="685800" cy="475488"/>
+          </a:xfrm>
+          <a:prstGeom prst="rect">
+            <a:avLst>
+              <a:gd name="adj" fmla="val 7692"/>
+            </a:avLst>
+          </a:prstGeom>
+          <a:solidFill>
+            <a:srgbClr val="FFFFFF"/>
+          </a:solidFill>
+          <a:ln w="12700">
+            <a:solidFill>
+              <a:srgbClr val="DB2777"/>
+            </a:solidFill>
+            <a:prstDash val="solid"/>
+          </a:ln>
+        </p:spPr>
+      </p:sp>
+      <p:sp>
+        <p:nvSpPr>
+          <p:cNvPr id="50" name="Text 48"/>
+          <p:cNvSpPr/>
+          <p:nvPr/>
+        </p:nvSpPr>
+        <p:spPr>
+          <a:xfrm>
+            <a:off x="6668262" y="4169664"/>
+            <a:ext cx="685800" cy="475488"/>
+          </a:xfrm>
+          <a:prstGeom prst="rect">
+            <a:avLst/>
+          </a:prstGeom>
+          <a:noFill/>
+          <a:ln/>
+        </p:spPr>
+        <p:txBody>
+          <a:bodyPr wrap="square" lIns="0" tIns="0" rIns="0" bIns="0" rtlCol="0" anchor="ctr"/>
+          <a:lstStyle/>
+          <a:p>
+            <a:pPr algn="ctr" indent="0" marL="0">
+              <a:buNone/>
+            </a:pPr>
+            <a:r>
+              <a:rPr lang="en-US" sz="900" b="1" dirty="0">
+                <a:solidFill>
+                  <a:srgbClr val="9D174D"/>
+                </a:solidFill>
+                <a:latin typeface="Trebuchet MS" pitchFamily="34" charset="0"/>
+                <a:ea typeface="Trebuchet MS" pitchFamily="34" charset="-122"/>
+                <a:cs typeface="Trebuchet MS" pitchFamily="34" charset="-120"/>
+              </a:rPr>
+              <a:t>i</a:t>
+            </a:r>
+            <a:endParaRPr lang="en-US" sz="900" dirty="0"/>
+          </a:p>
+        </p:txBody>
+      </p:sp>
+      <p:sp>
+        <p:nvSpPr>
+          <p:cNvPr id="51" name="Shape 49"/>
+          <p:cNvSpPr/>
+          <p:nvPr/>
+        </p:nvSpPr>
+        <p:spPr>
+          <a:xfrm>
+            <a:off x="7576947" y="4169664"/>
+            <a:ext cx="685800" cy="475488"/>
+          </a:xfrm>
+          <a:prstGeom prst="rect">
+            <a:avLst>
+              <a:gd name="adj" fmla="val 7692"/>
+            </a:avLst>
+          </a:prstGeom>
+          <a:solidFill>
+            <a:srgbClr val="FFFFFF"/>
+          </a:solidFill>
+          <a:ln w="12700">
+            <a:solidFill>
+              <a:srgbClr val="DB2777"/>
+            </a:solidFill>
+            <a:prstDash val="solid"/>
+          </a:ln>
+        </p:spPr>
+      </p:sp>
+      <p:sp>
+        <p:nvSpPr>
+          <p:cNvPr id="52" name="Text 50"/>
+          <p:cNvSpPr/>
+          <p:nvPr/>
+        </p:nvSpPr>
+        <p:spPr>
+          <a:xfrm>
+            <a:off x="7576947" y="4169664"/>
+            <a:ext cx="685800" cy="475488"/>
+          </a:xfrm>
+          <a:prstGeom prst="rect">
+            <a:avLst/>
+          </a:prstGeom>
+          <a:noFill/>
+          <a:ln/>
+        </p:spPr>
+        <p:txBody>
+          <a:bodyPr wrap="square" lIns="0" tIns="0" rIns="0" bIns="0" rtlCol="0" anchor="ctr"/>
+          <a:lstStyle/>
+          <a:p>
+            <a:pPr algn="ctr" indent="0" marL="0">
+              <a:buNone/>
+            </a:pPr>
+            <a:r>
+              <a:rPr lang="en-US" sz="900" b="1" dirty="0">
+                <a:solidFill>
+                  <a:srgbClr val="9D174D"/>
+                </a:solidFill>
+                <a:latin typeface="Trebuchet MS" pitchFamily="34" charset="0"/>
+                <a:ea typeface="Trebuchet MS" pitchFamily="34" charset="-122"/>
+                <a:cs typeface="Trebuchet MS" pitchFamily="34" charset="-120"/>
+              </a:rPr>
+              <a:t>ng</a:t>
             </a:r>
             <a:endParaRPr lang="en-US" sz="900" dirty="0"/>
           </a:p>
@@ -27736,7 +28597,7 @@
                 <a:ea typeface="Calibri" pitchFamily="34" charset="-122"/>
                 <a:cs typeface="Calibri" pitchFamily="34" charset="-120"/>
               </a:rPr>
-              <a:t>Word Labs  •  wordlabs.app  •  Root: 'merge' = join, combine, sink into</a:t>
+              <a:t>Word Labs  •  wordlabs.app  •  Root: 'merge' = to join together into one</a:t>
             </a:r>
             <a:endParaRPr lang="en-US" sz="800" dirty="0"/>
           </a:p>
@@ -27875,7 +28736,7 @@
                 <a:ea typeface="Trebuchet MS" pitchFamily="34" charset="-122"/>
                 <a:cs typeface="Trebuchet MS" pitchFamily="34" charset="-120"/>
               </a:rPr>
-              <a:t>submerged</a:t>
+              <a:t>emergence</a:t>
             </a:r>
             <a:endParaRPr lang="en-US" sz="2800" dirty="0"/>
           </a:p>
@@ -28563,7 +29424,7 @@
                 <a:ea typeface="Calibri" pitchFamily="34" charset="-122"/>
                 <a:cs typeface="Calibri" pitchFamily="34" charset="-120"/>
               </a:rPr>
-              <a:t>Word Labs  •  wordlabs.app  •  Root: 'merge' = join, combine, sink into</a:t>
+              <a:t>Word Labs  •  wordlabs.app  •  Root: 'merge' = to join together into one</a:t>
             </a:r>
             <a:endParaRPr lang="en-US" sz="800" dirty="0"/>
           </a:p>
@@ -28702,7 +29563,7 @@
                 <a:ea typeface="Trebuchet MS" pitchFamily="34" charset="-122"/>
                 <a:cs typeface="Trebuchet MS" pitchFamily="34" charset="-120"/>
               </a:rPr>
-              <a:t>submerged</a:t>
+              <a:t>emergence</a:t>
             </a:r>
             <a:endParaRPr lang="en-US" sz="2800" dirty="0"/>
           </a:p>
@@ -28841,7 +29702,7 @@
                 <a:ea typeface="Trebuchet MS" pitchFamily="34" charset="-122"/>
                 <a:cs typeface="Trebuchet MS" pitchFamily="34" charset="-120"/>
               </a:rPr>
-              <a:t>sub</a:t>
+              <a:t>e</a:t>
             </a:r>
             <a:endParaRPr lang="en-US" sz="1300" dirty="0"/>
           </a:p>
@@ -28880,7 +29741,7 @@
                 <a:ea typeface="Calibri" pitchFamily="34" charset="-122"/>
                 <a:cs typeface="Calibri" pitchFamily="34" charset="-120"/>
               </a:rPr>
-              <a:t>under, below</a:t>
+              <a:t>electronic; online</a:t>
             </a:r>
             <a:endParaRPr lang="en-US" sz="850" dirty="0"/>
           </a:p>
@@ -28992,7 +29853,7 @@
                 <a:ea typeface="Calibri" pitchFamily="34" charset="-122"/>
                 <a:cs typeface="Calibri" pitchFamily="34" charset="-120"/>
               </a:rPr>
-              <a:t>join, combine, sink into</a:t>
+              <a:t>to join together into one</a:t>
             </a:r>
             <a:endParaRPr lang="en-US" sz="850" dirty="0"/>
           </a:p>
@@ -29065,7 +29926,7 @@
                 <a:ea typeface="Trebuchet MS" pitchFamily="34" charset="-122"/>
                 <a:cs typeface="Trebuchet MS" pitchFamily="34" charset="-120"/>
               </a:rPr>
-              <a:t>d</a:t>
+              <a:t>ence</a:t>
             </a:r>
             <a:endParaRPr lang="en-US" sz="1300" dirty="0"/>
           </a:p>
@@ -29104,7 +29965,7 @@
                 <a:ea typeface="Calibri" pitchFamily="34" charset="-122"/>
                 <a:cs typeface="Calibri" pitchFamily="34" charset="-120"/>
               </a:rPr>
-              <a:t>in the past</a:t>
+              <a:t>state of</a:t>
             </a:r>
             <a:endParaRPr lang="en-US" sz="850" dirty="0"/>
           </a:p>
@@ -29660,7 +30521,7 @@
                 <a:ea typeface="Calibri" pitchFamily="34" charset="-122"/>
                 <a:cs typeface="Calibri" pitchFamily="34" charset="-120"/>
               </a:rPr>
-              <a:t>Word Labs  •  wordlabs.app  •  Root: 'merge' = join, combine, sink into</a:t>
+              <a:t>Word Labs  •  wordlabs.app  •  Root: 'merge' = to join together into one</a:t>
             </a:r>
             <a:endParaRPr lang="en-US" sz="800" dirty="0"/>
           </a:p>
@@ -29799,7 +30660,7 @@
                 <a:ea typeface="Trebuchet MS" pitchFamily="34" charset="-122"/>
                 <a:cs typeface="Trebuchet MS" pitchFamily="34" charset="-120"/>
               </a:rPr>
-              <a:t>submerged</a:t>
+              <a:t>emergence</a:t>
             </a:r>
             <a:endParaRPr lang="en-US" sz="2800" dirty="0"/>
           </a:p>
@@ -29938,7 +30799,7 @@
                 <a:ea typeface="Trebuchet MS" pitchFamily="34" charset="-122"/>
                 <a:cs typeface="Trebuchet MS" pitchFamily="34" charset="-120"/>
               </a:rPr>
-              <a:t>sub</a:t>
+              <a:t>e</a:t>
             </a:r>
             <a:endParaRPr lang="en-US" sz="1300" dirty="0"/>
           </a:p>
@@ -29977,7 +30838,7 @@
                 <a:ea typeface="Calibri" pitchFamily="34" charset="-122"/>
                 <a:cs typeface="Calibri" pitchFamily="34" charset="-120"/>
               </a:rPr>
-              <a:t>under, below</a:t>
+              <a:t>electronic; online</a:t>
             </a:r>
             <a:endParaRPr lang="en-US" sz="850" dirty="0"/>
           </a:p>
@@ -30089,7 +30950,7 @@
                 <a:ea typeface="Calibri" pitchFamily="34" charset="-122"/>
                 <a:cs typeface="Calibri" pitchFamily="34" charset="-120"/>
               </a:rPr>
-              <a:t>join, combine, sink into</a:t>
+              <a:t>to join together into one</a:t>
             </a:r>
             <a:endParaRPr lang="en-US" sz="850" dirty="0"/>
           </a:p>
@@ -30162,7 +31023,7 @@
                 <a:ea typeface="Trebuchet MS" pitchFamily="34" charset="-122"/>
                 <a:cs typeface="Trebuchet MS" pitchFamily="34" charset="-120"/>
               </a:rPr>
-              <a:t>d</a:t>
+              <a:t>ence</a:t>
             </a:r>
             <a:endParaRPr lang="en-US" sz="1300" dirty="0"/>
           </a:p>
@@ -30201,7 +31062,7 @@
                 <a:ea typeface="Calibri" pitchFamily="34" charset="-122"/>
                 <a:cs typeface="Calibri" pitchFamily="34" charset="-120"/>
               </a:rPr>
-              <a:t>in the past</a:t>
+              <a:t>state of</a:t>
             </a:r>
             <a:endParaRPr lang="en-US" sz="850" dirty="0"/>
           </a:p>
@@ -30308,7 +31169,7 @@
         </p:nvSpPr>
         <p:spPr>
           <a:xfrm>
-            <a:off x="2999232" y="3364992"/>
+            <a:off x="2313432" y="3364992"/>
             <a:ext cx="1645920" cy="475488"/>
           </a:xfrm>
           <a:prstGeom prst="rect">
@@ -30335,7 +31196,7 @@
         </p:nvSpPr>
         <p:spPr>
           <a:xfrm>
-            <a:off x="2999232" y="3364992"/>
+            <a:off x="2313432" y="3364992"/>
             <a:ext cx="1645920" cy="475488"/>
           </a:xfrm>
           <a:prstGeom prst="rect">
@@ -30360,7 +31221,7 @@
                 <a:ea typeface="Trebuchet MS" pitchFamily="34" charset="-122"/>
                 <a:cs typeface="Trebuchet MS" pitchFamily="34" charset="-120"/>
               </a:rPr>
-              <a:t>sub</a:t>
+              <a:t>e</a:t>
             </a:r>
             <a:endParaRPr lang="en-US" sz="1400" dirty="0"/>
           </a:p>
@@ -30374,8 +31235,8 @@
         </p:nvSpPr>
         <p:spPr>
           <a:xfrm>
-            <a:off x="4645152" y="3364992"/>
-            <a:ext cx="1097280" cy="475488"/>
+            <a:off x="3959352" y="3364992"/>
+            <a:ext cx="411480" cy="475488"/>
           </a:xfrm>
           <a:prstGeom prst="rect">
             <a:avLst/>
@@ -30413,7 +31274,7 @@
         </p:nvSpPr>
         <p:spPr>
           <a:xfrm>
-            <a:off x="5742432" y="3364992"/>
+            <a:off x="4370832" y="3364992"/>
             <a:ext cx="1645920" cy="475488"/>
           </a:xfrm>
           <a:prstGeom prst="rect">
@@ -30440,7 +31301,7 @@
         </p:nvSpPr>
         <p:spPr>
           <a:xfrm>
-            <a:off x="5742432" y="3364992"/>
+            <a:off x="4370832" y="3364992"/>
             <a:ext cx="1645920" cy="475488"/>
           </a:xfrm>
           <a:prstGeom prst="rect">
@@ -30465,7 +31326,7 @@
                 <a:ea typeface="Trebuchet MS" pitchFamily="34" charset="-122"/>
                 <a:cs typeface="Trebuchet MS" pitchFamily="34" charset="-120"/>
               </a:rPr>
-              <a:t>merged</a:t>
+              <a:t>mer</a:t>
             </a:r>
             <a:endParaRPr lang="en-US" sz="1400" dirty="0"/>
           </a:p>
@@ -30473,7 +31334,112 @@
       </p:sp>
       <p:sp>
         <p:nvSpPr>
-          <p:cNvPr id="33" name="Shape 31"/>
+          <p:cNvPr id="33" name="Text 31"/>
+          <p:cNvSpPr/>
+          <p:nvPr/>
+        </p:nvSpPr>
+        <p:spPr>
+          <a:xfrm>
+            <a:off x="6016752" y="3364992"/>
+            <a:ext cx="411480" cy="475488"/>
+          </a:xfrm>
+          <a:prstGeom prst="rect">
+            <a:avLst/>
+          </a:prstGeom>
+          <a:noFill/>
+          <a:ln/>
+        </p:spPr>
+        <p:txBody>
+          <a:bodyPr wrap="square" lIns="0" tIns="0" rIns="0" bIns="0" rtlCol="0" anchor="ctr"/>
+          <a:lstStyle/>
+          <a:p>
+            <a:pPr algn="ctr" indent="0" marL="0">
+              <a:buNone/>
+            </a:pPr>
+            <a:r>
+              <a:rPr lang="en-US" sz="1600" b="1" dirty="0">
+                <a:solidFill>
+                  <a:srgbClr val="0D9488"/>
+                </a:solidFill>
+                <a:latin typeface="Trebuchet MS" pitchFamily="34" charset="0"/>
+                <a:ea typeface="Trebuchet MS" pitchFamily="34" charset="-122"/>
+                <a:cs typeface="Trebuchet MS" pitchFamily="34" charset="-120"/>
+              </a:rPr>
+              <a:t>·</a:t>
+            </a:r>
+            <a:endParaRPr lang="en-US" sz="1600" dirty="0"/>
+          </a:p>
+        </p:txBody>
+      </p:sp>
+      <p:sp>
+        <p:nvSpPr>
+          <p:cNvPr id="34" name="Shape 32"/>
+          <p:cNvSpPr/>
+          <p:nvPr/>
+        </p:nvSpPr>
+        <p:spPr>
+          <a:xfrm>
+            <a:off x="6428232" y="3364992"/>
+            <a:ext cx="1645920" cy="475488"/>
+          </a:xfrm>
+          <a:prstGeom prst="rect">
+            <a:avLst>
+              <a:gd name="adj" fmla="val 9615"/>
+            </a:avLst>
+          </a:prstGeom>
+          <a:solidFill>
+            <a:srgbClr val="FFFFFF"/>
+          </a:solidFill>
+          <a:ln w="12700">
+            <a:solidFill>
+              <a:srgbClr val="0D9488"/>
+            </a:solidFill>
+            <a:prstDash val="solid"/>
+          </a:ln>
+        </p:spPr>
+      </p:sp>
+      <p:sp>
+        <p:nvSpPr>
+          <p:cNvPr id="35" name="Text 33"/>
+          <p:cNvSpPr/>
+          <p:nvPr/>
+        </p:nvSpPr>
+        <p:spPr>
+          <a:xfrm>
+            <a:off x="6428232" y="3364992"/>
+            <a:ext cx="1645920" cy="475488"/>
+          </a:xfrm>
+          <a:prstGeom prst="rect">
+            <a:avLst/>
+          </a:prstGeom>
+          <a:noFill/>
+          <a:ln/>
+        </p:spPr>
+        <p:txBody>
+          <a:bodyPr wrap="square" lIns="0" tIns="0" rIns="0" bIns="0" rtlCol="0" anchor="ctr"/>
+          <a:lstStyle/>
+          <a:p>
+            <a:pPr algn="ctr" indent="0" marL="0">
+              <a:buNone/>
+            </a:pPr>
+            <a:r>
+              <a:rPr lang="en-US" sz="1400" b="1" dirty="0">
+                <a:solidFill>
+                  <a:srgbClr val="0D9488"/>
+                </a:solidFill>
+                <a:latin typeface="Trebuchet MS" pitchFamily="34" charset="0"/>
+                <a:ea typeface="Trebuchet MS" pitchFamily="34" charset="-122"/>
+                <a:cs typeface="Trebuchet MS" pitchFamily="34" charset="-120"/>
+              </a:rPr>
+              <a:t>gence</a:t>
+            </a:r>
+            <a:endParaRPr lang="en-US" sz="1400" dirty="0"/>
+          </a:p>
+        </p:txBody>
+      </p:sp>
+      <p:sp>
+        <p:nvSpPr>
+          <p:cNvPr id="36" name="Shape 34"/>
           <p:cNvSpPr/>
           <p:nvPr/>
         </p:nvSpPr>
@@ -30500,7 +31466,7 @@
       </p:sp>
       <p:sp>
         <p:nvSpPr>
-          <p:cNvPr id="34" name="Text 32"/>
+          <p:cNvPr id="37" name="Text 35"/>
           <p:cNvSpPr/>
           <p:nvPr/>
         </p:nvSpPr>
@@ -30539,7 +31505,7 @@
       </p:sp>
       <p:sp>
         <p:nvSpPr>
-          <p:cNvPr id="35" name="Shape 33"/>
+          <p:cNvPr id="38" name="Shape 36"/>
           <p:cNvSpPr/>
           <p:nvPr/>
         </p:nvSpPr>
@@ -30566,7 +31532,7 @@
       </p:sp>
       <p:sp>
         <p:nvSpPr>
-          <p:cNvPr id="36" name="Text 34"/>
+          <p:cNvPr id="39" name="Text 37"/>
           <p:cNvSpPr/>
           <p:nvPr/>
         </p:nvSpPr>
@@ -30889,7 +31855,7 @@
                 <a:ea typeface="Calibri" pitchFamily="34" charset="-122"/>
                 <a:cs typeface="Calibri" pitchFamily="34" charset="-120"/>
               </a:rPr>
-              <a:t>Word Labs  •  wordlabs.app  •  Root: 'merge' = join, combine, sink into</a:t>
+              <a:t>Word Labs  •  wordlabs.app  •  Root: 'merge' = to join together into one</a:t>
             </a:r>
             <a:endParaRPr lang="en-US" sz="800" dirty="0"/>
           </a:p>
@@ -31028,7 +31994,7 @@
                 <a:ea typeface="Trebuchet MS" pitchFamily="34" charset="-122"/>
                 <a:cs typeface="Trebuchet MS" pitchFamily="34" charset="-120"/>
               </a:rPr>
-              <a:t>submerged</a:t>
+              <a:t>emergence</a:t>
             </a:r>
             <a:endParaRPr lang="en-US" sz="2800" dirty="0"/>
           </a:p>
@@ -31167,7 +32133,7 @@
                 <a:ea typeface="Trebuchet MS" pitchFamily="34" charset="-122"/>
                 <a:cs typeface="Trebuchet MS" pitchFamily="34" charset="-120"/>
               </a:rPr>
-              <a:t>sub</a:t>
+              <a:t>e</a:t>
             </a:r>
             <a:endParaRPr lang="en-US" sz="1300" dirty="0"/>
           </a:p>
@@ -31206,7 +32172,7 @@
                 <a:ea typeface="Calibri" pitchFamily="34" charset="-122"/>
                 <a:cs typeface="Calibri" pitchFamily="34" charset="-120"/>
               </a:rPr>
-              <a:t>under, below</a:t>
+              <a:t>electronic; online</a:t>
             </a:r>
             <a:endParaRPr lang="en-US" sz="850" dirty="0"/>
           </a:p>
@@ -31318,7 +32284,7 @@
                 <a:ea typeface="Calibri" pitchFamily="34" charset="-122"/>
                 <a:cs typeface="Calibri" pitchFamily="34" charset="-120"/>
               </a:rPr>
-              <a:t>join, combine, sink into</a:t>
+              <a:t>to join together into one</a:t>
             </a:r>
             <a:endParaRPr lang="en-US" sz="850" dirty="0"/>
           </a:p>
@@ -31391,7 +32357,7 @@
                 <a:ea typeface="Trebuchet MS" pitchFamily="34" charset="-122"/>
                 <a:cs typeface="Trebuchet MS" pitchFamily="34" charset="-120"/>
               </a:rPr>
-              <a:t>d</a:t>
+              <a:t>ence</a:t>
             </a:r>
             <a:endParaRPr lang="en-US" sz="1300" dirty="0"/>
           </a:p>
@@ -31430,7 +32396,7 @@
                 <a:ea typeface="Calibri" pitchFamily="34" charset="-122"/>
                 <a:cs typeface="Calibri" pitchFamily="34" charset="-120"/>
               </a:rPr>
-              <a:t>in the past</a:t>
+              <a:t>state of</a:t>
             </a:r>
             <a:endParaRPr lang="en-US" sz="850" dirty="0"/>
           </a:p>
@@ -31537,7 +32503,7 @@
         </p:nvSpPr>
         <p:spPr>
           <a:xfrm>
-            <a:off x="2999232" y="3364992"/>
+            <a:off x="2313432" y="3364992"/>
             <a:ext cx="1645920" cy="475488"/>
           </a:xfrm>
           <a:prstGeom prst="rect">
@@ -31564,7 +32530,7 @@
         </p:nvSpPr>
         <p:spPr>
           <a:xfrm>
-            <a:off x="2999232" y="3364992"/>
+            <a:off x="2313432" y="3364992"/>
             <a:ext cx="1645920" cy="475488"/>
           </a:xfrm>
           <a:prstGeom prst="rect">
@@ -31589,7 +32555,7 @@
                 <a:ea typeface="Trebuchet MS" pitchFamily="34" charset="-122"/>
                 <a:cs typeface="Trebuchet MS" pitchFamily="34" charset="-120"/>
               </a:rPr>
-              <a:t>sub</a:t>
+              <a:t>e</a:t>
             </a:r>
             <a:endParaRPr lang="en-US" sz="1400" dirty="0"/>
           </a:p>
@@ -31603,8 +32569,8 @@
         </p:nvSpPr>
         <p:spPr>
           <a:xfrm>
-            <a:off x="4645152" y="3364992"/>
-            <a:ext cx="1097280" cy="475488"/>
+            <a:off x="3959352" y="3364992"/>
+            <a:ext cx="411480" cy="475488"/>
           </a:xfrm>
           <a:prstGeom prst="rect">
             <a:avLst/>
@@ -31642,7 +32608,7 @@
         </p:nvSpPr>
         <p:spPr>
           <a:xfrm>
-            <a:off x="5742432" y="3364992"/>
+            <a:off x="4370832" y="3364992"/>
             <a:ext cx="1645920" cy="475488"/>
           </a:xfrm>
           <a:prstGeom prst="rect">
@@ -31669,7 +32635,7 @@
         </p:nvSpPr>
         <p:spPr>
           <a:xfrm>
-            <a:off x="5742432" y="3364992"/>
+            <a:off x="4370832" y="3364992"/>
             <a:ext cx="1645920" cy="475488"/>
           </a:xfrm>
           <a:prstGeom prst="rect">
@@ -31694,7 +32660,7 @@
                 <a:ea typeface="Trebuchet MS" pitchFamily="34" charset="-122"/>
                 <a:cs typeface="Trebuchet MS" pitchFamily="34" charset="-120"/>
               </a:rPr>
-              <a:t>merged</a:t>
+              <a:t>mer</a:t>
             </a:r>
             <a:endParaRPr lang="en-US" sz="1400" dirty="0"/>
           </a:p>
@@ -31702,7 +32668,112 @@
       </p:sp>
       <p:sp>
         <p:nvSpPr>
-          <p:cNvPr id="33" name="Shape 31"/>
+          <p:cNvPr id="33" name="Text 31"/>
+          <p:cNvSpPr/>
+          <p:nvPr/>
+        </p:nvSpPr>
+        <p:spPr>
+          <a:xfrm>
+            <a:off x="6016752" y="3364992"/>
+            <a:ext cx="411480" cy="475488"/>
+          </a:xfrm>
+          <a:prstGeom prst="rect">
+            <a:avLst/>
+          </a:prstGeom>
+          <a:noFill/>
+          <a:ln/>
+        </p:spPr>
+        <p:txBody>
+          <a:bodyPr wrap="square" lIns="0" tIns="0" rIns="0" bIns="0" rtlCol="0" anchor="ctr"/>
+          <a:lstStyle/>
+          <a:p>
+            <a:pPr algn="ctr" indent="0" marL="0">
+              <a:buNone/>
+            </a:pPr>
+            <a:r>
+              <a:rPr lang="en-US" sz="1600" b="1" dirty="0">
+                <a:solidFill>
+                  <a:srgbClr val="0D9488"/>
+                </a:solidFill>
+                <a:latin typeface="Trebuchet MS" pitchFamily="34" charset="0"/>
+                <a:ea typeface="Trebuchet MS" pitchFamily="34" charset="-122"/>
+                <a:cs typeface="Trebuchet MS" pitchFamily="34" charset="-120"/>
+              </a:rPr>
+              <a:t>·</a:t>
+            </a:r>
+            <a:endParaRPr lang="en-US" sz="1600" dirty="0"/>
+          </a:p>
+        </p:txBody>
+      </p:sp>
+      <p:sp>
+        <p:nvSpPr>
+          <p:cNvPr id="34" name="Shape 32"/>
+          <p:cNvSpPr/>
+          <p:nvPr/>
+        </p:nvSpPr>
+        <p:spPr>
+          <a:xfrm>
+            <a:off x="6428232" y="3364992"/>
+            <a:ext cx="1645920" cy="475488"/>
+          </a:xfrm>
+          <a:prstGeom prst="rect">
+            <a:avLst>
+              <a:gd name="adj" fmla="val 9615"/>
+            </a:avLst>
+          </a:prstGeom>
+          <a:solidFill>
+            <a:srgbClr val="FFFFFF"/>
+          </a:solidFill>
+          <a:ln w="12700">
+            <a:solidFill>
+              <a:srgbClr val="0D9488"/>
+            </a:solidFill>
+            <a:prstDash val="solid"/>
+          </a:ln>
+        </p:spPr>
+      </p:sp>
+      <p:sp>
+        <p:nvSpPr>
+          <p:cNvPr id="35" name="Text 33"/>
+          <p:cNvSpPr/>
+          <p:nvPr/>
+        </p:nvSpPr>
+        <p:spPr>
+          <a:xfrm>
+            <a:off x="6428232" y="3364992"/>
+            <a:ext cx="1645920" cy="475488"/>
+          </a:xfrm>
+          <a:prstGeom prst="rect">
+            <a:avLst/>
+          </a:prstGeom>
+          <a:noFill/>
+          <a:ln/>
+        </p:spPr>
+        <p:txBody>
+          <a:bodyPr wrap="square" lIns="0" tIns="0" rIns="0" bIns="0" rtlCol="0" anchor="ctr"/>
+          <a:lstStyle/>
+          <a:p>
+            <a:pPr algn="ctr" indent="0" marL="0">
+              <a:buNone/>
+            </a:pPr>
+            <a:r>
+              <a:rPr lang="en-US" sz="1400" b="1" dirty="0">
+                <a:solidFill>
+                  <a:srgbClr val="0D9488"/>
+                </a:solidFill>
+                <a:latin typeface="Trebuchet MS" pitchFamily="34" charset="0"/>
+                <a:ea typeface="Trebuchet MS" pitchFamily="34" charset="-122"/>
+                <a:cs typeface="Trebuchet MS" pitchFamily="34" charset="-120"/>
+              </a:rPr>
+              <a:t>gence</a:t>
+            </a:r>
+            <a:endParaRPr lang="en-US" sz="1400" dirty="0"/>
+          </a:p>
+        </p:txBody>
+      </p:sp>
+      <p:sp>
+        <p:nvSpPr>
+          <p:cNvPr id="36" name="Shape 34"/>
           <p:cNvSpPr/>
           <p:nvPr/>
         </p:nvSpPr>
@@ -31729,7 +32800,7 @@
       </p:sp>
       <p:sp>
         <p:nvSpPr>
-          <p:cNvPr id="34" name="Text 32"/>
+          <p:cNvPr id="37" name="Text 35"/>
           <p:cNvSpPr/>
           <p:nvPr/>
         </p:nvSpPr>
@@ -31768,18 +32839,18 @@
       </p:sp>
       <p:sp>
         <p:nvSpPr>
-          <p:cNvPr id="35" name="Shape 33"/>
+          <p:cNvPr id="38" name="Shape 36"/>
           <p:cNvSpPr/>
           <p:nvPr/>
         </p:nvSpPr>
         <p:spPr>
           <a:xfrm>
             <a:off x="1874520" y="4096512"/>
-            <a:ext cx="6903720" cy="804672"/>
+            <a:ext cx="6903720" cy="658368"/>
           </a:xfrm>
           <a:prstGeom prst="rect">
             <a:avLst>
-              <a:gd name="adj" fmla="val 6818"/>
+              <a:gd name="adj" fmla="val 8333"/>
             </a:avLst>
           </a:prstGeom>
           <a:solidFill>
@@ -31795,18 +32866,18 @@
       </p:sp>
       <p:sp>
         <p:nvSpPr>
-          <p:cNvPr id="36" name="Shape 34"/>
-          <p:cNvSpPr/>
-          <p:nvPr/>
-        </p:nvSpPr>
-        <p:spPr>
-          <a:xfrm>
-            <a:off x="2124837" y="4169664"/>
-            <a:ext cx="685800" cy="384048"/>
+          <p:cNvPr id="39" name="Shape 37"/>
+          <p:cNvSpPr/>
+          <p:nvPr/>
+        </p:nvSpPr>
+        <p:spPr>
+          <a:xfrm>
+            <a:off x="1951330" y="4169664"/>
+            <a:ext cx="676656" cy="475488"/>
           </a:xfrm>
           <a:prstGeom prst="rect">
             <a:avLst>
-              <a:gd name="adj" fmla="val 9524"/>
+              <a:gd name="adj" fmla="val 7692"/>
             </a:avLst>
           </a:prstGeom>
           <a:solidFill>
@@ -31822,14 +32893,14 @@
       </p:sp>
       <p:sp>
         <p:nvSpPr>
-          <p:cNvPr id="37" name="Text 35"/>
-          <p:cNvSpPr/>
-          <p:nvPr/>
-        </p:nvSpPr>
-        <p:spPr>
-          <a:xfrm>
-            <a:off x="2124837" y="4169664"/>
-            <a:ext cx="685800" cy="384048"/>
+          <p:cNvPr id="40" name="Text 38"/>
+          <p:cNvSpPr/>
+          <p:nvPr/>
+        </p:nvSpPr>
+        <p:spPr>
+          <a:xfrm>
+            <a:off x="1951330" y="4169664"/>
+            <a:ext cx="676656" cy="475488"/>
           </a:xfrm>
           <a:prstGeom prst="rect">
             <a:avLst/>
@@ -31853,7 +32924,7 @@
                 <a:ea typeface="Trebuchet MS" pitchFamily="34" charset="-122"/>
                 <a:cs typeface="Trebuchet MS" pitchFamily="34" charset="-120"/>
               </a:rPr>
-              <a:t>s</a:t>
+              <a:t>e</a:t>
             </a:r>
             <a:endParaRPr lang="en-US" sz="900" dirty="0"/>
           </a:p>
@@ -31861,18 +32932,18 @@
       </p:sp>
       <p:sp>
         <p:nvSpPr>
-          <p:cNvPr id="38" name="Shape 36"/>
-          <p:cNvSpPr/>
-          <p:nvPr/>
-        </p:nvSpPr>
-        <p:spPr>
-          <a:xfrm>
-            <a:off x="3033522" y="4169664"/>
-            <a:ext cx="685800" cy="384048"/>
+          <p:cNvPr id="41" name="Shape 39"/>
+          <p:cNvSpPr/>
+          <p:nvPr/>
+        </p:nvSpPr>
+        <p:spPr>
+          <a:xfrm>
+            <a:off x="2677363" y="4169664"/>
+            <a:ext cx="676656" cy="475488"/>
           </a:xfrm>
           <a:prstGeom prst="rect">
             <a:avLst>
-              <a:gd name="adj" fmla="val 9524"/>
+              <a:gd name="adj" fmla="val 7692"/>
             </a:avLst>
           </a:prstGeom>
           <a:solidFill>
@@ -31888,14 +32959,14 @@
       </p:sp>
       <p:sp>
         <p:nvSpPr>
-          <p:cNvPr id="39" name="Text 37"/>
-          <p:cNvSpPr/>
-          <p:nvPr/>
-        </p:nvSpPr>
-        <p:spPr>
-          <a:xfrm>
-            <a:off x="3033522" y="4169664"/>
-            <a:ext cx="685800" cy="384048"/>
+          <p:cNvPr id="42" name="Text 40"/>
+          <p:cNvSpPr/>
+          <p:nvPr/>
+        </p:nvSpPr>
+        <p:spPr>
+          <a:xfrm>
+            <a:off x="2677363" y="4169664"/>
+            <a:ext cx="676656" cy="475488"/>
           </a:xfrm>
           <a:prstGeom prst="rect">
             <a:avLst/>
@@ -31919,7 +32990,7 @@
                 <a:ea typeface="Trebuchet MS" pitchFamily="34" charset="-122"/>
                 <a:cs typeface="Trebuchet MS" pitchFamily="34" charset="-120"/>
               </a:rPr>
-              <a:t>u</a:t>
+              <a:t>m</a:t>
             </a:r>
             <a:endParaRPr lang="en-US" sz="900" dirty="0"/>
           </a:p>
@@ -31927,18 +32998,18 @@
       </p:sp>
       <p:sp>
         <p:nvSpPr>
-          <p:cNvPr id="40" name="Shape 38"/>
-          <p:cNvSpPr/>
-          <p:nvPr/>
-        </p:nvSpPr>
-        <p:spPr>
-          <a:xfrm>
-            <a:off x="3942207" y="4169664"/>
-            <a:ext cx="685800" cy="384048"/>
+          <p:cNvPr id="43" name="Shape 41"/>
+          <p:cNvSpPr/>
+          <p:nvPr/>
+        </p:nvSpPr>
+        <p:spPr>
+          <a:xfrm>
+            <a:off x="3403397" y="4169664"/>
+            <a:ext cx="676656" cy="475488"/>
           </a:xfrm>
           <a:prstGeom prst="rect">
             <a:avLst>
-              <a:gd name="adj" fmla="val 9524"/>
+              <a:gd name="adj" fmla="val 7692"/>
             </a:avLst>
           </a:prstGeom>
           <a:solidFill>
@@ -31954,14 +33025,14 @@
       </p:sp>
       <p:sp>
         <p:nvSpPr>
-          <p:cNvPr id="41" name="Text 39"/>
-          <p:cNvSpPr/>
-          <p:nvPr/>
-        </p:nvSpPr>
-        <p:spPr>
-          <a:xfrm>
-            <a:off x="3942207" y="4169664"/>
-            <a:ext cx="685800" cy="384048"/>
+          <p:cNvPr id="44" name="Text 42"/>
+          <p:cNvSpPr/>
+          <p:nvPr/>
+        </p:nvSpPr>
+        <p:spPr>
+          <a:xfrm>
+            <a:off x="3403397" y="4169664"/>
+            <a:ext cx="676656" cy="475488"/>
           </a:xfrm>
           <a:prstGeom prst="rect">
             <a:avLst/>
@@ -31985,7 +33056,7 @@
                 <a:ea typeface="Trebuchet MS" pitchFamily="34" charset="-122"/>
                 <a:cs typeface="Trebuchet MS" pitchFamily="34" charset="-120"/>
               </a:rPr>
-              <a:t>b</a:t>
+              <a:t>e</a:t>
             </a:r>
             <a:endParaRPr lang="en-US" sz="900" dirty="0"/>
           </a:p>
@@ -31993,18 +33064,18 @@
       </p:sp>
       <p:sp>
         <p:nvSpPr>
-          <p:cNvPr id="42" name="Shape 40"/>
-          <p:cNvSpPr/>
-          <p:nvPr/>
-        </p:nvSpPr>
-        <p:spPr>
-          <a:xfrm>
-            <a:off x="4850892" y="4169664"/>
-            <a:ext cx="685800" cy="384048"/>
+          <p:cNvPr id="45" name="Shape 43"/>
+          <p:cNvSpPr/>
+          <p:nvPr/>
+        </p:nvSpPr>
+        <p:spPr>
+          <a:xfrm>
+            <a:off x="4129430" y="4169664"/>
+            <a:ext cx="676656" cy="475488"/>
           </a:xfrm>
           <a:prstGeom prst="rect">
             <a:avLst>
-              <a:gd name="adj" fmla="val 9524"/>
+              <a:gd name="adj" fmla="val 7692"/>
             </a:avLst>
           </a:prstGeom>
           <a:solidFill>
@@ -32020,14 +33091,14 @@
       </p:sp>
       <p:sp>
         <p:nvSpPr>
-          <p:cNvPr id="43" name="Text 41"/>
-          <p:cNvSpPr/>
-          <p:nvPr/>
-        </p:nvSpPr>
-        <p:spPr>
-          <a:xfrm>
-            <a:off x="4850892" y="4169664"/>
-            <a:ext cx="685800" cy="384048"/>
+          <p:cNvPr id="46" name="Text 44"/>
+          <p:cNvSpPr/>
+          <p:nvPr/>
+        </p:nvSpPr>
+        <p:spPr>
+          <a:xfrm>
+            <a:off x="4129430" y="4169664"/>
+            <a:ext cx="676656" cy="475488"/>
           </a:xfrm>
           <a:prstGeom prst="rect">
             <a:avLst/>
@@ -32051,7 +33122,7 @@
                 <a:ea typeface="Trebuchet MS" pitchFamily="34" charset="-122"/>
                 <a:cs typeface="Trebuchet MS" pitchFamily="34" charset="-120"/>
               </a:rPr>
-              <a:t>m</a:t>
+              <a:t>r</a:t>
             </a:r>
             <a:endParaRPr lang="en-US" sz="900" dirty="0"/>
           </a:p>
@@ -32059,18 +33130,18 @@
       </p:sp>
       <p:sp>
         <p:nvSpPr>
-          <p:cNvPr id="44" name="Shape 42"/>
-          <p:cNvSpPr/>
-          <p:nvPr/>
-        </p:nvSpPr>
-        <p:spPr>
-          <a:xfrm>
-            <a:off x="5759577" y="4169664"/>
-            <a:ext cx="685800" cy="384048"/>
+          <p:cNvPr id="47" name="Shape 45"/>
+          <p:cNvSpPr/>
+          <p:nvPr/>
+        </p:nvSpPr>
+        <p:spPr>
+          <a:xfrm>
+            <a:off x="4855464" y="4169664"/>
+            <a:ext cx="676656" cy="475488"/>
           </a:xfrm>
           <a:prstGeom prst="rect">
             <a:avLst>
-              <a:gd name="adj" fmla="val 9524"/>
+              <a:gd name="adj" fmla="val 7692"/>
             </a:avLst>
           </a:prstGeom>
           <a:solidFill>
@@ -32086,14 +33157,14 @@
       </p:sp>
       <p:sp>
         <p:nvSpPr>
-          <p:cNvPr id="45" name="Text 43"/>
-          <p:cNvSpPr/>
-          <p:nvPr/>
-        </p:nvSpPr>
-        <p:spPr>
-          <a:xfrm>
-            <a:off x="5759577" y="4169664"/>
-            <a:ext cx="685800" cy="384048"/>
+          <p:cNvPr id="48" name="Text 46"/>
+          <p:cNvSpPr/>
+          <p:nvPr/>
+        </p:nvSpPr>
+        <p:spPr>
+          <a:xfrm>
+            <a:off x="4855464" y="4169664"/>
+            <a:ext cx="676656" cy="475488"/>
           </a:xfrm>
           <a:prstGeom prst="rect">
             <a:avLst/>
@@ -32117,7 +33188,7 @@
                 <a:ea typeface="Trebuchet MS" pitchFamily="34" charset="-122"/>
                 <a:cs typeface="Trebuchet MS" pitchFamily="34" charset="-120"/>
               </a:rPr>
-              <a:t>er</a:t>
+              <a:t>g</a:t>
             </a:r>
             <a:endParaRPr lang="en-US" sz="900" dirty="0"/>
           </a:p>
@@ -32125,18 +33196,18 @@
       </p:sp>
       <p:sp>
         <p:nvSpPr>
-          <p:cNvPr id="46" name="Shape 44"/>
-          <p:cNvSpPr/>
-          <p:nvPr/>
-        </p:nvSpPr>
-        <p:spPr>
-          <a:xfrm>
-            <a:off x="6668262" y="4169664"/>
-            <a:ext cx="685800" cy="384048"/>
+          <p:cNvPr id="49" name="Shape 47"/>
+          <p:cNvSpPr/>
+          <p:nvPr/>
+        </p:nvSpPr>
+        <p:spPr>
+          <a:xfrm>
+            <a:off x="5581498" y="4169664"/>
+            <a:ext cx="676656" cy="475488"/>
           </a:xfrm>
           <a:prstGeom prst="rect">
             <a:avLst>
-              <a:gd name="adj" fmla="val 9524"/>
+              <a:gd name="adj" fmla="val 7692"/>
             </a:avLst>
           </a:prstGeom>
           <a:solidFill>
@@ -32152,14 +33223,14 @@
       </p:sp>
       <p:sp>
         <p:nvSpPr>
-          <p:cNvPr id="47" name="Text 45"/>
-          <p:cNvSpPr/>
-          <p:nvPr/>
-        </p:nvSpPr>
-        <p:spPr>
-          <a:xfrm>
-            <a:off x="6668262" y="4169664"/>
-            <a:ext cx="685800" cy="384048"/>
+          <p:cNvPr id="50" name="Text 48"/>
+          <p:cNvSpPr/>
+          <p:nvPr/>
+        </p:nvSpPr>
+        <p:spPr>
+          <a:xfrm>
+            <a:off x="5581498" y="4169664"/>
+            <a:ext cx="676656" cy="475488"/>
           </a:xfrm>
           <a:prstGeom prst="rect">
             <a:avLst/>
@@ -32183,7 +33254,7 @@
                 <a:ea typeface="Trebuchet MS" pitchFamily="34" charset="-122"/>
                 <a:cs typeface="Trebuchet MS" pitchFamily="34" charset="-120"/>
               </a:rPr>
-              <a:t>ge</a:t>
+              <a:t>e</a:t>
             </a:r>
             <a:endParaRPr lang="en-US" sz="900" dirty="0"/>
           </a:p>
@@ -32191,57 +33262,18 @@
       </p:sp>
       <p:sp>
         <p:nvSpPr>
-          <p:cNvPr id="48" name="Text 46"/>
-          <p:cNvSpPr/>
-          <p:nvPr/>
-        </p:nvSpPr>
-        <p:spPr>
-          <a:xfrm>
-            <a:off x="6668262" y="4572000"/>
-            <a:ext cx="685800" cy="219456"/>
-          </a:xfrm>
-          <a:prstGeom prst="rect">
-            <a:avLst/>
-          </a:prstGeom>
-          <a:noFill/>
-          <a:ln/>
-        </p:spPr>
-        <p:txBody>
-          <a:bodyPr wrap="square" lIns="0" tIns="0" rIns="0" bIns="0" rtlCol="0" anchor="t"/>
-          <a:lstStyle/>
-          <a:p>
-            <a:pPr algn="ctr" indent="0" marL="0">
-              <a:buNone/>
-            </a:pPr>
-            <a:r>
-              <a:rPr lang="en-US" sz="750" i="1" dirty="0">
-                <a:solidFill>
-                  <a:srgbClr val="94A3B8"/>
-                </a:solidFill>
-                <a:latin typeface="Calibri" pitchFamily="34" charset="0"/>
-                <a:ea typeface="Calibri" pitchFamily="34" charset="-122"/>
-                <a:cs typeface="Calibri" pitchFamily="34" charset="-120"/>
-              </a:rPr>
-              <a:t>/j/</a:t>
-            </a:r>
-            <a:endParaRPr lang="en-US" sz="750" dirty="0"/>
-          </a:p>
-        </p:txBody>
-      </p:sp>
-      <p:sp>
-        <p:nvSpPr>
-          <p:cNvPr id="49" name="Shape 47"/>
-          <p:cNvSpPr/>
-          <p:nvPr/>
-        </p:nvSpPr>
-        <p:spPr>
-          <a:xfrm>
-            <a:off x="7576947" y="4169664"/>
-            <a:ext cx="685800" cy="384048"/>
+          <p:cNvPr id="51" name="Shape 49"/>
+          <p:cNvSpPr/>
+          <p:nvPr/>
+        </p:nvSpPr>
+        <p:spPr>
+          <a:xfrm>
+            <a:off x="6307531" y="4169664"/>
+            <a:ext cx="676656" cy="475488"/>
           </a:xfrm>
           <a:prstGeom prst="rect">
             <a:avLst>
-              <a:gd name="adj" fmla="val 9524"/>
+              <a:gd name="adj" fmla="val 7692"/>
             </a:avLst>
           </a:prstGeom>
           <a:solidFill>
@@ -32257,14 +33289,14 @@
       </p:sp>
       <p:sp>
         <p:nvSpPr>
-          <p:cNvPr id="50" name="Text 48"/>
-          <p:cNvSpPr/>
-          <p:nvPr/>
-        </p:nvSpPr>
-        <p:spPr>
-          <a:xfrm>
-            <a:off x="7576947" y="4169664"/>
-            <a:ext cx="685800" cy="384048"/>
+          <p:cNvPr id="52" name="Text 50"/>
+          <p:cNvSpPr/>
+          <p:nvPr/>
+        </p:nvSpPr>
+        <p:spPr>
+          <a:xfrm>
+            <a:off x="6307531" y="4169664"/>
+            <a:ext cx="676656" cy="475488"/>
           </a:xfrm>
           <a:prstGeom prst="rect">
             <a:avLst/>
@@ -32288,7 +33320,139 @@
                 <a:ea typeface="Trebuchet MS" pitchFamily="34" charset="-122"/>
                 <a:cs typeface="Trebuchet MS" pitchFamily="34" charset="-120"/>
               </a:rPr>
-              <a:t>d</a:t>
+              <a:t>n</a:t>
+            </a:r>
+            <a:endParaRPr lang="en-US" sz="900" dirty="0"/>
+          </a:p>
+        </p:txBody>
+      </p:sp>
+      <p:sp>
+        <p:nvSpPr>
+          <p:cNvPr id="53" name="Shape 51"/>
+          <p:cNvSpPr/>
+          <p:nvPr/>
+        </p:nvSpPr>
+        <p:spPr>
+          <a:xfrm>
+            <a:off x="7033565" y="4169664"/>
+            <a:ext cx="676656" cy="475488"/>
+          </a:xfrm>
+          <a:prstGeom prst="rect">
+            <a:avLst>
+              <a:gd name="adj" fmla="val 7692"/>
+            </a:avLst>
+          </a:prstGeom>
+          <a:solidFill>
+            <a:srgbClr val="FFFFFF"/>
+          </a:solidFill>
+          <a:ln w="12700">
+            <a:solidFill>
+              <a:srgbClr val="DB2777"/>
+            </a:solidFill>
+            <a:prstDash val="solid"/>
+          </a:ln>
+        </p:spPr>
+      </p:sp>
+      <p:sp>
+        <p:nvSpPr>
+          <p:cNvPr id="54" name="Text 52"/>
+          <p:cNvSpPr/>
+          <p:nvPr/>
+        </p:nvSpPr>
+        <p:spPr>
+          <a:xfrm>
+            <a:off x="7033565" y="4169664"/>
+            <a:ext cx="676656" cy="475488"/>
+          </a:xfrm>
+          <a:prstGeom prst="rect">
+            <a:avLst/>
+          </a:prstGeom>
+          <a:noFill/>
+          <a:ln/>
+        </p:spPr>
+        <p:txBody>
+          <a:bodyPr wrap="square" lIns="0" tIns="0" rIns="0" bIns="0" rtlCol="0" anchor="ctr"/>
+          <a:lstStyle/>
+          <a:p>
+            <a:pPr algn="ctr" indent="0" marL="0">
+              <a:buNone/>
+            </a:pPr>
+            <a:r>
+              <a:rPr lang="en-US" sz="900" b="1" dirty="0">
+                <a:solidFill>
+                  <a:srgbClr val="9D174D"/>
+                </a:solidFill>
+                <a:latin typeface="Trebuchet MS" pitchFamily="34" charset="0"/>
+                <a:ea typeface="Trebuchet MS" pitchFamily="34" charset="-122"/>
+                <a:cs typeface="Trebuchet MS" pitchFamily="34" charset="-120"/>
+              </a:rPr>
+              <a:t>c</a:t>
+            </a:r>
+            <a:endParaRPr lang="en-US" sz="900" dirty="0"/>
+          </a:p>
+        </p:txBody>
+      </p:sp>
+      <p:sp>
+        <p:nvSpPr>
+          <p:cNvPr id="55" name="Shape 53"/>
+          <p:cNvSpPr/>
+          <p:nvPr/>
+        </p:nvSpPr>
+        <p:spPr>
+          <a:xfrm>
+            <a:off x="7759598" y="4169664"/>
+            <a:ext cx="676656" cy="475488"/>
+          </a:xfrm>
+          <a:prstGeom prst="rect">
+            <a:avLst>
+              <a:gd name="adj" fmla="val 7692"/>
+            </a:avLst>
+          </a:prstGeom>
+          <a:solidFill>
+            <a:srgbClr val="FFFFFF"/>
+          </a:solidFill>
+          <a:ln w="12700">
+            <a:solidFill>
+              <a:srgbClr val="DB2777"/>
+            </a:solidFill>
+            <a:prstDash val="solid"/>
+          </a:ln>
+        </p:spPr>
+      </p:sp>
+      <p:sp>
+        <p:nvSpPr>
+          <p:cNvPr id="56" name="Text 54"/>
+          <p:cNvSpPr/>
+          <p:nvPr/>
+        </p:nvSpPr>
+        <p:spPr>
+          <a:xfrm>
+            <a:off x="7759598" y="4169664"/>
+            <a:ext cx="676656" cy="475488"/>
+          </a:xfrm>
+          <a:prstGeom prst="rect">
+            <a:avLst/>
+          </a:prstGeom>
+          <a:noFill/>
+          <a:ln/>
+        </p:spPr>
+        <p:txBody>
+          <a:bodyPr wrap="square" lIns="0" tIns="0" rIns="0" bIns="0" rtlCol="0" anchor="ctr"/>
+          <a:lstStyle/>
+          <a:p>
+            <a:pPr algn="ctr" indent="0" marL="0">
+              <a:buNone/>
+            </a:pPr>
+            <a:r>
+              <a:rPr lang="en-US" sz="900" b="1" dirty="0">
+                <a:solidFill>
+                  <a:srgbClr val="9D174D"/>
+                </a:solidFill>
+                <a:latin typeface="Trebuchet MS" pitchFamily="34" charset="0"/>
+                <a:ea typeface="Trebuchet MS" pitchFamily="34" charset="-122"/>
+                <a:cs typeface="Trebuchet MS" pitchFamily="34" charset="-120"/>
+              </a:rPr>
+              <a:t>e</a:t>
             </a:r>
             <a:endParaRPr lang="en-US" sz="900" dirty="0"/>
           </a:p>
@@ -32580,7 +33744,7 @@
                 <a:ea typeface="Calibri" pitchFamily="34" charset="-122"/>
                 <a:cs typeface="Calibri" pitchFamily="34" charset="-120"/>
               </a:rPr>
-              <a:t>Word Labs  •  wordlabs.app  •  Root: 'merge' = join, combine, sink into</a:t>
+              <a:t>Word Labs  •  wordlabs.app  •  Root: 'merge' = to join together into one</a:t>
             </a:r>
             <a:endParaRPr lang="en-US" sz="800" dirty="0"/>
           </a:p>
@@ -33749,7 +34913,7 @@
                 <a:ea typeface="Calibri" pitchFamily="34" charset="-122"/>
                 <a:cs typeface="Calibri" pitchFamily="34" charset="-120"/>
               </a:rPr>
-              <a:t>Word Labs  •  wordlabs.app  •  Root: 'merge' = join, combine, sink into</a:t>
+              <a:t>Word Labs  •  wordlabs.app  •  Root: 'merge' = to join together into one</a:t>
             </a:r>
             <a:endParaRPr lang="en-US" sz="800" dirty="0"/>
           </a:p>
@@ -34178,7 +35342,7 @@
                 <a:ea typeface="Trebuchet MS" pitchFamily="34" charset="-122"/>
                 <a:cs typeface="Trebuchet MS" pitchFamily="34" charset="-120"/>
               </a:rPr>
-              <a:t>-d</a:t>
+              <a:t>-ed</a:t>
             </a:r>
             <a:endParaRPr lang="en-US" sz="1300" dirty="0"/>
           </a:p>
@@ -34242,7 +35406,7 @@
                 <a:ea typeface="Trebuchet MS" pitchFamily="34" charset="-122"/>
                 <a:cs typeface="Trebuchet MS" pitchFamily="34" charset="-120"/>
               </a:rPr>
-              <a:t>im-</a:t>
+              <a:t>sub-</a:t>
             </a:r>
             <a:endParaRPr lang="en-US" sz="1300" dirty="0"/>
           </a:p>
@@ -34331,7 +35495,7 @@
                 <a:ea typeface="Trebuchet MS" pitchFamily="34" charset="-122"/>
                 <a:cs typeface="Trebuchet MS" pitchFamily="34" charset="-120"/>
               </a:rPr>
-              <a:t>-r</a:t>
+              <a:t>-ence</a:t>
             </a:r>
             <a:endParaRPr lang="en-US" sz="1300" dirty="0"/>
           </a:p>
@@ -34352,7 +35516,7 @@
             <a:avLst/>
           </a:prstGeom>
           <a:solidFill>
-            <a:srgbClr val="DDD6FE"/>
+            <a:srgbClr val="F8FAFC"/>
           </a:solidFill>
           <a:ln w="12700">
             <a:solidFill>
@@ -34364,14 +35528,64 @@
       </p:sp>
       <p:sp>
         <p:nvSpPr>
-          <p:cNvPr id="29" name="Text 27"/>
-          <p:cNvSpPr/>
-          <p:nvPr/>
-        </p:nvSpPr>
-        <p:spPr>
-          <a:xfrm>
-            <a:off x="365760" y="2404872"/>
-            <a:ext cx="2468880" cy="402336"/>
+          <p:cNvPr id="29" name="Shape 27"/>
+          <p:cNvSpPr/>
+          <p:nvPr/>
+        </p:nvSpPr>
+        <p:spPr>
+          <a:xfrm>
+            <a:off x="2971800" y="2404872"/>
+            <a:ext cx="2834640" cy="402336"/>
+          </a:xfrm>
+          <a:prstGeom prst="rect">
+            <a:avLst/>
+          </a:prstGeom>
+          <a:solidFill>
+            <a:srgbClr val="F8FAFC"/>
+          </a:solidFill>
+          <a:ln w="12700">
+            <a:solidFill>
+              <a:srgbClr val="E2E8F0"/>
+            </a:solidFill>
+            <a:prstDash val="solid"/>
+          </a:ln>
+        </p:spPr>
+      </p:sp>
+      <p:sp>
+        <p:nvSpPr>
+          <p:cNvPr id="30" name="Shape 28"/>
+          <p:cNvSpPr/>
+          <p:nvPr/>
+        </p:nvSpPr>
+        <p:spPr>
+          <a:xfrm>
+            <a:off x="5943600" y="2404872"/>
+            <a:ext cx="2834640" cy="402336"/>
+          </a:xfrm>
+          <a:prstGeom prst="rect">
+            <a:avLst/>
+          </a:prstGeom>
+          <a:solidFill>
+            <a:srgbClr val="FCE7F3"/>
+          </a:solidFill>
+          <a:ln w="12700">
+            <a:solidFill>
+              <a:srgbClr val="E2E8F0"/>
+            </a:solidFill>
+            <a:prstDash val="solid"/>
+          </a:ln>
+        </p:spPr>
+      </p:sp>
+      <p:sp>
+        <p:nvSpPr>
+          <p:cNvPr id="31" name="Text 29"/>
+          <p:cNvSpPr/>
+          <p:nvPr/>
+        </p:nvSpPr>
+        <p:spPr>
+          <a:xfrm>
+            <a:off x="5943600" y="2404872"/>
+            <a:ext cx="2834640" cy="402336"/>
           </a:xfrm>
           <a:prstGeom prst="rect">
             <a:avLst/>
@@ -34389,13 +35603,13 @@
             <a:r>
               <a:rPr lang="en-US" sz="1300" b="1" dirty="0">
                 <a:solidFill>
-                  <a:srgbClr val="4C1D95"/>
+                  <a:srgbClr val="9D174D"/>
                 </a:solidFill>
                 <a:latin typeface="Trebuchet MS" pitchFamily="34" charset="0"/>
                 <a:ea typeface="Trebuchet MS" pitchFamily="34" charset="-122"/>
                 <a:cs typeface="Trebuchet MS" pitchFamily="34" charset="-120"/>
               </a:rPr>
-              <a:t>sub-</a:t>
+              <a:t>-s</a:t>
             </a:r>
             <a:endParaRPr lang="en-US" sz="1300" dirty="0"/>
           </a:p>
@@ -34403,20 +35617,45 @@
       </p:sp>
       <p:sp>
         <p:nvSpPr>
-          <p:cNvPr id="30" name="Shape 28"/>
-          <p:cNvSpPr/>
-          <p:nvPr/>
-        </p:nvSpPr>
-        <p:spPr>
-          <a:xfrm>
-            <a:off x="2971800" y="2404872"/>
+          <p:cNvPr id="32" name="Shape 30"/>
+          <p:cNvSpPr/>
+          <p:nvPr/>
+        </p:nvSpPr>
+        <p:spPr>
+          <a:xfrm>
+            <a:off x="365760" y="2825496"/>
+            <a:ext cx="2468880" cy="402336"/>
+          </a:xfrm>
+          <a:prstGeom prst="rect">
+            <a:avLst/>
+          </a:prstGeom>
+          <a:solidFill>
+            <a:srgbClr val="F1F5F9"/>
+          </a:solidFill>
+          <a:ln w="12700">
+            <a:solidFill>
+              <a:srgbClr val="E2E8F0"/>
+            </a:solidFill>
+            <a:prstDash val="solid"/>
+          </a:ln>
+        </p:spPr>
+      </p:sp>
+      <p:sp>
+        <p:nvSpPr>
+          <p:cNvPr id="33" name="Shape 31"/>
+          <p:cNvSpPr/>
+          <p:nvPr/>
+        </p:nvSpPr>
+        <p:spPr>
+          <a:xfrm>
+            <a:off x="2971800" y="2825496"/>
             <a:ext cx="2834640" cy="402336"/>
           </a:xfrm>
           <a:prstGeom prst="rect">
             <a:avLst/>
           </a:prstGeom>
           <a:solidFill>
-            <a:srgbClr val="F8FAFC"/>
+            <a:srgbClr val="F1F5F9"/>
           </a:solidFill>
           <a:ln w="12700">
             <a:solidFill>
@@ -34428,13 +35667,13 @@
       </p:sp>
       <p:sp>
         <p:nvSpPr>
-          <p:cNvPr id="31" name="Shape 29"/>
-          <p:cNvSpPr/>
-          <p:nvPr/>
-        </p:nvSpPr>
-        <p:spPr>
-          <a:xfrm>
-            <a:off x="5943600" y="2404872"/>
+          <p:cNvPr id="34" name="Shape 32"/>
+          <p:cNvSpPr/>
+          <p:nvPr/>
+        </p:nvSpPr>
+        <p:spPr>
+          <a:xfrm>
+            <a:off x="5943600" y="2825496"/>
             <a:ext cx="2834640" cy="402336"/>
           </a:xfrm>
           <a:prstGeom prst="rect">
@@ -34453,13 +35692,13 @@
       </p:sp>
       <p:sp>
         <p:nvSpPr>
-          <p:cNvPr id="32" name="Text 30"/>
-          <p:cNvSpPr/>
-          <p:nvPr/>
-        </p:nvSpPr>
-        <p:spPr>
-          <a:xfrm>
-            <a:off x="5943600" y="2404872"/>
+          <p:cNvPr id="35" name="Text 33"/>
+          <p:cNvSpPr/>
+          <p:nvPr/>
+        </p:nvSpPr>
+        <p:spPr>
+          <a:xfrm>
+            <a:off x="5943600" y="2825496"/>
             <a:ext cx="2834640" cy="402336"/>
           </a:xfrm>
           <a:prstGeom prst="rect">
@@ -34484,7 +35723,7 @@
                 <a:ea typeface="Trebuchet MS" pitchFamily="34" charset="-122"/>
                 <a:cs typeface="Trebuchet MS" pitchFamily="34" charset="-120"/>
               </a:rPr>
-              <a:t>-rs</a:t>
+              <a:t>-ing</a:t>
             </a:r>
             <a:endParaRPr lang="en-US" sz="1300" dirty="0"/>
           </a:p>
@@ -34492,20 +35731,20 @@
       </p:sp>
       <p:sp>
         <p:nvSpPr>
-          <p:cNvPr id="33" name="Shape 31"/>
-          <p:cNvSpPr/>
-          <p:nvPr/>
-        </p:nvSpPr>
-        <p:spPr>
-          <a:xfrm>
-            <a:off x="365760" y="2825496"/>
+          <p:cNvPr id="36" name="Shape 34"/>
+          <p:cNvSpPr/>
+          <p:nvPr/>
+        </p:nvSpPr>
+        <p:spPr>
+          <a:xfrm>
+            <a:off x="365760" y="3246120"/>
             <a:ext cx="2468880" cy="402336"/>
           </a:xfrm>
           <a:prstGeom prst="rect">
             <a:avLst/>
           </a:prstGeom>
           <a:solidFill>
-            <a:srgbClr val="DDD6FE"/>
+            <a:srgbClr val="F8FAFC"/>
           </a:solidFill>
           <a:ln w="12700">
             <a:solidFill>
@@ -34517,14 +35756,64 @@
       </p:sp>
       <p:sp>
         <p:nvSpPr>
-          <p:cNvPr id="34" name="Text 32"/>
-          <p:cNvSpPr/>
-          <p:nvPr/>
-        </p:nvSpPr>
-        <p:spPr>
-          <a:xfrm>
-            <a:off x="365760" y="2825496"/>
-            <a:ext cx="2468880" cy="402336"/>
+          <p:cNvPr id="37" name="Shape 35"/>
+          <p:cNvSpPr/>
+          <p:nvPr/>
+        </p:nvSpPr>
+        <p:spPr>
+          <a:xfrm>
+            <a:off x="2971800" y="3246120"/>
+            <a:ext cx="2834640" cy="402336"/>
+          </a:xfrm>
+          <a:prstGeom prst="rect">
+            <a:avLst/>
+          </a:prstGeom>
+          <a:solidFill>
+            <a:srgbClr val="F8FAFC"/>
+          </a:solidFill>
+          <a:ln w="12700">
+            <a:solidFill>
+              <a:srgbClr val="E2E8F0"/>
+            </a:solidFill>
+            <a:prstDash val="solid"/>
+          </a:ln>
+        </p:spPr>
+      </p:sp>
+      <p:sp>
+        <p:nvSpPr>
+          <p:cNvPr id="38" name="Shape 36"/>
+          <p:cNvSpPr/>
+          <p:nvPr/>
+        </p:nvSpPr>
+        <p:spPr>
+          <a:xfrm>
+            <a:off x="5943600" y="3246120"/>
+            <a:ext cx="2834640" cy="402336"/>
+          </a:xfrm>
+          <a:prstGeom prst="rect">
+            <a:avLst/>
+          </a:prstGeom>
+          <a:solidFill>
+            <a:srgbClr val="FCE7F3"/>
+          </a:solidFill>
+          <a:ln w="12700">
+            <a:solidFill>
+              <a:srgbClr val="E2E8F0"/>
+            </a:solidFill>
+            <a:prstDash val="solid"/>
+          </a:ln>
+        </p:spPr>
+      </p:sp>
+      <p:sp>
+        <p:nvSpPr>
+          <p:cNvPr id="39" name="Text 37"/>
+          <p:cNvSpPr/>
+          <p:nvPr/>
+        </p:nvSpPr>
+        <p:spPr>
+          <a:xfrm>
+            <a:off x="5943600" y="3246120"/>
+            <a:ext cx="2834640" cy="402336"/>
           </a:xfrm>
           <a:prstGeom prst="rect">
             <a:avLst/>
@@ -34542,13 +35831,13 @@
             <a:r>
               <a:rPr lang="en-US" sz="1300" b="1" dirty="0">
                 <a:solidFill>
-                  <a:srgbClr val="4C1D95"/>
+                  <a:srgbClr val="9D174D"/>
                 </a:solidFill>
                 <a:latin typeface="Trebuchet MS" pitchFamily="34" charset="0"/>
                 <a:ea typeface="Trebuchet MS" pitchFamily="34" charset="-122"/>
                 <a:cs typeface="Trebuchet MS" pitchFamily="34" charset="-120"/>
               </a:rPr>
-              <a:t>de-</a:t>
+              <a:t>-er</a:t>
             </a:r>
             <a:endParaRPr lang="en-US" sz="1300" dirty="0"/>
           </a:p>
@@ -34556,64 +35845,14 @@
       </p:sp>
       <p:sp>
         <p:nvSpPr>
-          <p:cNvPr id="35" name="Shape 33"/>
-          <p:cNvSpPr/>
-          <p:nvPr/>
-        </p:nvSpPr>
-        <p:spPr>
-          <a:xfrm>
-            <a:off x="2971800" y="2825496"/>
-            <a:ext cx="2834640" cy="402336"/>
-          </a:xfrm>
-          <a:prstGeom prst="rect">
-            <a:avLst/>
-          </a:prstGeom>
-          <a:solidFill>
-            <a:srgbClr val="F1F5F9"/>
-          </a:solidFill>
-          <a:ln w="12700">
-            <a:solidFill>
-              <a:srgbClr val="E2E8F0"/>
-            </a:solidFill>
-            <a:prstDash val="solid"/>
-          </a:ln>
-        </p:spPr>
-      </p:sp>
-      <p:sp>
-        <p:nvSpPr>
-          <p:cNvPr id="36" name="Shape 34"/>
-          <p:cNvSpPr/>
-          <p:nvPr/>
-        </p:nvSpPr>
-        <p:spPr>
-          <a:xfrm>
-            <a:off x="5943600" y="2825496"/>
-            <a:ext cx="2834640" cy="402336"/>
-          </a:xfrm>
-          <a:prstGeom prst="rect">
-            <a:avLst/>
-          </a:prstGeom>
-          <a:solidFill>
-            <a:srgbClr val="FCE7F3"/>
-          </a:solidFill>
-          <a:ln w="12700">
-            <a:solidFill>
-              <a:srgbClr val="E2E8F0"/>
-            </a:solidFill>
-            <a:prstDash val="solid"/>
-          </a:ln>
-        </p:spPr>
-      </p:sp>
-      <p:sp>
-        <p:nvSpPr>
-          <p:cNvPr id="37" name="Text 35"/>
-          <p:cNvSpPr/>
-          <p:nvPr/>
-        </p:nvSpPr>
-        <p:spPr>
-          <a:xfrm>
-            <a:off x="5943600" y="2825496"/>
-            <a:ext cx="2834640" cy="402336"/>
+          <p:cNvPr id="40" name="Text 38"/>
+          <p:cNvSpPr/>
+          <p:nvPr/>
+        </p:nvSpPr>
+        <p:spPr>
+          <a:xfrm>
+            <a:off x="365760" y="3611880"/>
+            <a:ext cx="1828800" cy="347472"/>
           </a:xfrm>
           <a:prstGeom prst="rect">
             <a:avLst/>
@@ -34625,59 +35864,61 @@
           <a:bodyPr wrap="square" lIns="0" tIns="0" rIns="0" bIns="0" rtlCol="0" anchor="ctr"/>
           <a:lstStyle/>
           <a:p>
-            <a:pPr algn="ctr" indent="0" marL="0">
-              <a:buNone/>
-            </a:pPr>
-            <a:r>
-              <a:rPr lang="en-US" sz="1300" b="1" dirty="0">
-                <a:solidFill>
-                  <a:srgbClr val="9D174D"/>
+            <a:pPr algn="l" indent="0" marL="0">
+              <a:buNone/>
+            </a:pPr>
+            <a:r>
+              <a:rPr lang="en-US" sz="1200" b="1" dirty="0">
+                <a:solidFill>
+                  <a:srgbClr val="0F172A"/>
                 </a:solidFill>
                 <a:latin typeface="Trebuchet MS" pitchFamily="34" charset="0"/>
                 <a:ea typeface="Trebuchet MS" pitchFamily="34" charset="-122"/>
                 <a:cs typeface="Trebuchet MS" pitchFamily="34" charset="-120"/>
               </a:rPr>
-              <a:t>-nce</a:t>
-            </a:r>
-            <a:endParaRPr lang="en-US" sz="1300" dirty="0"/>
-          </a:p>
-        </p:txBody>
-      </p:sp>
-      <p:sp>
-        <p:nvSpPr>
-          <p:cNvPr id="38" name="Shape 36"/>
-          <p:cNvSpPr/>
-          <p:nvPr/>
-        </p:nvSpPr>
-        <p:spPr>
-          <a:xfrm>
-            <a:off x="365760" y="3246120"/>
-            <a:ext cx="2468880" cy="402336"/>
-          </a:xfrm>
-          <a:prstGeom prst="rect">
-            <a:avLst/>
-          </a:prstGeom>
-          <a:solidFill>
-            <a:srgbClr val="DDD6FE"/>
-          </a:solidFill>
-          <a:ln w="12700">
-            <a:solidFill>
-              <a:srgbClr val="E2E8F0"/>
-            </a:solidFill>
-            <a:prstDash val="solid"/>
-          </a:ln>
-        </p:spPr>
-      </p:sp>
-      <p:sp>
-        <p:nvSpPr>
-          <p:cNvPr id="39" name="Text 37"/>
-          <p:cNvSpPr/>
-          <p:nvPr/>
-        </p:nvSpPr>
-        <p:spPr>
-          <a:xfrm>
-            <a:off x="365760" y="3246120"/>
-            <a:ext cx="2468880" cy="402336"/>
+              <a:t>Sample words:</a:t>
+            </a:r>
+            <a:endParaRPr lang="en-US" sz="1200" dirty="0"/>
+          </a:p>
+        </p:txBody>
+      </p:sp>
+      <p:sp>
+        <p:nvSpPr>
+          <p:cNvPr id="41" name="Shape 39"/>
+          <p:cNvSpPr/>
+          <p:nvPr/>
+        </p:nvSpPr>
+        <p:spPr>
+          <a:xfrm>
+            <a:off x="365760" y="4023360"/>
+            <a:ext cx="2011680" cy="402336"/>
+          </a:xfrm>
+          <a:prstGeom prst="rect">
+            <a:avLst>
+              <a:gd name="adj" fmla="val 13636"/>
+            </a:avLst>
+          </a:prstGeom>
+          <a:solidFill>
+            <a:srgbClr val="EEF2FF"/>
+          </a:solidFill>
+          <a:ln w="12700">
+            <a:solidFill>
+              <a:srgbClr val="6366F1"/>
+            </a:solidFill>
+            <a:prstDash val="solid"/>
+          </a:ln>
+        </p:spPr>
+      </p:sp>
+      <p:sp>
+        <p:nvSpPr>
+          <p:cNvPr id="42" name="Text 40"/>
+          <p:cNvSpPr/>
+          <p:nvPr/>
+        </p:nvSpPr>
+        <p:spPr>
+          <a:xfrm>
+            <a:off x="365760" y="4023360"/>
+            <a:ext cx="2011680" cy="402336"/>
           </a:xfrm>
           <a:prstGeom prst="rect">
             <a:avLst/>
@@ -34693,80 +35934,57 @@
               <a:buNone/>
             </a:pPr>
             <a:r>
-              <a:rPr lang="en-US" sz="1300" b="1" dirty="0">
-                <a:solidFill>
-                  <a:srgbClr val="4C1D95"/>
+              <a:rPr lang="en-US" sz="1200" b="1" dirty="0">
+                <a:solidFill>
+                  <a:srgbClr val="4338CA"/>
                 </a:solidFill>
                 <a:latin typeface="Trebuchet MS" pitchFamily="34" charset="0"/>
                 <a:ea typeface="Trebuchet MS" pitchFamily="34" charset="-122"/>
                 <a:cs typeface="Trebuchet MS" pitchFamily="34" charset="-120"/>
               </a:rPr>
-              <a:t>re-</a:t>
-            </a:r>
-            <a:endParaRPr lang="en-US" sz="1300" dirty="0"/>
-          </a:p>
-        </p:txBody>
-      </p:sp>
-      <p:sp>
-        <p:nvSpPr>
-          <p:cNvPr id="40" name="Shape 38"/>
-          <p:cNvSpPr/>
-          <p:nvPr/>
-        </p:nvSpPr>
-        <p:spPr>
-          <a:xfrm>
-            <a:off x="2971800" y="3246120"/>
-            <a:ext cx="2834640" cy="402336"/>
-          </a:xfrm>
-          <a:prstGeom prst="rect">
-            <a:avLst/>
-          </a:prstGeom>
-          <a:solidFill>
-            <a:srgbClr val="F8FAFC"/>
-          </a:solidFill>
-          <a:ln w="12700">
-            <a:solidFill>
-              <a:srgbClr val="E2E8F0"/>
-            </a:solidFill>
-            <a:prstDash val="solid"/>
-          </a:ln>
-        </p:spPr>
-      </p:sp>
-      <p:sp>
-        <p:nvSpPr>
-          <p:cNvPr id="41" name="Shape 39"/>
-          <p:cNvSpPr/>
-          <p:nvPr/>
-        </p:nvSpPr>
-        <p:spPr>
-          <a:xfrm>
-            <a:off x="5943600" y="3246120"/>
-            <a:ext cx="2834640" cy="402336"/>
-          </a:xfrm>
-          <a:prstGeom prst="rect">
-            <a:avLst/>
-          </a:prstGeom>
-          <a:solidFill>
-            <a:srgbClr val="FCE7F3"/>
-          </a:solidFill>
-          <a:ln w="12700">
-            <a:solidFill>
-              <a:srgbClr val="E2E8F0"/>
-            </a:solidFill>
-            <a:prstDash val="solid"/>
-          </a:ln>
-        </p:spPr>
-      </p:sp>
-      <p:sp>
-        <p:nvSpPr>
-          <p:cNvPr id="42" name="Text 40"/>
-          <p:cNvSpPr/>
-          <p:nvPr/>
-        </p:nvSpPr>
-        <p:spPr>
-          <a:xfrm>
-            <a:off x="5943600" y="3246120"/>
-            <a:ext cx="2834640" cy="402336"/>
+              <a:t>merge</a:t>
+            </a:r>
+            <a:endParaRPr lang="en-US" sz="1200" dirty="0"/>
+          </a:p>
+        </p:txBody>
+      </p:sp>
+      <p:sp>
+        <p:nvSpPr>
+          <p:cNvPr id="43" name="Shape 41"/>
+          <p:cNvSpPr/>
+          <p:nvPr/>
+        </p:nvSpPr>
+        <p:spPr>
+          <a:xfrm>
+            <a:off x="2542032" y="4023360"/>
+            <a:ext cx="2011680" cy="402336"/>
+          </a:xfrm>
+          <a:prstGeom prst="rect">
+            <a:avLst>
+              <a:gd name="adj" fmla="val 13636"/>
+            </a:avLst>
+          </a:prstGeom>
+          <a:solidFill>
+            <a:srgbClr val="EEF2FF"/>
+          </a:solidFill>
+          <a:ln w="12700">
+            <a:solidFill>
+              <a:srgbClr val="6366F1"/>
+            </a:solidFill>
+            <a:prstDash val="solid"/>
+          </a:ln>
+        </p:spPr>
+      </p:sp>
+      <p:sp>
+        <p:nvSpPr>
+          <p:cNvPr id="44" name="Text 42"/>
+          <p:cNvSpPr/>
+          <p:nvPr/>
+        </p:nvSpPr>
+        <p:spPr>
+          <a:xfrm>
+            <a:off x="2542032" y="4023360"/>
+            <a:ext cx="2011680" cy="402336"/>
           </a:xfrm>
           <a:prstGeom prst="rect">
             <a:avLst/>
@@ -34782,30 +36000,57 @@
               <a:buNone/>
             </a:pPr>
             <a:r>
-              <a:rPr lang="en-US" sz="1300" b="1" dirty="0">
-                <a:solidFill>
-                  <a:srgbClr val="9D174D"/>
+              <a:rPr lang="en-US" sz="1200" b="1" dirty="0">
+                <a:solidFill>
+                  <a:srgbClr val="4338CA"/>
                 </a:solidFill>
                 <a:latin typeface="Trebuchet MS" pitchFamily="34" charset="0"/>
                 <a:ea typeface="Trebuchet MS" pitchFamily="34" charset="-122"/>
                 <a:cs typeface="Trebuchet MS" pitchFamily="34" charset="-120"/>
               </a:rPr>
-              <a:t>-nt</a:t>
-            </a:r>
-            <a:endParaRPr lang="en-US" sz="1300" dirty="0"/>
-          </a:p>
-        </p:txBody>
-      </p:sp>
-      <p:sp>
-        <p:nvSpPr>
-          <p:cNvPr id="43" name="Text 41"/>
-          <p:cNvSpPr/>
-          <p:nvPr/>
-        </p:nvSpPr>
-        <p:spPr>
-          <a:xfrm>
-            <a:off x="365760" y="3611880"/>
-            <a:ext cx="1828800" cy="347472"/>
+              <a:t>merged</a:t>
+            </a:r>
+            <a:endParaRPr lang="en-US" sz="1200" dirty="0"/>
+          </a:p>
+        </p:txBody>
+      </p:sp>
+      <p:sp>
+        <p:nvSpPr>
+          <p:cNvPr id="45" name="Shape 43"/>
+          <p:cNvSpPr/>
+          <p:nvPr/>
+        </p:nvSpPr>
+        <p:spPr>
+          <a:xfrm>
+            <a:off x="4718304" y="4023360"/>
+            <a:ext cx="2011680" cy="402336"/>
+          </a:xfrm>
+          <a:prstGeom prst="rect">
+            <a:avLst>
+              <a:gd name="adj" fmla="val 13636"/>
+            </a:avLst>
+          </a:prstGeom>
+          <a:solidFill>
+            <a:srgbClr val="EEF2FF"/>
+          </a:solidFill>
+          <a:ln w="12700">
+            <a:solidFill>
+              <a:srgbClr val="6366F1"/>
+            </a:solidFill>
+            <a:prstDash val="solid"/>
+          </a:ln>
+        </p:spPr>
+      </p:sp>
+      <p:sp>
+        <p:nvSpPr>
+          <p:cNvPr id="46" name="Text 44"/>
+          <p:cNvSpPr/>
+          <p:nvPr/>
+        </p:nvSpPr>
+        <p:spPr>
+          <a:xfrm>
+            <a:off x="4718304" y="4023360"/>
+            <a:ext cx="2011680" cy="402336"/>
           </a:xfrm>
           <a:prstGeom prst="rect">
             <a:avLst/>
@@ -34817,19 +36062,19 @@
           <a:bodyPr wrap="square" lIns="0" tIns="0" rIns="0" bIns="0" rtlCol="0" anchor="ctr"/>
           <a:lstStyle/>
           <a:p>
-            <a:pPr algn="l" indent="0" marL="0">
+            <a:pPr algn="ctr" indent="0" marL="0">
               <a:buNone/>
             </a:pPr>
             <a:r>
               <a:rPr lang="en-US" sz="1200" b="1" dirty="0">
                 <a:solidFill>
-                  <a:srgbClr val="0F172A"/>
+                  <a:srgbClr val="4338CA"/>
                 </a:solidFill>
                 <a:latin typeface="Trebuchet MS" pitchFamily="34" charset="0"/>
                 <a:ea typeface="Trebuchet MS" pitchFamily="34" charset="-122"/>
                 <a:cs typeface="Trebuchet MS" pitchFamily="34" charset="-120"/>
               </a:rPr>
-              <a:t>Sample words:</a:t>
+              <a:t>merger</a:t>
             </a:r>
             <a:endParaRPr lang="en-US" sz="1200" dirty="0"/>
           </a:p>
@@ -34837,13 +36082,13 @@
       </p:sp>
       <p:sp>
         <p:nvSpPr>
-          <p:cNvPr id="44" name="Shape 42"/>
-          <p:cNvSpPr/>
-          <p:nvPr/>
-        </p:nvSpPr>
-        <p:spPr>
-          <a:xfrm>
-            <a:off x="365760" y="4023360"/>
+          <p:cNvPr id="47" name="Shape 45"/>
+          <p:cNvSpPr/>
+          <p:nvPr/>
+        </p:nvSpPr>
+        <p:spPr>
+          <a:xfrm>
+            <a:off x="6894576" y="4023360"/>
             <a:ext cx="2011680" cy="402336"/>
           </a:xfrm>
           <a:prstGeom prst="rect">
@@ -34864,13 +36109,13 @@
       </p:sp>
       <p:sp>
         <p:nvSpPr>
-          <p:cNvPr id="45" name="Text 43"/>
-          <p:cNvSpPr/>
-          <p:nvPr/>
-        </p:nvSpPr>
-        <p:spPr>
-          <a:xfrm>
-            <a:off x="365760" y="4023360"/>
+          <p:cNvPr id="48" name="Text 46"/>
+          <p:cNvSpPr/>
+          <p:nvPr/>
+        </p:nvSpPr>
+        <p:spPr>
+          <a:xfrm>
+            <a:off x="6894576" y="4023360"/>
             <a:ext cx="2011680" cy="402336"/>
           </a:xfrm>
           <a:prstGeom prst="rect">
@@ -34895,7 +36140,7 @@
                 <a:ea typeface="Trebuchet MS" pitchFamily="34" charset="-122"/>
                 <a:cs typeface="Trebuchet MS" pitchFamily="34" charset="-120"/>
               </a:rPr>
-              <a:t>merge</a:t>
+              <a:t>merges</a:t>
             </a:r>
             <a:endParaRPr lang="en-US" sz="1200" dirty="0"/>
           </a:p>
@@ -34903,13 +36148,13 @@
       </p:sp>
       <p:sp>
         <p:nvSpPr>
-          <p:cNvPr id="46" name="Shape 44"/>
-          <p:cNvSpPr/>
-          <p:nvPr/>
-        </p:nvSpPr>
-        <p:spPr>
-          <a:xfrm>
-            <a:off x="2542032" y="4023360"/>
+          <p:cNvPr id="49" name="Shape 47"/>
+          <p:cNvSpPr/>
+          <p:nvPr/>
+        </p:nvSpPr>
+        <p:spPr>
+          <a:xfrm>
+            <a:off x="365760" y="4498848"/>
             <a:ext cx="2011680" cy="402336"/>
           </a:xfrm>
           <a:prstGeom prst="rect">
@@ -34930,13 +36175,13 @@
       </p:sp>
       <p:sp>
         <p:nvSpPr>
-          <p:cNvPr id="47" name="Text 45"/>
-          <p:cNvSpPr/>
-          <p:nvPr/>
-        </p:nvSpPr>
-        <p:spPr>
-          <a:xfrm>
-            <a:off x="2542032" y="4023360"/>
+          <p:cNvPr id="50" name="Text 48"/>
+          <p:cNvSpPr/>
+          <p:nvPr/>
+        </p:nvSpPr>
+        <p:spPr>
+          <a:xfrm>
+            <a:off x="365760" y="4498848"/>
             <a:ext cx="2011680" cy="402336"/>
           </a:xfrm>
           <a:prstGeom prst="rect">
@@ -34961,7 +36206,7 @@
                 <a:ea typeface="Trebuchet MS" pitchFamily="34" charset="-122"/>
                 <a:cs typeface="Trebuchet MS" pitchFamily="34" charset="-120"/>
               </a:rPr>
-              <a:t>merged</a:t>
+              <a:t>mergers</a:t>
             </a:r>
             <a:endParaRPr lang="en-US" sz="1200" dirty="0"/>
           </a:p>
@@ -34969,13 +36214,13 @@
       </p:sp>
       <p:sp>
         <p:nvSpPr>
-          <p:cNvPr id="48" name="Shape 46"/>
-          <p:cNvSpPr/>
-          <p:nvPr/>
-        </p:nvSpPr>
-        <p:spPr>
-          <a:xfrm>
-            <a:off x="4718304" y="4023360"/>
+          <p:cNvPr id="51" name="Shape 49"/>
+          <p:cNvSpPr/>
+          <p:nvPr/>
+        </p:nvSpPr>
+        <p:spPr>
+          <a:xfrm>
+            <a:off x="2542032" y="4498848"/>
             <a:ext cx="2011680" cy="402336"/>
           </a:xfrm>
           <a:prstGeom prst="rect">
@@ -34996,13 +36241,13 @@
       </p:sp>
       <p:sp>
         <p:nvSpPr>
-          <p:cNvPr id="49" name="Text 47"/>
-          <p:cNvSpPr/>
-          <p:nvPr/>
-        </p:nvSpPr>
-        <p:spPr>
-          <a:xfrm>
-            <a:off x="4718304" y="4023360"/>
+          <p:cNvPr id="52" name="Text 50"/>
+          <p:cNvSpPr/>
+          <p:nvPr/>
+        </p:nvSpPr>
+        <p:spPr>
+          <a:xfrm>
+            <a:off x="2542032" y="4498848"/>
             <a:ext cx="2011680" cy="402336"/>
           </a:xfrm>
           <a:prstGeom prst="rect">
@@ -35027,7 +36272,7 @@
                 <a:ea typeface="Trebuchet MS" pitchFamily="34" charset="-122"/>
                 <a:cs typeface="Trebuchet MS" pitchFamily="34" charset="-120"/>
               </a:rPr>
-              <a:t>merger</a:t>
+              <a:t>merging</a:t>
             </a:r>
             <a:endParaRPr lang="en-US" sz="1200" dirty="0"/>
           </a:p>
@@ -35035,13 +36280,13 @@
       </p:sp>
       <p:sp>
         <p:nvSpPr>
-          <p:cNvPr id="50" name="Shape 48"/>
-          <p:cNvSpPr/>
-          <p:nvPr/>
-        </p:nvSpPr>
-        <p:spPr>
-          <a:xfrm>
-            <a:off x="6894576" y="4023360"/>
+          <p:cNvPr id="53" name="Shape 51"/>
+          <p:cNvSpPr/>
+          <p:nvPr/>
+        </p:nvSpPr>
+        <p:spPr>
+          <a:xfrm>
+            <a:off x="4718304" y="4498848"/>
             <a:ext cx="2011680" cy="402336"/>
           </a:xfrm>
           <a:prstGeom prst="rect">
@@ -35062,13 +36307,13 @@
       </p:sp>
       <p:sp>
         <p:nvSpPr>
-          <p:cNvPr id="51" name="Text 49"/>
-          <p:cNvSpPr/>
-          <p:nvPr/>
-        </p:nvSpPr>
-        <p:spPr>
-          <a:xfrm>
-            <a:off x="6894576" y="4023360"/>
+          <p:cNvPr id="54" name="Text 52"/>
+          <p:cNvSpPr/>
+          <p:nvPr/>
+        </p:nvSpPr>
+        <p:spPr>
+          <a:xfrm>
+            <a:off x="4718304" y="4498848"/>
             <a:ext cx="2011680" cy="402336"/>
           </a:xfrm>
           <a:prstGeom prst="rect">
@@ -35093,271 +36338,7 @@
                 <a:ea typeface="Trebuchet MS" pitchFamily="34" charset="-122"/>
                 <a:cs typeface="Trebuchet MS" pitchFamily="34" charset="-120"/>
               </a:rPr>
-              <a:t>emerge</a:t>
-            </a:r>
-            <a:endParaRPr lang="en-US" sz="1200" dirty="0"/>
-          </a:p>
-        </p:txBody>
-      </p:sp>
-      <p:sp>
-        <p:nvSpPr>
-          <p:cNvPr id="52" name="Shape 50"/>
-          <p:cNvSpPr/>
-          <p:nvPr/>
-        </p:nvSpPr>
-        <p:spPr>
-          <a:xfrm>
-            <a:off x="365760" y="4498848"/>
-            <a:ext cx="2011680" cy="402336"/>
-          </a:xfrm>
-          <a:prstGeom prst="rect">
-            <a:avLst>
-              <a:gd name="adj" fmla="val 13636"/>
-            </a:avLst>
-          </a:prstGeom>
-          <a:solidFill>
-            <a:srgbClr val="EEF2FF"/>
-          </a:solidFill>
-          <a:ln w="12700">
-            <a:solidFill>
-              <a:srgbClr val="6366F1"/>
-            </a:solidFill>
-            <a:prstDash val="solid"/>
-          </a:ln>
-        </p:spPr>
-      </p:sp>
-      <p:sp>
-        <p:nvSpPr>
-          <p:cNvPr id="53" name="Text 51"/>
-          <p:cNvSpPr/>
-          <p:nvPr/>
-        </p:nvSpPr>
-        <p:spPr>
-          <a:xfrm>
-            <a:off x="365760" y="4498848"/>
-            <a:ext cx="2011680" cy="402336"/>
-          </a:xfrm>
-          <a:prstGeom prst="rect">
-            <a:avLst/>
-          </a:prstGeom>
-          <a:noFill/>
-          <a:ln/>
-        </p:spPr>
-        <p:txBody>
-          <a:bodyPr wrap="square" lIns="0" tIns="0" rIns="0" bIns="0" rtlCol="0" anchor="ctr"/>
-          <a:lstStyle/>
-          <a:p>
-            <a:pPr algn="ctr" indent="0" marL="0">
-              <a:buNone/>
-            </a:pPr>
-            <a:r>
-              <a:rPr lang="en-US" sz="1200" b="1" dirty="0">
-                <a:solidFill>
-                  <a:srgbClr val="4338CA"/>
-                </a:solidFill>
-                <a:latin typeface="Trebuchet MS" pitchFamily="34" charset="0"/>
-                <a:ea typeface="Trebuchet MS" pitchFamily="34" charset="-122"/>
-                <a:cs typeface="Trebuchet MS" pitchFamily="34" charset="-120"/>
-              </a:rPr>
-              <a:t>emerged</a:t>
-            </a:r>
-            <a:endParaRPr lang="en-US" sz="1200" dirty="0"/>
-          </a:p>
-        </p:txBody>
-      </p:sp>
-      <p:sp>
-        <p:nvSpPr>
-          <p:cNvPr id="54" name="Shape 52"/>
-          <p:cNvSpPr/>
-          <p:nvPr/>
-        </p:nvSpPr>
-        <p:spPr>
-          <a:xfrm>
-            <a:off x="2542032" y="4498848"/>
-            <a:ext cx="2011680" cy="402336"/>
-          </a:xfrm>
-          <a:prstGeom prst="rect">
-            <a:avLst>
-              <a:gd name="adj" fmla="val 13636"/>
-            </a:avLst>
-          </a:prstGeom>
-          <a:solidFill>
-            <a:srgbClr val="EEF2FF"/>
-          </a:solidFill>
-          <a:ln w="12700">
-            <a:solidFill>
-              <a:srgbClr val="6366F1"/>
-            </a:solidFill>
-            <a:prstDash val="solid"/>
-          </a:ln>
-        </p:spPr>
-      </p:sp>
-      <p:sp>
-        <p:nvSpPr>
-          <p:cNvPr id="55" name="Text 53"/>
-          <p:cNvSpPr/>
-          <p:nvPr/>
-        </p:nvSpPr>
-        <p:spPr>
-          <a:xfrm>
-            <a:off x="2542032" y="4498848"/>
-            <a:ext cx="2011680" cy="402336"/>
-          </a:xfrm>
-          <a:prstGeom prst="rect">
-            <a:avLst/>
-          </a:prstGeom>
-          <a:noFill/>
-          <a:ln/>
-        </p:spPr>
-        <p:txBody>
-          <a:bodyPr wrap="square" lIns="0" tIns="0" rIns="0" bIns="0" rtlCol="0" anchor="ctr"/>
-          <a:lstStyle/>
-          <a:p>
-            <a:pPr algn="ctr" indent="0" marL="0">
-              <a:buNone/>
-            </a:pPr>
-            <a:r>
-              <a:rPr lang="en-US" sz="1200" b="1" dirty="0">
-                <a:solidFill>
-                  <a:srgbClr val="4338CA"/>
-                </a:solidFill>
-                <a:latin typeface="Trebuchet MS" pitchFamily="34" charset="0"/>
-                <a:ea typeface="Trebuchet MS" pitchFamily="34" charset="-122"/>
-                <a:cs typeface="Trebuchet MS" pitchFamily="34" charset="-120"/>
-              </a:rPr>
-              <a:t>emergence</a:t>
-            </a:r>
-            <a:endParaRPr lang="en-US" sz="1200" dirty="0"/>
-          </a:p>
-        </p:txBody>
-      </p:sp>
-      <p:sp>
-        <p:nvSpPr>
-          <p:cNvPr id="56" name="Shape 54"/>
-          <p:cNvSpPr/>
-          <p:nvPr/>
-        </p:nvSpPr>
-        <p:spPr>
-          <a:xfrm>
-            <a:off x="4718304" y="4498848"/>
-            <a:ext cx="2011680" cy="402336"/>
-          </a:xfrm>
-          <a:prstGeom prst="rect">
-            <a:avLst>
-              <a:gd name="adj" fmla="val 13636"/>
-            </a:avLst>
-          </a:prstGeom>
-          <a:solidFill>
-            <a:srgbClr val="EEF2FF"/>
-          </a:solidFill>
-          <a:ln w="12700">
-            <a:solidFill>
-              <a:srgbClr val="6366F1"/>
-            </a:solidFill>
-            <a:prstDash val="solid"/>
-          </a:ln>
-        </p:spPr>
-      </p:sp>
-      <p:sp>
-        <p:nvSpPr>
-          <p:cNvPr id="57" name="Text 55"/>
-          <p:cNvSpPr/>
-          <p:nvPr/>
-        </p:nvSpPr>
-        <p:spPr>
-          <a:xfrm>
-            <a:off x="4718304" y="4498848"/>
-            <a:ext cx="2011680" cy="402336"/>
-          </a:xfrm>
-          <a:prstGeom prst="rect">
-            <a:avLst/>
-          </a:prstGeom>
-          <a:noFill/>
-          <a:ln/>
-        </p:spPr>
-        <p:txBody>
-          <a:bodyPr wrap="square" lIns="0" tIns="0" rIns="0" bIns="0" rtlCol="0" anchor="ctr"/>
-          <a:lstStyle/>
-          <a:p>
-            <a:pPr algn="ctr" indent="0" marL="0">
-              <a:buNone/>
-            </a:pPr>
-            <a:r>
-              <a:rPr lang="en-US" sz="1200" b="1" dirty="0">
-                <a:solidFill>
-                  <a:srgbClr val="4338CA"/>
-                </a:solidFill>
-                <a:latin typeface="Trebuchet MS" pitchFamily="34" charset="0"/>
-                <a:ea typeface="Trebuchet MS" pitchFamily="34" charset="-122"/>
-                <a:cs typeface="Trebuchet MS" pitchFamily="34" charset="-120"/>
-              </a:rPr>
               <a:t>submerge</a:t>
-            </a:r>
-            <a:endParaRPr lang="en-US" sz="1200" dirty="0"/>
-          </a:p>
-        </p:txBody>
-      </p:sp>
-      <p:sp>
-        <p:nvSpPr>
-          <p:cNvPr id="58" name="Shape 56"/>
-          <p:cNvSpPr/>
-          <p:nvPr/>
-        </p:nvSpPr>
-        <p:spPr>
-          <a:xfrm>
-            <a:off x="6894576" y="4498848"/>
-            <a:ext cx="2011680" cy="402336"/>
-          </a:xfrm>
-          <a:prstGeom prst="rect">
-            <a:avLst>
-              <a:gd name="adj" fmla="val 13636"/>
-            </a:avLst>
-          </a:prstGeom>
-          <a:solidFill>
-            <a:srgbClr val="EEF2FF"/>
-          </a:solidFill>
-          <a:ln w="12700">
-            <a:solidFill>
-              <a:srgbClr val="6366F1"/>
-            </a:solidFill>
-            <a:prstDash val="solid"/>
-          </a:ln>
-        </p:spPr>
-      </p:sp>
-      <p:sp>
-        <p:nvSpPr>
-          <p:cNvPr id="59" name="Text 57"/>
-          <p:cNvSpPr/>
-          <p:nvPr/>
-        </p:nvSpPr>
-        <p:spPr>
-          <a:xfrm>
-            <a:off x="6894576" y="4498848"/>
-            <a:ext cx="2011680" cy="402336"/>
-          </a:xfrm>
-          <a:prstGeom prst="rect">
-            <a:avLst/>
-          </a:prstGeom>
-          <a:noFill/>
-          <a:ln/>
-        </p:spPr>
-        <p:txBody>
-          <a:bodyPr wrap="square" lIns="0" tIns="0" rIns="0" bIns="0" rtlCol="0" anchor="ctr"/>
-          <a:lstStyle/>
-          <a:p>
-            <a:pPr algn="ctr" indent="0" marL="0">
-              <a:buNone/>
-            </a:pPr>
-            <a:r>
-              <a:rPr lang="en-US" sz="1200" b="1" dirty="0">
-                <a:solidFill>
-                  <a:srgbClr val="4338CA"/>
-                </a:solidFill>
-                <a:latin typeface="Trebuchet MS" pitchFamily="34" charset="0"/>
-                <a:ea typeface="Trebuchet MS" pitchFamily="34" charset="-122"/>
-                <a:cs typeface="Trebuchet MS" pitchFamily="34" charset="-120"/>
-              </a:rPr>
-              <a:t>immerse</a:t>
             </a:r>
             <a:endParaRPr lang="en-US" sz="1200" dirty="0"/>
           </a:p>
@@ -35649,7 +36630,7 @@
                 <a:ea typeface="Calibri" pitchFamily="34" charset="-122"/>
                 <a:cs typeface="Calibri" pitchFamily="34" charset="-120"/>
               </a:rPr>
-              <a:t>Word Labs  •  wordlabs.app  •  Root: 'merge' = join, combine, sink into</a:t>
+              <a:t>Word Labs  •  wordlabs.app  •  Root: 'merge' = to join together into one</a:t>
             </a:r>
             <a:endParaRPr lang="en-US" sz="800" dirty="0"/>
           </a:p>
@@ -35813,7 +36794,7 @@
                 <a:ea typeface="Calibri" pitchFamily="34" charset="-122"/>
                 <a:cs typeface="Calibri" pitchFamily="34" charset="-120"/>
               </a:rPr>
-              <a:t>The core part of a word carrying its basic meaning. For example, 'merge' means 'join, combine, sink into'.</a:t>
+              <a:t>The core part of a word carrying its basic meaning. For example, 'merge' means 'to join together into one'.</a:t>
             </a:r>
             <a:endParaRPr lang="en-US" sz="1350" dirty="0"/>
           </a:p>
@@ -36433,7 +37414,7 @@
                 <a:ea typeface="Calibri" pitchFamily="34" charset="-122"/>
                 <a:cs typeface="Calibri" pitchFamily="34" charset="-120"/>
               </a:rPr>
-              <a:t>Word Labs  •  wordlabs.app  •  Root: 'merge' = join, combine, sink into</a:t>
+              <a:t>Word Labs  •  wordlabs.app  •  Root: 'merge' = to join together into one</a:t>
             </a:r>
             <a:endParaRPr lang="en-US" sz="800" dirty="0"/>
           </a:p>
@@ -36545,7 +37526,7 @@
                 <a:ea typeface="Calibri" pitchFamily="34" charset="-122"/>
                 <a:cs typeface="Calibri" pitchFamily="34" charset="-120"/>
               </a:rPr>
-              <a:t>1.  The root 'merge' can only be used at the start of a word.</a:t>
+              <a:t>1.  'merge' means 'to join or combine two or more things into one'.</a:t>
             </a:r>
             <a:endParaRPr lang="en-US" sz="1300" dirty="0"/>
           </a:p>
@@ -36568,11 +37549,11 @@
             </a:avLst>
           </a:prstGeom>
           <a:solidFill>
-            <a:srgbClr val="FEE2E2"/>
-          </a:solidFill>
-          <a:ln w="12700">
-            <a:solidFill>
-              <a:srgbClr val="DC2626"/>
+            <a:srgbClr val="DCFCE7"/>
+          </a:solidFill>
+          <a:ln w="12700">
+            <a:solidFill>
+              <a:srgbClr val="16A34A"/>
             </a:solidFill>
             <a:prstDash val="solid"/>
           </a:ln>
@@ -36605,13 +37586,13 @@
             <a:r>
               <a:rPr lang="en-US" sz="1100" b="1" dirty="0">
                 <a:solidFill>
-                  <a:srgbClr val="DC2626"/>
+                  <a:srgbClr val="16A34A"/>
                 </a:solidFill>
                 <a:latin typeface="Trebuchet MS" pitchFamily="34" charset="0"/>
                 <a:ea typeface="Trebuchet MS" pitchFamily="34" charset="-122"/>
                 <a:cs typeface="Trebuchet MS" pitchFamily="34" charset="-120"/>
               </a:rPr>
-              <a:t>FALSE</a:t>
+              <a:t>TRUE</a:t>
             </a:r>
             <a:endParaRPr lang="en-US" sz="1100" dirty="0"/>
           </a:p>
@@ -36684,7 +37665,7 @@
                 <a:ea typeface="Calibri" pitchFamily="34" charset="-122"/>
                 <a:cs typeface="Calibri" pitchFamily="34" charset="-120"/>
               </a:rPr>
-              <a:t>2.  The prefix 'sub' in 'submerge' means under or below.</a:t>
+              <a:t>2.  'merged' means 'joined or combined together'.</a:t>
             </a:r>
             <a:endParaRPr lang="en-US" sz="1300" dirty="0"/>
           </a:p>
@@ -36823,7 +37804,7 @@
                 <a:ea typeface="Calibri" pitchFamily="34" charset="-122"/>
                 <a:cs typeface="Calibri" pitchFamily="34" charset="-120"/>
               </a:rPr>
-              <a:t>3.  The root 'merge' comes from a Latin word meaning to join or sink into.</a:t>
+              <a:t>3.  'merged' means 'broken apart into pieces'.</a:t>
             </a:r>
             <a:endParaRPr lang="en-US" sz="1300" dirty="0"/>
           </a:p>
@@ -36846,11 +37827,11 @@
             </a:avLst>
           </a:prstGeom>
           <a:solidFill>
-            <a:srgbClr val="DCFCE7"/>
-          </a:solidFill>
-          <a:ln w="12700">
-            <a:solidFill>
-              <a:srgbClr val="16A34A"/>
+            <a:srgbClr val="FEE2E2"/>
+          </a:solidFill>
+          <a:ln w="12700">
+            <a:solidFill>
+              <a:srgbClr val="DC2626"/>
             </a:solidFill>
             <a:prstDash val="solid"/>
           </a:ln>
@@ -36883,13 +37864,13 @@
             <a:r>
               <a:rPr lang="en-US" sz="1100" b="1" dirty="0">
                 <a:solidFill>
-                  <a:srgbClr val="16A34A"/>
+                  <a:srgbClr val="DC2626"/>
                 </a:solidFill>
                 <a:latin typeface="Trebuchet MS" pitchFamily="34" charset="0"/>
                 <a:ea typeface="Trebuchet MS" pitchFamily="34" charset="-122"/>
                 <a:cs typeface="Trebuchet MS" pitchFamily="34" charset="-120"/>
               </a:rPr>
-              <a:t>TRUE</a:t>
+              <a:t>FALSE</a:t>
             </a:r>
             <a:endParaRPr lang="en-US" sz="1100" dirty="0"/>
           </a:p>
@@ -36962,7 +37943,7 @@
                 <a:ea typeface="Calibri" pitchFamily="34" charset="-122"/>
                 <a:cs typeface="Calibri" pitchFamily="34" charset="-120"/>
               </a:rPr>
-              <a:t>4.  A merger is when two companies join together to become one.</a:t>
+              <a:t>4.  'merge' means 'to break something into smaller pieces'.</a:t>
             </a:r>
             <a:endParaRPr lang="en-US" sz="1300" dirty="0"/>
           </a:p>
@@ -36985,11 +37966,11 @@
             </a:avLst>
           </a:prstGeom>
           <a:solidFill>
-            <a:srgbClr val="DCFCE7"/>
-          </a:solidFill>
-          <a:ln w="12700">
-            <a:solidFill>
-              <a:srgbClr val="16A34A"/>
+            <a:srgbClr val="FEE2E2"/>
+          </a:solidFill>
+          <a:ln w="12700">
+            <a:solidFill>
+              <a:srgbClr val="DC2626"/>
             </a:solidFill>
             <a:prstDash val="solid"/>
           </a:ln>
@@ -37022,13 +38003,13 @@
             <a:r>
               <a:rPr lang="en-US" sz="1100" b="1" dirty="0">
                 <a:solidFill>
-                  <a:srgbClr val="16A34A"/>
+                  <a:srgbClr val="DC2626"/>
                 </a:solidFill>
                 <a:latin typeface="Trebuchet MS" pitchFamily="34" charset="0"/>
                 <a:ea typeface="Trebuchet MS" pitchFamily="34" charset="-122"/>
                 <a:cs typeface="Trebuchet MS" pitchFamily="34" charset="-120"/>
               </a:rPr>
-              <a:t>TRUE</a:t>
+              <a:t>FALSE</a:t>
             </a:r>
             <a:endParaRPr lang="en-US" sz="1100" dirty="0"/>
           </a:p>
@@ -37101,7 +38082,7 @@
                 <a:ea typeface="Calibri" pitchFamily="34" charset="-122"/>
                 <a:cs typeface="Calibri" pitchFamily="34" charset="-120"/>
               </a:rPr>
-              <a:t>5.  The word 'emerge' means to hide something deep underground.</a:t>
+              <a:t>5.  'merge' means 'to join together into one'.</a:t>
             </a:r>
             <a:endParaRPr lang="en-US" sz="1300" dirty="0"/>
           </a:p>
@@ -37124,11 +38105,11 @@
             </a:avLst>
           </a:prstGeom>
           <a:solidFill>
-            <a:srgbClr val="FEE2E2"/>
-          </a:solidFill>
-          <a:ln w="12700">
-            <a:solidFill>
-              <a:srgbClr val="DC2626"/>
+            <a:srgbClr val="DCFCE7"/>
+          </a:solidFill>
+          <a:ln w="12700">
+            <a:solidFill>
+              <a:srgbClr val="16A34A"/>
             </a:solidFill>
             <a:prstDash val="solid"/>
           </a:ln>
@@ -37161,13 +38142,13 @@
             <a:r>
               <a:rPr lang="en-US" sz="1100" b="1" dirty="0">
                 <a:solidFill>
-                  <a:srgbClr val="DC2626"/>
+                  <a:srgbClr val="16A34A"/>
                 </a:solidFill>
                 <a:latin typeface="Trebuchet MS" pitchFamily="34" charset="0"/>
                 <a:ea typeface="Trebuchet MS" pitchFamily="34" charset="-122"/>
                 <a:cs typeface="Trebuchet MS" pitchFamily="34" charset="-120"/>
               </a:rPr>
-              <a:t>FALSE</a:t>
+              <a:t>TRUE</a:t>
             </a:r>
             <a:endParaRPr lang="en-US" sz="1100" dirty="0"/>
           </a:p>
@@ -37459,7 +38440,7 @@
                 <a:ea typeface="Calibri" pitchFamily="34" charset="-122"/>
                 <a:cs typeface="Calibri" pitchFamily="34" charset="-120"/>
               </a:rPr>
-              <a:t>Word Labs  •  wordlabs.app  •  Root: 'merge' = join, combine, sink into</a:t>
+              <a:t>Word Labs  •  wordlabs.app  •  Root: 'merge' = to join together into one</a:t>
             </a:r>
             <a:endParaRPr lang="en-US" sz="800" dirty="0"/>
           </a:p>
@@ -37596,7 +38577,7 @@
                 <a:ea typeface="Trebuchet MS" pitchFamily="34" charset="-122"/>
                 <a:cs typeface="Trebuchet MS" pitchFamily="34" charset="-120"/>
               </a:rPr>
-              <a:t>join, combine, sink into</a:t>
+              <a:t>to join together into one</a:t>
             </a:r>
             <a:endParaRPr lang="en-US" sz="2000" dirty="0"/>
           </a:p>
@@ -37635,7 +38616,7 @@
                 <a:ea typeface="Calibri" pitchFamily="34" charset="-122"/>
                 <a:cs typeface="Calibri" pitchFamily="34" charset="-120"/>
               </a:rPr>
-              <a:t>Origin: Latin: mergere</a:t>
+              <a:t>Origin: Anglo-Saxon (Old English) root</a:t>
             </a:r>
             <a:endParaRPr lang="en-US" sz="1100" dirty="0"/>
           </a:p>
@@ -37938,7 +38919,7 @@
                 <a:ea typeface="Trebuchet MS" pitchFamily="34" charset="-122"/>
                 <a:cs typeface="Trebuchet MS" pitchFamily="34" charset="-120"/>
               </a:rPr>
-              <a:t>emerge</a:t>
+              <a:t>merges</a:t>
             </a:r>
             <a:endParaRPr lang="en-US" sz="1300" dirty="0"/>
           </a:p>
@@ -38004,7 +38985,7 @@
                 <a:ea typeface="Trebuchet MS" pitchFamily="34" charset="-122"/>
                 <a:cs typeface="Trebuchet MS" pitchFamily="34" charset="-120"/>
               </a:rPr>
-              <a:t>emerged</a:t>
+              <a:t>mergers</a:t>
             </a:r>
             <a:endParaRPr lang="en-US" sz="1300" dirty="0"/>
           </a:p>
@@ -38070,7 +39051,7 @@
                 <a:ea typeface="Trebuchet MS" pitchFamily="34" charset="-122"/>
                 <a:cs typeface="Trebuchet MS" pitchFamily="34" charset="-120"/>
               </a:rPr>
-              <a:t>emergence</a:t>
+              <a:t>merging</a:t>
             </a:r>
             <a:endParaRPr lang="en-US" sz="1300" dirty="0"/>
           </a:p>
@@ -38428,7 +39409,7 @@
                 <a:ea typeface="Calibri" pitchFamily="34" charset="-122"/>
                 <a:cs typeface="Calibri" pitchFamily="34" charset="-120"/>
               </a:rPr>
-              <a:t>Word Labs  •  wordlabs.app  •  Root: 'merge' = join, combine, sink into</a:t>
+              <a:t>Word Labs  •  wordlabs.app  •  Root: 'merge' = to join together into one</a:t>
             </a:r>
             <a:endParaRPr lang="en-US" sz="800" dirty="0"/>
           </a:p>
@@ -38857,7 +39838,7 @@
                 <a:ea typeface="Trebuchet MS" pitchFamily="34" charset="-122"/>
                 <a:cs typeface="Trebuchet MS" pitchFamily="34" charset="-120"/>
               </a:rPr>
-              <a:t>-d</a:t>
+              <a:t>-ed</a:t>
             </a:r>
             <a:endParaRPr lang="en-US" sz="1300" dirty="0"/>
           </a:p>
@@ -38921,7 +39902,7 @@
                 <a:ea typeface="Trebuchet MS" pitchFamily="34" charset="-122"/>
                 <a:cs typeface="Trebuchet MS" pitchFamily="34" charset="-120"/>
               </a:rPr>
-              <a:t>im-</a:t>
+              <a:t>sub-</a:t>
             </a:r>
             <a:endParaRPr lang="en-US" sz="1300" dirty="0"/>
           </a:p>
@@ -39010,7 +39991,7 @@
                 <a:ea typeface="Trebuchet MS" pitchFamily="34" charset="-122"/>
                 <a:cs typeface="Trebuchet MS" pitchFamily="34" charset="-120"/>
               </a:rPr>
-              <a:t>-r</a:t>
+              <a:t>-ence</a:t>
             </a:r>
             <a:endParaRPr lang="en-US" sz="1300" dirty="0"/>
           </a:p>
@@ -39031,7 +40012,7 @@
             <a:avLst/>
           </a:prstGeom>
           <a:solidFill>
-            <a:srgbClr val="DDD6FE"/>
+            <a:srgbClr val="F8FAFC"/>
           </a:solidFill>
           <a:ln w="12700">
             <a:solidFill>
@@ -39043,18 +40024,68 @@
       </p:sp>
       <p:sp>
         <p:nvSpPr>
-          <p:cNvPr id="29" name="Text 27"/>
-          <p:cNvSpPr/>
-          <p:nvPr/>
-        </p:nvSpPr>
-        <p:spPr>
-          <a:xfrm>
-            <a:off x="640080" y="2670048"/>
+          <p:cNvPr id="29" name="Shape 27"/>
+          <p:cNvSpPr/>
+          <p:nvPr/>
+        </p:nvSpPr>
+        <p:spPr>
+          <a:xfrm>
+            <a:off x="3291840" y="2670048"/>
+            <a:ext cx="1645920" cy="420624"/>
+          </a:xfrm>
+          <a:prstGeom prst="rect">
+            <a:avLst/>
+          </a:prstGeom>
+          <a:solidFill>
+            <a:srgbClr val="F8FAFC"/>
+          </a:solidFill>
+          <a:ln w="12700">
+            <a:solidFill>
+              <a:srgbClr val="E5E7EB"/>
+            </a:solidFill>
+            <a:prstDash val="solid"/>
+          </a:ln>
+        </p:spPr>
+      </p:sp>
+      <p:sp>
+        <p:nvSpPr>
+          <p:cNvPr id="30" name="Shape 28"/>
+          <p:cNvSpPr/>
+          <p:nvPr/>
+        </p:nvSpPr>
+        <p:spPr>
+          <a:xfrm>
+            <a:off x="5943600" y="2670048"/>
             <a:ext cx="1463040" cy="420624"/>
           </a:xfrm>
           <a:prstGeom prst="rect">
             <a:avLst/>
           </a:prstGeom>
+          <a:solidFill>
+            <a:srgbClr val="FCE7F3"/>
+          </a:solidFill>
+          <a:ln w="12700">
+            <a:solidFill>
+              <a:srgbClr val="E5E7EB"/>
+            </a:solidFill>
+            <a:prstDash val="solid"/>
+          </a:ln>
+        </p:spPr>
+      </p:sp>
+      <p:sp>
+        <p:nvSpPr>
+          <p:cNvPr id="31" name="Text 29"/>
+          <p:cNvSpPr/>
+          <p:nvPr/>
+        </p:nvSpPr>
+        <p:spPr>
+          <a:xfrm>
+            <a:off x="5943600" y="2670048"/>
+            <a:ext cx="1463040" cy="420624"/>
+          </a:xfrm>
+          <a:prstGeom prst="rect">
+            <a:avLst/>
+          </a:prstGeom>
           <a:noFill/>
           <a:ln/>
         </p:spPr>
@@ -39068,13 +40099,13 @@
             <a:r>
               <a:rPr lang="en-US" sz="1300" b="1" dirty="0">
                 <a:solidFill>
-                  <a:srgbClr val="4C1D95"/>
+                  <a:srgbClr val="9D174D"/>
                 </a:solidFill>
                 <a:latin typeface="Trebuchet MS" pitchFamily="34" charset="0"/>
                 <a:ea typeface="Trebuchet MS" pitchFamily="34" charset="-122"/>
                 <a:cs typeface="Trebuchet MS" pitchFamily="34" charset="-120"/>
               </a:rPr>
-              <a:t>sub-</a:t>
+              <a:t>-s</a:t>
             </a:r>
             <a:endParaRPr lang="en-US" sz="1300" dirty="0"/>
           </a:p>
@@ -39082,20 +40113,45 @@
       </p:sp>
       <p:sp>
         <p:nvSpPr>
-          <p:cNvPr id="30" name="Shape 28"/>
-          <p:cNvSpPr/>
-          <p:nvPr/>
-        </p:nvSpPr>
-        <p:spPr>
-          <a:xfrm>
-            <a:off x="3291840" y="2670048"/>
+          <p:cNvPr id="32" name="Shape 30"/>
+          <p:cNvSpPr/>
+          <p:nvPr/>
+        </p:nvSpPr>
+        <p:spPr>
+          <a:xfrm>
+            <a:off x="640080" y="3127248"/>
+            <a:ext cx="1463040" cy="420624"/>
+          </a:xfrm>
+          <a:prstGeom prst="rect">
+            <a:avLst/>
+          </a:prstGeom>
+          <a:solidFill>
+            <a:srgbClr val="F1F5F9"/>
+          </a:solidFill>
+          <a:ln w="12700">
+            <a:solidFill>
+              <a:srgbClr val="E5E7EB"/>
+            </a:solidFill>
+            <a:prstDash val="solid"/>
+          </a:ln>
+        </p:spPr>
+      </p:sp>
+      <p:sp>
+        <p:nvSpPr>
+          <p:cNvPr id="33" name="Shape 31"/>
+          <p:cNvSpPr/>
+          <p:nvPr/>
+        </p:nvSpPr>
+        <p:spPr>
+          <a:xfrm>
+            <a:off x="3291840" y="3127248"/>
             <a:ext cx="1645920" cy="420624"/>
           </a:xfrm>
           <a:prstGeom prst="rect">
             <a:avLst/>
           </a:prstGeom>
           <a:solidFill>
-            <a:srgbClr val="F8FAFC"/>
+            <a:srgbClr val="F1F5F9"/>
           </a:solidFill>
           <a:ln w="12700">
             <a:solidFill>
@@ -39107,13 +40163,13 @@
       </p:sp>
       <p:sp>
         <p:nvSpPr>
-          <p:cNvPr id="31" name="Shape 29"/>
-          <p:cNvSpPr/>
-          <p:nvPr/>
-        </p:nvSpPr>
-        <p:spPr>
-          <a:xfrm>
-            <a:off x="5943600" y="2670048"/>
+          <p:cNvPr id="34" name="Shape 32"/>
+          <p:cNvSpPr/>
+          <p:nvPr/>
+        </p:nvSpPr>
+        <p:spPr>
+          <a:xfrm>
+            <a:off x="5943600" y="3127248"/>
             <a:ext cx="1463040" cy="420624"/>
           </a:xfrm>
           <a:prstGeom prst="rect">
@@ -39132,13 +40188,13 @@
       </p:sp>
       <p:sp>
         <p:nvSpPr>
-          <p:cNvPr id="32" name="Text 30"/>
-          <p:cNvSpPr/>
-          <p:nvPr/>
-        </p:nvSpPr>
-        <p:spPr>
-          <a:xfrm>
-            <a:off x="5943600" y="2670048"/>
+          <p:cNvPr id="35" name="Text 33"/>
+          <p:cNvSpPr/>
+          <p:nvPr/>
+        </p:nvSpPr>
+        <p:spPr>
+          <a:xfrm>
+            <a:off x="5943600" y="3127248"/>
             <a:ext cx="1463040" cy="420624"/>
           </a:xfrm>
           <a:prstGeom prst="rect">
@@ -39163,7 +40219,7 @@
                 <a:ea typeface="Trebuchet MS" pitchFamily="34" charset="-122"/>
                 <a:cs typeface="Trebuchet MS" pitchFamily="34" charset="-120"/>
               </a:rPr>
-              <a:t>-rs</a:t>
+              <a:t>-ing</a:t>
             </a:r>
             <a:endParaRPr lang="en-US" sz="1300" dirty="0"/>
           </a:p>
@@ -39171,20 +40227,20 @@
       </p:sp>
       <p:sp>
         <p:nvSpPr>
-          <p:cNvPr id="33" name="Shape 31"/>
-          <p:cNvSpPr/>
-          <p:nvPr/>
-        </p:nvSpPr>
-        <p:spPr>
-          <a:xfrm>
-            <a:off x="640080" y="3127248"/>
+          <p:cNvPr id="36" name="Shape 34"/>
+          <p:cNvSpPr/>
+          <p:nvPr/>
+        </p:nvSpPr>
+        <p:spPr>
+          <a:xfrm>
+            <a:off x="640080" y="3584448"/>
             <a:ext cx="1463040" cy="420624"/>
           </a:xfrm>
           <a:prstGeom prst="rect">
             <a:avLst/>
           </a:prstGeom>
           <a:solidFill>
-            <a:srgbClr val="DDD6FE"/>
+            <a:srgbClr val="F8FAFC"/>
           </a:solidFill>
           <a:ln w="12700">
             <a:solidFill>
@@ -39196,18 +40252,68 @@
       </p:sp>
       <p:sp>
         <p:nvSpPr>
-          <p:cNvPr id="34" name="Text 32"/>
-          <p:cNvSpPr/>
-          <p:nvPr/>
-        </p:nvSpPr>
-        <p:spPr>
-          <a:xfrm>
-            <a:off x="640080" y="3127248"/>
+          <p:cNvPr id="37" name="Shape 35"/>
+          <p:cNvSpPr/>
+          <p:nvPr/>
+        </p:nvSpPr>
+        <p:spPr>
+          <a:xfrm>
+            <a:off x="3291840" y="3584448"/>
+            <a:ext cx="1645920" cy="420624"/>
+          </a:xfrm>
+          <a:prstGeom prst="rect">
+            <a:avLst/>
+          </a:prstGeom>
+          <a:solidFill>
+            <a:srgbClr val="F8FAFC"/>
+          </a:solidFill>
+          <a:ln w="12700">
+            <a:solidFill>
+              <a:srgbClr val="E5E7EB"/>
+            </a:solidFill>
+            <a:prstDash val="solid"/>
+          </a:ln>
+        </p:spPr>
+      </p:sp>
+      <p:sp>
+        <p:nvSpPr>
+          <p:cNvPr id="38" name="Shape 36"/>
+          <p:cNvSpPr/>
+          <p:nvPr/>
+        </p:nvSpPr>
+        <p:spPr>
+          <a:xfrm>
+            <a:off x="5943600" y="3584448"/>
             <a:ext cx="1463040" cy="420624"/>
           </a:xfrm>
           <a:prstGeom prst="rect">
             <a:avLst/>
           </a:prstGeom>
+          <a:solidFill>
+            <a:srgbClr val="FCE7F3"/>
+          </a:solidFill>
+          <a:ln w="12700">
+            <a:solidFill>
+              <a:srgbClr val="E5E7EB"/>
+            </a:solidFill>
+            <a:prstDash val="solid"/>
+          </a:ln>
+        </p:spPr>
+      </p:sp>
+      <p:sp>
+        <p:nvSpPr>
+          <p:cNvPr id="39" name="Text 37"/>
+          <p:cNvSpPr/>
+          <p:nvPr/>
+        </p:nvSpPr>
+        <p:spPr>
+          <a:xfrm>
+            <a:off x="5943600" y="3584448"/>
+            <a:ext cx="1463040" cy="420624"/>
+          </a:xfrm>
+          <a:prstGeom prst="rect">
+            <a:avLst/>
+          </a:prstGeom>
           <a:noFill/>
           <a:ln/>
         </p:spPr>
@@ -39221,13 +40327,13 @@
             <a:r>
               <a:rPr lang="en-US" sz="1300" b="1" dirty="0">
                 <a:solidFill>
-                  <a:srgbClr val="4C1D95"/>
+                  <a:srgbClr val="9D174D"/>
                 </a:solidFill>
                 <a:latin typeface="Trebuchet MS" pitchFamily="34" charset="0"/>
                 <a:ea typeface="Trebuchet MS" pitchFamily="34" charset="-122"/>
                 <a:cs typeface="Trebuchet MS" pitchFamily="34" charset="-120"/>
               </a:rPr>
-              <a:t>de-</a:t>
+              <a:t>-er</a:t>
             </a:r>
             <a:endParaRPr lang="en-US" sz="1300" dirty="0"/>
           </a:p>
@@ -39235,249 +40341,7 @@
       </p:sp>
       <p:sp>
         <p:nvSpPr>
-          <p:cNvPr id="35" name="Shape 33"/>
-          <p:cNvSpPr/>
-          <p:nvPr/>
-        </p:nvSpPr>
-        <p:spPr>
-          <a:xfrm>
-            <a:off x="3291840" y="3127248"/>
-            <a:ext cx="1645920" cy="420624"/>
-          </a:xfrm>
-          <a:prstGeom prst="rect">
-            <a:avLst/>
-          </a:prstGeom>
-          <a:solidFill>
-            <a:srgbClr val="F1F5F9"/>
-          </a:solidFill>
-          <a:ln w="12700">
-            <a:solidFill>
-              <a:srgbClr val="E5E7EB"/>
-            </a:solidFill>
-            <a:prstDash val="solid"/>
-          </a:ln>
-        </p:spPr>
-      </p:sp>
-      <p:sp>
-        <p:nvSpPr>
-          <p:cNvPr id="36" name="Shape 34"/>
-          <p:cNvSpPr/>
-          <p:nvPr/>
-        </p:nvSpPr>
-        <p:spPr>
-          <a:xfrm>
-            <a:off x="5943600" y="3127248"/>
-            <a:ext cx="1463040" cy="420624"/>
-          </a:xfrm>
-          <a:prstGeom prst="rect">
-            <a:avLst/>
-          </a:prstGeom>
-          <a:solidFill>
-            <a:srgbClr val="FCE7F3"/>
-          </a:solidFill>
-          <a:ln w="12700">
-            <a:solidFill>
-              <a:srgbClr val="E5E7EB"/>
-            </a:solidFill>
-            <a:prstDash val="solid"/>
-          </a:ln>
-        </p:spPr>
-      </p:sp>
-      <p:sp>
-        <p:nvSpPr>
-          <p:cNvPr id="37" name="Text 35"/>
-          <p:cNvSpPr/>
-          <p:nvPr/>
-        </p:nvSpPr>
-        <p:spPr>
-          <a:xfrm>
-            <a:off x="5943600" y="3127248"/>
-            <a:ext cx="1463040" cy="420624"/>
-          </a:xfrm>
-          <a:prstGeom prst="rect">
-            <a:avLst/>
-          </a:prstGeom>
-          <a:noFill/>
-          <a:ln/>
-        </p:spPr>
-        <p:txBody>
-          <a:bodyPr wrap="square" lIns="0" tIns="0" rIns="0" bIns="0" rtlCol="0" anchor="ctr"/>
-          <a:lstStyle/>
-          <a:p>
-            <a:pPr algn="ctr" indent="0" marL="0">
-              <a:buNone/>
-            </a:pPr>
-            <a:r>
-              <a:rPr lang="en-US" sz="1300" b="1" dirty="0">
-                <a:solidFill>
-                  <a:srgbClr val="9D174D"/>
-                </a:solidFill>
-                <a:latin typeface="Trebuchet MS" pitchFamily="34" charset="0"/>
-                <a:ea typeface="Trebuchet MS" pitchFamily="34" charset="-122"/>
-                <a:cs typeface="Trebuchet MS" pitchFamily="34" charset="-120"/>
-              </a:rPr>
-              <a:t>-nce</a:t>
-            </a:r>
-            <a:endParaRPr lang="en-US" sz="1300" dirty="0"/>
-          </a:p>
-        </p:txBody>
-      </p:sp>
-      <p:sp>
-        <p:nvSpPr>
-          <p:cNvPr id="38" name="Shape 36"/>
-          <p:cNvSpPr/>
-          <p:nvPr/>
-        </p:nvSpPr>
-        <p:spPr>
-          <a:xfrm>
-            <a:off x="640080" y="3584448"/>
-            <a:ext cx="1463040" cy="420624"/>
-          </a:xfrm>
-          <a:prstGeom prst="rect">
-            <a:avLst/>
-          </a:prstGeom>
-          <a:solidFill>
-            <a:srgbClr val="DDD6FE"/>
-          </a:solidFill>
-          <a:ln w="12700">
-            <a:solidFill>
-              <a:srgbClr val="E5E7EB"/>
-            </a:solidFill>
-            <a:prstDash val="solid"/>
-          </a:ln>
-        </p:spPr>
-      </p:sp>
-      <p:sp>
-        <p:nvSpPr>
-          <p:cNvPr id="39" name="Text 37"/>
-          <p:cNvSpPr/>
-          <p:nvPr/>
-        </p:nvSpPr>
-        <p:spPr>
-          <a:xfrm>
-            <a:off x="640080" y="3584448"/>
-            <a:ext cx="1463040" cy="420624"/>
-          </a:xfrm>
-          <a:prstGeom prst="rect">
-            <a:avLst/>
-          </a:prstGeom>
-          <a:noFill/>
-          <a:ln/>
-        </p:spPr>
-        <p:txBody>
-          <a:bodyPr wrap="square" lIns="0" tIns="0" rIns="0" bIns="0" rtlCol="0" anchor="ctr"/>
-          <a:lstStyle/>
-          <a:p>
-            <a:pPr algn="ctr" indent="0" marL="0">
-              <a:buNone/>
-            </a:pPr>
-            <a:r>
-              <a:rPr lang="en-US" sz="1300" b="1" dirty="0">
-                <a:solidFill>
-                  <a:srgbClr val="4C1D95"/>
-                </a:solidFill>
-                <a:latin typeface="Trebuchet MS" pitchFamily="34" charset="0"/>
-                <a:ea typeface="Trebuchet MS" pitchFamily="34" charset="-122"/>
-                <a:cs typeface="Trebuchet MS" pitchFamily="34" charset="-120"/>
-              </a:rPr>
-              <a:t>re-</a:t>
-            </a:r>
-            <a:endParaRPr lang="en-US" sz="1300" dirty="0"/>
-          </a:p>
-        </p:txBody>
-      </p:sp>
-      <p:sp>
-        <p:nvSpPr>
-          <p:cNvPr id="40" name="Shape 38"/>
-          <p:cNvSpPr/>
-          <p:nvPr/>
-        </p:nvSpPr>
-        <p:spPr>
-          <a:xfrm>
-            <a:off x="3291840" y="3584448"/>
-            <a:ext cx="1645920" cy="420624"/>
-          </a:xfrm>
-          <a:prstGeom prst="rect">
-            <a:avLst/>
-          </a:prstGeom>
-          <a:solidFill>
-            <a:srgbClr val="F8FAFC"/>
-          </a:solidFill>
-          <a:ln w="12700">
-            <a:solidFill>
-              <a:srgbClr val="E5E7EB"/>
-            </a:solidFill>
-            <a:prstDash val="solid"/>
-          </a:ln>
-        </p:spPr>
-      </p:sp>
-      <p:sp>
-        <p:nvSpPr>
-          <p:cNvPr id="41" name="Shape 39"/>
-          <p:cNvSpPr/>
-          <p:nvPr/>
-        </p:nvSpPr>
-        <p:spPr>
-          <a:xfrm>
-            <a:off x="5943600" y="3584448"/>
-            <a:ext cx="1463040" cy="420624"/>
-          </a:xfrm>
-          <a:prstGeom prst="rect">
-            <a:avLst/>
-          </a:prstGeom>
-          <a:solidFill>
-            <a:srgbClr val="FCE7F3"/>
-          </a:solidFill>
-          <a:ln w="12700">
-            <a:solidFill>
-              <a:srgbClr val="E5E7EB"/>
-            </a:solidFill>
-            <a:prstDash val="solid"/>
-          </a:ln>
-        </p:spPr>
-      </p:sp>
-      <p:sp>
-        <p:nvSpPr>
-          <p:cNvPr id="42" name="Text 40"/>
-          <p:cNvSpPr/>
-          <p:nvPr/>
-        </p:nvSpPr>
-        <p:spPr>
-          <a:xfrm>
-            <a:off x="5943600" y="3584448"/>
-            <a:ext cx="1463040" cy="420624"/>
-          </a:xfrm>
-          <a:prstGeom prst="rect">
-            <a:avLst/>
-          </a:prstGeom>
-          <a:noFill/>
-          <a:ln/>
-        </p:spPr>
-        <p:txBody>
-          <a:bodyPr wrap="square" lIns="0" tIns="0" rIns="0" bIns="0" rtlCol="0" anchor="ctr"/>
-          <a:lstStyle/>
-          <a:p>
-            <a:pPr algn="ctr" indent="0" marL="0">
-              <a:buNone/>
-            </a:pPr>
-            <a:r>
-              <a:rPr lang="en-US" sz="1300" b="1" dirty="0">
-                <a:solidFill>
-                  <a:srgbClr val="9D174D"/>
-                </a:solidFill>
-                <a:latin typeface="Trebuchet MS" pitchFamily="34" charset="0"/>
-                <a:ea typeface="Trebuchet MS" pitchFamily="34" charset="-122"/>
-                <a:cs typeface="Trebuchet MS" pitchFamily="34" charset="-120"/>
-              </a:rPr>
-              <a:t>-nt</a:t>
-            </a:r>
-            <a:endParaRPr lang="en-US" sz="1300" dirty="0"/>
-          </a:p>
-        </p:txBody>
-      </p:sp>
-      <p:sp>
-        <p:nvSpPr>
-          <p:cNvPr id="43" name="Text 41"/>
+          <p:cNvPr id="40" name="Text 38"/>
           <p:cNvSpPr/>
           <p:nvPr/>
         </p:nvSpPr>
@@ -39516,7 +40380,7 @@
       </p:sp>
       <p:sp>
         <p:nvSpPr>
-          <p:cNvPr id="44" name="Shape 42"/>
+          <p:cNvPr id="41" name="Shape 39"/>
           <p:cNvSpPr/>
           <p:nvPr/>
         </p:nvSpPr>
@@ -39550,7 +40414,7 @@
       </p:sp>
       <p:sp>
         <p:nvSpPr>
-          <p:cNvPr id="45" name="Text 43"/>
+          <p:cNvPr id="42" name="Text 40"/>
           <p:cNvSpPr/>
           <p:nvPr/>
         </p:nvSpPr>
@@ -39589,7 +40453,7 @@
       </p:sp>
       <p:sp>
         <p:nvSpPr>
-          <p:cNvPr id="46" name="Text 44"/>
+          <p:cNvPr id="43" name="Text 41"/>
           <p:cNvSpPr/>
           <p:nvPr/>
         </p:nvSpPr>
@@ -39628,7 +40492,7 @@
       </p:sp>
       <p:sp>
         <p:nvSpPr>
-          <p:cNvPr id="47" name="Shape 45"/>
+          <p:cNvPr id="44" name="Shape 42"/>
           <p:cNvSpPr/>
           <p:nvPr/>
         </p:nvSpPr>
@@ -39662,7 +40526,7 @@
       </p:sp>
       <p:sp>
         <p:nvSpPr>
-          <p:cNvPr id="48" name="Text 46"/>
+          <p:cNvPr id="45" name="Text 43"/>
           <p:cNvSpPr/>
           <p:nvPr/>
         </p:nvSpPr>
@@ -39701,7 +40565,7 @@
       </p:sp>
       <p:sp>
         <p:nvSpPr>
-          <p:cNvPr id="49" name="Text 47"/>
+          <p:cNvPr id="46" name="Text 44"/>
           <p:cNvSpPr/>
           <p:nvPr/>
         </p:nvSpPr>
@@ -39740,7 +40604,7 @@
       </p:sp>
       <p:sp>
         <p:nvSpPr>
-          <p:cNvPr id="50" name="Shape 48"/>
+          <p:cNvPr id="47" name="Shape 45"/>
           <p:cNvSpPr/>
           <p:nvPr/>
         </p:nvSpPr>
@@ -39774,7 +40638,7 @@
       </p:sp>
       <p:sp>
         <p:nvSpPr>
-          <p:cNvPr id="51" name="Text 49"/>
+          <p:cNvPr id="48" name="Text 46"/>
           <p:cNvSpPr/>
           <p:nvPr/>
         </p:nvSpPr>
@@ -39805,7 +40669,7 @@
                 <a:ea typeface="Trebuchet MS" pitchFamily="34" charset="-122"/>
                 <a:cs typeface="Trebuchet MS" pitchFamily="34" charset="-120"/>
               </a:rPr>
-              <a:t>-d</a:t>
+              <a:t>-ed</a:t>
             </a:r>
             <a:endParaRPr lang="en-US" sz="1300" dirty="0"/>
           </a:p>
@@ -39813,7 +40677,7 @@
       </p:sp>
       <p:sp>
         <p:nvSpPr>
-          <p:cNvPr id="52" name="Text 50"/>
+          <p:cNvPr id="49" name="Text 47"/>
           <p:cNvSpPr/>
           <p:nvPr/>
         </p:nvSpPr>
@@ -39852,7 +40716,7 @@
       </p:sp>
       <p:sp>
         <p:nvSpPr>
-          <p:cNvPr id="53" name="Shape 51"/>
+          <p:cNvPr id="50" name="Shape 48"/>
           <p:cNvSpPr/>
           <p:nvPr/>
         </p:nvSpPr>
@@ -39879,7 +40743,7 @@
       </p:sp>
       <p:sp>
         <p:nvSpPr>
-          <p:cNvPr id="54" name="Text 52"/>
+          <p:cNvPr id="51" name="Text 49"/>
           <p:cNvSpPr/>
           <p:nvPr/>
         </p:nvSpPr>
@@ -40202,7 +41066,7 @@
                 <a:ea typeface="Calibri" pitchFamily="34" charset="-122"/>
                 <a:cs typeface="Calibri" pitchFamily="34" charset="-120"/>
               </a:rPr>
-              <a:t>Word Labs  •  wordlabs.app  •  Root: 'merge' = join, combine, sink into</a:t>
+              <a:t>Word Labs  •  wordlabs.app  •  Root: 'merge' = to join together into one</a:t>
             </a:r>
             <a:endParaRPr lang="en-US" sz="800" dirty="0"/>
           </a:p>
@@ -40380,7 +41244,7 @@
                 <a:ea typeface="Calibri" pitchFamily="34" charset="-122"/>
                 <a:cs typeface="Calibri" pitchFamily="34" charset="-120"/>
               </a:rPr>
-              <a:t>To go completely under water or to cover something fully with liquid.</a:t>
+              <a:t>to go completely under the surface of water or another liquid</a:t>
             </a:r>
             <a:endParaRPr lang="en-US" sz="1200" dirty="0"/>
           </a:p>
@@ -40519,7 +41383,7 @@
                 <a:ea typeface="Calibri" pitchFamily="34" charset="-122"/>
                 <a:cs typeface="Calibri" pitchFamily="34" charset="-120"/>
               </a:rPr>
-              <a:t>To come out from somewhere or to appear from hiding.</a:t>
+              <a:t>joins or combines with something else</a:t>
             </a:r>
             <a:endParaRPr lang="en-US" sz="1200" dirty="0"/>
           </a:p>
@@ -40658,7 +41522,7 @@
                 <a:ea typeface="Calibri" pitchFamily="34" charset="-122"/>
                 <a:cs typeface="Calibri" pitchFamily="34" charset="-120"/>
               </a:rPr>
-              <a:t>Came out into the open or appeared after being hidden.</a:t>
+              <a:t>cases where two or more organisations join together to form one</a:t>
             </a:r>
             <a:endParaRPr lang="en-US" sz="1200" dirty="0"/>
           </a:p>
@@ -40731,7 +41595,7 @@
                 <a:ea typeface="Trebuchet MS" pitchFamily="34" charset="-122"/>
                 <a:cs typeface="Trebuchet MS" pitchFamily="34" charset="-120"/>
               </a:rPr>
-              <a:t>emerge</a:t>
+              <a:t>merges</a:t>
             </a:r>
             <a:endParaRPr lang="en-US" sz="1200" dirty="0"/>
           </a:p>
@@ -40797,7 +41661,7 @@
                 <a:ea typeface="Calibri" pitchFamily="34" charset="-122"/>
                 <a:cs typeface="Calibri" pitchFamily="34" charset="-120"/>
               </a:rPr>
-              <a:t>When two companies or groups join together to become one organisation.</a:t>
+              <a:t>the joining together of two organisations or companies into one</a:t>
             </a:r>
             <a:endParaRPr lang="en-US" sz="1200" dirty="0"/>
           </a:p>
@@ -40870,7 +41734,7 @@
                 <a:ea typeface="Trebuchet MS" pitchFamily="34" charset="-122"/>
                 <a:cs typeface="Trebuchet MS" pitchFamily="34" charset="-120"/>
               </a:rPr>
-              <a:t>emerged</a:t>
+              <a:t>mergers</a:t>
             </a:r>
             <a:endParaRPr lang="en-US" sz="1200" dirty="0"/>
           </a:p>
@@ -40936,7 +41800,7 @@
                 <a:ea typeface="Calibri" pitchFamily="34" charset="-122"/>
                 <a:cs typeface="Calibri" pitchFamily="34" charset="-120"/>
               </a:rPr>
-              <a:t>The moment when something comes out or becomes known for the first time.</a:t>
+              <a:t>joining or combining together, happening now</a:t>
             </a:r>
             <a:endParaRPr lang="en-US" sz="1200" dirty="0"/>
           </a:p>
@@ -41009,7 +41873,7 @@
                 <a:ea typeface="Trebuchet MS" pitchFamily="34" charset="-122"/>
                 <a:cs typeface="Trebuchet MS" pitchFamily="34" charset="-120"/>
               </a:rPr>
-              <a:t>emergence</a:t>
+              <a:t>merging</a:t>
             </a:r>
             <a:endParaRPr lang="en-US" sz="1200" dirty="0"/>
           </a:p>
@@ -41075,7 +41939,7 @@
                 <a:ea typeface="Calibri" pitchFamily="34" charset="-122"/>
                 <a:cs typeface="Calibri" pitchFamily="34" charset="-120"/>
               </a:rPr>
-              <a:t>To join together or combine into one thing.</a:t>
+              <a:t>to join or combine two or more things into one</a:t>
             </a:r>
             <a:endParaRPr lang="en-US" sz="1200" dirty="0"/>
           </a:p>
@@ -41214,7 +42078,7 @@
                 <a:ea typeface="Calibri" pitchFamily="34" charset="-122"/>
                 <a:cs typeface="Calibri" pitchFamily="34" charset="-120"/>
               </a:rPr>
-              <a:t>When two or more things have joined together to become one.</a:t>
+              <a:t>joined or combined together</a:t>
             </a:r>
             <a:endParaRPr lang="en-US" sz="1200" dirty="0"/>
           </a:p>
@@ -41506,7 +42370,7 @@
                 <a:ea typeface="Calibri" pitchFamily="34" charset="-122"/>
                 <a:cs typeface="Calibri" pitchFamily="34" charset="-120"/>
               </a:rPr>
-              <a:t>Word Labs  •  wordlabs.app  •  Root: 'merge' = join, combine, sink into</a:t>
+              <a:t>Word Labs  •  wordlabs.app  •  Root: 'merge' = to join together into one</a:t>
             </a:r>
             <a:endParaRPr lang="en-US" sz="800" dirty="0"/>
           </a:p>
@@ -41709,7 +42573,7 @@
                 <a:ea typeface="Calibri" pitchFamily="34" charset="-122"/>
                 <a:cs typeface="Calibri" pitchFamily="34" charset="-120"/>
               </a:rPr>
-              <a:t>Watch how the two rivers merge together at the bottom of the valley to form one wide river.</a:t>
+              <a:t>The two roads merge into one just before the bridge.</a:t>
             </a:r>
             <a:endParaRPr lang="en-US" sz="1500" dirty="0"/>
           </a:p>
@@ -41873,7 +42737,7 @@
                 <a:ea typeface="Calibri" pitchFamily="34" charset="-122"/>
                 <a:cs typeface="Calibri" pitchFamily="34" charset="-120"/>
               </a:rPr>
-              <a:t>The butterfly began to emerge slowly from its chrysalis after many days of waiting.</a:t>
+              <a:t>The two small companies merged to form one big business.</a:t>
             </a:r>
             <a:endParaRPr lang="en-US" sz="1500" dirty="0"/>
           </a:p>
@@ -42037,7 +42901,7 @@
                 <a:ea typeface="Calibri" pitchFamily="34" charset="-122"/>
                 <a:cs typeface="Calibri" pitchFamily="34" charset="-120"/>
               </a:rPr>
-              <a:t>The two small schools decided to merge so that students could share teachers and resources.</a:t>
+              <a:t>The merger of the two banks created one of the largest banks in the country.</a:t>
             </a:r>
             <a:endParaRPr lang="en-US" sz="1500" dirty="0"/>
           </a:p>
